--- a/CPX_Tectonic_Classification.pptx
+++ b/CPX_Tectonic_Classification.pptx
@@ -19,6 +19,8 @@
     <p:sldId id="267" r:id="rId18"/>
     <p:sldId id="268" r:id="rId19"/>
     <p:sldId id="269" r:id="rId20"/>
+    <p:sldId id="270" r:id="rId21"/>
+    <p:sldId id="271" r:id="rId22"/>
   </p:sldIdLst>
   <p:sldSz cx="12191695" cy="6858000" type="screen4x3"/>
   <p:notesSz cx="6858000" cy="9144000"/>
@@ -3844,7 +3846,7 @@
               </a:defRPr>
             </a:pPr>
             <a:r>
-              <a:t>Key Conclusions</a:t>
+              <a:t>Per-Class Classification Performance</a:t>
             </a:r>
           </a:p>
         </p:txBody>
@@ -3892,6 +3894,1459 @@
           </a:p>
         </p:txBody>
       </p:sp>
+      <p:pic>
+        <p:nvPicPr>
+          <p:cNvPr id="4" name="Picture 3" descr="per_class_f1.png"/>
+          <p:cNvPicPr>
+            <a:picLocks noChangeAspect="1"/>
+          </p:cNvPicPr>
+          <p:nvPr/>
+        </p:nvPicPr>
+        <p:blipFill>
+          <a:blip r:embed="rId2"/>
+          <a:stretch>
+            <a:fillRect/>
+          </a:stretch>
+        </p:blipFill>
+        <p:spPr>
+          <a:xfrm>
+            <a:off x="365760" y="1188720"/>
+            <a:ext cx="6400800" cy="4846320"/>
+          </a:xfrm>
+          <a:prstGeom prst="rect">
+            <a:avLst/>
+          </a:prstGeom>
+        </p:spPr>
+      </p:pic>
+      <p:graphicFrame>
+        <p:nvGraphicFramePr>
+          <p:cNvPr id="5" name="Table 4"/>
+          <p:cNvGraphicFramePr>
+            <a:graphicFrameLocks noGrp="1"/>
+          </p:cNvGraphicFramePr>
+          <p:nvPr/>
+        </p:nvGraphicFramePr>
+        <p:xfrm>
+          <a:off x="7132320" y="1188720"/>
+          <a:ext cx="4754880" cy="4846320"/>
+        </p:xfrm>
+        <a:graphic>
+          <a:graphicData uri="http://schemas.openxmlformats.org/drawingml/2006/table">
+            <a:tbl>
+              <a:tblPr firstRow="1" bandRow="1">
+                <a:tableStyleId>{5C22544A-7EE6-4342-B048-85BDC9FD1C3A}</a:tableStyleId>
+              </a:tblPr>
+              <a:tblGrid>
+                <a:gridCol w="2560320"/>
+                <a:gridCol w="914400"/>
+                <a:gridCol w="1280160"/>
+              </a:tblGrid>
+              <a:tr h="403860">
+                <a:tc>
+                  <a:txBody>
+                    <a:bodyPr/>
+                    <a:lstStyle/>
+                    <a:p>
+                      <a:pPr algn="ctr">
+                        <a:defRPr sz="1200" b="1">
+                          <a:solidFill>
+                            <a:srgbClr val="FFFFFF"/>
+                          </a:solidFill>
+                          <a:latin typeface="Calibri"/>
+                        </a:defRPr>
+                      </a:pPr>
+                      <a:r>
+                        <a:t>Class</a:t>
+                      </a:r>
+                    </a:p>
+                  </a:txBody>
+                  <a:tcPr>
+                    <a:solidFill>
+                      <a:srgbClr val="1A2744"/>
+                    </a:solidFill>
+                  </a:tcPr>
+                </a:tc>
+                <a:tc>
+                  <a:txBody>
+                    <a:bodyPr/>
+                    <a:lstStyle/>
+                    <a:p>
+                      <a:pPr algn="ctr">
+                        <a:defRPr sz="1200" b="1">
+                          <a:solidFill>
+                            <a:srgbClr val="FFFFFF"/>
+                          </a:solidFill>
+                          <a:latin typeface="Calibri"/>
+                        </a:defRPr>
+                      </a:pPr>
+                      <a:r>
+                        <a:t>n</a:t>
+                      </a:r>
+                    </a:p>
+                  </a:txBody>
+                  <a:tcPr>
+                    <a:solidFill>
+                      <a:srgbClr val="1A2744"/>
+                    </a:solidFill>
+                  </a:tcPr>
+                </a:tc>
+                <a:tc>
+                  <a:txBody>
+                    <a:bodyPr/>
+                    <a:lstStyle/>
+                    <a:p>
+                      <a:pPr algn="ctr">
+                        <a:defRPr sz="1200" b="1">
+                          <a:solidFill>
+                            <a:srgbClr val="FFFFFF"/>
+                          </a:solidFill>
+                          <a:latin typeface="Calibri"/>
+                        </a:defRPr>
+                      </a:pPr>
+                      <a:r>
+                        <a:t>F1</a:t>
+                      </a:r>
+                    </a:p>
+                  </a:txBody>
+                  <a:tcPr>
+                    <a:solidFill>
+                      <a:srgbClr val="1A2744"/>
+                    </a:solidFill>
+                  </a:tcPr>
+                </a:tc>
+              </a:tr>
+              <a:tr h="403860">
+                <a:tc>
+                  <a:txBody>
+                    <a:bodyPr/>
+                    <a:lstStyle/>
+                    <a:p>
+                      <a:pPr algn="l">
+                        <a:defRPr sz="1100" b="1">
+                          <a:solidFill>
+                            <a:srgbClr val="D97706"/>
+                          </a:solidFill>
+                          <a:latin typeface="Calibri"/>
+                        </a:defRPr>
+                      </a:pPr>
+                      <a:r>
+                        <a:t>Archean Craton</a:t>
+                      </a:r>
+                    </a:p>
+                  </a:txBody>
+                  <a:tcPr anchor="ctr">
+                    <a:solidFill>
+                      <a:srgbClr val="F8F8F8"/>
+                    </a:solidFill>
+                  </a:tcPr>
+                </a:tc>
+                <a:tc>
+                  <a:txBody>
+                    <a:bodyPr/>
+                    <a:lstStyle/>
+                    <a:p>
+                      <a:pPr algn="ctr">
+                        <a:defRPr sz="1100">
+                          <a:solidFill>
+                            <a:srgbClr val="333333"/>
+                          </a:solidFill>
+                          <a:latin typeface="Consolas"/>
+                        </a:defRPr>
+                      </a:pPr>
+                      <a:r>
+                        <a:t>194</a:t>
+                      </a:r>
+                    </a:p>
+                  </a:txBody>
+                  <a:tcPr anchor="ctr">
+                    <a:solidFill>
+                      <a:srgbClr val="F8F8F8"/>
+                    </a:solidFill>
+                  </a:tcPr>
+                </a:tc>
+                <a:tc>
+                  <a:txBody>
+                    <a:bodyPr/>
+                    <a:lstStyle/>
+                    <a:p>
+                      <a:pPr algn="ctr">
+                        <a:defRPr sz="1100">
+                          <a:solidFill>
+                            <a:srgbClr val="333333"/>
+                          </a:solidFill>
+                          <a:latin typeface="Consolas"/>
+                        </a:defRPr>
+                      </a:pPr>
+                      <a:r>
+                        <a:t>0.758</a:t>
+                      </a:r>
+                    </a:p>
+                  </a:txBody>
+                  <a:tcPr anchor="ctr">
+                    <a:solidFill>
+                      <a:srgbClr val="F8F8F8"/>
+                    </a:solidFill>
+                  </a:tcPr>
+                </a:tc>
+              </a:tr>
+              <a:tr h="403860">
+                <a:tc>
+                  <a:txBody>
+                    <a:bodyPr/>
+                    <a:lstStyle/>
+                    <a:p>
+                      <a:pPr algn="l">
+                        <a:defRPr sz="1100" b="1">
+                          <a:solidFill>
+                            <a:srgbClr val="D97706"/>
+                          </a:solidFill>
+                          <a:latin typeface="Calibri"/>
+                        </a:defRPr>
+                      </a:pPr>
+                      <a:r>
+                        <a:t>Oceanic Plateau</a:t>
+                      </a:r>
+                    </a:p>
+                  </a:txBody>
+                  <a:tcPr anchor="ctr"/>
+                </a:tc>
+                <a:tc>
+                  <a:txBody>
+                    <a:bodyPr/>
+                    <a:lstStyle/>
+                    <a:p>
+                      <a:pPr algn="ctr">
+                        <a:defRPr sz="1100">
+                          <a:solidFill>
+                            <a:srgbClr val="333333"/>
+                          </a:solidFill>
+                          <a:latin typeface="Consolas"/>
+                        </a:defRPr>
+                      </a:pPr>
+                      <a:r>
+                        <a:t>116</a:t>
+                      </a:r>
+                    </a:p>
+                  </a:txBody>
+                  <a:tcPr anchor="ctr"/>
+                </a:tc>
+                <a:tc>
+                  <a:txBody>
+                    <a:bodyPr/>
+                    <a:lstStyle/>
+                    <a:p>
+                      <a:pPr algn="ctr">
+                        <a:defRPr sz="1100">
+                          <a:solidFill>
+                            <a:srgbClr val="333333"/>
+                          </a:solidFill>
+                          <a:latin typeface="Consolas"/>
+                        </a:defRPr>
+                      </a:pPr>
+                      <a:r>
+                        <a:t>0.816</a:t>
+                      </a:r>
+                    </a:p>
+                  </a:txBody>
+                  <a:tcPr anchor="ctr"/>
+                </a:tc>
+              </a:tr>
+              <a:tr h="403860">
+                <a:tc>
+                  <a:txBody>
+                    <a:bodyPr/>
+                    <a:lstStyle/>
+                    <a:p>
+                      <a:pPr algn="l">
+                        <a:defRPr sz="1100" b="1">
+                          <a:solidFill>
+                            <a:srgbClr val="2563EB"/>
+                          </a:solidFill>
+                          <a:latin typeface="Calibri"/>
+                        </a:defRPr>
+                      </a:pPr>
+                      <a:r>
+                        <a:t>Rift Volcanics</a:t>
+                      </a:r>
+                    </a:p>
+                  </a:txBody>
+                  <a:tcPr anchor="ctr">
+                    <a:solidFill>
+                      <a:srgbClr val="F8F8F8"/>
+                    </a:solidFill>
+                  </a:tcPr>
+                </a:tc>
+                <a:tc>
+                  <a:txBody>
+                    <a:bodyPr/>
+                    <a:lstStyle/>
+                    <a:p>
+                      <a:pPr algn="ctr">
+                        <a:defRPr sz="1100">
+                          <a:solidFill>
+                            <a:srgbClr val="333333"/>
+                          </a:solidFill>
+                          <a:latin typeface="Consolas"/>
+                        </a:defRPr>
+                      </a:pPr>
+                      <a:r>
+                        <a:t>1,894</a:t>
+                      </a:r>
+                    </a:p>
+                  </a:txBody>
+                  <a:tcPr anchor="ctr">
+                    <a:solidFill>
+                      <a:srgbClr val="F8F8F8"/>
+                    </a:solidFill>
+                  </a:tcPr>
+                </a:tc>
+                <a:tc>
+                  <a:txBody>
+                    <a:bodyPr/>
+                    <a:lstStyle/>
+                    <a:p>
+                      <a:pPr algn="ctr">
+                        <a:defRPr sz="1100">
+                          <a:solidFill>
+                            <a:srgbClr val="333333"/>
+                          </a:solidFill>
+                          <a:latin typeface="Consolas"/>
+                        </a:defRPr>
+                      </a:pPr>
+                      <a:r>
+                        <a:t>0.872</a:t>
+                      </a:r>
+                    </a:p>
+                  </a:txBody>
+                  <a:tcPr anchor="ctr">
+                    <a:solidFill>
+                      <a:srgbClr val="F8F8F8"/>
+                    </a:solidFill>
+                  </a:tcPr>
+                </a:tc>
+              </a:tr>
+              <a:tr h="403860">
+                <a:tc>
+                  <a:txBody>
+                    <a:bodyPr/>
+                    <a:lstStyle/>
+                    <a:p>
+                      <a:pPr algn="l">
+                        <a:defRPr sz="1100" b="1">
+                          <a:solidFill>
+                            <a:srgbClr val="2563EB"/>
+                          </a:solidFill>
+                          <a:latin typeface="Calibri"/>
+                        </a:defRPr>
+                      </a:pPr>
+                      <a:r>
+                        <a:t>Seamount</a:t>
+                      </a:r>
+                    </a:p>
+                  </a:txBody>
+                  <a:tcPr anchor="ctr"/>
+                </a:tc>
+                <a:tc>
+                  <a:txBody>
+                    <a:bodyPr/>
+                    <a:lstStyle/>
+                    <a:p>
+                      <a:pPr algn="ctr">
+                        <a:defRPr sz="1100">
+                          <a:solidFill>
+                            <a:srgbClr val="333333"/>
+                          </a:solidFill>
+                          <a:latin typeface="Consolas"/>
+                        </a:defRPr>
+                      </a:pPr>
+                      <a:r>
+                        <a:t>494</a:t>
+                      </a:r>
+                    </a:p>
+                  </a:txBody>
+                  <a:tcPr anchor="ctr"/>
+                </a:tc>
+                <a:tc>
+                  <a:txBody>
+                    <a:bodyPr/>
+                    <a:lstStyle/>
+                    <a:p>
+                      <a:pPr algn="ctr">
+                        <a:defRPr sz="1100">
+                          <a:solidFill>
+                            <a:srgbClr val="333333"/>
+                          </a:solidFill>
+                          <a:latin typeface="Consolas"/>
+                        </a:defRPr>
+                      </a:pPr>
+                      <a:r>
+                        <a:t>0.885</a:t>
+                      </a:r>
+                    </a:p>
+                  </a:txBody>
+                  <a:tcPr anchor="ctr"/>
+                </a:tc>
+              </a:tr>
+              <a:tr h="403860">
+                <a:tc>
+                  <a:txBody>
+                    <a:bodyPr/>
+                    <a:lstStyle/>
+                    <a:p>
+                      <a:pPr algn="l">
+                        <a:defRPr sz="1100" b="1">
+                          <a:solidFill>
+                            <a:srgbClr val="2563EB"/>
+                          </a:solidFill>
+                          <a:latin typeface="Calibri"/>
+                        </a:defRPr>
+                      </a:pPr>
+                      <a:r>
+                        <a:t>Cont. Flood Basalt</a:t>
+                      </a:r>
+                    </a:p>
+                  </a:txBody>
+                  <a:tcPr anchor="ctr">
+                    <a:solidFill>
+                      <a:srgbClr val="F8F8F8"/>
+                    </a:solidFill>
+                  </a:tcPr>
+                </a:tc>
+                <a:tc>
+                  <a:txBody>
+                    <a:bodyPr/>
+                    <a:lstStyle/>
+                    <a:p>
+                      <a:pPr algn="ctr">
+                        <a:defRPr sz="1100">
+                          <a:solidFill>
+                            <a:srgbClr val="333333"/>
+                          </a:solidFill>
+                          <a:latin typeface="Consolas"/>
+                        </a:defRPr>
+                      </a:pPr>
+                      <a:r>
+                        <a:t>2,919</a:t>
+                      </a:r>
+                    </a:p>
+                  </a:txBody>
+                  <a:tcPr anchor="ctr">
+                    <a:solidFill>
+                      <a:srgbClr val="F8F8F8"/>
+                    </a:solidFill>
+                  </a:tcPr>
+                </a:tc>
+                <a:tc>
+                  <a:txBody>
+                    <a:bodyPr/>
+                    <a:lstStyle/>
+                    <a:p>
+                      <a:pPr algn="ctr">
+                        <a:defRPr sz="1100">
+                          <a:solidFill>
+                            <a:srgbClr val="333333"/>
+                          </a:solidFill>
+                          <a:latin typeface="Consolas"/>
+                        </a:defRPr>
+                      </a:pPr>
+                      <a:r>
+                        <a:t>0.916</a:t>
+                      </a:r>
+                    </a:p>
+                  </a:txBody>
+                  <a:tcPr anchor="ctr">
+                    <a:solidFill>
+                      <a:srgbClr val="F8F8F8"/>
+                    </a:solidFill>
+                  </a:tcPr>
+                </a:tc>
+              </a:tr>
+              <a:tr h="403860">
+                <a:tc>
+                  <a:txBody>
+                    <a:bodyPr/>
+                    <a:lstStyle/>
+                    <a:p>
+                      <a:pPr algn="l">
+                        <a:defRPr sz="1100" b="1">
+                          <a:solidFill>
+                            <a:srgbClr val="2563EB"/>
+                          </a:solidFill>
+                          <a:latin typeface="Calibri"/>
+                        </a:defRPr>
+                      </a:pPr>
+                      <a:r>
+                        <a:t>Ocean Island</a:t>
+                      </a:r>
+                    </a:p>
+                  </a:txBody>
+                  <a:tcPr anchor="ctr"/>
+                </a:tc>
+                <a:tc>
+                  <a:txBody>
+                    <a:bodyPr/>
+                    <a:lstStyle/>
+                    <a:p>
+                      <a:pPr algn="ctr">
+                        <a:defRPr sz="1100">
+                          <a:solidFill>
+                            <a:srgbClr val="333333"/>
+                          </a:solidFill>
+                          <a:latin typeface="Consolas"/>
+                        </a:defRPr>
+                      </a:pPr>
+                      <a:r>
+                        <a:t>2,278</a:t>
+                      </a:r>
+                    </a:p>
+                  </a:txBody>
+                  <a:tcPr anchor="ctr"/>
+                </a:tc>
+                <a:tc>
+                  <a:txBody>
+                    <a:bodyPr/>
+                    <a:lstStyle/>
+                    <a:p>
+                      <a:pPr algn="ctr">
+                        <a:defRPr sz="1100">
+                          <a:solidFill>
+                            <a:srgbClr val="333333"/>
+                          </a:solidFill>
+                          <a:latin typeface="Consolas"/>
+                        </a:defRPr>
+                      </a:pPr>
+                      <a:r>
+                        <a:t>0.934</a:t>
+                      </a:r>
+                    </a:p>
+                  </a:txBody>
+                  <a:tcPr anchor="ctr"/>
+                </a:tc>
+              </a:tr>
+              <a:tr h="403860">
+                <a:tc>
+                  <a:txBody>
+                    <a:bodyPr/>
+                    <a:lstStyle/>
+                    <a:p>
+                      <a:pPr algn="l">
+                        <a:defRPr sz="1100" b="1">
+                          <a:solidFill>
+                            <a:srgbClr val="059669"/>
+                          </a:solidFill>
+                          <a:latin typeface="Calibri"/>
+                        </a:defRPr>
+                      </a:pPr>
+                      <a:r>
+                        <a:t>Complex Volcanic</a:t>
+                      </a:r>
+                    </a:p>
+                  </a:txBody>
+                  <a:tcPr anchor="ctr">
+                    <a:solidFill>
+                      <a:srgbClr val="F8F8F8"/>
+                    </a:solidFill>
+                  </a:tcPr>
+                </a:tc>
+                <a:tc>
+                  <a:txBody>
+                    <a:bodyPr/>
+                    <a:lstStyle/>
+                    <a:p>
+                      <a:pPr algn="ctr">
+                        <a:defRPr sz="1100">
+                          <a:solidFill>
+                            <a:srgbClr val="333333"/>
+                          </a:solidFill>
+                          <a:latin typeface="Consolas"/>
+                        </a:defRPr>
+                      </a:pPr>
+                      <a:r>
+                        <a:t>576</a:t>
+                      </a:r>
+                    </a:p>
+                  </a:txBody>
+                  <a:tcPr anchor="ctr">
+                    <a:solidFill>
+                      <a:srgbClr val="F8F8F8"/>
+                    </a:solidFill>
+                  </a:tcPr>
+                </a:tc>
+                <a:tc>
+                  <a:txBody>
+                    <a:bodyPr/>
+                    <a:lstStyle/>
+                    <a:p>
+                      <a:pPr algn="ctr">
+                        <a:defRPr sz="1100">
+                          <a:solidFill>
+                            <a:srgbClr val="333333"/>
+                          </a:solidFill>
+                          <a:latin typeface="Consolas"/>
+                        </a:defRPr>
+                      </a:pPr>
+                      <a:r>
+                        <a:t>0.950</a:t>
+                      </a:r>
+                    </a:p>
+                  </a:txBody>
+                  <a:tcPr anchor="ctr">
+                    <a:solidFill>
+                      <a:srgbClr val="F8F8F8"/>
+                    </a:solidFill>
+                  </a:tcPr>
+                </a:tc>
+              </a:tr>
+              <a:tr h="403860">
+                <a:tc>
+                  <a:txBody>
+                    <a:bodyPr/>
+                    <a:lstStyle/>
+                    <a:p>
+                      <a:pPr algn="l">
+                        <a:defRPr sz="1100" b="1">
+                          <a:solidFill>
+                            <a:srgbClr val="059669"/>
+                          </a:solidFill>
+                          <a:latin typeface="Calibri"/>
+                        </a:defRPr>
+                      </a:pPr>
+                      <a:r>
+                        <a:t>Intraplate Volcanics</a:t>
+                      </a:r>
+                    </a:p>
+                  </a:txBody>
+                  <a:tcPr anchor="ctr"/>
+                </a:tc>
+                <a:tc>
+                  <a:txBody>
+                    <a:bodyPr/>
+                    <a:lstStyle/>
+                    <a:p>
+                      <a:pPr algn="ctr">
+                        <a:defRPr sz="1100">
+                          <a:solidFill>
+                            <a:srgbClr val="333333"/>
+                          </a:solidFill>
+                          <a:latin typeface="Consolas"/>
+                        </a:defRPr>
+                      </a:pPr>
+                      <a:r>
+                        <a:t>16,988</a:t>
+                      </a:r>
+                    </a:p>
+                  </a:txBody>
+                  <a:tcPr anchor="ctr"/>
+                </a:tc>
+                <a:tc>
+                  <a:txBody>
+                    <a:bodyPr/>
+                    <a:lstStyle/>
+                    <a:p>
+                      <a:pPr algn="ctr">
+                        <a:defRPr sz="1100">
+                          <a:solidFill>
+                            <a:srgbClr val="333333"/>
+                          </a:solidFill>
+                          <a:latin typeface="Consolas"/>
+                        </a:defRPr>
+                      </a:pPr>
+                      <a:r>
+                        <a:t>0.956</a:t>
+                      </a:r>
+                    </a:p>
+                  </a:txBody>
+                  <a:tcPr anchor="ctr"/>
+                </a:tc>
+              </a:tr>
+              <a:tr h="403860">
+                <a:tc>
+                  <a:txBody>
+                    <a:bodyPr/>
+                    <a:lstStyle/>
+                    <a:p>
+                      <a:pPr algn="l">
+                        <a:defRPr sz="1100" b="1">
+                          <a:solidFill>
+                            <a:srgbClr val="059669"/>
+                          </a:solidFill>
+                          <a:latin typeface="Calibri"/>
+                        </a:defRPr>
+                      </a:pPr>
+                      <a:r>
+                        <a:t>Submarine Ridge</a:t>
+                      </a:r>
+                    </a:p>
+                  </a:txBody>
+                  <a:tcPr anchor="ctr">
+                    <a:solidFill>
+                      <a:srgbClr val="F8F8F8"/>
+                    </a:solidFill>
+                  </a:tcPr>
+                </a:tc>
+                <a:tc>
+                  <a:txBody>
+                    <a:bodyPr/>
+                    <a:lstStyle/>
+                    <a:p>
+                      <a:pPr algn="ctr">
+                        <a:defRPr sz="1100">
+                          <a:solidFill>
+                            <a:srgbClr val="333333"/>
+                          </a:solidFill>
+                          <a:latin typeface="Consolas"/>
+                        </a:defRPr>
+                      </a:pPr>
+                      <a:r>
+                        <a:t>35</a:t>
+                      </a:r>
+                    </a:p>
+                  </a:txBody>
+                  <a:tcPr anchor="ctr">
+                    <a:solidFill>
+                      <a:srgbClr val="F8F8F8"/>
+                    </a:solidFill>
+                  </a:tcPr>
+                </a:tc>
+                <a:tc>
+                  <a:txBody>
+                    <a:bodyPr/>
+                    <a:lstStyle/>
+                    <a:p>
+                      <a:pPr algn="ctr">
+                        <a:defRPr sz="1100">
+                          <a:solidFill>
+                            <a:srgbClr val="333333"/>
+                          </a:solidFill>
+                          <a:latin typeface="Consolas"/>
+                        </a:defRPr>
+                      </a:pPr>
+                      <a:r>
+                        <a:t>0.957</a:t>
+                      </a:r>
+                    </a:p>
+                  </a:txBody>
+                  <a:tcPr anchor="ctr">
+                    <a:solidFill>
+                      <a:srgbClr val="F8F8F8"/>
+                    </a:solidFill>
+                  </a:tcPr>
+                </a:tc>
+              </a:tr>
+              <a:tr h="403860">
+                <a:tc>
+                  <a:txBody>
+                    <a:bodyPr/>
+                    <a:lstStyle/>
+                    <a:p>
+                      <a:pPr algn="l">
+                        <a:defRPr sz="1100" b="1">
+                          <a:solidFill>
+                            <a:srgbClr val="059669"/>
+                          </a:solidFill>
+                          <a:latin typeface="Calibri"/>
+                        </a:defRPr>
+                      </a:pPr>
+                      <a:r>
+                        <a:t>Convergent Margin</a:t>
+                      </a:r>
+                    </a:p>
+                  </a:txBody>
+                  <a:tcPr anchor="ctr"/>
+                </a:tc>
+                <a:tc>
+                  <a:txBody>
+                    <a:bodyPr/>
+                    <a:lstStyle/>
+                    <a:p>
+                      <a:pPr algn="ctr">
+                        <a:defRPr sz="1100">
+                          <a:solidFill>
+                            <a:srgbClr val="333333"/>
+                          </a:solidFill>
+                          <a:latin typeface="Consolas"/>
+                        </a:defRPr>
+                      </a:pPr>
+                      <a:r>
+                        <a:t>14,078</a:t>
+                      </a:r>
+                    </a:p>
+                  </a:txBody>
+                  <a:tcPr anchor="ctr"/>
+                </a:tc>
+                <a:tc>
+                  <a:txBody>
+                    <a:bodyPr/>
+                    <a:lstStyle/>
+                    <a:p>
+                      <a:pPr algn="ctr">
+                        <a:defRPr sz="1100">
+                          <a:solidFill>
+                            <a:srgbClr val="333333"/>
+                          </a:solidFill>
+                          <a:latin typeface="Consolas"/>
+                        </a:defRPr>
+                      </a:pPr>
+                      <a:r>
+                        <a:t>0.976</a:t>
+                      </a:r>
+                    </a:p>
+                  </a:txBody>
+                  <a:tcPr anchor="ctr"/>
+                </a:tc>
+              </a:tr>
+              <a:tr h="403860">
+                <a:tc>
+                  <a:txBody>
+                    <a:bodyPr/>
+                    <a:lstStyle/>
+                    <a:p>
+                      <a:pPr algn="l">
+                        <a:defRPr sz="1100" b="1">
+                          <a:solidFill>
+                            <a:srgbClr val="059669"/>
+                          </a:solidFill>
+                          <a:latin typeface="Calibri"/>
+                        </a:defRPr>
+                      </a:pPr>
+                      <a:r>
+                        <a:t>Ocean-Basin Flood</a:t>
+                      </a:r>
+                    </a:p>
+                  </a:txBody>
+                  <a:tcPr anchor="ctr">
+                    <a:solidFill>
+                      <a:srgbClr val="F8F8F8"/>
+                    </a:solidFill>
+                  </a:tcPr>
+                </a:tc>
+                <a:tc>
+                  <a:txBody>
+                    <a:bodyPr/>
+                    <a:lstStyle/>
+                    <a:p>
+                      <a:pPr algn="ctr">
+                        <a:defRPr sz="1100">
+                          <a:solidFill>
+                            <a:srgbClr val="333333"/>
+                          </a:solidFill>
+                          <a:latin typeface="Consolas"/>
+                        </a:defRPr>
+                      </a:pPr>
+                      <a:r>
+                        <a:t>59</a:t>
+                      </a:r>
+                    </a:p>
+                  </a:txBody>
+                  <a:tcPr anchor="ctr">
+                    <a:solidFill>
+                      <a:srgbClr val="F8F8F8"/>
+                    </a:solidFill>
+                  </a:tcPr>
+                </a:tc>
+                <a:tc>
+                  <a:txBody>
+                    <a:bodyPr/>
+                    <a:lstStyle/>
+                    <a:p>
+                      <a:pPr algn="ctr">
+                        <a:defRPr sz="1100">
+                          <a:solidFill>
+                            <a:srgbClr val="333333"/>
+                          </a:solidFill>
+                          <a:latin typeface="Consolas"/>
+                        </a:defRPr>
+                      </a:pPr>
+                      <a:r>
+                        <a:t>0.983</a:t>
+                      </a:r>
+                    </a:p>
+                  </a:txBody>
+                  <a:tcPr anchor="ctr">
+                    <a:solidFill>
+                      <a:srgbClr val="F8F8F8"/>
+                    </a:solidFill>
+                  </a:tcPr>
+                </a:tc>
+              </a:tr>
+            </a:tbl>
+          </a:graphicData>
+        </a:graphic>
+      </p:graphicFrame>
+      <p:sp>
+        <p:nvSpPr>
+          <p:cNvPr id="6" name="TextBox 5"/>
+          <p:cNvSpPr txBox="1"/>
+          <p:nvPr/>
+        </p:nvSpPr>
+        <p:spPr>
+          <a:xfrm>
+            <a:off x="548640" y="6217920"/>
+            <a:ext cx="10972800" cy="457200"/>
+          </a:xfrm>
+          <a:prstGeom prst="rect">
+            <a:avLst/>
+          </a:prstGeom>
+          <a:noFill/>
+        </p:spPr>
+        <p:txBody>
+          <a:bodyPr wrap="square">
+            <a:spAutoFit/>
+          </a:bodyPr>
+          <a:lstStyle/>
+          <a:p>
+            <a:pPr>
+              <a:defRPr sz="1200" i="1">
+                <a:solidFill>
+                  <a:srgbClr val="666666"/>
+                </a:solidFill>
+                <a:latin typeface="Calibri"/>
+              </a:defRPr>
+            </a:pPr>
+            <a:r>
+              <a:t>Hardest classes: Archean Craton (F1=0.76, n=194), Oceanic Plateau (F1=0.82, n=116) -- both confused with Intraplate Volcanics. Easiest: Ocean-Basin Flood (F1=0.98, n=59).</a:t>
+            </a:r>
+          </a:p>
+        </p:txBody>
+      </p:sp>
+    </p:spTree>
+  </p:cSld>
+  <p:clrMapOvr>
+    <a:masterClrMapping/>
+  </p:clrMapOvr>
+</p:sld>
+</file>
+
+<file path=ppt/slides/slide14.xml><?xml version="1.0" encoding="utf-8"?>
+<p:sld xmlns:a="http://schemas.openxmlformats.org/drawingml/2006/main" xmlns:p="http://schemas.openxmlformats.org/presentationml/2006/main" xmlns:r="http://schemas.openxmlformats.org/officeDocument/2006/relationships">
+  <p:cSld>
+    <p:spTree>
+      <p:nvGrpSpPr>
+        <p:cNvPr id="1" name=""/>
+        <p:cNvGrpSpPr/>
+        <p:nvPr/>
+      </p:nvGrpSpPr>
+      <p:grpSpPr/>
+      <p:sp>
+        <p:nvSpPr>
+          <p:cNvPr id="2" name="TextBox 1"/>
+          <p:cNvSpPr txBox="1"/>
+          <p:nvPr/>
+        </p:nvSpPr>
+        <p:spPr>
+          <a:xfrm>
+            <a:off x="548640" y="274320"/>
+            <a:ext cx="10972800" cy="640080"/>
+          </a:xfrm>
+          <a:prstGeom prst="rect">
+            <a:avLst/>
+          </a:prstGeom>
+          <a:noFill/>
+        </p:spPr>
+        <p:txBody>
+          <a:bodyPr wrap="square">
+            <a:spAutoFit/>
+          </a:bodyPr>
+          <a:lstStyle/>
+          <a:p>
+            <a:pPr>
+              <a:defRPr sz="2800" b="1">
+                <a:solidFill>
+                  <a:srgbClr val="1A2744"/>
+                </a:solidFill>
+                <a:latin typeface="Calibri"/>
+              </a:defRPr>
+            </a:pPr>
+            <a:r>
+              <a:t>Data Availability -- Temporal Metadata Gap</a:t>
+            </a:r>
+          </a:p>
+        </p:txBody>
+      </p:sp>
+      <p:sp>
+        <p:nvSpPr>
+          <p:cNvPr id="3" name="Rectangle 2"/>
+          <p:cNvSpPr/>
+          <p:nvPr/>
+        </p:nvSpPr>
+        <p:spPr>
+          <a:xfrm>
+            <a:off x="548640" y="1005840"/>
+            <a:ext cx="10972800" cy="25400"/>
+          </a:xfrm>
+          <a:prstGeom prst="rect">
+            <a:avLst/>
+          </a:prstGeom>
+          <a:solidFill>
+            <a:srgbClr val="2563EB"/>
+          </a:solidFill>
+          <a:ln>
+            <a:noFill/>
+          </a:ln>
+        </p:spPr>
+        <p:style>
+          <a:lnRef idx="1">
+            <a:schemeClr val="accent1"/>
+          </a:lnRef>
+          <a:fillRef idx="3">
+            <a:schemeClr val="accent1"/>
+          </a:fillRef>
+          <a:effectRef idx="2">
+            <a:schemeClr val="accent1"/>
+          </a:effectRef>
+          <a:fontRef idx="minor">
+            <a:schemeClr val="lt1"/>
+          </a:fontRef>
+        </p:style>
+        <p:txBody>
+          <a:bodyPr rtlCol="0" anchor="ctr"/>
+          <a:lstStyle/>
+          <a:p>
+            <a:pPr algn="ctr"/>
+          </a:p>
+        </p:txBody>
+      </p:sp>
+      <p:sp>
+        <p:nvSpPr>
+          <p:cNvPr id="4" name="Rectangle 3"/>
+          <p:cNvSpPr/>
+          <p:nvPr/>
+        </p:nvSpPr>
+        <p:spPr>
+          <a:xfrm>
+            <a:off x="548640" y="1188720"/>
+            <a:ext cx="10972800" cy="457200"/>
+          </a:xfrm>
+          <a:prstGeom prst="rect">
+            <a:avLst/>
+          </a:prstGeom>
+          <a:solidFill>
+            <a:srgbClr val="1A2744"/>
+          </a:solidFill>
+          <a:ln>
+            <a:noFill/>
+          </a:ln>
+        </p:spPr>
+        <p:style>
+          <a:lnRef idx="1">
+            <a:schemeClr val="accent1"/>
+          </a:lnRef>
+          <a:fillRef idx="3">
+            <a:schemeClr val="accent1"/>
+          </a:fillRef>
+          <a:effectRef idx="2">
+            <a:schemeClr val="accent1"/>
+          </a:effectRef>
+          <a:fontRef idx="minor">
+            <a:schemeClr val="lt1"/>
+          </a:fontRef>
+        </p:style>
+        <p:txBody>
+          <a:bodyPr rtlCol="0" anchor="ctr" lIns="137160" rIns="137160"/>
+          <a:lstStyle/>
+          <a:p>
+            <a:pPr algn="ctr">
+              <a:defRPr sz="1600" b="1">
+                <a:solidFill>
+                  <a:srgbClr val="FFFFFF"/>
+                </a:solidFill>
+                <a:latin typeface="Calibri"/>
+              </a:defRPr>
+            </a:pPr>
+            <a:r>
+              <a:t>Only 0.076% of samples have AGE(MA) metadata (161 / 211,773)</a:t>
+            </a:r>
+          </a:p>
+        </p:txBody>
+      </p:sp>
+      <p:pic>
+        <p:nvPicPr>
+          <p:cNvPr id="5" name="Picture 4" descr="age_era_stacked.png"/>
+          <p:cNvPicPr>
+            <a:picLocks noChangeAspect="1"/>
+          </p:cNvPicPr>
+          <p:nvPr/>
+        </p:nvPicPr>
+        <p:blipFill>
+          <a:blip r:embed="rId2"/>
+          <a:stretch>
+            <a:fillRect/>
+          </a:stretch>
+        </p:blipFill>
+        <p:spPr>
+          <a:xfrm>
+            <a:off x="365760" y="1828800"/>
+            <a:ext cx="6858000" cy="4114800"/>
+          </a:xfrm>
+          <a:prstGeom prst="rect">
+            <a:avLst/>
+          </a:prstGeom>
+        </p:spPr>
+      </p:pic>
+      <p:sp>
+        <p:nvSpPr>
+          <p:cNvPr id="6" name="TextBox 5"/>
+          <p:cNvSpPr txBox="1"/>
+          <p:nvPr/>
+        </p:nvSpPr>
+        <p:spPr>
+          <a:xfrm>
+            <a:off x="7498079" y="1828800"/>
+            <a:ext cx="4572000" cy="4114800"/>
+          </a:xfrm>
+          <a:prstGeom prst="rect">
+            <a:avLst/>
+          </a:prstGeom>
+          <a:noFill/>
+        </p:spPr>
+        <p:txBody>
+          <a:bodyPr wrap="square">
+            <a:spAutoFit/>
+          </a:bodyPr>
+          <a:lstStyle/>
+          <a:p>
+            <a:pPr>
+              <a:spcAft>
+                <a:spcPts val="400"/>
+              </a:spcAft>
+              <a:defRPr sz="2200" b="1">
+                <a:solidFill>
+                  <a:srgbClr val="1A2744"/>
+                </a:solidFill>
+                <a:latin typeface="Calibri"/>
+              </a:defRPr>
+            </a:pPr>
+            <a:r>
+              <a:t>Age coverage: 0.076%</a:t>
+            </a:r>
+          </a:p>
+          <a:p>
+            <a:pPr>
+              <a:spcAft>
+                <a:spcPts val="1000"/>
+              </a:spcAft>
+              <a:defRPr sz="1300" i="1">
+                <a:solidFill>
+                  <a:srgbClr val="D97706"/>
+                </a:solidFill>
+                <a:latin typeface="Calibri"/>
+              </a:defRPr>
+            </a:pPr>
+            <a:r>
+              <a:t>6 / 11 classes have ZERO aged samples</a:t>
+            </a:r>
+          </a:p>
+          <a:p>
+            <a:pPr>
+              <a:spcAft>
+                <a:spcPts val="200"/>
+              </a:spcAft>
+              <a:defRPr sz="1300" b="0">
+                <a:solidFill>
+                  <a:srgbClr val="059669"/>
+                </a:solidFill>
+                <a:latin typeface="Consolas"/>
+              </a:defRPr>
+            </a:pPr>
+            <a:r>
+              <a:t>Intraplate: 16 / 84,835</a:t>
+            </a:r>
+          </a:p>
+          <a:p>
+            <a:pPr>
+              <a:spcAft>
+                <a:spcPts val="200"/>
+              </a:spcAft>
+              <a:defRPr sz="1300" b="0">
+                <a:solidFill>
+                  <a:srgbClr val="059669"/>
+                </a:solidFill>
+                <a:latin typeface="Consolas"/>
+              </a:defRPr>
+            </a:pPr>
+            <a:r>
+              <a:t>Conv. Margin: 125 / 56,216</a:t>
+            </a:r>
+          </a:p>
+          <a:p>
+            <a:pPr>
+              <a:spcAft>
+                <a:spcPts val="200"/>
+              </a:spcAft>
+              <a:defRPr sz="1300" b="0">
+                <a:solidFill>
+                  <a:srgbClr val="059669"/>
+                </a:solidFill>
+                <a:latin typeface="Consolas"/>
+              </a:defRPr>
+            </a:pPr>
+            <a:r>
+              <a:t>Ocean Island: 11 / 24,008</a:t>
+            </a:r>
+          </a:p>
+          <a:p>
+            <a:pPr>
+              <a:spcAft>
+                <a:spcPts val="200"/>
+              </a:spcAft>
+              <a:defRPr sz="1300" b="1">
+                <a:solidFill>
+                  <a:srgbClr val="D97706"/>
+                </a:solidFill>
+                <a:latin typeface="Consolas"/>
+              </a:defRPr>
+            </a:pPr>
+            <a:r>
+              <a:t>CFB: 0 / 20,816</a:t>
+            </a:r>
+          </a:p>
+          <a:p>
+            <a:pPr>
+              <a:spcAft>
+                <a:spcPts val="200"/>
+              </a:spcAft>
+              <a:defRPr sz="1300" b="0">
+                <a:solidFill>
+                  <a:srgbClr val="059669"/>
+                </a:solidFill>
+                <a:latin typeface="Consolas"/>
+              </a:defRPr>
+            </a:pPr>
+            <a:r>
+              <a:t>Rift Volc.: 3 / 13,689</a:t>
+            </a:r>
+          </a:p>
+          <a:p>
+            <a:pPr>
+              <a:spcAft>
+                <a:spcPts val="200"/>
+              </a:spcAft>
+              <a:defRPr sz="1300" b="0">
+                <a:solidFill>
+                  <a:srgbClr val="059669"/>
+                </a:solidFill>
+                <a:latin typeface="Consolas"/>
+              </a:defRPr>
+            </a:pPr>
+            <a:r>
+              <a:t>Complex Volc.: 6 / 4,201</a:t>
+            </a:r>
+          </a:p>
+          <a:p>
+            <a:pPr>
+              <a:spcAft>
+                <a:spcPts val="200"/>
+              </a:spcAft>
+              <a:defRPr sz="1300" b="1">
+                <a:solidFill>
+                  <a:srgbClr val="D97706"/>
+                </a:solidFill>
+                <a:latin typeface="Consolas"/>
+              </a:defRPr>
+            </a:pPr>
+            <a:r>
+              <a:t>Seamount: 0 / 3,907</a:t>
+            </a:r>
+          </a:p>
+          <a:p>
+            <a:pPr>
+              <a:spcAft>
+                <a:spcPts val="200"/>
+              </a:spcAft>
+              <a:defRPr sz="1300" b="1">
+                <a:solidFill>
+                  <a:srgbClr val="D97706"/>
+                </a:solidFill>
+                <a:latin typeface="Consolas"/>
+              </a:defRPr>
+            </a:pPr>
+            <a:r>
+              <a:t>Arch. Craton: 0 / 2,189</a:t>
+            </a:r>
+          </a:p>
+          <a:p>
+            <a:pPr>
+              <a:spcAft>
+                <a:spcPts val="200"/>
+              </a:spcAft>
+              <a:defRPr sz="1300" b="1">
+                <a:solidFill>
+                  <a:srgbClr val="D97706"/>
+                </a:solidFill>
+                <a:latin typeface="Consolas"/>
+              </a:defRPr>
+            </a:pPr>
+            <a:r>
+              <a:t>Oceanic Plat.: 0 / 1,472</a:t>
+            </a:r>
+          </a:p>
+          <a:p>
+            <a:pPr>
+              <a:spcAft>
+                <a:spcPts val="200"/>
+              </a:spcAft>
+              <a:defRPr sz="1300" b="1">
+                <a:solidFill>
+                  <a:srgbClr val="D97706"/>
+                </a:solidFill>
+                <a:latin typeface="Consolas"/>
+              </a:defRPr>
+            </a:pPr>
+            <a:r>
+              <a:t>Sub. Ridge: 0 / 233</a:t>
+            </a:r>
+          </a:p>
+          <a:p>
+            <a:pPr>
+              <a:spcAft>
+                <a:spcPts val="200"/>
+              </a:spcAft>
+              <a:defRPr sz="1300" b="1">
+                <a:solidFill>
+                  <a:srgbClr val="D97706"/>
+                </a:solidFill>
+                <a:latin typeface="Consolas"/>
+              </a:defRPr>
+            </a:pPr>
+            <a:r>
+              <a:t>OBF: 0 / 207</a:t>
+            </a:r>
+          </a:p>
+        </p:txBody>
+      </p:sp>
+      <p:sp>
+        <p:nvSpPr>
+          <p:cNvPr id="7" name="TextBox 6"/>
+          <p:cNvSpPr txBox="1"/>
+          <p:nvPr/>
+        </p:nvSpPr>
+        <p:spPr>
+          <a:xfrm>
+            <a:off x="548640" y="6217920"/>
+            <a:ext cx="10972800" cy="457200"/>
+          </a:xfrm>
+          <a:prstGeom prst="rect">
+            <a:avLst/>
+          </a:prstGeom>
+          <a:noFill/>
+        </p:spPr>
+        <p:txBody>
+          <a:bodyPr wrap="square">
+            <a:spAutoFit/>
+          </a:bodyPr>
+          <a:lstStyle/>
+          <a:p>
+            <a:pPr>
+              <a:defRPr sz="1200" i="1">
+                <a:solidFill>
+                  <a:srgbClr val="666666"/>
+                </a:solidFill>
+                <a:latin typeface="Calibri"/>
+              </a:defRPr>
+            </a:pPr>
+            <a:r>
+              <a:t>Age metadata cannot be used for feature engineering or stratification. Recommend flagging to GEOROC / GRO.data maintainers.</a:t>
+            </a:r>
+          </a:p>
+        </p:txBody>
+      </p:sp>
+    </p:spTree>
+  </p:cSld>
+  <p:clrMapOvr>
+    <a:masterClrMapping/>
+  </p:clrMapOvr>
+</p:sld>
+</file>
+
+<file path=ppt/slides/slide15.xml><?xml version="1.0" encoding="utf-8"?>
+<p:sld xmlns:a="http://schemas.openxmlformats.org/drawingml/2006/main" xmlns:p="http://schemas.openxmlformats.org/presentationml/2006/main" xmlns:r="http://schemas.openxmlformats.org/officeDocument/2006/relationships">
+  <p:cSld>
+    <p:spTree>
+      <p:nvGrpSpPr>
+        <p:cNvPr id="1" name=""/>
+        <p:cNvGrpSpPr/>
+        <p:nvPr/>
+      </p:nvGrpSpPr>
+      <p:grpSpPr/>
+      <p:sp>
+        <p:nvSpPr>
+          <p:cNvPr id="2" name="TextBox 1"/>
+          <p:cNvSpPr txBox="1"/>
+          <p:nvPr/>
+        </p:nvSpPr>
+        <p:spPr>
+          <a:xfrm>
+            <a:off x="548640" y="274320"/>
+            <a:ext cx="10972800" cy="640080"/>
+          </a:xfrm>
+          <a:prstGeom prst="rect">
+            <a:avLst/>
+          </a:prstGeom>
+          <a:noFill/>
+        </p:spPr>
+        <p:txBody>
+          <a:bodyPr wrap="square">
+            <a:spAutoFit/>
+          </a:bodyPr>
+          <a:lstStyle/>
+          <a:p>
+            <a:pPr>
+              <a:defRPr sz="2800" b="1">
+                <a:solidFill>
+                  <a:srgbClr val="1A2744"/>
+                </a:solidFill>
+                <a:latin typeface="Calibri"/>
+              </a:defRPr>
+            </a:pPr>
+            <a:r>
+              <a:t>Key Conclusions</a:t>
+            </a:r>
+          </a:p>
+        </p:txBody>
+      </p:sp>
+      <p:sp>
+        <p:nvSpPr>
+          <p:cNvPr id="3" name="Rectangle 2"/>
+          <p:cNvSpPr/>
+          <p:nvPr/>
+        </p:nvSpPr>
+        <p:spPr>
+          <a:xfrm>
+            <a:off x="548640" y="1005840"/>
+            <a:ext cx="10972800" cy="25400"/>
+          </a:xfrm>
+          <a:prstGeom prst="rect">
+            <a:avLst/>
+          </a:prstGeom>
+          <a:solidFill>
+            <a:srgbClr val="2563EB"/>
+          </a:solidFill>
+          <a:ln>
+            <a:noFill/>
+          </a:ln>
+        </p:spPr>
+        <p:style>
+          <a:lnRef idx="1">
+            <a:schemeClr val="accent1"/>
+          </a:lnRef>
+          <a:fillRef idx="3">
+            <a:schemeClr val="accent1"/>
+          </a:fillRef>
+          <a:effectRef idx="2">
+            <a:schemeClr val="accent1"/>
+          </a:effectRef>
+          <a:fontRef idx="minor">
+            <a:schemeClr val="lt1"/>
+          </a:fontRef>
+        </p:style>
+        <p:txBody>
+          <a:bodyPr rtlCol="0" anchor="ctr"/>
+          <a:lstStyle/>
+          <a:p>
+            <a:pPr algn="ctr"/>
+          </a:p>
+        </p:txBody>
+      </p:sp>
       <p:sp>
         <p:nvSpPr>
           <p:cNvPr id="4" name="TextBox 3"/>
@@ -4244,7 +5699,7 @@
 </p:sld>
 </file>
 
-<file path=ppt/slides/slide14.xml><?xml version="1.0" encoding="utf-8"?>
+<file path=ppt/slides/slide16.xml><?xml version="1.0" encoding="utf-8"?>
 <p:sld xmlns:a="http://schemas.openxmlformats.org/drawingml/2006/main" xmlns:p="http://schemas.openxmlformats.org/presentationml/2006/main" xmlns:r="http://schemas.openxmlformats.org/officeDocument/2006/relationships">
   <p:cSld>
     <p:spTree>

--- a/CPX_Tectonic_Classification.pptx
+++ b/CPX_Tectonic_Classification.pptx
@@ -21,6 +21,7 @@
     <p:sldId id="269" r:id="rId20"/>
     <p:sldId id="270" r:id="rId21"/>
     <p:sldId id="271" r:id="rId22"/>
+    <p:sldId id="272" r:id="rId23"/>
   </p:sldIdLst>
   <p:sldSz cx="12191695" cy="6858000" type="screen4x3"/>
   <p:notesSz cx="6858000" cy="9144000"/>
@@ -3846,6 +3847,1230 @@
               </a:defRPr>
             </a:pPr>
             <a:r>
+              <a:t>Stratified Evaluation: Best Practical on Basalt + Phenocryst</a:t>
+            </a:r>
+          </a:p>
+        </p:txBody>
+      </p:sp>
+      <p:sp>
+        <p:nvSpPr>
+          <p:cNvPr id="3" name="Rectangle 2"/>
+          <p:cNvSpPr/>
+          <p:nvPr/>
+        </p:nvSpPr>
+        <p:spPr>
+          <a:xfrm>
+            <a:off x="548640" y="1005840"/>
+            <a:ext cx="10972800" cy="25400"/>
+          </a:xfrm>
+          <a:prstGeom prst="rect">
+            <a:avLst/>
+          </a:prstGeom>
+          <a:solidFill>
+            <a:srgbClr val="2563EB"/>
+          </a:solidFill>
+          <a:ln>
+            <a:noFill/>
+          </a:ln>
+        </p:spPr>
+        <p:style>
+          <a:lnRef idx="1">
+            <a:schemeClr val="accent1"/>
+          </a:lnRef>
+          <a:fillRef idx="3">
+            <a:schemeClr val="accent1"/>
+          </a:fillRef>
+          <a:effectRef idx="2">
+            <a:schemeClr val="accent1"/>
+          </a:effectRef>
+          <a:fontRef idx="minor">
+            <a:schemeClr val="lt1"/>
+          </a:fontRef>
+        </p:style>
+        <p:txBody>
+          <a:bodyPr rtlCol="0" anchor="ctr"/>
+          <a:lstStyle/>
+          <a:p>
+            <a:pPr algn="ctr"/>
+          </a:p>
+        </p:txBody>
+      </p:sp>
+      <p:pic>
+        <p:nvPicPr>
+          <p:cNvPr id="4" name="Picture 3" descr="stratified_eval_bars.png"/>
+          <p:cNvPicPr>
+            <a:picLocks noChangeAspect="1"/>
+          </p:cNvPicPr>
+          <p:nvPr/>
+        </p:nvPicPr>
+        <p:blipFill>
+          <a:blip r:embed="rId2"/>
+          <a:stretch>
+            <a:fillRect/>
+          </a:stretch>
+        </p:blipFill>
+        <p:spPr>
+          <a:xfrm>
+            <a:off x="365760" y="1188720"/>
+            <a:ext cx="5669280" cy="4663440"/>
+          </a:xfrm>
+          <a:prstGeom prst="rect">
+            <a:avLst/>
+          </a:prstGeom>
+        </p:spPr>
+      </p:pic>
+      <p:graphicFrame>
+        <p:nvGraphicFramePr>
+          <p:cNvPr id="5" name="Table 4"/>
+          <p:cNvGraphicFramePr>
+            <a:graphicFrameLocks noGrp="1"/>
+          </p:cNvGraphicFramePr>
+          <p:nvPr/>
+        </p:nvGraphicFramePr>
+        <p:xfrm>
+          <a:off x="6309360" y="1280160"/>
+          <a:ext cx="5669280" cy="4846320"/>
+        </p:xfrm>
+        <a:graphic>
+          <a:graphicData uri="http://schemas.openxmlformats.org/drawingml/2006/table">
+            <a:tbl>
+              <a:tblPr firstRow="1" bandRow="1">
+                <a:tableStyleId>{5C22544A-7EE6-4342-B048-85BDC9FD1C3A}</a:tableStyleId>
+              </a:tblPr>
+              <a:tblGrid>
+                <a:gridCol w="1737360"/>
+                <a:gridCol w="640080"/>
+                <a:gridCol w="1097280"/>
+                <a:gridCol w="1097280"/>
+                <a:gridCol w="1097280"/>
+              </a:tblGrid>
+              <a:tr h="538480">
+                <a:tc>
+                  <a:txBody>
+                    <a:bodyPr/>
+                    <a:lstStyle/>
+                    <a:p>
+                      <a:pPr algn="ctr">
+                        <a:defRPr sz="1000" b="1">
+                          <a:solidFill>
+                            <a:srgbClr val="FFFFFF"/>
+                          </a:solidFill>
+                          <a:latin typeface="Calibri"/>
+                        </a:defRPr>
+                      </a:pPr>
+                      <a:r>
+                        <a:t>Class</a:t>
+                      </a:r>
+                    </a:p>
+                  </a:txBody>
+                  <a:tcPr>
+                    <a:solidFill>
+                      <a:srgbClr val="1A2744"/>
+                    </a:solidFill>
+                  </a:tcPr>
+                </a:tc>
+                <a:tc>
+                  <a:txBody>
+                    <a:bodyPr/>
+                    <a:lstStyle/>
+                    <a:p>
+                      <a:pPr algn="ctr">
+                        <a:defRPr sz="1000" b="1">
+                          <a:solidFill>
+                            <a:srgbClr val="FFFFFF"/>
+                          </a:solidFill>
+                          <a:latin typeface="Calibri"/>
+                        </a:defRPr>
+                      </a:pPr>
+                      <a:r>
+                        <a:t>n</a:t>
+                      </a:r>
+                    </a:p>
+                  </a:txBody>
+                  <a:tcPr>
+                    <a:solidFill>
+                      <a:srgbClr val="1A2744"/>
+                    </a:solidFill>
+                  </a:tcPr>
+                </a:tc>
+                <a:tc>
+                  <a:txBody>
+                    <a:bodyPr/>
+                    <a:lstStyle/>
+                    <a:p>
+                      <a:pPr algn="ctr">
+                        <a:defRPr sz="1000" b="1">
+                          <a:solidFill>
+                            <a:srgbClr val="FFFFFF"/>
+                          </a:solidFill>
+                          <a:latin typeface="Calibri"/>
+                        </a:defRPr>
+                      </a:pPr>
+                      <a:r>
+                        <a:t>Sliced F1</a:t>
+                      </a:r>
+                    </a:p>
+                  </a:txBody>
+                  <a:tcPr>
+                    <a:solidFill>
+                      <a:srgbClr val="1A2744"/>
+                    </a:solidFill>
+                  </a:tcPr>
+                </a:tc>
+                <a:tc>
+                  <a:txBody>
+                    <a:bodyPr/>
+                    <a:lstStyle/>
+                    <a:p>
+                      <a:pPr algn="ctr">
+                        <a:defRPr sz="1000" b="1">
+                          <a:solidFill>
+                            <a:srgbClr val="FFFFFF"/>
+                          </a:solidFill>
+                          <a:latin typeface="Calibri"/>
+                        </a:defRPr>
+                      </a:pPr>
+                      <a:r>
+                        <a:t>Indep F1</a:t>
+                      </a:r>
+                    </a:p>
+                  </a:txBody>
+                  <a:tcPr>
+                    <a:solidFill>
+                      <a:srgbClr val="1A2744"/>
+                    </a:solidFill>
+                  </a:tcPr>
+                </a:tc>
+                <a:tc>
+                  <a:txBody>
+                    <a:bodyPr/>
+                    <a:lstStyle/>
+                    <a:p>
+                      <a:pPr algn="ctr">
+                        <a:defRPr sz="1000" b="1">
+                          <a:solidFill>
+                            <a:srgbClr val="FFFFFF"/>
+                          </a:solidFill>
+                          <a:latin typeface="Calibri"/>
+                        </a:defRPr>
+                      </a:pPr>
+                      <a:r>
+                        <a:t>Δ (I−S)</a:t>
+                      </a:r>
+                    </a:p>
+                  </a:txBody>
+                  <a:tcPr>
+                    <a:solidFill>
+                      <a:srgbClr val="1A2744"/>
+                    </a:solidFill>
+                  </a:tcPr>
+                </a:tc>
+              </a:tr>
+              <a:tr h="538480">
+                <a:tc>
+                  <a:txBody>
+                    <a:bodyPr/>
+                    <a:lstStyle/>
+                    <a:p>
+                      <a:pPr algn="l">
+                        <a:defRPr sz="1000">
+                          <a:solidFill>
+                            <a:srgbClr val="333333"/>
+                          </a:solidFill>
+                          <a:latin typeface="Calibri"/>
+                        </a:defRPr>
+                      </a:pPr>
+                      <a:r>
+                        <a:t>Convergent Margin</a:t>
+                      </a:r>
+                    </a:p>
+                  </a:txBody>
+                  <a:tcPr anchor="ctr">
+                    <a:solidFill>
+                      <a:srgbClr val="F8F8F8"/>
+                    </a:solidFill>
+                  </a:tcPr>
+                </a:tc>
+                <a:tc>
+                  <a:txBody>
+                    <a:bodyPr/>
+                    <a:lstStyle/>
+                    <a:p>
+                      <a:pPr algn="ctr">
+                        <a:defRPr sz="1000">
+                          <a:solidFill>
+                            <a:srgbClr val="333333"/>
+                          </a:solidFill>
+                          <a:latin typeface="Consolas"/>
+                        </a:defRPr>
+                      </a:pPr>
+                      <a:r>
+                        <a:t>424</a:t>
+                      </a:r>
+                    </a:p>
+                  </a:txBody>
+                  <a:tcPr anchor="ctr">
+                    <a:solidFill>
+                      <a:srgbClr val="F8F8F8"/>
+                    </a:solidFill>
+                  </a:tcPr>
+                </a:tc>
+                <a:tc>
+                  <a:txBody>
+                    <a:bodyPr/>
+                    <a:lstStyle/>
+                    <a:p>
+                      <a:pPr algn="ctr">
+                        <a:defRPr sz="1000">
+                          <a:solidFill>
+                            <a:srgbClr val="333333"/>
+                          </a:solidFill>
+                          <a:latin typeface="Consolas"/>
+                        </a:defRPr>
+                      </a:pPr>
+                      <a:r>
+                        <a:t>0.955</a:t>
+                      </a:r>
+                    </a:p>
+                  </a:txBody>
+                  <a:tcPr anchor="ctr">
+                    <a:solidFill>
+                      <a:srgbClr val="F8F8F8"/>
+                    </a:solidFill>
+                  </a:tcPr>
+                </a:tc>
+                <a:tc>
+                  <a:txBody>
+                    <a:bodyPr/>
+                    <a:lstStyle/>
+                    <a:p>
+                      <a:pPr algn="ctr">
+                        <a:defRPr sz="1000">
+                          <a:solidFill>
+                            <a:srgbClr val="333333"/>
+                          </a:solidFill>
+                          <a:latin typeface="Consolas"/>
+                        </a:defRPr>
+                      </a:pPr>
+                      <a:r>
+                        <a:t>0.961</a:t>
+                      </a:r>
+                    </a:p>
+                  </a:txBody>
+                  <a:tcPr anchor="ctr">
+                    <a:solidFill>
+                      <a:srgbClr val="F8F8F8"/>
+                    </a:solidFill>
+                  </a:tcPr>
+                </a:tc>
+                <a:tc>
+                  <a:txBody>
+                    <a:bodyPr/>
+                    <a:lstStyle/>
+                    <a:p>
+                      <a:pPr algn="ctr">
+                        <a:defRPr sz="1000">
+                          <a:solidFill>
+                            <a:srgbClr val="333333"/>
+                          </a:solidFill>
+                          <a:latin typeface="Consolas"/>
+                        </a:defRPr>
+                      </a:pPr>
+                      <a:r>
+                        <a:t>+0.006</a:t>
+                      </a:r>
+                    </a:p>
+                  </a:txBody>
+                  <a:tcPr anchor="ctr">
+                    <a:solidFill>
+                      <a:srgbClr val="F8F8F8"/>
+                    </a:solidFill>
+                  </a:tcPr>
+                </a:tc>
+              </a:tr>
+              <a:tr h="538480">
+                <a:tc>
+                  <a:txBody>
+                    <a:bodyPr/>
+                    <a:lstStyle/>
+                    <a:p>
+                      <a:pPr algn="l">
+                        <a:defRPr sz="1000">
+                          <a:solidFill>
+                            <a:srgbClr val="333333"/>
+                          </a:solidFill>
+                          <a:latin typeface="Calibri"/>
+                        </a:defRPr>
+                      </a:pPr>
+                      <a:r>
+                        <a:t>Seamount</a:t>
+                      </a:r>
+                    </a:p>
+                  </a:txBody>
+                  <a:tcPr anchor="ctr"/>
+                </a:tc>
+                <a:tc>
+                  <a:txBody>
+                    <a:bodyPr/>
+                    <a:lstStyle/>
+                    <a:p>
+                      <a:pPr algn="ctr">
+                        <a:defRPr sz="1000">
+                          <a:solidFill>
+                            <a:srgbClr val="333333"/>
+                          </a:solidFill>
+                          <a:latin typeface="Consolas"/>
+                        </a:defRPr>
+                      </a:pPr>
+                      <a:r>
+                        <a:t>106</a:t>
+                      </a:r>
+                    </a:p>
+                  </a:txBody>
+                  <a:tcPr anchor="ctr"/>
+                </a:tc>
+                <a:tc>
+                  <a:txBody>
+                    <a:bodyPr/>
+                    <a:lstStyle/>
+                    <a:p>
+                      <a:pPr algn="ctr">
+                        <a:defRPr sz="1000">
+                          <a:solidFill>
+                            <a:srgbClr val="333333"/>
+                          </a:solidFill>
+                          <a:latin typeface="Consolas"/>
+                        </a:defRPr>
+                      </a:pPr>
+                      <a:r>
+                        <a:t>0.904</a:t>
+                      </a:r>
+                    </a:p>
+                  </a:txBody>
+                  <a:tcPr anchor="ctr"/>
+                </a:tc>
+                <a:tc>
+                  <a:txBody>
+                    <a:bodyPr/>
+                    <a:lstStyle/>
+                    <a:p>
+                      <a:pPr algn="ctr">
+                        <a:defRPr sz="1000">
+                          <a:solidFill>
+                            <a:srgbClr val="333333"/>
+                          </a:solidFill>
+                          <a:latin typeface="Consolas"/>
+                        </a:defRPr>
+                      </a:pPr>
+                      <a:r>
+                        <a:t>0.873</a:t>
+                      </a:r>
+                    </a:p>
+                  </a:txBody>
+                  <a:tcPr anchor="ctr"/>
+                </a:tc>
+                <a:tc>
+                  <a:txBody>
+                    <a:bodyPr/>
+                    <a:lstStyle/>
+                    <a:p>
+                      <a:pPr algn="ctr">
+                        <a:defRPr sz="1000" b="1">
+                          <a:solidFill>
+                            <a:srgbClr val="059669"/>
+                          </a:solidFill>
+                          <a:latin typeface="Consolas"/>
+                        </a:defRPr>
+                      </a:pPr>
+                      <a:r>
+                        <a:t>-0.031</a:t>
+                      </a:r>
+                    </a:p>
+                  </a:txBody>
+                  <a:tcPr anchor="ctr"/>
+                </a:tc>
+              </a:tr>
+              <a:tr h="538480">
+                <a:tc>
+                  <a:txBody>
+                    <a:bodyPr/>
+                    <a:lstStyle/>
+                    <a:p>
+                      <a:pPr algn="l">
+                        <a:defRPr sz="1000">
+                          <a:solidFill>
+                            <a:srgbClr val="333333"/>
+                          </a:solidFill>
+                          <a:latin typeface="Calibri"/>
+                        </a:defRPr>
+                      </a:pPr>
+                      <a:r>
+                        <a:t>Ocean Island</a:t>
+                      </a:r>
+                    </a:p>
+                  </a:txBody>
+                  <a:tcPr anchor="ctr">
+                    <a:solidFill>
+                      <a:srgbClr val="F8F8F8"/>
+                    </a:solidFill>
+                  </a:tcPr>
+                </a:tc>
+                <a:tc>
+                  <a:txBody>
+                    <a:bodyPr/>
+                    <a:lstStyle/>
+                    <a:p>
+                      <a:pPr algn="ctr">
+                        <a:defRPr sz="1000">
+                          <a:solidFill>
+                            <a:srgbClr val="333333"/>
+                          </a:solidFill>
+                          <a:latin typeface="Consolas"/>
+                        </a:defRPr>
+                      </a:pPr>
+                      <a:r>
+                        <a:t>90</a:t>
+                      </a:r>
+                    </a:p>
+                  </a:txBody>
+                  <a:tcPr anchor="ctr">
+                    <a:solidFill>
+                      <a:srgbClr val="F8F8F8"/>
+                    </a:solidFill>
+                  </a:tcPr>
+                </a:tc>
+                <a:tc>
+                  <a:txBody>
+                    <a:bodyPr/>
+                    <a:lstStyle/>
+                    <a:p>
+                      <a:pPr algn="ctr">
+                        <a:defRPr sz="1000">
+                          <a:solidFill>
+                            <a:srgbClr val="333333"/>
+                          </a:solidFill>
+                          <a:latin typeface="Consolas"/>
+                        </a:defRPr>
+                      </a:pPr>
+                      <a:r>
+                        <a:t>0.978</a:t>
+                      </a:r>
+                    </a:p>
+                  </a:txBody>
+                  <a:tcPr anchor="ctr">
+                    <a:solidFill>
+                      <a:srgbClr val="F8F8F8"/>
+                    </a:solidFill>
+                  </a:tcPr>
+                </a:tc>
+                <a:tc>
+                  <a:txBody>
+                    <a:bodyPr/>
+                    <a:lstStyle/>
+                    <a:p>
+                      <a:pPr algn="ctr">
+                        <a:defRPr sz="1000">
+                          <a:solidFill>
+                            <a:srgbClr val="333333"/>
+                          </a:solidFill>
+                          <a:latin typeface="Consolas"/>
+                        </a:defRPr>
+                      </a:pPr>
+                      <a:r>
+                        <a:t>0.972</a:t>
+                      </a:r>
+                    </a:p>
+                  </a:txBody>
+                  <a:tcPr anchor="ctr">
+                    <a:solidFill>
+                      <a:srgbClr val="F8F8F8"/>
+                    </a:solidFill>
+                  </a:tcPr>
+                </a:tc>
+                <a:tc>
+                  <a:txBody>
+                    <a:bodyPr/>
+                    <a:lstStyle/>
+                    <a:p>
+                      <a:pPr algn="ctr">
+                        <a:defRPr sz="1000">
+                          <a:solidFill>
+                            <a:srgbClr val="333333"/>
+                          </a:solidFill>
+                          <a:latin typeface="Consolas"/>
+                        </a:defRPr>
+                      </a:pPr>
+                      <a:r>
+                        <a:t>-0.006</a:t>
+                      </a:r>
+                    </a:p>
+                  </a:txBody>
+                  <a:tcPr anchor="ctr">
+                    <a:solidFill>
+                      <a:srgbClr val="F8F8F8"/>
+                    </a:solidFill>
+                  </a:tcPr>
+                </a:tc>
+              </a:tr>
+              <a:tr h="538480">
+                <a:tc>
+                  <a:txBody>
+                    <a:bodyPr/>
+                    <a:lstStyle/>
+                    <a:p>
+                      <a:pPr algn="l">
+                        <a:defRPr sz="1000">
+                          <a:solidFill>
+                            <a:srgbClr val="333333"/>
+                          </a:solidFill>
+                          <a:latin typeface="Calibri"/>
+                        </a:defRPr>
+                      </a:pPr>
+                      <a:r>
+                        <a:t>Intraplate Volcanics</a:t>
+                      </a:r>
+                    </a:p>
+                  </a:txBody>
+                  <a:tcPr anchor="ctr"/>
+                </a:tc>
+                <a:tc>
+                  <a:txBody>
+                    <a:bodyPr/>
+                    <a:lstStyle/>
+                    <a:p>
+                      <a:pPr algn="ctr">
+                        <a:defRPr sz="1000">
+                          <a:solidFill>
+                            <a:srgbClr val="333333"/>
+                          </a:solidFill>
+                          <a:latin typeface="Consolas"/>
+                        </a:defRPr>
+                      </a:pPr>
+                      <a:r>
+                        <a:t>57</a:t>
+                      </a:r>
+                    </a:p>
+                  </a:txBody>
+                  <a:tcPr anchor="ctr"/>
+                </a:tc>
+                <a:tc>
+                  <a:txBody>
+                    <a:bodyPr/>
+                    <a:lstStyle/>
+                    <a:p>
+                      <a:pPr algn="ctr">
+                        <a:defRPr sz="1000">
+                          <a:solidFill>
+                            <a:srgbClr val="333333"/>
+                          </a:solidFill>
+                          <a:latin typeface="Consolas"/>
+                        </a:defRPr>
+                      </a:pPr>
+                      <a:r>
+                        <a:t>0.848</a:t>
+                      </a:r>
+                    </a:p>
+                  </a:txBody>
+                  <a:tcPr anchor="ctr"/>
+                </a:tc>
+                <a:tc>
+                  <a:txBody>
+                    <a:bodyPr/>
+                    <a:lstStyle/>
+                    <a:p>
+                      <a:pPr algn="ctr">
+                        <a:defRPr sz="1000">
+                          <a:solidFill>
+                            <a:srgbClr val="333333"/>
+                          </a:solidFill>
+                          <a:latin typeface="Consolas"/>
+                        </a:defRPr>
+                      </a:pPr>
+                      <a:r>
+                        <a:t>0.904</a:t>
+                      </a:r>
+                    </a:p>
+                  </a:txBody>
+                  <a:tcPr anchor="ctr"/>
+                </a:tc>
+                <a:tc>
+                  <a:txBody>
+                    <a:bodyPr/>
+                    <a:lstStyle/>
+                    <a:p>
+                      <a:pPr algn="ctr">
+                        <a:defRPr sz="1000" b="1">
+                          <a:solidFill>
+                            <a:srgbClr val="D97706"/>
+                          </a:solidFill>
+                          <a:latin typeface="Consolas"/>
+                        </a:defRPr>
+                      </a:pPr>
+                      <a:r>
+                        <a:t>+0.056</a:t>
+                      </a:r>
+                    </a:p>
+                  </a:txBody>
+                  <a:tcPr anchor="ctr"/>
+                </a:tc>
+              </a:tr>
+              <a:tr h="538480">
+                <a:tc>
+                  <a:txBody>
+                    <a:bodyPr/>
+                    <a:lstStyle/>
+                    <a:p>
+                      <a:pPr algn="l">
+                        <a:defRPr sz="1000">
+                          <a:solidFill>
+                            <a:srgbClr val="333333"/>
+                          </a:solidFill>
+                          <a:latin typeface="Calibri"/>
+                        </a:defRPr>
+                      </a:pPr>
+                      <a:r>
+                        <a:t>Complex Volcanic</a:t>
+                      </a:r>
+                    </a:p>
+                  </a:txBody>
+                  <a:tcPr anchor="ctr">
+                    <a:solidFill>
+                      <a:srgbClr val="F8F8F8"/>
+                    </a:solidFill>
+                  </a:tcPr>
+                </a:tc>
+                <a:tc>
+                  <a:txBody>
+                    <a:bodyPr/>
+                    <a:lstStyle/>
+                    <a:p>
+                      <a:pPr algn="ctr">
+                        <a:defRPr sz="1000">
+                          <a:solidFill>
+                            <a:srgbClr val="333333"/>
+                          </a:solidFill>
+                          <a:latin typeface="Consolas"/>
+                        </a:defRPr>
+                      </a:pPr>
+                      <a:r>
+                        <a:t>46</a:t>
+                      </a:r>
+                    </a:p>
+                  </a:txBody>
+                  <a:tcPr anchor="ctr">
+                    <a:solidFill>
+                      <a:srgbClr val="F8F8F8"/>
+                    </a:solidFill>
+                  </a:tcPr>
+                </a:tc>
+                <a:tc>
+                  <a:txBody>
+                    <a:bodyPr/>
+                    <a:lstStyle/>
+                    <a:p>
+                      <a:pPr algn="ctr">
+                        <a:defRPr sz="1000">
+                          <a:solidFill>
+                            <a:srgbClr val="333333"/>
+                          </a:solidFill>
+                          <a:latin typeface="Consolas"/>
+                        </a:defRPr>
+                      </a:pPr>
+                      <a:r>
+                        <a:t>0.955</a:t>
+                      </a:r>
+                    </a:p>
+                  </a:txBody>
+                  <a:tcPr anchor="ctr">
+                    <a:solidFill>
+                      <a:srgbClr val="F8F8F8"/>
+                    </a:solidFill>
+                  </a:tcPr>
+                </a:tc>
+                <a:tc>
+                  <a:txBody>
+                    <a:bodyPr/>
+                    <a:lstStyle/>
+                    <a:p>
+                      <a:pPr algn="ctr">
+                        <a:defRPr sz="1000">
+                          <a:solidFill>
+                            <a:srgbClr val="333333"/>
+                          </a:solidFill>
+                          <a:latin typeface="Consolas"/>
+                        </a:defRPr>
+                      </a:pPr>
+                      <a:r>
+                        <a:t>0.978</a:t>
+                      </a:r>
+                    </a:p>
+                  </a:txBody>
+                  <a:tcPr anchor="ctr">
+                    <a:solidFill>
+                      <a:srgbClr val="F8F8F8"/>
+                    </a:solidFill>
+                  </a:tcPr>
+                </a:tc>
+                <a:tc>
+                  <a:txBody>
+                    <a:bodyPr/>
+                    <a:lstStyle/>
+                    <a:p>
+                      <a:pPr algn="ctr">
+                        <a:defRPr sz="1000">
+                          <a:solidFill>
+                            <a:srgbClr val="333333"/>
+                          </a:solidFill>
+                          <a:latin typeface="Consolas"/>
+                        </a:defRPr>
+                      </a:pPr>
+                      <a:r>
+                        <a:t>+0.023</a:t>
+                      </a:r>
+                    </a:p>
+                  </a:txBody>
+                  <a:tcPr anchor="ctr">
+                    <a:solidFill>
+                      <a:srgbClr val="F8F8F8"/>
+                    </a:solidFill>
+                  </a:tcPr>
+                </a:tc>
+              </a:tr>
+              <a:tr h="538480">
+                <a:tc>
+                  <a:txBody>
+                    <a:bodyPr/>
+                    <a:lstStyle/>
+                    <a:p>
+                      <a:pPr algn="l">
+                        <a:defRPr sz="1000">
+                          <a:solidFill>
+                            <a:srgbClr val="333333"/>
+                          </a:solidFill>
+                          <a:latin typeface="Calibri"/>
+                        </a:defRPr>
+                      </a:pPr>
+                      <a:r>
+                        <a:t>Rift Volcanics</a:t>
+                      </a:r>
+                    </a:p>
+                  </a:txBody>
+                  <a:tcPr anchor="ctr"/>
+                </a:tc>
+                <a:tc>
+                  <a:txBody>
+                    <a:bodyPr/>
+                    <a:lstStyle/>
+                    <a:p>
+                      <a:pPr algn="ctr">
+                        <a:defRPr sz="1000">
+                          <a:solidFill>
+                            <a:srgbClr val="333333"/>
+                          </a:solidFill>
+                          <a:latin typeface="Consolas"/>
+                        </a:defRPr>
+                      </a:pPr>
+                      <a:r>
+                        <a:t>39</a:t>
+                      </a:r>
+                    </a:p>
+                  </a:txBody>
+                  <a:tcPr anchor="ctr"/>
+                </a:tc>
+                <a:tc>
+                  <a:txBody>
+                    <a:bodyPr/>
+                    <a:lstStyle/>
+                    <a:p>
+                      <a:pPr algn="ctr">
+                        <a:defRPr sz="1000">
+                          <a:solidFill>
+                            <a:srgbClr val="333333"/>
+                          </a:solidFill>
+                          <a:latin typeface="Consolas"/>
+                        </a:defRPr>
+                      </a:pPr>
+                      <a:r>
+                        <a:t>0.946</a:t>
+                      </a:r>
+                    </a:p>
+                  </a:txBody>
+                  <a:tcPr anchor="ctr"/>
+                </a:tc>
+                <a:tc>
+                  <a:txBody>
+                    <a:bodyPr/>
+                    <a:lstStyle/>
+                    <a:p>
+                      <a:pPr algn="ctr">
+                        <a:defRPr sz="1000">
+                          <a:solidFill>
+                            <a:srgbClr val="333333"/>
+                          </a:solidFill>
+                          <a:latin typeface="Consolas"/>
+                        </a:defRPr>
+                      </a:pPr>
+                      <a:r>
+                        <a:t>0.987</a:t>
+                      </a:r>
+                    </a:p>
+                  </a:txBody>
+                  <a:tcPr anchor="ctr"/>
+                </a:tc>
+                <a:tc>
+                  <a:txBody>
+                    <a:bodyPr/>
+                    <a:lstStyle/>
+                    <a:p>
+                      <a:pPr algn="ctr">
+                        <a:defRPr sz="1000">
+                          <a:solidFill>
+                            <a:srgbClr val="333333"/>
+                          </a:solidFill>
+                          <a:latin typeface="Consolas"/>
+                        </a:defRPr>
+                      </a:pPr>
+                      <a:r>
+                        <a:t>+0.041</a:t>
+                      </a:r>
+                    </a:p>
+                  </a:txBody>
+                  <a:tcPr anchor="ctr"/>
+                </a:tc>
+              </a:tr>
+              <a:tr h="538480">
+                <a:tc>
+                  <a:txBody>
+                    <a:bodyPr/>
+                    <a:lstStyle/>
+                    <a:p>
+                      <a:pPr algn="l">
+                        <a:defRPr sz="1000">
+                          <a:solidFill>
+                            <a:srgbClr val="333333"/>
+                          </a:solidFill>
+                          <a:latin typeface="Calibri"/>
+                        </a:defRPr>
+                      </a:pPr>
+                      <a:r>
+                        <a:t>Oceanic Plateau ⚠</a:t>
+                      </a:r>
+                    </a:p>
+                  </a:txBody>
+                  <a:tcPr anchor="ctr">
+                    <a:solidFill>
+                      <a:srgbClr val="FFF4E6"/>
+                    </a:solidFill>
+                  </a:tcPr>
+                </a:tc>
+                <a:tc>
+                  <a:txBody>
+                    <a:bodyPr/>
+                    <a:lstStyle/>
+                    <a:p>
+                      <a:pPr algn="ctr">
+                        <a:defRPr sz="1000">
+                          <a:solidFill>
+                            <a:srgbClr val="333333"/>
+                          </a:solidFill>
+                          <a:latin typeface="Consolas"/>
+                        </a:defRPr>
+                      </a:pPr>
+                      <a:r>
+                        <a:t>16</a:t>
+                      </a:r>
+                    </a:p>
+                  </a:txBody>
+                  <a:tcPr anchor="ctr">
+                    <a:solidFill>
+                      <a:srgbClr val="FFF4E6"/>
+                    </a:solidFill>
+                  </a:tcPr>
+                </a:tc>
+                <a:tc>
+                  <a:txBody>
+                    <a:bodyPr/>
+                    <a:lstStyle/>
+                    <a:p>
+                      <a:pPr algn="ctr">
+                        <a:defRPr sz="1000">
+                          <a:solidFill>
+                            <a:srgbClr val="333333"/>
+                          </a:solidFill>
+                          <a:latin typeface="Consolas"/>
+                        </a:defRPr>
+                      </a:pPr>
+                      <a:r>
+                        <a:t>0.970</a:t>
+                      </a:r>
+                    </a:p>
+                  </a:txBody>
+                  <a:tcPr anchor="ctr">
+                    <a:solidFill>
+                      <a:srgbClr val="FFF4E6"/>
+                    </a:solidFill>
+                  </a:tcPr>
+                </a:tc>
+                <a:tc>
+                  <a:txBody>
+                    <a:bodyPr/>
+                    <a:lstStyle/>
+                    <a:p>
+                      <a:pPr algn="ctr">
+                        <a:defRPr sz="1000">
+                          <a:solidFill>
+                            <a:srgbClr val="333333"/>
+                          </a:solidFill>
+                          <a:latin typeface="Consolas"/>
+                        </a:defRPr>
+                      </a:pPr>
+                      <a:r>
+                        <a:t>1.000</a:t>
+                      </a:r>
+                    </a:p>
+                  </a:txBody>
+                  <a:tcPr anchor="ctr">
+                    <a:solidFill>
+                      <a:srgbClr val="FFF4E6"/>
+                    </a:solidFill>
+                  </a:tcPr>
+                </a:tc>
+                <a:tc>
+                  <a:txBody>
+                    <a:bodyPr/>
+                    <a:lstStyle/>
+                    <a:p>
+                      <a:pPr algn="ctr">
+                        <a:defRPr sz="1000">
+                          <a:solidFill>
+                            <a:srgbClr val="333333"/>
+                          </a:solidFill>
+                          <a:latin typeface="Consolas"/>
+                        </a:defRPr>
+                      </a:pPr>
+                      <a:r>
+                        <a:t>+0.030</a:t>
+                      </a:r>
+                    </a:p>
+                  </a:txBody>
+                  <a:tcPr anchor="ctr">
+                    <a:solidFill>
+                      <a:srgbClr val="FFF4E6"/>
+                    </a:solidFill>
+                  </a:tcPr>
+                </a:tc>
+              </a:tr>
+              <a:tr h="538480">
+                <a:tc>
+                  <a:txBody>
+                    <a:bodyPr/>
+                    <a:lstStyle/>
+                    <a:p>
+                      <a:pPr algn="l">
+                        <a:defRPr sz="1000">
+                          <a:solidFill>
+                            <a:srgbClr val="333333"/>
+                          </a:solidFill>
+                          <a:latin typeface="Calibri"/>
+                        </a:defRPr>
+                      </a:pPr>
+                      <a:r>
+                        <a:t>Cont. Flood Basalt ⚠</a:t>
+                      </a:r>
+                    </a:p>
+                  </a:txBody>
+                  <a:tcPr anchor="ctr">
+                    <a:solidFill>
+                      <a:srgbClr val="FFF4E6"/>
+                    </a:solidFill>
+                  </a:tcPr>
+                </a:tc>
+                <a:tc>
+                  <a:txBody>
+                    <a:bodyPr/>
+                    <a:lstStyle/>
+                    <a:p>
+                      <a:pPr algn="ctr">
+                        <a:defRPr sz="1000">
+                          <a:solidFill>
+                            <a:srgbClr val="333333"/>
+                          </a:solidFill>
+                          <a:latin typeface="Consolas"/>
+                        </a:defRPr>
+                      </a:pPr>
+                      <a:r>
+                        <a:t>5</a:t>
+                      </a:r>
+                    </a:p>
+                  </a:txBody>
+                  <a:tcPr anchor="ctr">
+                    <a:solidFill>
+                      <a:srgbClr val="FFF4E6"/>
+                    </a:solidFill>
+                  </a:tcPr>
+                </a:tc>
+                <a:tc>
+                  <a:txBody>
+                    <a:bodyPr/>
+                    <a:lstStyle/>
+                    <a:p>
+                      <a:pPr algn="ctr">
+                        <a:defRPr sz="1000">
+                          <a:solidFill>
+                            <a:srgbClr val="333333"/>
+                          </a:solidFill>
+                          <a:latin typeface="Consolas"/>
+                        </a:defRPr>
+                      </a:pPr>
+                      <a:r>
+                        <a:t>0.667</a:t>
+                      </a:r>
+                    </a:p>
+                  </a:txBody>
+                  <a:tcPr anchor="ctr">
+                    <a:solidFill>
+                      <a:srgbClr val="FFF4E6"/>
+                    </a:solidFill>
+                  </a:tcPr>
+                </a:tc>
+                <a:tc>
+                  <a:txBody>
+                    <a:bodyPr/>
+                    <a:lstStyle/>
+                    <a:p>
+                      <a:pPr algn="ctr">
+                        <a:defRPr sz="1000">
+                          <a:solidFill>
+                            <a:srgbClr val="333333"/>
+                          </a:solidFill>
+                          <a:latin typeface="Consolas"/>
+                        </a:defRPr>
+                      </a:pPr>
+                      <a:r>
+                        <a:t>1.000</a:t>
+                      </a:r>
+                    </a:p>
+                  </a:txBody>
+                  <a:tcPr anchor="ctr">
+                    <a:solidFill>
+                      <a:srgbClr val="FFF4E6"/>
+                    </a:solidFill>
+                  </a:tcPr>
+                </a:tc>
+                <a:tc>
+                  <a:txBody>
+                    <a:bodyPr/>
+                    <a:lstStyle/>
+                    <a:p>
+                      <a:pPr algn="ctr">
+                        <a:defRPr sz="1000" b="1">
+                          <a:solidFill>
+                            <a:srgbClr val="D97706"/>
+                          </a:solidFill>
+                          <a:latin typeface="Consolas"/>
+                        </a:defRPr>
+                      </a:pPr>
+                      <a:r>
+                        <a:t>+0.333</a:t>
+                      </a:r>
+                    </a:p>
+                  </a:txBody>
+                  <a:tcPr anchor="ctr">
+                    <a:solidFill>
+                      <a:srgbClr val="FFF4E6"/>
+                    </a:solidFill>
+                  </a:tcPr>
+                </a:tc>
+              </a:tr>
+            </a:tbl>
+          </a:graphicData>
+        </a:graphic>
+      </p:graphicFrame>
+      <p:sp>
+        <p:nvSpPr>
+          <p:cNvPr id="6" name="TextBox 5"/>
+          <p:cNvSpPr txBox="1"/>
+          <p:nvPr/>
+        </p:nvSpPr>
+        <p:spPr>
+          <a:xfrm>
+            <a:off x="548640" y="6217920"/>
+            <a:ext cx="10972800" cy="457200"/>
+          </a:xfrm>
+          <a:prstGeom prst="rect">
+            <a:avLst/>
+          </a:prstGeom>
+          <a:noFill/>
+        </p:spPr>
+        <p:txBody>
+          <a:bodyPr wrap="square">
+            <a:spAutoFit/>
+          </a:bodyPr>
+          <a:lstStyle/>
+          <a:p>
+            <a:pPr>
+              <a:defRPr sz="1200" i="1">
+                <a:solidFill>
+                  <a:srgbClr val="666666"/>
+                </a:solidFill>
+                <a:latin typeface="Calibri"/>
+              </a:defRPr>
+            </a:pPr>
+            <a:r>
+              <a:t>Slicing the best practical model's OOF to the 783 basalt+phenocryst samples gives F1m = 0.903; the +0.056 gap to the independently trained model is driven mainly by CFB (n=5) and Oceanic Plateau (n=16) overfitting. No specialised model needed.</a:t>
+            </a:r>
+          </a:p>
+        </p:txBody>
+      </p:sp>
+    </p:spTree>
+  </p:cSld>
+  <p:clrMapOvr>
+    <a:masterClrMapping/>
+  </p:clrMapOvr>
+</p:sld>
+</file>
+
+<file path=ppt/slides/slide14.xml><?xml version="1.0" encoding="utf-8"?>
+<p:sld xmlns:a="http://schemas.openxmlformats.org/drawingml/2006/main" xmlns:p="http://schemas.openxmlformats.org/presentationml/2006/main" xmlns:r="http://schemas.openxmlformats.org/officeDocument/2006/relationships">
+  <p:cSld>
+    <p:spTree>
+      <p:nvGrpSpPr>
+        <p:cNvPr id="1" name=""/>
+        <p:cNvGrpSpPr/>
+        <p:nvPr/>
+      </p:nvGrpSpPr>
+      <p:grpSpPr/>
+      <p:sp>
+        <p:nvSpPr>
+          <p:cNvPr id="2" name="TextBox 1"/>
+          <p:cNvSpPr txBox="1"/>
+          <p:nvPr/>
+        </p:nvSpPr>
+        <p:spPr>
+          <a:xfrm>
+            <a:off x="548640" y="274320"/>
+            <a:ext cx="10972800" cy="640080"/>
+          </a:xfrm>
+          <a:prstGeom prst="rect">
+            <a:avLst/>
+          </a:prstGeom>
+          <a:noFill/>
+        </p:spPr>
+        <p:txBody>
+          <a:bodyPr wrap="square">
+            <a:spAutoFit/>
+          </a:bodyPr>
+          <a:lstStyle/>
+          <a:p>
+            <a:pPr>
+              <a:defRPr sz="2800" b="1">
+                <a:solidFill>
+                  <a:srgbClr val="1A2744"/>
+                </a:solidFill>
+                <a:latin typeface="Calibri"/>
+              </a:defRPr>
+            </a:pPr>
+            <a:r>
               <a:t>Per-Class Classification Performance</a:t>
             </a:r>
           </a:p>
@@ -4817,7 +6042,7 @@
 </p:sld>
 </file>
 
-<file path=ppt/slides/slide14.xml><?xml version="1.0" encoding="utf-8"?>
+<file path=ppt/slides/slide15.xml><?xml version="1.0" encoding="utf-8"?>
 <p:sld xmlns:a="http://schemas.openxmlformats.org/drawingml/2006/main" xmlns:p="http://schemas.openxmlformats.org/presentationml/2006/main" xmlns:r="http://schemas.openxmlformats.org/officeDocument/2006/relationships">
   <p:cSld>
     <p:spTree>
@@ -5258,7 +6483,7 @@
 </p:sld>
 </file>
 
-<file path=ppt/slides/slide15.xml><?xml version="1.0" encoding="utf-8"?>
+<file path=ppt/slides/slide16.xml><?xml version="1.0" encoding="utf-8"?>
 <p:sld xmlns:a="http://schemas.openxmlformats.org/drawingml/2006/main" xmlns:p="http://schemas.openxmlformats.org/presentationml/2006/main" xmlns:r="http://schemas.openxmlformats.org/officeDocument/2006/relationships">
   <p:cSld>
     <p:spTree>
@@ -5355,8 +6580,8 @@
         </p:nvSpPr>
         <p:spPr>
           <a:xfrm>
-            <a:off x="731520" y="1371600"/>
-            <a:ext cx="10515600" cy="5029200"/>
+            <a:off x="731520" y="1280160"/>
+            <a:ext cx="10789920" cy="5303520"/>
           </a:xfrm>
           <a:prstGeom prst="rect">
             <a:avLst/>
@@ -5371,12 +6596,12 @@
           <a:p>
             <a:pPr>
               <a:spcBef>
-                <a:spcPts val="200"/>
+                <a:spcPts val="100"/>
               </a:spcBef>
               <a:spcAft>
-                <a:spcPts val="600"/>
+                <a:spcPts val="500"/>
               </a:spcAft>
-              <a:defRPr sz="1600">
+              <a:defRPr sz="1500" i="0">
                 <a:solidFill>
                   <a:srgbClr val="333333"/>
                 </a:solidFill>
@@ -5384,7 +6609,7 @@
               </a:defRPr>
             </a:pPr>
             <a:r>
-              <a:rPr sz="1400">
+              <a:rPr sz="1300">
                 <a:solidFill>
                   <a:srgbClr val="059669"/>
                 </a:solidFill>
@@ -5393,7 +6618,7 @@
               <a:t>■  </a:t>
             </a:r>
             <a:r>
-              <a:rPr sz="1600">
+              <a:rPr sz="1500">
                 <a:solidFill>
                   <a:srgbClr val="333333"/>
                 </a:solidFill>
@@ -5405,19 +6630,19 @@
           <a:p>
             <a:pPr>
               <a:spcAft>
-                <a:spcPts val="200"/>
+                <a:spcPts val="100"/>
               </a:spcAft>
             </a:pPr>
           </a:p>
           <a:p>
             <a:pPr>
               <a:spcBef>
-                <a:spcPts val="200"/>
+                <a:spcPts val="100"/>
               </a:spcBef>
               <a:spcAft>
-                <a:spcPts val="600"/>
+                <a:spcPts val="500"/>
               </a:spcAft>
-              <a:defRPr sz="1600">
+              <a:defRPr sz="1500" i="0">
                 <a:solidFill>
                   <a:srgbClr val="333333"/>
                 </a:solidFill>
@@ -5425,7 +6650,7 @@
               </a:defRPr>
             </a:pPr>
             <a:r>
-              <a:rPr sz="1400">
+              <a:rPr sz="1300">
                 <a:solidFill>
                   <a:srgbClr val="059669"/>
                 </a:solidFill>
@@ -5434,7 +6659,7 @@
               <a:t>■  </a:t>
             </a:r>
             <a:r>
-              <a:rPr sz="1600">
+              <a:rPr sz="1500">
                 <a:solidFill>
                   <a:srgbClr val="333333"/>
                 </a:solidFill>
@@ -5446,19 +6671,19 @@
           <a:p>
             <a:pPr>
               <a:spcAft>
-                <a:spcPts val="200"/>
+                <a:spcPts val="100"/>
               </a:spcAft>
             </a:pPr>
           </a:p>
           <a:p>
             <a:pPr>
               <a:spcBef>
-                <a:spcPts val="200"/>
+                <a:spcPts val="100"/>
               </a:spcBef>
               <a:spcAft>
-                <a:spcPts val="600"/>
+                <a:spcPts val="500"/>
               </a:spcAft>
-              <a:defRPr sz="1600">
+              <a:defRPr sz="1500" i="0">
                 <a:solidFill>
                   <a:srgbClr val="333333"/>
                 </a:solidFill>
@@ -5466,7 +6691,7 @@
               </a:defRPr>
             </a:pPr>
             <a:r>
-              <a:rPr sz="1400">
+              <a:rPr sz="1300">
                 <a:solidFill>
                   <a:srgbClr val="D97706"/>
                 </a:solidFill>
@@ -5475,7 +6700,7 @@
               <a:t>■  </a:t>
             </a:r>
             <a:r>
-              <a:rPr sz="1600">
+              <a:rPr sz="1500">
                 <a:solidFill>
                   <a:srgbClr val="333333"/>
                 </a:solidFill>
@@ -5487,19 +6712,19 @@
           <a:p>
             <a:pPr>
               <a:spcAft>
-                <a:spcPts val="200"/>
+                <a:spcPts val="100"/>
               </a:spcAft>
             </a:pPr>
           </a:p>
           <a:p>
             <a:pPr>
               <a:spcBef>
-                <a:spcPts val="200"/>
+                <a:spcPts val="100"/>
               </a:spcBef>
               <a:spcAft>
-                <a:spcPts val="600"/>
+                <a:spcPts val="500"/>
               </a:spcAft>
-              <a:defRPr sz="1600">
+              <a:defRPr sz="1500" i="0">
                 <a:solidFill>
                   <a:srgbClr val="333333"/>
                 </a:solidFill>
@@ -5507,7 +6732,7 @@
               </a:defRPr>
             </a:pPr>
             <a:r>
-              <a:rPr sz="1400">
+              <a:rPr sz="1300">
                 <a:solidFill>
                   <a:srgbClr val="2563EB"/>
                 </a:solidFill>
@@ -5516,7 +6741,7 @@
               <a:t>■  </a:t>
             </a:r>
             <a:r>
-              <a:rPr sz="1600">
+              <a:rPr sz="1500">
                 <a:solidFill>
                   <a:srgbClr val="333333"/>
                 </a:solidFill>
@@ -5528,19 +6753,19 @@
           <a:p>
             <a:pPr>
               <a:spcAft>
-                <a:spcPts val="200"/>
+                <a:spcPts val="100"/>
               </a:spcAft>
             </a:pPr>
           </a:p>
           <a:p>
             <a:pPr>
               <a:spcBef>
-                <a:spcPts val="200"/>
+                <a:spcPts val="100"/>
               </a:spcBef>
               <a:spcAft>
-                <a:spcPts val="600"/>
+                <a:spcPts val="500"/>
               </a:spcAft>
-              <a:defRPr sz="1600">
+              <a:defRPr sz="1500" i="0">
                 <a:solidFill>
                   <a:srgbClr val="333333"/>
                 </a:solidFill>
@@ -5548,57 +6773,136 @@
               </a:defRPr>
             </a:pPr>
             <a:r>
-              <a:rPr sz="1400">
-                <a:solidFill>
-                  <a:srgbClr val="059669"/>
+              <a:rPr sz="1300">
+                <a:solidFill>
+                  <a:srgbClr val="1A2744"/>
                 </a:solidFill>
                 <a:latin typeface="Calibri"/>
               </a:rPr>
               <a:t>■  </a:t>
             </a:r>
             <a:r>
-              <a:rPr sz="1600">
+              <a:rPr sz="1500">
                 <a:solidFill>
                   <a:srgbClr val="333333"/>
                 </a:solidFill>
                 <a:latin typeface="Calibri"/>
               </a:rPr>
-              <a:t>Basalt phenocryst with trace data: F1-macro = 0.959 (near-perfect, 8 classes)</a:t>
-            </a:r>
-          </a:p>
-          <a:p>
-            <a:pPr>
-              <a:spcAft>
-                <a:spcPts val="200"/>
-              </a:spcAft>
-            </a:pPr>
+              <a:t>Stratified eval: best practical reaches F1m=0.903 on the 783 basalt+phenocryst slice</a:t>
+            </a:r>
           </a:p>
           <a:p>
             <a:pPr>
               <a:spcBef>
-                <a:spcPts val="200"/>
+                <a:spcPts val="100"/>
               </a:spcBef>
               <a:spcAft>
-                <a:spcPts val="600"/>
+                <a:spcPts val="300"/>
               </a:spcAft>
-              <a:defRPr sz="1600">
-                <a:solidFill>
-                  <a:srgbClr val="333333"/>
+              <a:defRPr sz="1400" i="1">
+                <a:solidFill>
+                  <a:srgbClr val="666666"/>
                 </a:solidFill>
                 <a:latin typeface="Calibri"/>
               </a:defRPr>
             </a:pPr>
             <a:r>
-              <a:rPr sz="1400">
-                <a:solidFill>
-                  <a:srgbClr val="1A2744"/>
+              <a:t>  (indep. training 0.959; +0.056 gap driven by CFB n=5 and Oceanic Plateau n=16)</a:t>
+            </a:r>
+          </a:p>
+          <a:p>
+            <a:pPr>
+              <a:spcAft>
+                <a:spcPts val="100"/>
+              </a:spcAft>
+            </a:pPr>
+          </a:p>
+          <a:p>
+            <a:pPr>
+              <a:spcBef>
+                <a:spcPts val="100"/>
+              </a:spcBef>
+              <a:spcAft>
+                <a:spcPts val="500"/>
+              </a:spcAft>
+              <a:defRPr sz="1500" i="0">
+                <a:solidFill>
+                  <a:srgbClr val="333333"/>
+                </a:solidFill>
+                <a:latin typeface="Calibri"/>
+              </a:defRPr>
+            </a:pPr>
+            <a:r>
+              <a:rPr sz="1300">
+                <a:solidFill>
+                  <a:srgbClr val="7C3AED"/>
                 </a:solidFill>
                 <a:latin typeface="Calibri"/>
               </a:rPr>
               <a:t>■  </a:t>
             </a:r>
             <a:r>
-              <a:rPr sz="1600">
+              <a:rPr sz="1500">
+                <a:solidFill>
+                  <a:srgbClr val="333333"/>
+                </a:solidFill>
+                <a:latin typeface="Calibri"/>
+              </a:rPr>
+              <a:t>Intraplate Volcanics F1 drops 0.956 -&gt; 0.848 on basalt+phenocryst slice: the overall</a:t>
+            </a:r>
+          </a:p>
+          <a:p>
+            <a:pPr>
+              <a:spcBef>
+                <a:spcPts val="100"/>
+              </a:spcBef>
+              <a:spcAft>
+                <a:spcPts val="300"/>
+              </a:spcAft>
+              <a:defRPr sz="1400" i="1">
+                <a:solidFill>
+                  <a:srgbClr val="666666"/>
+                </a:solidFill>
+                <a:latin typeface="Calibri"/>
+              </a:defRPr>
+            </a:pPr>
+            <a:r>
+              <a:t>  Intraplate class is dominated by mantle xenoliths, not phenocryst basalts</a:t>
+            </a:r>
+          </a:p>
+          <a:p>
+            <a:pPr>
+              <a:spcAft>
+                <a:spcPts val="100"/>
+              </a:spcAft>
+            </a:pPr>
+          </a:p>
+          <a:p>
+            <a:pPr>
+              <a:spcBef>
+                <a:spcPts val="100"/>
+              </a:spcBef>
+              <a:spcAft>
+                <a:spcPts val="500"/>
+              </a:spcAft>
+              <a:defRPr sz="1500" i="0">
+                <a:solidFill>
+                  <a:srgbClr val="333333"/>
+                </a:solidFill>
+                <a:latin typeface="Calibri"/>
+              </a:defRPr>
+            </a:pPr>
+            <a:r>
+              <a:rPr sz="1300">
+                <a:solidFill>
+                  <a:srgbClr val="1A2744"/>
+                </a:solidFill>
+                <a:latin typeface="Calibri"/>
+              </a:rPr>
+              <a:t>■  </a:t>
+            </a:r>
+            <a:r>
+              <a:rPr sz="1500">
                 <a:solidFill>
                   <a:srgbClr val="333333"/>
                 </a:solidFill>
@@ -5610,19 +6914,19 @@
           <a:p>
             <a:pPr>
               <a:spcAft>
-                <a:spcPts val="200"/>
+                <a:spcPts val="100"/>
               </a:spcAft>
             </a:pPr>
           </a:p>
           <a:p>
             <a:pPr>
               <a:spcBef>
-                <a:spcPts val="200"/>
+                <a:spcPts val="100"/>
               </a:spcBef>
               <a:spcAft>
-                <a:spcPts val="600"/>
+                <a:spcPts val="500"/>
               </a:spcAft>
-              <a:defRPr sz="1600">
+              <a:defRPr sz="1500" i="0">
                 <a:solidFill>
                   <a:srgbClr val="333333"/>
                 </a:solidFill>
@@ -5630,7 +6934,7 @@
               </a:defRPr>
             </a:pPr>
             <a:r>
-              <a:rPr sz="1400">
+              <a:rPr sz="1300">
                 <a:solidFill>
                   <a:srgbClr val="2563EB"/>
                 </a:solidFill>
@@ -5639,54 +6943,13 @@
               <a:t>■  </a:t>
             </a:r>
             <a:r>
-              <a:rPr sz="1600">
+              <a:rPr sz="1500">
                 <a:solidFill>
                   <a:srgbClr val="333333"/>
                 </a:solidFill>
                 <a:latin typeface="Calibri"/>
               </a:rPr>
-              <a:t>Native NaN handling outperforms median imputation (+0.04 F1-macro)</a:t>
-            </a:r>
-          </a:p>
-          <a:p>
-            <a:pPr>
-              <a:spcAft>
-                <a:spcPts val="200"/>
-              </a:spcAft>
-            </a:pPr>
-          </a:p>
-          <a:p>
-            <a:pPr>
-              <a:spcBef>
-                <a:spcPts val="200"/>
-              </a:spcBef>
-              <a:spcAft>
-                <a:spcPts val="600"/>
-              </a:spcAft>
-              <a:defRPr sz="1600">
-                <a:solidFill>
-                  <a:srgbClr val="333333"/>
-                </a:solidFill>
-                <a:latin typeface="Calibri"/>
-              </a:defRPr>
-            </a:pPr>
-            <a:r>
-              <a:rPr sz="1400">
-                <a:solidFill>
-                  <a:srgbClr val="7C3AED"/>
-                </a:solidFill>
-                <a:latin typeface="Calibri"/>
-              </a:rPr>
-              <a:t>■  </a:t>
-            </a:r>
-            <a:r>
-              <a:rPr sz="1600">
-                <a:solidFill>
-                  <a:srgbClr val="333333"/>
-                </a:solidFill>
-                <a:latin typeface="Calibri"/>
-              </a:rPr>
-              <a:t>Complete trace element data (M2_T0): F1 = 0.972, but only 1,195 samples available</a:t>
+              <a:t>Native NaN handling outperforms median imputation (+0.18 F1-macro vs 0.732 baseline)</a:t>
             </a:r>
           </a:p>
         </p:txBody>
@@ -5699,7 +6962,7 @@
 </p:sld>
 </file>
 
-<file path=ppt/slides/slide16.xml><?xml version="1.0" encoding="utf-8"?>
+<file path=ppt/slides/slide17.xml><?xml version="1.0" encoding="utf-8"?>
 <p:sld xmlns:a="http://schemas.openxmlformats.org/drawingml/2006/main" xmlns:p="http://schemas.openxmlformats.org/presentationml/2006/main" xmlns:r="http://schemas.openxmlformats.org/officeDocument/2006/relationships">
   <p:cSld>
     <p:spTree>

--- a/CPX_Tectonic_Classification.pptx
+++ b/CPX_Tectonic_Classification.pptx
@@ -22,6 +22,8 @@
     <p:sldId id="270" r:id="rId21"/>
     <p:sldId id="271" r:id="rId22"/>
     <p:sldId id="272" r:id="rId23"/>
+    <p:sldId id="273" r:id="rId24"/>
+    <p:sldId id="274" r:id="rId25"/>
   </p:sldIdLst>
   <p:sldSz cx="12191695" cy="6858000" type="screen4x3"/>
   <p:notesSz cx="6858000" cy="9144000"/>
@@ -3214,7 +3216,7 @@
               </a:defRPr>
             </a:pPr>
             <a:r>
-              <a:t>Machine Learning Analysis of 211,773 Geochemical Analyses</a:t>
+              <a:t>43-Feature Model: Machine Learning Analysis of 211,773 Geochemical Analyses</a:t>
             </a:r>
           </a:p>
         </p:txBody>
@@ -3322,7 +3324,7 @@
               </a:defRPr>
             </a:pPr>
             <a:r>
-              <a:t>XGBoost  |  SHAP Interpretation  |  5-Fold Stratified CV  |  50 Geochemical Features</a:t>
+              <a:t>XGBoost  |  SHAP Interpretation  |  90/10 Stratified Split  |  43 Geochemical Features (Major + Trace)</a:t>
             </a:r>
           </a:p>
         </p:txBody>
@@ -3533,7 +3535,7 @@
               </a:defRPr>
             </a:pPr>
             <a:r>
-              <a:t>5-Fold Cross-Validation Confusion Matrix</a:t>
+              <a:t>43-Feature Model, 90/10 Split: Test Set Confusion Matrix</a:t>
             </a:r>
           </a:p>
         </p:txBody>
@@ -3636,7 +3638,7 @@
               </a:defRPr>
             </a:pPr>
             <a:r>
-              <a:t>Best model: F1-macro = 0.909 +/- 0.005. Archean Craton (F1=0.758) and Oceanic Plateau (F1=0.816) are most challenging classes.</a:t>
+              <a:t>43-feature model test set: F1-macro = 0.914. Diagonal dominance is strong across all 11 classes.</a:t>
             </a:r>
           </a:p>
         </p:txBody>
@@ -4129,7 +4131,7 @@
                         </a:defRPr>
                       </a:pPr>
                       <a:r>
-                        <a:t>0.955</a:t>
+                        <a:t>0.997</a:t>
                       </a:r>
                     </a:p>
                   </a:txBody>
@@ -4169,15 +4171,15 @@
                     <a:lstStyle/>
                     <a:p>
                       <a:pPr algn="ctr">
-                        <a:defRPr sz="1000">
-                          <a:solidFill>
-                            <a:srgbClr val="333333"/>
+                        <a:defRPr sz="1000" b="1">
+                          <a:solidFill>
+                            <a:srgbClr val="059669"/>
                           </a:solidFill>
                           <a:latin typeface="Consolas"/>
                         </a:defRPr>
                       </a:pPr>
                       <a:r>
-                        <a:t>+0.006</a:t>
+                        <a:t>-0.036</a:t>
                       </a:r>
                     </a:p>
                   </a:txBody>
@@ -4243,7 +4245,7 @@
                         </a:defRPr>
                       </a:pPr>
                       <a:r>
-                        <a:t>0.904</a:t>
+                        <a:t>0.986</a:t>
                       </a:r>
                     </a:p>
                   </a:txBody>
@@ -4283,7 +4285,7 @@
                         </a:defRPr>
                       </a:pPr>
                       <a:r>
-                        <a:t>-0.031</a:t>
+                        <a:t>-0.113</a:t>
                       </a:r>
                     </a:p>
                   </a:txBody>
@@ -4353,7 +4355,7 @@
                         </a:defRPr>
                       </a:pPr>
                       <a:r>
-                        <a:t>0.978</a:t>
+                        <a:t>1.000</a:t>
                       </a:r>
                     </a:p>
                   </a:txBody>
@@ -4393,15 +4395,15 @@
                     <a:lstStyle/>
                     <a:p>
                       <a:pPr algn="ctr">
-                        <a:defRPr sz="1000">
-                          <a:solidFill>
-                            <a:srgbClr val="333333"/>
+                        <a:defRPr sz="1000" b="1">
+                          <a:solidFill>
+                            <a:srgbClr val="059669"/>
                           </a:solidFill>
                           <a:latin typeface="Consolas"/>
                         </a:defRPr>
                       </a:pPr>
                       <a:r>
-                        <a:t>-0.006</a:t>
+                        <a:t>-0.028</a:t>
                       </a:r>
                     </a:p>
                   </a:txBody>
@@ -4467,7 +4469,7 @@
                         </a:defRPr>
                       </a:pPr>
                       <a:r>
-                        <a:t>0.848</a:t>
+                        <a:t>0.983</a:t>
                       </a:r>
                     </a:p>
                   </a:txBody>
@@ -4501,13 +4503,13 @@
                       <a:pPr algn="ctr">
                         <a:defRPr sz="1000" b="1">
                           <a:solidFill>
-                            <a:srgbClr val="D97706"/>
+                            <a:srgbClr val="059669"/>
                           </a:solidFill>
                           <a:latin typeface="Consolas"/>
                         </a:defRPr>
                       </a:pPr>
                       <a:r>
-                        <a:t>+0.056</a:t>
+                        <a:t>-0.079</a:t>
                       </a:r>
                     </a:p>
                   </a:txBody>
@@ -4577,7 +4579,7 @@
                         </a:defRPr>
                       </a:pPr>
                       <a:r>
-                        <a:t>0.955</a:t>
+                        <a:t>1.000</a:t>
                       </a:r>
                     </a:p>
                   </a:txBody>
@@ -4617,15 +4619,15 @@
                     <a:lstStyle/>
                     <a:p>
                       <a:pPr algn="ctr">
-                        <a:defRPr sz="1000">
-                          <a:solidFill>
-                            <a:srgbClr val="333333"/>
+                        <a:defRPr sz="1000" b="1">
+                          <a:solidFill>
+                            <a:srgbClr val="059669"/>
                           </a:solidFill>
                           <a:latin typeface="Consolas"/>
                         </a:defRPr>
                       </a:pPr>
                       <a:r>
-                        <a:t>+0.023</a:t>
+                        <a:t>-0.022</a:t>
                       </a:r>
                     </a:p>
                   </a:txBody>
@@ -4691,7 +4693,7 @@
                         </a:defRPr>
                       </a:pPr>
                       <a:r>
-                        <a:t>0.946</a:t>
+                        <a:t>0.987</a:t>
                       </a:r>
                     </a:p>
                   </a:txBody>
@@ -4731,7 +4733,7 @@
                         </a:defRPr>
                       </a:pPr>
                       <a:r>
-                        <a:t>+0.041</a:t>
+                        <a:t>+0.000</a:t>
                       </a:r>
                     </a:p>
                   </a:txBody>
@@ -4801,7 +4803,7 @@
                         </a:defRPr>
                       </a:pPr>
                       <a:r>
-                        <a:t>0.970</a:t>
+                        <a:t>1.000</a:t>
                       </a:r>
                     </a:p>
                   </a:txBody>
@@ -4849,7 +4851,7 @@
                         </a:defRPr>
                       </a:pPr>
                       <a:r>
-                        <a:t>+0.030</a:t>
+                        <a:t>+0.000</a:t>
                       </a:r>
                     </a:p>
                   </a:txBody>
@@ -4923,7 +4925,7 @@
                         </a:defRPr>
                       </a:pPr>
                       <a:r>
-                        <a:t>0.667</a:t>
+                        <a:t>0.889</a:t>
                       </a:r>
                     </a:p>
                   </a:txBody>
@@ -4971,7 +4973,7 @@
                         </a:defRPr>
                       </a:pPr>
                       <a:r>
-                        <a:t>+0.333</a:t>
+                        <a:t>+0.111</a:t>
                       </a:r>
                     </a:p>
                   </a:txBody>
@@ -5017,7 +5019,7 @@
               </a:defRPr>
             </a:pPr>
             <a:r>
-              <a:t>Slicing the best practical model's OOF to the 783 basalt+phenocryst samples gives F1m = 0.903; the +0.056 gap to the independently trained model is driven mainly by CFB (n=5) and Oceanic Plateau (n=16) overfitting. No specialised model needed.</a:t>
+              <a:t>43-feature model on the 783 basalt+phenocryst samples gives F1m = 0.980. The gap to the independently trained model is driven mainly by small-class overfitting. No specialised model needed.</a:t>
             </a:r>
           </a:p>
         </p:txBody>
@@ -5255,7 +5257,7 @@
                         </a:defRPr>
                       </a:pPr>
                       <a:r>
-                        <a:t>Archean Craton</a:t>
+                        <a:t>Oceanic Plateau</a:t>
                       </a:r>
                     </a:p>
                   </a:txBody>
@@ -5279,7 +5281,7 @@
                         </a:defRPr>
                       </a:pPr>
                       <a:r>
-                        <a:t>194</a:t>
+                        <a:t>12</a:t>
                       </a:r>
                     </a:p>
                   </a:txBody>
@@ -5303,7 +5305,7 @@
                         </a:defRPr>
                       </a:pPr>
                       <a:r>
-                        <a:t>0.758</a:t>
+                        <a:t>0.700</a:t>
                       </a:r>
                     </a:p>
                   </a:txBody>
@@ -5323,13 +5325,13 @@
                       <a:pPr algn="l">
                         <a:defRPr sz="1100" b="1">
                           <a:solidFill>
-                            <a:srgbClr val="D97706"/>
+                            <a:srgbClr val="2563EB"/>
                           </a:solidFill>
                           <a:latin typeface="Calibri"/>
                         </a:defRPr>
                       </a:pPr>
                       <a:r>
-                        <a:t>Oceanic Plateau</a:t>
+                        <a:t>Rift Volcanics</a:t>
                       </a:r>
                     </a:p>
                   </a:txBody>
@@ -5349,7 +5351,7 @@
                         </a:defRPr>
                       </a:pPr>
                       <a:r>
-                        <a:t>116</a:t>
+                        <a:t>189</a:t>
                       </a:r>
                     </a:p>
                   </a:txBody>
@@ -5369,7 +5371,7 @@
                         </a:defRPr>
                       </a:pPr>
                       <a:r>
-                        <a:t>0.816</a:t>
+                        <a:t>0.861</a:t>
                       </a:r>
                     </a:p>
                   </a:txBody>
@@ -5391,7 +5393,7 @@
                         </a:defRPr>
                       </a:pPr>
                       <a:r>
-                        <a:t>Rift Volcanics</a:t>
+                        <a:t>Archean Craton</a:t>
                       </a:r>
                     </a:p>
                   </a:txBody>
@@ -5415,7 +5417,7 @@
                         </a:defRPr>
                       </a:pPr>
                       <a:r>
-                        <a:t>1,894</a:t>
+                        <a:t>19</a:t>
                       </a:r>
                     </a:p>
                   </a:txBody>
@@ -5485,7 +5487,7 @@
                         </a:defRPr>
                       </a:pPr>
                       <a:r>
-                        <a:t>494</a:t>
+                        <a:t>49</a:t>
                       </a:r>
                     </a:p>
                   </a:txBody>
@@ -5505,7 +5507,7 @@
                         </a:defRPr>
                       </a:pPr>
                       <a:r>
-                        <a:t>0.885</a:t>
+                        <a:t>0.875</a:t>
                       </a:r>
                     </a:p>
                   </a:txBody>
@@ -5551,7 +5553,7 @@
                         </a:defRPr>
                       </a:pPr>
                       <a:r>
-                        <a:t>2,919</a:t>
+                        <a:t>292</a:t>
                       </a:r>
                     </a:p>
                   </a:txBody>
@@ -5575,7 +5577,7 @@
                         </a:defRPr>
                       </a:pPr>
                       <a:r>
-                        <a:t>0.916</a:t>
+                        <a:t>0.907</a:t>
                       </a:r>
                     </a:p>
                   </a:txBody>
@@ -5601,7 +5603,7 @@
                         </a:defRPr>
                       </a:pPr>
                       <a:r>
-                        <a:t>Ocean Island</a:t>
+                        <a:t>Complex Volcanic</a:t>
                       </a:r>
                     </a:p>
                   </a:txBody>
@@ -5621,7 +5623,7 @@
                         </a:defRPr>
                       </a:pPr>
                       <a:r>
-                        <a:t>2,278</a:t>
+                        <a:t>58</a:t>
                       </a:r>
                     </a:p>
                   </a:txBody>
@@ -5641,7 +5643,7 @@
                         </a:defRPr>
                       </a:pPr>
                       <a:r>
-                        <a:t>0.934</a:t>
+                        <a:t>0.949</a:t>
                       </a:r>
                     </a:p>
                   </a:txBody>
@@ -5657,13 +5659,13 @@
                       <a:pPr algn="l">
                         <a:defRPr sz="1100" b="1">
                           <a:solidFill>
-                            <a:srgbClr val="059669"/>
+                            <a:srgbClr val="2563EB"/>
                           </a:solidFill>
                           <a:latin typeface="Calibri"/>
                         </a:defRPr>
                       </a:pPr>
                       <a:r>
-                        <a:t>Complex Volcanic</a:t>
+                        <a:t>Ocean Island</a:t>
                       </a:r>
                     </a:p>
                   </a:txBody>
@@ -5687,7 +5689,7 @@
                         </a:defRPr>
                       </a:pPr>
                       <a:r>
-                        <a:t>576</a:t>
+                        <a:t>228</a:t>
                       </a:r>
                     </a:p>
                   </a:txBody>
@@ -5711,7 +5713,7 @@
                         </a:defRPr>
                       </a:pPr>
                       <a:r>
-                        <a:t>0.950</a:t>
+                        <a:t>0.949</a:t>
                       </a:r>
                     </a:p>
                   </a:txBody>
@@ -5757,7 +5759,7 @@
                         </a:defRPr>
                       </a:pPr>
                       <a:r>
-                        <a:t>16,988</a:t>
+                        <a:t>1,699</a:t>
                       </a:r>
                     </a:p>
                   </a:txBody>
@@ -5777,7 +5779,7 @@
                         </a:defRPr>
                       </a:pPr>
                       <a:r>
-                        <a:t>0.956</a:t>
+                        <a:t>0.959</a:t>
                       </a:r>
                     </a:p>
                   </a:txBody>
@@ -5799,7 +5801,7 @@
                         </a:defRPr>
                       </a:pPr>
                       <a:r>
-                        <a:t>Submarine Ridge</a:t>
+                        <a:t>Convergent Margin</a:t>
                       </a:r>
                     </a:p>
                   </a:txBody>
@@ -5823,7 +5825,7 @@
                         </a:defRPr>
                       </a:pPr>
                       <a:r>
-                        <a:t>35</a:t>
+                        <a:t>1,408</a:t>
                       </a:r>
                     </a:p>
                   </a:txBody>
@@ -5847,7 +5849,7 @@
                         </a:defRPr>
                       </a:pPr>
                       <a:r>
-                        <a:t>0.957</a:t>
+                        <a:t>0.977</a:t>
                       </a:r>
                     </a:p>
                   </a:txBody>
@@ -5873,7 +5875,7 @@
                         </a:defRPr>
                       </a:pPr>
                       <a:r>
-                        <a:t>Convergent Margin</a:t>
+                        <a:t>Ocean-Basin Flood</a:t>
                       </a:r>
                     </a:p>
                   </a:txBody>
@@ -5893,7 +5895,7 @@
                         </a:defRPr>
                       </a:pPr>
                       <a:r>
-                        <a:t>14,078</a:t>
+                        <a:t>6</a:t>
                       </a:r>
                     </a:p>
                   </a:txBody>
@@ -5913,7 +5915,7 @@
                         </a:defRPr>
                       </a:pPr>
                       <a:r>
-                        <a:t>0.976</a:t>
+                        <a:t>1.000</a:t>
                       </a:r>
                     </a:p>
                   </a:txBody>
@@ -5935,7 +5937,7 @@
                         </a:defRPr>
                       </a:pPr>
                       <a:r>
-                        <a:t>Ocean-Basin Flood</a:t>
+                        <a:t>Submarine Ridge</a:t>
                       </a:r>
                     </a:p>
                   </a:txBody>
@@ -5959,7 +5961,7 @@
                         </a:defRPr>
                       </a:pPr>
                       <a:r>
-                        <a:t>59</a:t>
+                        <a:t>4</a:t>
                       </a:r>
                     </a:p>
                   </a:txBody>
@@ -5983,7 +5985,7 @@
                         </a:defRPr>
                       </a:pPr>
                       <a:r>
-                        <a:t>0.983</a:t>
+                        <a:t>1.000</a:t>
                       </a:r>
                     </a:p>
                   </a:txBody>
@@ -6083,7 +6085,7 @@
               </a:defRPr>
             </a:pPr>
             <a:r>
-              <a:t>Data Availability -- Temporal Metadata Gap</a:t>
+              <a:t>Spatial Distribution of 39,631 Predictions</a:t>
             </a:r>
           </a:p>
         </p:txBody>
@@ -6131,6 +6133,163 @@
           </a:p>
         </p:txBody>
       </p:sp>
+      <p:pic>
+        <p:nvPicPr>
+          <p:cNvPr id="4" name="Picture 3" descr="spatial_distribution.png"/>
+          <p:cNvPicPr>
+            <a:picLocks noChangeAspect="1"/>
+          </p:cNvPicPr>
+          <p:nvPr/>
+        </p:nvPicPr>
+        <p:blipFill>
+          <a:blip r:embed="rId2"/>
+          <a:stretch>
+            <a:fillRect/>
+          </a:stretch>
+        </p:blipFill>
+        <p:spPr>
+          <a:xfrm>
+            <a:off x="274320" y="1005840"/>
+            <a:ext cx="11612880" cy="5303520"/>
+          </a:xfrm>
+          <a:prstGeom prst="rect">
+            <a:avLst/>
+          </a:prstGeom>
+        </p:spPr>
+      </p:pic>
+      <p:sp>
+        <p:nvSpPr>
+          <p:cNvPr id="5" name="TextBox 4"/>
+          <p:cNvSpPr txBox="1"/>
+          <p:nvPr/>
+        </p:nvSpPr>
+        <p:spPr>
+          <a:xfrm>
+            <a:off x="548640" y="6217920"/>
+            <a:ext cx="10972800" cy="457200"/>
+          </a:xfrm>
+          <a:prstGeom prst="rect">
+            <a:avLst/>
+          </a:prstGeom>
+          <a:noFill/>
+        </p:spPr>
+        <p:txBody>
+          <a:bodyPr wrap="square">
+            <a:spAutoFit/>
+          </a:bodyPr>
+          <a:lstStyle/>
+          <a:p>
+            <a:pPr>
+              <a:defRPr sz="1200" i="1">
+                <a:solidFill>
+                  <a:srgbClr val="666666"/>
+                </a:solidFill>
+                <a:latin typeface="Calibri"/>
+              </a:defRPr>
+            </a:pPr>
+            <a:r>
+              <a:t>39,631 predictions: 39,316 correct (99.2%), 315 misclassified (red edges). Misclassifications are geographically dispersed, not clustered.</a:t>
+            </a:r>
+          </a:p>
+        </p:txBody>
+      </p:sp>
+    </p:spTree>
+  </p:cSld>
+  <p:clrMapOvr>
+    <a:masterClrMapping/>
+  </p:clrMapOvr>
+</p:sld>
+</file>
+
+<file path=ppt/slides/slide16.xml><?xml version="1.0" encoding="utf-8"?>
+<p:sld xmlns:a="http://schemas.openxmlformats.org/drawingml/2006/main" xmlns:p="http://schemas.openxmlformats.org/presentationml/2006/main" xmlns:r="http://schemas.openxmlformats.org/officeDocument/2006/relationships">
+  <p:cSld>
+    <p:spTree>
+      <p:nvGrpSpPr>
+        <p:cNvPr id="1" name=""/>
+        <p:cNvGrpSpPr/>
+        <p:nvPr/>
+      </p:nvGrpSpPr>
+      <p:grpSpPr/>
+      <p:sp>
+        <p:nvSpPr>
+          <p:cNvPr id="2" name="TextBox 1"/>
+          <p:cNvSpPr txBox="1"/>
+          <p:nvPr/>
+        </p:nvSpPr>
+        <p:spPr>
+          <a:xfrm>
+            <a:off x="548640" y="274320"/>
+            <a:ext cx="10972800" cy="640080"/>
+          </a:xfrm>
+          <a:prstGeom prst="rect">
+            <a:avLst/>
+          </a:prstGeom>
+          <a:noFill/>
+        </p:spPr>
+        <p:txBody>
+          <a:bodyPr wrap="square">
+            <a:spAutoFit/>
+          </a:bodyPr>
+          <a:lstStyle/>
+          <a:p>
+            <a:pPr>
+              <a:defRPr sz="2800" b="1">
+                <a:solidFill>
+                  <a:srgbClr val="1A2744"/>
+                </a:solidFill>
+                <a:latin typeface="Calibri"/>
+              </a:defRPr>
+            </a:pPr>
+            <a:r>
+              <a:t>Data Availability -- Temporal Metadata Gap</a:t>
+            </a:r>
+          </a:p>
+        </p:txBody>
+      </p:sp>
+      <p:sp>
+        <p:nvSpPr>
+          <p:cNvPr id="3" name="Rectangle 2"/>
+          <p:cNvSpPr/>
+          <p:nvPr/>
+        </p:nvSpPr>
+        <p:spPr>
+          <a:xfrm>
+            <a:off x="548640" y="1005840"/>
+            <a:ext cx="10972800" cy="25400"/>
+          </a:xfrm>
+          <a:prstGeom prst="rect">
+            <a:avLst/>
+          </a:prstGeom>
+          <a:solidFill>
+            <a:srgbClr val="2563EB"/>
+          </a:solidFill>
+          <a:ln>
+            <a:noFill/>
+          </a:ln>
+        </p:spPr>
+        <p:style>
+          <a:lnRef idx="1">
+            <a:schemeClr val="accent1"/>
+          </a:lnRef>
+          <a:fillRef idx="3">
+            <a:schemeClr val="accent1"/>
+          </a:fillRef>
+          <a:effectRef idx="2">
+            <a:schemeClr val="accent1"/>
+          </a:effectRef>
+          <a:fontRef idx="minor">
+            <a:schemeClr val="lt1"/>
+          </a:fontRef>
+        </p:style>
+        <p:txBody>
+          <a:bodyPr rtlCol="0" anchor="ctr"/>
+          <a:lstStyle/>
+          <a:p>
+            <a:pPr algn="ctr"/>
+          </a:p>
+        </p:txBody>
+      </p:sp>
       <p:sp>
         <p:nvSpPr>
           <p:cNvPr id="4" name="Rectangle 3"/>
@@ -6483,7 +6642,7 @@
 </p:sld>
 </file>
 
-<file path=ppt/slides/slide16.xml><?xml version="1.0" encoding="utf-8"?>
+<file path=ppt/slides/slide17.xml><?xml version="1.0" encoding="utf-8"?>
 <p:sld xmlns:a="http://schemas.openxmlformats.org/drawingml/2006/main" xmlns:p="http://schemas.openxmlformats.org/presentationml/2006/main" xmlns:r="http://schemas.openxmlformats.org/officeDocument/2006/relationships">
   <p:cSld>
     <p:spTree>
@@ -6524,7 +6683,7 @@
               </a:defRPr>
             </a:pPr>
             <a:r>
-              <a:t>Key Conclusions</a:t>
+              <a:t>Experiment Matrix: 9 Data Subsets × 6 Feature Groups</a:t>
             </a:r>
           </a:p>
         </p:txBody>
@@ -6572,16 +6731,40 @@
           </a:p>
         </p:txBody>
       </p:sp>
-      <p:sp>
-        <p:nvSpPr>
-          <p:cNvPr id="4" name="TextBox 3"/>
+      <p:pic>
+        <p:nvPicPr>
+          <p:cNvPr id="4" name="Picture 3" descr="experiment_matrix.png"/>
+          <p:cNvPicPr>
+            <a:picLocks noChangeAspect="1"/>
+          </p:cNvPicPr>
+          <p:nvPr/>
+        </p:nvPicPr>
+        <p:blipFill>
+          <a:blip r:embed="rId2"/>
+          <a:stretch>
+            <a:fillRect/>
+          </a:stretch>
+        </p:blipFill>
+        <p:spPr>
+          <a:xfrm>
+            <a:off x="274320" y="1097280"/>
+            <a:ext cx="11612880" cy="5303520"/>
+          </a:xfrm>
+          <a:prstGeom prst="rect">
+            <a:avLst/>
+          </a:prstGeom>
+        </p:spPr>
+      </p:pic>
+      <p:sp>
+        <p:nvSpPr>
+          <p:cNvPr id="5" name="TextBox 4"/>
           <p:cNvSpPr txBox="1"/>
           <p:nvPr/>
         </p:nvSpPr>
         <p:spPr>
           <a:xfrm>
-            <a:off x="731520" y="1280160"/>
-            <a:ext cx="10789920" cy="5303520"/>
+            <a:off x="548640" y="6217920"/>
+            <a:ext cx="10972800" cy="457200"/>
           </a:xfrm>
           <a:prstGeom prst="rect">
             <a:avLst/>
@@ -6595,361 +6778,15 @@
           <a:lstStyle/>
           <a:p>
             <a:pPr>
-              <a:spcBef>
-                <a:spcPts val="100"/>
-              </a:spcBef>
-              <a:spcAft>
-                <a:spcPts val="500"/>
-              </a:spcAft>
-              <a:defRPr sz="1500" i="0">
-                <a:solidFill>
-                  <a:srgbClr val="333333"/>
+              <a:defRPr sz="1200" i="1">
+                <a:solidFill>
+                  <a:srgbClr val="666666"/>
                 </a:solidFill>
                 <a:latin typeface="Calibri"/>
               </a:defRPr>
             </a:pPr>
             <a:r>
-              <a:rPr sz="1300">
-                <a:solidFill>
-                  <a:srgbClr val="059669"/>
-                </a:solidFill>
-                <a:latin typeface="Calibri"/>
-              </a:rPr>
-              <a:t>■  </a:t>
-            </a:r>
-            <a:r>
-              <a:rPr sz="1500">
-                <a:solidFill>
-                  <a:srgbClr val="333333"/>
-                </a:solidFill>
-                <a:latin typeface="Calibri"/>
-              </a:rPr>
-              <a:t>Best practical model: F1-macro = 0.909 +/- 0.005 (5-fold CV, 39,631 rows, 50 features)</a:t>
-            </a:r>
-          </a:p>
-          <a:p>
-            <a:pPr>
-              <a:spcAft>
-                <a:spcPts val="100"/>
-              </a:spcAft>
-            </a:pPr>
-          </a:p>
-          <a:p>
-            <a:pPr>
-              <a:spcBef>
-                <a:spcPts val="100"/>
-              </a:spcBef>
-              <a:spcAft>
-                <a:spcPts val="500"/>
-              </a:spcAft>
-              <a:defRPr sz="1500" i="0">
-                <a:solidFill>
-                  <a:srgbClr val="333333"/>
-                </a:solidFill>
-                <a:latin typeface="Calibri"/>
-              </a:defRPr>
-            </a:pPr>
-            <a:r>
-              <a:rPr sz="1300">
-                <a:solidFill>
-                  <a:srgbClr val="059669"/>
-                </a:solidFill>
-                <a:latin typeface="Calibri"/>
-              </a:rPr>
-              <a:t>■  </a:t>
-            </a:r>
-            <a:r>
-              <a:rPr sz="1500">
-                <a:solidFill>
-                  <a:srgbClr val="333333"/>
-                </a:solidFill>
-                <a:latin typeface="Calibri"/>
-              </a:rPr>
-              <a:t>Trace elements are decisive: +0.477 F1-macro contribution when added to major oxides</a:t>
-            </a:r>
-          </a:p>
-          <a:p>
-            <a:pPr>
-              <a:spcAft>
-                <a:spcPts val="100"/>
-              </a:spcAft>
-            </a:pPr>
-          </a:p>
-          <a:p>
-            <a:pPr>
-              <a:spcBef>
-                <a:spcPts val="100"/>
-              </a:spcBef>
-              <a:spcAft>
-                <a:spcPts val="500"/>
-              </a:spcAft>
-              <a:defRPr sz="1500" i="0">
-                <a:solidFill>
-                  <a:srgbClr val="333333"/>
-                </a:solidFill>
-                <a:latin typeface="Calibri"/>
-              </a:defRPr>
-            </a:pPr>
-            <a:r>
-              <a:rPr sz="1300">
-                <a:solidFill>
-                  <a:srgbClr val="D97706"/>
-                </a:solidFill>
-                <a:latin typeface="Calibri"/>
-              </a:rPr>
-              <a:t>■  </a:t>
-            </a:r>
-            <a:r>
-              <a:rPr sz="1500">
-                <a:solidFill>
-                  <a:srgbClr val="333333"/>
-                </a:solidFill>
-                <a:latin typeface="Calibri"/>
-              </a:rPr>
-              <a:t>K2O is the strongest statistical discriminator among major oxides (CV = 1.753)</a:t>
-            </a:r>
-          </a:p>
-          <a:p>
-            <a:pPr>
-              <a:spcAft>
-                <a:spcPts val="100"/>
-              </a:spcAft>
-            </a:pPr>
-          </a:p>
-          <a:p>
-            <a:pPr>
-              <a:spcBef>
-                <a:spcPts val="100"/>
-              </a:spcBef>
-              <a:spcAft>
-                <a:spcPts val="500"/>
-              </a:spcAft>
-              <a:defRPr sz="1500" i="0">
-                <a:solidFill>
-                  <a:srgbClr val="333333"/>
-                </a:solidFill>
-                <a:latin typeface="Calibri"/>
-              </a:defRPr>
-            </a:pPr>
-            <a:r>
-              <a:rPr sz="1300">
-                <a:solidFill>
-                  <a:srgbClr val="2563EB"/>
-                </a:solidFill>
-                <a:latin typeface="Calibri"/>
-              </a:rPr>
-              <a:t>■  </a:t>
-            </a:r>
-            <a:r>
-              <a:rPr sz="1500">
-                <a:solidFill>
-                  <a:srgbClr val="333333"/>
-                </a:solidFill>
-                <a:latin typeface="Calibri"/>
-              </a:rPr>
-              <a:t>SHAP analysis: Sr, Sm, Zr, Sc have the highest individual prediction impact</a:t>
-            </a:r>
-          </a:p>
-          <a:p>
-            <a:pPr>
-              <a:spcAft>
-                <a:spcPts val="100"/>
-              </a:spcAft>
-            </a:pPr>
-          </a:p>
-          <a:p>
-            <a:pPr>
-              <a:spcBef>
-                <a:spcPts val="100"/>
-              </a:spcBef>
-              <a:spcAft>
-                <a:spcPts val="500"/>
-              </a:spcAft>
-              <a:defRPr sz="1500" i="0">
-                <a:solidFill>
-                  <a:srgbClr val="333333"/>
-                </a:solidFill>
-                <a:latin typeface="Calibri"/>
-              </a:defRPr>
-            </a:pPr>
-            <a:r>
-              <a:rPr sz="1300">
-                <a:solidFill>
-                  <a:srgbClr val="1A2744"/>
-                </a:solidFill>
-                <a:latin typeface="Calibri"/>
-              </a:rPr>
-              <a:t>■  </a:t>
-            </a:r>
-            <a:r>
-              <a:rPr sz="1500">
-                <a:solidFill>
-                  <a:srgbClr val="333333"/>
-                </a:solidFill>
-                <a:latin typeface="Calibri"/>
-              </a:rPr>
-              <a:t>Stratified eval: best practical reaches F1m=0.903 on the 783 basalt+phenocryst slice</a:t>
-            </a:r>
-          </a:p>
-          <a:p>
-            <a:pPr>
-              <a:spcBef>
-                <a:spcPts val="100"/>
-              </a:spcBef>
-              <a:spcAft>
-                <a:spcPts val="300"/>
-              </a:spcAft>
-              <a:defRPr sz="1400" i="1">
-                <a:solidFill>
-                  <a:srgbClr val="666666"/>
-                </a:solidFill>
-                <a:latin typeface="Calibri"/>
-              </a:defRPr>
-            </a:pPr>
-            <a:r>
-              <a:t>  (indep. training 0.959; +0.056 gap driven by CFB n=5 and Oceanic Plateau n=16)</a:t>
-            </a:r>
-          </a:p>
-          <a:p>
-            <a:pPr>
-              <a:spcAft>
-                <a:spcPts val="100"/>
-              </a:spcAft>
-            </a:pPr>
-          </a:p>
-          <a:p>
-            <a:pPr>
-              <a:spcBef>
-                <a:spcPts val="100"/>
-              </a:spcBef>
-              <a:spcAft>
-                <a:spcPts val="500"/>
-              </a:spcAft>
-              <a:defRPr sz="1500" i="0">
-                <a:solidFill>
-                  <a:srgbClr val="333333"/>
-                </a:solidFill>
-                <a:latin typeface="Calibri"/>
-              </a:defRPr>
-            </a:pPr>
-            <a:r>
-              <a:rPr sz="1300">
-                <a:solidFill>
-                  <a:srgbClr val="7C3AED"/>
-                </a:solidFill>
-                <a:latin typeface="Calibri"/>
-              </a:rPr>
-              <a:t>■  </a:t>
-            </a:r>
-            <a:r>
-              <a:rPr sz="1500">
-                <a:solidFill>
-                  <a:srgbClr val="333333"/>
-                </a:solidFill>
-                <a:latin typeface="Calibri"/>
-              </a:rPr>
-              <a:t>Intraplate Volcanics F1 drops 0.956 -&gt; 0.848 on basalt+phenocryst slice: the overall</a:t>
-            </a:r>
-          </a:p>
-          <a:p>
-            <a:pPr>
-              <a:spcBef>
-                <a:spcPts val="100"/>
-              </a:spcBef>
-              <a:spcAft>
-                <a:spcPts val="300"/>
-              </a:spcAft>
-              <a:defRPr sz="1400" i="1">
-                <a:solidFill>
-                  <a:srgbClr val="666666"/>
-                </a:solidFill>
-                <a:latin typeface="Calibri"/>
-              </a:defRPr>
-            </a:pPr>
-            <a:r>
-              <a:t>  Intraplate class is dominated by mantle xenoliths, not phenocryst basalts</a:t>
-            </a:r>
-          </a:p>
-          <a:p>
-            <a:pPr>
-              <a:spcAft>
-                <a:spcPts val="100"/>
-              </a:spcAft>
-            </a:pPr>
-          </a:p>
-          <a:p>
-            <a:pPr>
-              <a:spcBef>
-                <a:spcPts val="100"/>
-              </a:spcBef>
-              <a:spcAft>
-                <a:spcPts val="500"/>
-              </a:spcAft>
-              <a:defRPr sz="1500" i="0">
-                <a:solidFill>
-                  <a:srgbClr val="333333"/>
-                </a:solidFill>
-                <a:latin typeface="Calibri"/>
-              </a:defRPr>
-            </a:pPr>
-            <a:r>
-              <a:rPr sz="1300">
-                <a:solidFill>
-                  <a:srgbClr val="1A2744"/>
-                </a:solidFill>
-                <a:latin typeface="Calibri"/>
-              </a:rPr>
-              <a:t>■  </a:t>
-            </a:r>
-            <a:r>
-              <a:rPr sz="1500">
-                <a:solidFill>
-                  <a:srgbClr val="333333"/>
-                </a:solidFill>
-                <a:latin typeface="Calibri"/>
-              </a:rPr>
-              <a:t>Class imbalance (409.8 : 1) managed via balanced sample weights, not resampling</a:t>
-            </a:r>
-          </a:p>
-          <a:p>
-            <a:pPr>
-              <a:spcAft>
-                <a:spcPts val="100"/>
-              </a:spcAft>
-            </a:pPr>
-          </a:p>
-          <a:p>
-            <a:pPr>
-              <a:spcBef>
-                <a:spcPts val="100"/>
-              </a:spcBef>
-              <a:spcAft>
-                <a:spcPts val="500"/>
-              </a:spcAft>
-              <a:defRPr sz="1500" i="0">
-                <a:solidFill>
-                  <a:srgbClr val="333333"/>
-                </a:solidFill>
-                <a:latin typeface="Calibri"/>
-              </a:defRPr>
-            </a:pPr>
-            <a:r>
-              <a:rPr sz="1300">
-                <a:solidFill>
-                  <a:srgbClr val="2563EB"/>
-                </a:solidFill>
-                <a:latin typeface="Calibri"/>
-              </a:rPr>
-              <a:t>■  </a:t>
-            </a:r>
-            <a:r>
-              <a:rPr sz="1500">
-                <a:solidFill>
-                  <a:srgbClr val="333333"/>
-                </a:solidFill>
-                <a:latin typeface="Calibri"/>
-              </a:rPr>
-              <a:t>Native NaN handling outperforms median imputation (+0.18 F1-macro vs 0.732 baseline)</a:t>
+              <a:t>54 experiments, 5-fold stratified CV each. Best practical: Has Trace × Major+Trace (43 feat) = F1m 0.902. Black border = best per row.</a:t>
             </a:r>
           </a:p>
         </p:txBody>
@@ -6962,7 +6799,7 @@
 </p:sld>
 </file>
 
-<file path=ppt/slides/slide17.xml><?xml version="1.0" encoding="utf-8"?>
+<file path=ppt/slides/slide18.xml><?xml version="1.0" encoding="utf-8"?>
 <p:sld xmlns:a="http://schemas.openxmlformats.org/drawingml/2006/main" xmlns:p="http://schemas.openxmlformats.org/presentationml/2006/main" xmlns:r="http://schemas.openxmlformats.org/officeDocument/2006/relationships">
   <p:cSld>
     <p:spTree>
@@ -7003,7 +6840,7 @@
               </a:defRPr>
             </a:pPr>
             <a:r>
-              <a:t>Methodology Summary</a:t>
+              <a:t>Key Conclusions</a:t>
             </a:r>
           </a:p>
         </p:txBody>
@@ -7059,8 +6896,8 @@
         </p:nvSpPr>
         <p:spPr>
           <a:xfrm>
-            <a:off x="548640" y="1371600"/>
-            <a:ext cx="5029200" cy="365760"/>
+            <a:off x="731520" y="1280160"/>
+            <a:ext cx="10789920" cy="5303520"/>
           </a:xfrm>
           <a:prstGeom prst="rect">
             <a:avLst/>
@@ -7068,52 +6905,19 @@
           <a:noFill/>
         </p:spPr>
         <p:txBody>
-          <a:bodyPr wrap="none">
-            <a:spAutoFit/>
-          </a:bodyPr>
-          <a:lstStyle/>
-          <a:p>
-            <a:pPr>
-              <a:defRPr sz="1800" b="1">
-                <a:solidFill>
-                  <a:srgbClr val="2563EB"/>
-                </a:solidFill>
-                <a:latin typeface="Calibri"/>
-              </a:defRPr>
-            </a:pPr>
-            <a:r>
-              <a:t>Model</a:t>
-            </a:r>
-          </a:p>
-        </p:txBody>
-      </p:sp>
-      <p:sp>
-        <p:nvSpPr>
-          <p:cNvPr id="5" name="TextBox 4"/>
-          <p:cNvSpPr txBox="1"/>
-          <p:nvPr/>
-        </p:nvSpPr>
-        <p:spPr>
-          <a:xfrm>
-            <a:off x="731520" y="1783080"/>
-            <a:ext cx="4846320" cy="1737360"/>
-          </a:xfrm>
-          <a:prstGeom prst="rect">
-            <a:avLst/>
-          </a:prstGeom>
-          <a:noFill/>
-        </p:spPr>
-        <p:txBody>
           <a:bodyPr wrap="square">
             <a:spAutoFit/>
           </a:bodyPr>
           <a:lstStyle/>
           <a:p>
             <a:pPr>
+              <a:spcBef>
+                <a:spcPts val="100"/>
+              </a:spcBef>
               <a:spcAft>
-                <a:spcPts val="400"/>
+                <a:spcPts val="500"/>
               </a:spcAft>
-              <a:defRPr sz="1400">
+              <a:defRPr sz="1500" i="0">
                 <a:solidFill>
                   <a:srgbClr val="333333"/>
                 </a:solidFill>
@@ -7121,15 +6925,40 @@
               </a:defRPr>
             </a:pPr>
             <a:r>
-              <a:t>•  XGBoost (tree_method='hist')</a:t>
+              <a:rPr sz="1300">
+                <a:solidFill>
+                  <a:srgbClr val="059669"/>
+                </a:solidFill>
+                <a:latin typeface="Calibri"/>
+              </a:rPr>
+              <a:t>■  </a:t>
+            </a:r>
+            <a:r>
+              <a:rPr sz="1500">
+                <a:solidFill>
+                  <a:srgbClr val="333333"/>
+                </a:solidFill>
+                <a:latin typeface="Calibri"/>
+              </a:rPr>
+              <a:t>43-feature model (Major+Trace, no endmembers): F1-macro = 0.914 on test set (90/10 split, 39,631 rows)</a:t>
             </a:r>
           </a:p>
           <a:p>
             <a:pPr>
               <a:spcAft>
-                <a:spcPts val="400"/>
+                <a:spcPts val="100"/>
               </a:spcAft>
-              <a:defRPr sz="1400">
+            </a:pPr>
+          </a:p>
+          <a:p>
+            <a:pPr>
+              <a:spcBef>
+                <a:spcPts val="100"/>
+              </a:spcBef>
+              <a:spcAft>
+                <a:spcPts val="500"/>
+              </a:spcAft>
+              <a:defRPr sz="1500" i="0">
                 <a:solidFill>
                   <a:srgbClr val="333333"/>
                 </a:solidFill>
@@ -7137,15 +6966,40 @@
               </a:defRPr>
             </a:pPr>
             <a:r>
-              <a:t>•  max_depth = 12, learning_rate = 0.08</a:t>
+              <a:rPr sz="1300">
+                <a:solidFill>
+                  <a:srgbClr val="059669"/>
+                </a:solidFill>
+                <a:latin typeface="Calibri"/>
+              </a:rPr>
+              <a:t>■  </a:t>
+            </a:r>
+            <a:r>
+              <a:rPr sz="1500">
+                <a:solidFill>
+                  <a:srgbClr val="333333"/>
+                </a:solidFill>
+                <a:latin typeface="Calibri"/>
+              </a:rPr>
+              <a:t>Endmembers contribute &lt;0.006 F1; dropped for parsimony (43 vs 50 features)</a:t>
             </a:r>
           </a:p>
           <a:p>
             <a:pPr>
               <a:spcAft>
-                <a:spcPts val="400"/>
+                <a:spcPts val="100"/>
               </a:spcAft>
-              <a:defRPr sz="1400">
+            </a:pPr>
+          </a:p>
+          <a:p>
+            <a:pPr>
+              <a:spcBef>
+                <a:spcPts val="100"/>
+              </a:spcBef>
+              <a:spcAft>
+                <a:spcPts val="500"/>
+              </a:spcAft>
+              <a:defRPr sz="1500" i="0">
                 <a:solidFill>
                   <a:srgbClr val="333333"/>
                 </a:solidFill>
@@ -7153,15 +7007,40 @@
               </a:defRPr>
             </a:pPr>
             <a:r>
-              <a:t>•  n_estimators = 400</a:t>
+              <a:rPr sz="1300">
+                <a:solidFill>
+                  <a:srgbClr val="D97706"/>
+                </a:solidFill>
+                <a:latin typeface="Calibri"/>
+              </a:rPr>
+              <a:t>■  </a:t>
+            </a:r>
+            <a:r>
+              <a:rPr sz="1500">
+                <a:solidFill>
+                  <a:srgbClr val="333333"/>
+                </a:solidFill>
+                <a:latin typeface="Calibri"/>
+              </a:rPr>
+              <a:t>Trace elements are decisive: +0.475 F1-macro contribution when added to major oxides</a:t>
             </a:r>
           </a:p>
           <a:p>
             <a:pPr>
               <a:spcAft>
-                <a:spcPts val="400"/>
+                <a:spcPts val="100"/>
               </a:spcAft>
-              <a:defRPr sz="1400">
+            </a:pPr>
+          </a:p>
+          <a:p>
+            <a:pPr>
+              <a:spcBef>
+                <a:spcPts val="100"/>
+              </a:spcBef>
+              <a:spcAft>
+                <a:spcPts val="500"/>
+              </a:spcAft>
+              <a:defRPr sz="1500" i="0">
                 <a:solidFill>
                   <a:srgbClr val="333333"/>
                 </a:solidFill>
@@ -7169,15 +7048,40 @@
               </a:defRPr>
             </a:pPr>
             <a:r>
-              <a:t>•  Native NaN handling (no imputation)</a:t>
+              <a:rPr sz="1300">
+                <a:solidFill>
+                  <a:srgbClr val="2563EB"/>
+                </a:solidFill>
+                <a:latin typeface="Calibri"/>
+              </a:rPr>
+              <a:t>■  </a:t>
+            </a:r>
+            <a:r>
+              <a:rPr sz="1500">
+                <a:solidFill>
+                  <a:srgbClr val="333333"/>
+                </a:solidFill>
+                <a:latin typeface="Calibri"/>
+              </a:rPr>
+              <a:t>K2O is the strongest statistical discriminator among major oxides (CV = 1.753)</a:t>
             </a:r>
           </a:p>
           <a:p>
             <a:pPr>
               <a:spcAft>
-                <a:spcPts val="400"/>
+                <a:spcPts val="100"/>
               </a:spcAft>
-              <a:defRPr sz="1400">
+            </a:pPr>
+          </a:p>
+          <a:p>
+            <a:pPr>
+              <a:spcBef>
+                <a:spcPts val="100"/>
+              </a:spcBef>
+              <a:spcAft>
+                <a:spcPts val="500"/>
+              </a:spcAft>
+              <a:defRPr sz="1500" i="0">
                 <a:solidFill>
                   <a:srgbClr val="333333"/>
                 </a:solidFill>
@@ -7185,74 +7089,81 @@
               </a:defRPr>
             </a:pPr>
             <a:r>
-              <a:t>•  Balanced sample weights for class imbalance</a:t>
-            </a:r>
-          </a:p>
-        </p:txBody>
-      </p:sp>
-      <p:sp>
-        <p:nvSpPr>
-          <p:cNvPr id="6" name="TextBox 5"/>
-          <p:cNvSpPr txBox="1"/>
-          <p:nvPr/>
-        </p:nvSpPr>
-        <p:spPr>
-          <a:xfrm>
-            <a:off x="548640" y="3794759"/>
-            <a:ext cx="5029200" cy="365760"/>
-          </a:xfrm>
-          <a:prstGeom prst="rect">
-            <a:avLst/>
-          </a:prstGeom>
-          <a:noFill/>
-        </p:spPr>
-        <p:txBody>
-          <a:bodyPr wrap="none">
-            <a:spAutoFit/>
-          </a:bodyPr>
-          <a:lstStyle/>
+              <a:rPr sz="1300">
+                <a:solidFill>
+                  <a:srgbClr val="1A2744"/>
+                </a:solidFill>
+                <a:latin typeface="Calibri"/>
+              </a:rPr>
+              <a:t>■  </a:t>
+            </a:r>
+            <a:r>
+              <a:rPr sz="1500">
+                <a:solidFill>
+                  <a:srgbClr val="333333"/>
+                </a:solidFill>
+                <a:latin typeface="Calibri"/>
+              </a:rPr>
+              <a:t>SHAP analysis: Sr, Sm, Zr, Sc have the highest individual prediction impact</a:t>
+            </a:r>
+          </a:p>
           <a:p>
             <a:pPr>
-              <a:defRPr sz="1800" b="1">
-                <a:solidFill>
-                  <a:srgbClr val="2563EB"/>
+              <a:spcAft>
+                <a:spcPts val="100"/>
+              </a:spcAft>
+            </a:pPr>
+          </a:p>
+          <a:p>
+            <a:pPr>
+              <a:spcBef>
+                <a:spcPts val="100"/>
+              </a:spcBef>
+              <a:spcAft>
+                <a:spcPts val="500"/>
+              </a:spcAft>
+              <a:defRPr sz="1500" i="0">
+                <a:solidFill>
+                  <a:srgbClr val="333333"/>
                 </a:solidFill>
                 <a:latin typeface="Calibri"/>
               </a:defRPr>
             </a:pPr>
             <a:r>
-              <a:t>Validation</a:t>
-            </a:r>
-          </a:p>
-        </p:txBody>
-      </p:sp>
-      <p:sp>
-        <p:nvSpPr>
-          <p:cNvPr id="7" name="TextBox 6"/>
-          <p:cNvSpPr txBox="1"/>
-          <p:nvPr/>
-        </p:nvSpPr>
-        <p:spPr>
-          <a:xfrm>
-            <a:off x="731520" y="4206239"/>
-            <a:ext cx="4846320" cy="1042416"/>
-          </a:xfrm>
-          <a:prstGeom prst="rect">
-            <a:avLst/>
-          </a:prstGeom>
-          <a:noFill/>
-        </p:spPr>
-        <p:txBody>
-          <a:bodyPr wrap="square">
-            <a:spAutoFit/>
-          </a:bodyPr>
-          <a:lstStyle/>
+              <a:rPr sz="1300">
+                <a:solidFill>
+                  <a:srgbClr val="7C3AED"/>
+                </a:solidFill>
+                <a:latin typeface="Calibri"/>
+              </a:rPr>
+              <a:t>■  </a:t>
+            </a:r>
+            <a:r>
+              <a:rPr sz="1500">
+                <a:solidFill>
+                  <a:srgbClr val="333333"/>
+                </a:solidFill>
+                <a:latin typeface="Calibri"/>
+              </a:rPr>
+              <a:t>Intraplate Volcanics dominated by mantle xenoliths -- F1 drops on basalt+phenocryst slice</a:t>
+            </a:r>
+          </a:p>
           <a:p>
             <a:pPr>
               <a:spcAft>
-                <a:spcPts val="400"/>
+                <a:spcPts val="100"/>
               </a:spcAft>
-              <a:defRPr sz="1400">
+            </a:pPr>
+          </a:p>
+          <a:p>
+            <a:pPr>
+              <a:spcBef>
+                <a:spcPts val="100"/>
+              </a:spcBef>
+              <a:spcAft>
+                <a:spcPts val="500"/>
+              </a:spcAft>
+              <a:defRPr sz="1500" i="0">
                 <a:solidFill>
                   <a:srgbClr val="333333"/>
                 </a:solidFill>
@@ -7260,15 +7171,40 @@
               </a:defRPr>
             </a:pPr>
             <a:r>
-              <a:t>•  5-fold stratified cross-validation</a:t>
+              <a:rPr sz="1300">
+                <a:solidFill>
+                  <a:srgbClr val="1A2744"/>
+                </a:solidFill>
+                <a:latin typeface="Calibri"/>
+              </a:rPr>
+              <a:t>■  </a:t>
+            </a:r>
+            <a:r>
+              <a:rPr sz="1500">
+                <a:solidFill>
+                  <a:srgbClr val="333333"/>
+                </a:solidFill>
+                <a:latin typeface="Calibri"/>
+              </a:rPr>
+              <a:t>54-experiment matrix (9 subsets x 6 feature groups) confirms robustness across configurations</a:t>
             </a:r>
           </a:p>
           <a:p>
             <a:pPr>
               <a:spcAft>
-                <a:spcPts val="400"/>
+                <a:spcPts val="100"/>
               </a:spcAft>
-              <a:defRPr sz="1400">
+            </a:pPr>
+          </a:p>
+          <a:p>
+            <a:pPr>
+              <a:spcBef>
+                <a:spcPts val="100"/>
+              </a:spcBef>
+              <a:spcAft>
+                <a:spcPts val="500"/>
+              </a:spcAft>
+              <a:defRPr sz="1500" i="0">
                 <a:solidFill>
                   <a:srgbClr val="333333"/>
                 </a:solidFill>
@@ -7276,289 +7212,22 @@
               </a:defRPr>
             </a:pPr>
             <a:r>
-              <a:t>•  F1-macro as primary metric (equal class weighting)</a:t>
-            </a:r>
-          </a:p>
-          <a:p>
-            <a:pPr>
-              <a:spcAft>
-                <a:spcPts val="400"/>
-              </a:spcAft>
-              <a:defRPr sz="1400">
+              <a:rPr sz="1300">
+                <a:solidFill>
+                  <a:srgbClr val="2563EB"/>
+                </a:solidFill>
+                <a:latin typeface="Calibri"/>
+              </a:rPr>
+              <a:t>■  </a:t>
+            </a:r>
+            <a:r>
+              <a:rPr sz="1500">
                 <a:solidFill>
                   <a:srgbClr val="333333"/>
                 </a:solidFill>
                 <a:latin typeface="Calibri"/>
-              </a:defRPr>
-            </a:pPr>
-            <a:r>
-              <a:t>•  17 experiments across 4 data subsets</a:t>
-            </a:r>
-          </a:p>
-        </p:txBody>
-      </p:sp>
-      <p:sp>
-        <p:nvSpPr>
-          <p:cNvPr id="8" name="TextBox 7"/>
-          <p:cNvSpPr txBox="1"/>
-          <p:nvPr/>
-        </p:nvSpPr>
-        <p:spPr>
-          <a:xfrm>
-            <a:off x="6217920" y="1371600"/>
-            <a:ext cx="5029200" cy="365760"/>
-          </a:xfrm>
-          <a:prstGeom prst="rect">
-            <a:avLst/>
-          </a:prstGeom>
-          <a:noFill/>
-        </p:spPr>
-        <p:txBody>
-          <a:bodyPr wrap="none">
-            <a:spAutoFit/>
-          </a:bodyPr>
-          <a:lstStyle/>
-          <a:p>
-            <a:pPr>
-              <a:defRPr sz="1800" b="1">
-                <a:solidFill>
-                  <a:srgbClr val="2563EB"/>
-                </a:solidFill>
-                <a:latin typeface="Calibri"/>
-              </a:defRPr>
-            </a:pPr>
-            <a:r>
-              <a:t>Features</a:t>
-            </a:r>
-          </a:p>
-        </p:txBody>
-      </p:sp>
-      <p:sp>
-        <p:nvSpPr>
-          <p:cNvPr id="9" name="TextBox 8"/>
-          <p:cNvSpPr txBox="1"/>
-          <p:nvPr/>
-        </p:nvSpPr>
-        <p:spPr>
-          <a:xfrm>
-            <a:off x="6400800" y="1783080"/>
-            <a:ext cx="4846320" cy="1389888"/>
-          </a:xfrm>
-          <a:prstGeom prst="rect">
-            <a:avLst/>
-          </a:prstGeom>
-          <a:noFill/>
-        </p:spPr>
-        <p:txBody>
-          <a:bodyPr wrap="square">
-            <a:spAutoFit/>
-          </a:bodyPr>
-          <a:lstStyle/>
-          <a:p>
-            <a:pPr>
-              <a:spcAft>
-                <a:spcPts val="400"/>
-              </a:spcAft>
-              <a:defRPr sz="1400">
-                <a:solidFill>
-                  <a:srgbClr val="333333"/>
-                </a:solidFill>
-                <a:latin typeface="Calibri"/>
-              </a:defRPr>
-            </a:pPr>
-            <a:r>
-              <a:t>•  11 major oxides (SiO2 through NiO)</a:t>
-            </a:r>
-          </a:p>
-          <a:p>
-            <a:pPr>
-              <a:spcAft>
-                <a:spcPts val="400"/>
-              </a:spcAft>
-              <a:defRPr sz="1400">
-                <a:solidFill>
-                  <a:srgbClr val="333333"/>
-                </a:solidFill>
-                <a:latin typeface="Calibri"/>
-              </a:defRPr>
-            </a:pPr>
-            <a:r>
-              <a:t>•  32 trace elements (Sc through U)</a:t>
-            </a:r>
-          </a:p>
-          <a:p>
-            <a:pPr>
-              <a:spcAft>
-                <a:spcPts val="400"/>
-              </a:spcAft>
-              <a:defRPr sz="1400">
-                <a:solidFill>
-                  <a:srgbClr val="333333"/>
-                </a:solidFill>
-                <a:latin typeface="Calibri"/>
-              </a:defRPr>
-            </a:pPr>
-            <a:r>
-              <a:t>•  7 endmember components (Wo, En, Fs, etc.)</a:t>
-            </a:r>
-          </a:p>
-          <a:p>
-            <a:pPr>
-              <a:spcAft>
-                <a:spcPts val="400"/>
-              </a:spcAft>
-              <a:defRPr sz="1400">
-                <a:solidFill>
-                  <a:srgbClr val="333333"/>
-                </a:solidFill>
-                <a:latin typeface="Calibri"/>
-              </a:defRPr>
-            </a:pPr>
-            <a:r>
-              <a:t>•  50 total features</a:t>
-            </a:r>
-          </a:p>
-        </p:txBody>
-      </p:sp>
-      <p:sp>
-        <p:nvSpPr>
-          <p:cNvPr id="10" name="TextBox 9"/>
-          <p:cNvSpPr txBox="1"/>
-          <p:nvPr/>
-        </p:nvSpPr>
-        <p:spPr>
-          <a:xfrm>
-            <a:off x="6217920" y="3447288"/>
-            <a:ext cx="5029200" cy="365760"/>
-          </a:xfrm>
-          <a:prstGeom prst="rect">
-            <a:avLst/>
-          </a:prstGeom>
-          <a:noFill/>
-        </p:spPr>
-        <p:txBody>
-          <a:bodyPr wrap="none">
-            <a:spAutoFit/>
-          </a:bodyPr>
-          <a:lstStyle/>
-          <a:p>
-            <a:pPr>
-              <a:defRPr sz="1800" b="1">
-                <a:solidFill>
-                  <a:srgbClr val="2563EB"/>
-                </a:solidFill>
-                <a:latin typeface="Calibri"/>
-              </a:defRPr>
-            </a:pPr>
-            <a:r>
-              <a:t>Interpretation</a:t>
-            </a:r>
-          </a:p>
-        </p:txBody>
-      </p:sp>
-      <p:sp>
-        <p:nvSpPr>
-          <p:cNvPr id="11" name="TextBox 10"/>
-          <p:cNvSpPr txBox="1"/>
-          <p:nvPr/>
-        </p:nvSpPr>
-        <p:spPr>
-          <a:xfrm>
-            <a:off x="6400800" y="3858768"/>
-            <a:ext cx="4846320" cy="1042416"/>
-          </a:xfrm>
-          <a:prstGeom prst="rect">
-            <a:avLst/>
-          </a:prstGeom>
-          <a:noFill/>
-        </p:spPr>
-        <p:txBody>
-          <a:bodyPr wrap="square">
-            <a:spAutoFit/>
-          </a:bodyPr>
-          <a:lstStyle/>
-          <a:p>
-            <a:pPr>
-              <a:spcAft>
-                <a:spcPts val="400"/>
-              </a:spcAft>
-              <a:defRPr sz="1400">
-                <a:solidFill>
-                  <a:srgbClr val="333333"/>
-                </a:solidFill>
-                <a:latin typeface="Calibri"/>
-              </a:defRPr>
-            </a:pPr>
-            <a:r>
-              <a:t>•  SHAP TreeExplainer (1,000 sample subset)</a:t>
-            </a:r>
-          </a:p>
-          <a:p>
-            <a:pPr>
-              <a:spcAft>
-                <a:spcPts val="400"/>
-              </a:spcAft>
-              <a:defRPr sz="1400">
-                <a:solidFill>
-                  <a:srgbClr val="333333"/>
-                </a:solidFill>
-                <a:latin typeface="Calibri"/>
-              </a:defRPr>
-            </a:pPr>
-            <a:r>
-              <a:t>•  Global and per-class feature importance</a:t>
-            </a:r>
-          </a:p>
-          <a:p>
-            <a:pPr>
-              <a:spcAft>
-                <a:spcPts val="400"/>
-              </a:spcAft>
-              <a:defRPr sz="1400">
-                <a:solidFill>
-                  <a:srgbClr val="333333"/>
-                </a:solidFill>
-                <a:latin typeface="Calibri"/>
-              </a:defRPr>
-            </a:pPr>
-            <a:r>
-              <a:t>•  Signed SHAP values for directional effects</a:t>
-            </a:r>
-          </a:p>
-        </p:txBody>
-      </p:sp>
-      <p:sp>
-        <p:nvSpPr>
-          <p:cNvPr id="12" name="TextBox 11"/>
-          <p:cNvSpPr txBox="1"/>
-          <p:nvPr/>
-        </p:nvSpPr>
-        <p:spPr>
-          <a:xfrm>
-            <a:off x="548640" y="6126480"/>
-            <a:ext cx="10972800" cy="365760"/>
-          </a:xfrm>
-          <a:prstGeom prst="rect">
-            <a:avLst/>
-          </a:prstGeom>
-          <a:noFill/>
-        </p:spPr>
-        <p:txBody>
-          <a:bodyPr wrap="square">
-            <a:spAutoFit/>
-          </a:bodyPr>
-          <a:lstStyle/>
-          <a:p>
-            <a:pPr algn="l">
-              <a:defRPr sz="1200" b="0">
-                <a:solidFill>
-                  <a:srgbClr val="666666"/>
-                </a:solidFill>
-                <a:latin typeface="Calibri"/>
-              </a:defRPr>
-            </a:pPr>
-            <a:r>
-              <a:t>Data: GEOROC / GRO.data (DOI:10.25625/SGFTFN)  |  211,773 clinopyroxene analyses  |  11 tectonic settings</a:t>
+              </a:rPr>
+              <a:t>Class imbalance (409.8 : 1) managed via balanced sample weights, not resampling</a:t>
             </a:r>
           </a:p>
         </p:txBody>
@@ -7571,7 +7240,7 @@
 </p:sld>
 </file>
 
-<file path=ppt/slides/slide2.xml><?xml version="1.0" encoding="utf-8"?>
+<file path=ppt/slides/slide19.xml><?xml version="1.0" encoding="utf-8"?>
 <p:sld xmlns:a="http://schemas.openxmlformats.org/drawingml/2006/main" xmlns:p="http://schemas.openxmlformats.org/presentationml/2006/main" xmlns:r="http://schemas.openxmlformats.org/officeDocument/2006/relationships">
   <p:cSld>
     <p:spTree>
@@ -7612,7 +7281,7 @@
               </a:defRPr>
             </a:pPr>
             <a:r>
-              <a:t>Dataset Overview</a:t>
+              <a:t>Methodology Summary</a:t>
             </a:r>
           </a:p>
         </p:txBody>
@@ -7668,6 +7337,599 @@
         </p:nvSpPr>
         <p:spPr>
           <a:xfrm>
+            <a:off x="548640" y="1371600"/>
+            <a:ext cx="5029200" cy="365760"/>
+          </a:xfrm>
+          <a:prstGeom prst="rect">
+            <a:avLst/>
+          </a:prstGeom>
+          <a:noFill/>
+        </p:spPr>
+        <p:txBody>
+          <a:bodyPr wrap="none">
+            <a:spAutoFit/>
+          </a:bodyPr>
+          <a:lstStyle/>
+          <a:p>
+            <a:pPr>
+              <a:defRPr sz="1800" b="1">
+                <a:solidFill>
+                  <a:srgbClr val="2563EB"/>
+                </a:solidFill>
+                <a:latin typeface="Calibri"/>
+              </a:defRPr>
+            </a:pPr>
+            <a:r>
+              <a:t>Model</a:t>
+            </a:r>
+          </a:p>
+        </p:txBody>
+      </p:sp>
+      <p:sp>
+        <p:nvSpPr>
+          <p:cNvPr id="5" name="TextBox 4"/>
+          <p:cNvSpPr txBox="1"/>
+          <p:nvPr/>
+        </p:nvSpPr>
+        <p:spPr>
+          <a:xfrm>
+            <a:off x="731520" y="1783080"/>
+            <a:ext cx="4846320" cy="1737360"/>
+          </a:xfrm>
+          <a:prstGeom prst="rect">
+            <a:avLst/>
+          </a:prstGeom>
+          <a:noFill/>
+        </p:spPr>
+        <p:txBody>
+          <a:bodyPr wrap="square">
+            <a:spAutoFit/>
+          </a:bodyPr>
+          <a:lstStyle/>
+          <a:p>
+            <a:pPr>
+              <a:spcAft>
+                <a:spcPts val="400"/>
+              </a:spcAft>
+              <a:defRPr sz="1400">
+                <a:solidFill>
+                  <a:srgbClr val="333333"/>
+                </a:solidFill>
+                <a:latin typeface="Calibri"/>
+              </a:defRPr>
+            </a:pPr>
+            <a:r>
+              <a:t>•  XGBoost (tree_method='hist')</a:t>
+            </a:r>
+          </a:p>
+          <a:p>
+            <a:pPr>
+              <a:spcAft>
+                <a:spcPts val="400"/>
+              </a:spcAft>
+              <a:defRPr sz="1400">
+                <a:solidFill>
+                  <a:srgbClr val="333333"/>
+                </a:solidFill>
+                <a:latin typeface="Calibri"/>
+              </a:defRPr>
+            </a:pPr>
+            <a:r>
+              <a:t>•  max_depth = 12, learning_rate = 0.08</a:t>
+            </a:r>
+          </a:p>
+          <a:p>
+            <a:pPr>
+              <a:spcAft>
+                <a:spcPts val="400"/>
+              </a:spcAft>
+              <a:defRPr sz="1400">
+                <a:solidFill>
+                  <a:srgbClr val="333333"/>
+                </a:solidFill>
+                <a:latin typeface="Calibri"/>
+              </a:defRPr>
+            </a:pPr>
+            <a:r>
+              <a:t>•  n_estimators = 400</a:t>
+            </a:r>
+          </a:p>
+          <a:p>
+            <a:pPr>
+              <a:spcAft>
+                <a:spcPts val="400"/>
+              </a:spcAft>
+              <a:defRPr sz="1400">
+                <a:solidFill>
+                  <a:srgbClr val="333333"/>
+                </a:solidFill>
+                <a:latin typeface="Calibri"/>
+              </a:defRPr>
+            </a:pPr>
+            <a:r>
+              <a:t>•  Native NaN handling (no imputation)</a:t>
+            </a:r>
+          </a:p>
+          <a:p>
+            <a:pPr>
+              <a:spcAft>
+                <a:spcPts val="400"/>
+              </a:spcAft>
+              <a:defRPr sz="1400">
+                <a:solidFill>
+                  <a:srgbClr val="333333"/>
+                </a:solidFill>
+                <a:latin typeface="Calibri"/>
+              </a:defRPr>
+            </a:pPr>
+            <a:r>
+              <a:t>•  Balanced sample weights for class imbalance</a:t>
+            </a:r>
+          </a:p>
+        </p:txBody>
+      </p:sp>
+      <p:sp>
+        <p:nvSpPr>
+          <p:cNvPr id="6" name="TextBox 5"/>
+          <p:cNvSpPr txBox="1"/>
+          <p:nvPr/>
+        </p:nvSpPr>
+        <p:spPr>
+          <a:xfrm>
+            <a:off x="548640" y="3794759"/>
+            <a:ext cx="5029200" cy="365760"/>
+          </a:xfrm>
+          <a:prstGeom prst="rect">
+            <a:avLst/>
+          </a:prstGeom>
+          <a:noFill/>
+        </p:spPr>
+        <p:txBody>
+          <a:bodyPr wrap="none">
+            <a:spAutoFit/>
+          </a:bodyPr>
+          <a:lstStyle/>
+          <a:p>
+            <a:pPr>
+              <a:defRPr sz="1800" b="1">
+                <a:solidFill>
+                  <a:srgbClr val="2563EB"/>
+                </a:solidFill>
+                <a:latin typeface="Calibri"/>
+              </a:defRPr>
+            </a:pPr>
+            <a:r>
+              <a:t>Validation</a:t>
+            </a:r>
+          </a:p>
+        </p:txBody>
+      </p:sp>
+      <p:sp>
+        <p:nvSpPr>
+          <p:cNvPr id="7" name="TextBox 6"/>
+          <p:cNvSpPr txBox="1"/>
+          <p:nvPr/>
+        </p:nvSpPr>
+        <p:spPr>
+          <a:xfrm>
+            <a:off x="731520" y="4206239"/>
+            <a:ext cx="4846320" cy="1042416"/>
+          </a:xfrm>
+          <a:prstGeom prst="rect">
+            <a:avLst/>
+          </a:prstGeom>
+          <a:noFill/>
+        </p:spPr>
+        <p:txBody>
+          <a:bodyPr wrap="square">
+            <a:spAutoFit/>
+          </a:bodyPr>
+          <a:lstStyle/>
+          <a:p>
+            <a:pPr>
+              <a:spcAft>
+                <a:spcPts val="400"/>
+              </a:spcAft>
+              <a:defRPr sz="1400">
+                <a:solidFill>
+                  <a:srgbClr val="333333"/>
+                </a:solidFill>
+                <a:latin typeface="Calibri"/>
+              </a:defRPr>
+            </a:pPr>
+            <a:r>
+              <a:t>•  90/10 stratified split (primary model)</a:t>
+            </a:r>
+          </a:p>
+          <a:p>
+            <a:pPr>
+              <a:spcAft>
+                <a:spcPts val="400"/>
+              </a:spcAft>
+              <a:defRPr sz="1400">
+                <a:solidFill>
+                  <a:srgbClr val="333333"/>
+                </a:solidFill>
+                <a:latin typeface="Calibri"/>
+              </a:defRPr>
+            </a:pPr>
+            <a:r>
+              <a:t>•  54-experiment matrix with 5-fold CV</a:t>
+            </a:r>
+          </a:p>
+          <a:p>
+            <a:pPr>
+              <a:spcAft>
+                <a:spcPts val="400"/>
+              </a:spcAft>
+              <a:defRPr sz="1400">
+                <a:solidFill>
+                  <a:srgbClr val="333333"/>
+                </a:solidFill>
+                <a:latin typeface="Calibri"/>
+              </a:defRPr>
+            </a:pPr>
+            <a:r>
+              <a:t>•  F1-macro as primary metric (equal class weighting)</a:t>
+            </a:r>
+          </a:p>
+        </p:txBody>
+      </p:sp>
+      <p:sp>
+        <p:nvSpPr>
+          <p:cNvPr id="8" name="TextBox 7"/>
+          <p:cNvSpPr txBox="1"/>
+          <p:nvPr/>
+        </p:nvSpPr>
+        <p:spPr>
+          <a:xfrm>
+            <a:off x="6217920" y="1371600"/>
+            <a:ext cx="5029200" cy="365760"/>
+          </a:xfrm>
+          <a:prstGeom prst="rect">
+            <a:avLst/>
+          </a:prstGeom>
+          <a:noFill/>
+        </p:spPr>
+        <p:txBody>
+          <a:bodyPr wrap="none">
+            <a:spAutoFit/>
+          </a:bodyPr>
+          <a:lstStyle/>
+          <a:p>
+            <a:pPr>
+              <a:defRPr sz="1800" b="1">
+                <a:solidFill>
+                  <a:srgbClr val="2563EB"/>
+                </a:solidFill>
+                <a:latin typeface="Calibri"/>
+              </a:defRPr>
+            </a:pPr>
+            <a:r>
+              <a:t>Features</a:t>
+            </a:r>
+          </a:p>
+        </p:txBody>
+      </p:sp>
+      <p:sp>
+        <p:nvSpPr>
+          <p:cNvPr id="9" name="TextBox 8"/>
+          <p:cNvSpPr txBox="1"/>
+          <p:nvPr/>
+        </p:nvSpPr>
+        <p:spPr>
+          <a:xfrm>
+            <a:off x="6400800" y="1783080"/>
+            <a:ext cx="4846320" cy="1042416"/>
+          </a:xfrm>
+          <a:prstGeom prst="rect">
+            <a:avLst/>
+          </a:prstGeom>
+          <a:noFill/>
+        </p:spPr>
+        <p:txBody>
+          <a:bodyPr wrap="square">
+            <a:spAutoFit/>
+          </a:bodyPr>
+          <a:lstStyle/>
+          <a:p>
+            <a:pPr>
+              <a:spcAft>
+                <a:spcPts val="400"/>
+              </a:spcAft>
+              <a:defRPr sz="1400">
+                <a:solidFill>
+                  <a:srgbClr val="333333"/>
+                </a:solidFill>
+                <a:latin typeface="Calibri"/>
+              </a:defRPr>
+            </a:pPr>
+            <a:r>
+              <a:t>•  11 major oxides (SiO2 through NiO)</a:t>
+            </a:r>
+          </a:p>
+          <a:p>
+            <a:pPr>
+              <a:spcAft>
+                <a:spcPts val="400"/>
+              </a:spcAft>
+              <a:defRPr sz="1400">
+                <a:solidFill>
+                  <a:srgbClr val="333333"/>
+                </a:solidFill>
+                <a:latin typeface="Calibri"/>
+              </a:defRPr>
+            </a:pPr>
+            <a:r>
+              <a:t>•  32 trace elements (Sc through U)</a:t>
+            </a:r>
+          </a:p>
+          <a:p>
+            <a:pPr>
+              <a:spcAft>
+                <a:spcPts val="400"/>
+              </a:spcAft>
+              <a:defRPr sz="1400">
+                <a:solidFill>
+                  <a:srgbClr val="333333"/>
+                </a:solidFill>
+                <a:latin typeface="Calibri"/>
+              </a:defRPr>
+            </a:pPr>
+            <a:r>
+              <a:t>•  43 total features (no endmembers)</a:t>
+            </a:r>
+          </a:p>
+        </p:txBody>
+      </p:sp>
+      <p:sp>
+        <p:nvSpPr>
+          <p:cNvPr id="10" name="TextBox 9"/>
+          <p:cNvSpPr txBox="1"/>
+          <p:nvPr/>
+        </p:nvSpPr>
+        <p:spPr>
+          <a:xfrm>
+            <a:off x="6217920" y="3099816"/>
+            <a:ext cx="5029200" cy="365760"/>
+          </a:xfrm>
+          <a:prstGeom prst="rect">
+            <a:avLst/>
+          </a:prstGeom>
+          <a:noFill/>
+        </p:spPr>
+        <p:txBody>
+          <a:bodyPr wrap="none">
+            <a:spAutoFit/>
+          </a:bodyPr>
+          <a:lstStyle/>
+          <a:p>
+            <a:pPr>
+              <a:defRPr sz="1800" b="1">
+                <a:solidFill>
+                  <a:srgbClr val="2563EB"/>
+                </a:solidFill>
+                <a:latin typeface="Calibri"/>
+              </a:defRPr>
+            </a:pPr>
+            <a:r>
+              <a:t>Interpretation</a:t>
+            </a:r>
+          </a:p>
+        </p:txBody>
+      </p:sp>
+      <p:sp>
+        <p:nvSpPr>
+          <p:cNvPr id="11" name="TextBox 10"/>
+          <p:cNvSpPr txBox="1"/>
+          <p:nvPr/>
+        </p:nvSpPr>
+        <p:spPr>
+          <a:xfrm>
+            <a:off x="6400800" y="3511296"/>
+            <a:ext cx="4846320" cy="1042416"/>
+          </a:xfrm>
+          <a:prstGeom prst="rect">
+            <a:avLst/>
+          </a:prstGeom>
+          <a:noFill/>
+        </p:spPr>
+        <p:txBody>
+          <a:bodyPr wrap="square">
+            <a:spAutoFit/>
+          </a:bodyPr>
+          <a:lstStyle/>
+          <a:p>
+            <a:pPr>
+              <a:spcAft>
+                <a:spcPts val="400"/>
+              </a:spcAft>
+              <a:defRPr sz="1400">
+                <a:solidFill>
+                  <a:srgbClr val="333333"/>
+                </a:solidFill>
+                <a:latin typeface="Calibri"/>
+              </a:defRPr>
+            </a:pPr>
+            <a:r>
+              <a:t>•  SHAP TreeExplainer (1,000 sample subset)</a:t>
+            </a:r>
+          </a:p>
+          <a:p>
+            <a:pPr>
+              <a:spcAft>
+                <a:spcPts val="400"/>
+              </a:spcAft>
+              <a:defRPr sz="1400">
+                <a:solidFill>
+                  <a:srgbClr val="333333"/>
+                </a:solidFill>
+                <a:latin typeface="Calibri"/>
+              </a:defRPr>
+            </a:pPr>
+            <a:r>
+              <a:t>•  Global and per-class feature importance</a:t>
+            </a:r>
+          </a:p>
+          <a:p>
+            <a:pPr>
+              <a:spcAft>
+                <a:spcPts val="400"/>
+              </a:spcAft>
+              <a:defRPr sz="1400">
+                <a:solidFill>
+                  <a:srgbClr val="333333"/>
+                </a:solidFill>
+                <a:latin typeface="Calibri"/>
+              </a:defRPr>
+            </a:pPr>
+            <a:r>
+              <a:t>•  Signed SHAP values for directional effects</a:t>
+            </a:r>
+          </a:p>
+        </p:txBody>
+      </p:sp>
+      <p:sp>
+        <p:nvSpPr>
+          <p:cNvPr id="12" name="TextBox 11"/>
+          <p:cNvSpPr txBox="1"/>
+          <p:nvPr/>
+        </p:nvSpPr>
+        <p:spPr>
+          <a:xfrm>
+            <a:off x="548640" y="6126480"/>
+            <a:ext cx="10972800" cy="365760"/>
+          </a:xfrm>
+          <a:prstGeom prst="rect">
+            <a:avLst/>
+          </a:prstGeom>
+          <a:noFill/>
+        </p:spPr>
+        <p:txBody>
+          <a:bodyPr wrap="square">
+            <a:spAutoFit/>
+          </a:bodyPr>
+          <a:lstStyle/>
+          <a:p>
+            <a:pPr algn="l">
+              <a:defRPr sz="1200" b="0">
+                <a:solidFill>
+                  <a:srgbClr val="666666"/>
+                </a:solidFill>
+                <a:latin typeface="Calibri"/>
+              </a:defRPr>
+            </a:pPr>
+            <a:r>
+              <a:t>Data: GEOROC / GRO.data (DOI:10.25625/SGFTFN)  |  211,773 clinopyroxene analyses  |  11 tectonic settings</a:t>
+            </a:r>
+          </a:p>
+        </p:txBody>
+      </p:sp>
+    </p:spTree>
+  </p:cSld>
+  <p:clrMapOvr>
+    <a:masterClrMapping/>
+  </p:clrMapOvr>
+</p:sld>
+</file>
+
+<file path=ppt/slides/slide2.xml><?xml version="1.0" encoding="utf-8"?>
+<p:sld xmlns:a="http://schemas.openxmlformats.org/drawingml/2006/main" xmlns:p="http://schemas.openxmlformats.org/presentationml/2006/main" xmlns:r="http://schemas.openxmlformats.org/officeDocument/2006/relationships">
+  <p:cSld>
+    <p:spTree>
+      <p:nvGrpSpPr>
+        <p:cNvPr id="1" name=""/>
+        <p:cNvGrpSpPr/>
+        <p:nvPr/>
+      </p:nvGrpSpPr>
+      <p:grpSpPr/>
+      <p:sp>
+        <p:nvSpPr>
+          <p:cNvPr id="2" name="TextBox 1"/>
+          <p:cNvSpPr txBox="1"/>
+          <p:nvPr/>
+        </p:nvSpPr>
+        <p:spPr>
+          <a:xfrm>
+            <a:off x="548640" y="274320"/>
+            <a:ext cx="10972800" cy="640080"/>
+          </a:xfrm>
+          <a:prstGeom prst="rect">
+            <a:avLst/>
+          </a:prstGeom>
+          <a:noFill/>
+        </p:spPr>
+        <p:txBody>
+          <a:bodyPr wrap="square">
+            <a:spAutoFit/>
+          </a:bodyPr>
+          <a:lstStyle/>
+          <a:p>
+            <a:pPr>
+              <a:defRPr sz="2800" b="1">
+                <a:solidFill>
+                  <a:srgbClr val="1A2744"/>
+                </a:solidFill>
+                <a:latin typeface="Calibri"/>
+              </a:defRPr>
+            </a:pPr>
+            <a:r>
+              <a:t>Dataset Overview</a:t>
+            </a:r>
+          </a:p>
+        </p:txBody>
+      </p:sp>
+      <p:sp>
+        <p:nvSpPr>
+          <p:cNvPr id="3" name="Rectangle 2"/>
+          <p:cNvSpPr/>
+          <p:nvPr/>
+        </p:nvSpPr>
+        <p:spPr>
+          <a:xfrm>
+            <a:off x="548640" y="1005840"/>
+            <a:ext cx="10972800" cy="25400"/>
+          </a:xfrm>
+          <a:prstGeom prst="rect">
+            <a:avLst/>
+          </a:prstGeom>
+          <a:solidFill>
+            <a:srgbClr val="2563EB"/>
+          </a:solidFill>
+          <a:ln>
+            <a:noFill/>
+          </a:ln>
+        </p:spPr>
+        <p:style>
+          <a:lnRef idx="1">
+            <a:schemeClr val="accent1"/>
+          </a:lnRef>
+          <a:fillRef idx="3">
+            <a:schemeClr val="accent1"/>
+          </a:fillRef>
+          <a:effectRef idx="2">
+            <a:schemeClr val="accent1"/>
+          </a:effectRef>
+          <a:fontRef idx="minor">
+            <a:schemeClr val="lt1"/>
+          </a:fontRef>
+        </p:style>
+        <p:txBody>
+          <a:bodyPr rtlCol="0" anchor="ctr"/>
+          <a:lstStyle/>
+          <a:p>
+            <a:pPr algn="ctr"/>
+          </a:p>
+        </p:txBody>
+      </p:sp>
+      <p:sp>
+        <p:nvSpPr>
+          <p:cNvPr id="4" name="TextBox 3"/>
+          <p:cNvSpPr txBox="1"/>
+          <p:nvPr/>
+        </p:nvSpPr>
+        <p:spPr>
+          <a:xfrm>
             <a:off x="548640" y="1280160"/>
             <a:ext cx="5029200" cy="4572000"/>
           </a:xfrm>
@@ -7819,7 +8081,7 @@
               </a:defRPr>
             </a:pPr>
             <a:r>
-              <a:t>Feature groups used:          50</a:t>
+              <a:t>Feature groups used:          43</a:t>
             </a:r>
           </a:p>
           <a:p>
@@ -7852,22 +8114,6 @@
             </a:pPr>
             <a:r>
               <a:t>   Trace elements: 32</a:t>
-            </a:r>
-          </a:p>
-          <a:p>
-            <a:pPr>
-              <a:spcAft>
-                <a:spcPts val="400"/>
-              </a:spcAft>
-              <a:defRPr sz="1400">
-                <a:solidFill>
-                  <a:srgbClr val="333333"/>
-                </a:solidFill>
-                <a:latin typeface="Consolas"/>
-              </a:defRPr>
-            </a:pPr>
-            <a:r>
-              <a:t>   Endmembers:     7</a:t>
             </a:r>
           </a:p>
         </p:txBody>
@@ -10985,7 +11231,7 @@
               </a:defRPr>
             </a:pPr>
             <a:r>
-              <a:t>Green row = best practical model. M2_T0 has highest F1 (0.972) but only 1,195 samples.</a:t>
+              <a:t>Green row = best practical model. M2_T0 has highest F1 (0.972) but only 1,195 samples. See Slide 17 for the full 54-experiment matrix.</a:t>
             </a:r>
           </a:p>
         </p:txBody>
@@ -11263,7 +11509,7 @@
               </a:defRPr>
             </a:pPr>
             <a:r>
-              <a:t>Removing trace elements collapses F1-macro by ~0.48 in the main subset and ~0.33 in the basalt subset. Trace elements carry the tectonic signal.</a:t>
+              <a:t>Trace elements add +0.475 F1 over major oxides alone. Endmembers add only +0.006 over Major+Trace -- dropped for parsimony (43 features).</a:t>
             </a:r>
           </a:p>
         </p:txBody>
@@ -11420,7 +11666,7 @@
               </a:defRPr>
             </a:pPr>
             <a:r>
-              <a:t>Gain emphasizes structural features (NiO, Fs endmember); SHAP highlights trace elements (Sr, Sm, Zr) as key prediction drivers.</a:t>
+              <a:t>43-feature model (Major+Trace, no endmembers). Both Gain and SHAP highlight trace elements (Sr, Sm, Zr) as key prediction drivers.</a:t>
             </a:r>
           </a:p>
         </p:txBody>

--- a/CPX_Tectonic_Classification.pptx
+++ b/CPX_Tectonic_Classification.pptx
@@ -23,7 +23,6 @@
     <p:sldId id="271" r:id="rId22"/>
     <p:sldId id="272" r:id="rId23"/>
     <p:sldId id="273" r:id="rId24"/>
-    <p:sldId id="274" r:id="rId25"/>
   </p:sldIdLst>
   <p:sldSz cx="12191695" cy="6858000" type="screen4x3"/>
   <p:notesSz cx="6858000" cy="9144000"/>
@@ -3378,7 +3377,7 @@
               </a:defRPr>
             </a:pPr>
             <a:r>
-              <a:t>SHAP Per-Class Feature Importance</a:t>
+              <a:t>Trace Elements Are the Decisive Discriminator</a:t>
             </a:r>
           </a:p>
         </p:txBody>
@@ -3428,7 +3427,7 @@
       </p:sp>
       <p:pic>
         <p:nvPicPr>
-          <p:cNvPr id="4" name="Picture 3" descr="shap_heatmap.png"/>
+          <p:cNvPr id="4" name="Picture 3" descr="trace_impact.png"/>
           <p:cNvPicPr>
             <a:picLocks noChangeAspect="1"/>
           </p:cNvPicPr>
@@ -3442,8 +3441,8 @@
         </p:blipFill>
         <p:spPr>
           <a:xfrm>
-            <a:off x="1371600" y="1097280"/>
-            <a:ext cx="9601200" cy="5212080"/>
+            <a:off x="1828800" y="1188720"/>
+            <a:ext cx="8229600" cy="4572000"/>
           </a:xfrm>
           <a:prstGeom prst="rect">
             <a:avLst/>
@@ -3481,7 +3480,7 @@
               </a:defRPr>
             </a:pPr>
             <a:r>
-              <a:t>Signed SHAP shows feature-class relationships. Sr pushes toward Convergent Margin but away from Archean Craton and Submarine Ridge.</a:t>
+              <a:t>Trace elements add +0.475 F1 over major oxides alone. Endmembers add only +0.006 over Major+Trace -- dropped for parsimony (43 features).</a:t>
             </a:r>
           </a:p>
         </p:txBody>
@@ -3652,1387 +3651,6 @@
 </file>
 
 <file path=ppt/slides/slide12.xml><?xml version="1.0" encoding="utf-8"?>
-<p:sld xmlns:a="http://schemas.openxmlformats.org/drawingml/2006/main" xmlns:p="http://schemas.openxmlformats.org/presentationml/2006/main" xmlns:r="http://schemas.openxmlformats.org/officeDocument/2006/relationships">
-  <p:cSld>
-    <p:spTree>
-      <p:nvGrpSpPr>
-        <p:cNvPr id="1" name=""/>
-        <p:cNvGrpSpPr/>
-        <p:nvPr/>
-      </p:nvGrpSpPr>
-      <p:grpSpPr/>
-      <p:sp>
-        <p:nvSpPr>
-          <p:cNvPr id="2" name="TextBox 1"/>
-          <p:cNvSpPr txBox="1"/>
-          <p:nvPr/>
-        </p:nvSpPr>
-        <p:spPr>
-          <a:xfrm>
-            <a:off x="548640" y="274320"/>
-            <a:ext cx="10972800" cy="640080"/>
-          </a:xfrm>
-          <a:prstGeom prst="rect">
-            <a:avLst/>
-          </a:prstGeom>
-          <a:noFill/>
-        </p:spPr>
-        <p:txBody>
-          <a:bodyPr wrap="square">
-            <a:spAutoFit/>
-          </a:bodyPr>
-          <a:lstStyle/>
-          <a:p>
-            <a:pPr>
-              <a:defRPr sz="2800" b="1">
-                <a:solidFill>
-                  <a:srgbClr val="1A2744"/>
-                </a:solidFill>
-                <a:latin typeface="Calibri"/>
-              </a:defRPr>
-            </a:pPr>
-            <a:r>
-              <a:t>Basalt Subset Classification</a:t>
-            </a:r>
-          </a:p>
-        </p:txBody>
-      </p:sp>
-      <p:sp>
-        <p:nvSpPr>
-          <p:cNvPr id="3" name="Rectangle 2"/>
-          <p:cNvSpPr/>
-          <p:nvPr/>
-        </p:nvSpPr>
-        <p:spPr>
-          <a:xfrm>
-            <a:off x="548640" y="1005840"/>
-            <a:ext cx="10972800" cy="25400"/>
-          </a:xfrm>
-          <a:prstGeom prst="rect">
-            <a:avLst/>
-          </a:prstGeom>
-          <a:solidFill>
-            <a:srgbClr val="2563EB"/>
-          </a:solidFill>
-          <a:ln>
-            <a:noFill/>
-          </a:ln>
-        </p:spPr>
-        <p:style>
-          <a:lnRef idx="1">
-            <a:schemeClr val="accent1"/>
-          </a:lnRef>
-          <a:fillRef idx="3">
-            <a:schemeClr val="accent1"/>
-          </a:fillRef>
-          <a:effectRef idx="2">
-            <a:schemeClr val="accent1"/>
-          </a:effectRef>
-          <a:fontRef idx="minor">
-            <a:schemeClr val="lt1"/>
-          </a:fontRef>
-        </p:style>
-        <p:txBody>
-          <a:bodyPr rtlCol="0" anchor="ctr"/>
-          <a:lstStyle/>
-          <a:p>
-            <a:pPr algn="ctr"/>
-          </a:p>
-        </p:txBody>
-      </p:sp>
-      <p:pic>
-        <p:nvPicPr>
-          <p:cNvPr id="4" name="Picture 3" descr="basalt_comparison.png"/>
-          <p:cNvPicPr>
-            <a:picLocks noChangeAspect="1"/>
-          </p:cNvPicPr>
-          <p:nvPr/>
-        </p:nvPicPr>
-        <p:blipFill>
-          <a:blip r:embed="rId2"/>
-          <a:stretch>
-            <a:fillRect/>
-          </a:stretch>
-        </p:blipFill>
-        <p:spPr>
-          <a:xfrm>
-            <a:off x="914400" y="1188720"/>
-            <a:ext cx="10332720" cy="4754880"/>
-          </a:xfrm>
-          <a:prstGeom prst="rect">
-            <a:avLst/>
-          </a:prstGeom>
-        </p:spPr>
-      </p:pic>
-      <p:sp>
-        <p:nvSpPr>
-          <p:cNvPr id="5" name="TextBox 4"/>
-          <p:cNvSpPr txBox="1"/>
-          <p:nvPr/>
-        </p:nvSpPr>
-        <p:spPr>
-          <a:xfrm>
-            <a:off x="548640" y="6217920"/>
-            <a:ext cx="10972800" cy="457200"/>
-          </a:xfrm>
-          <a:prstGeom prst="rect">
-            <a:avLst/>
-          </a:prstGeom>
-          <a:noFill/>
-        </p:spPr>
-        <p:txBody>
-          <a:bodyPr wrap="square">
-            <a:spAutoFit/>
-          </a:bodyPr>
-          <a:lstStyle/>
-          <a:p>
-            <a:pPr>
-              <a:defRPr sz="1200" i="1">
-                <a:solidFill>
-                  <a:srgbClr val="666666"/>
-                </a:solidFill>
-                <a:latin typeface="Calibri"/>
-              </a:defRPr>
-            </a:pPr>
-            <a:r>
-              <a:t>Basalt phenocryst + trace data achieves F1-macro = 0.959 (783 rows, 8 classes). Trace elements consistently provide the decisive performance boost.</a:t>
-            </a:r>
-          </a:p>
-        </p:txBody>
-      </p:sp>
-    </p:spTree>
-  </p:cSld>
-  <p:clrMapOvr>
-    <a:masterClrMapping/>
-  </p:clrMapOvr>
-</p:sld>
-</file>
-
-<file path=ppt/slides/slide13.xml><?xml version="1.0" encoding="utf-8"?>
-<p:sld xmlns:a="http://schemas.openxmlformats.org/drawingml/2006/main" xmlns:p="http://schemas.openxmlformats.org/presentationml/2006/main" xmlns:r="http://schemas.openxmlformats.org/officeDocument/2006/relationships">
-  <p:cSld>
-    <p:spTree>
-      <p:nvGrpSpPr>
-        <p:cNvPr id="1" name=""/>
-        <p:cNvGrpSpPr/>
-        <p:nvPr/>
-      </p:nvGrpSpPr>
-      <p:grpSpPr/>
-      <p:sp>
-        <p:nvSpPr>
-          <p:cNvPr id="2" name="TextBox 1"/>
-          <p:cNvSpPr txBox="1"/>
-          <p:nvPr/>
-        </p:nvSpPr>
-        <p:spPr>
-          <a:xfrm>
-            <a:off x="548640" y="274320"/>
-            <a:ext cx="10972800" cy="640080"/>
-          </a:xfrm>
-          <a:prstGeom prst="rect">
-            <a:avLst/>
-          </a:prstGeom>
-          <a:noFill/>
-        </p:spPr>
-        <p:txBody>
-          <a:bodyPr wrap="square">
-            <a:spAutoFit/>
-          </a:bodyPr>
-          <a:lstStyle/>
-          <a:p>
-            <a:pPr>
-              <a:defRPr sz="2800" b="1">
-                <a:solidFill>
-                  <a:srgbClr val="1A2744"/>
-                </a:solidFill>
-                <a:latin typeface="Calibri"/>
-              </a:defRPr>
-            </a:pPr>
-            <a:r>
-              <a:t>Stratified Evaluation: Best Practical on Basalt + Phenocryst</a:t>
-            </a:r>
-          </a:p>
-        </p:txBody>
-      </p:sp>
-      <p:sp>
-        <p:nvSpPr>
-          <p:cNvPr id="3" name="Rectangle 2"/>
-          <p:cNvSpPr/>
-          <p:nvPr/>
-        </p:nvSpPr>
-        <p:spPr>
-          <a:xfrm>
-            <a:off x="548640" y="1005840"/>
-            <a:ext cx="10972800" cy="25400"/>
-          </a:xfrm>
-          <a:prstGeom prst="rect">
-            <a:avLst/>
-          </a:prstGeom>
-          <a:solidFill>
-            <a:srgbClr val="2563EB"/>
-          </a:solidFill>
-          <a:ln>
-            <a:noFill/>
-          </a:ln>
-        </p:spPr>
-        <p:style>
-          <a:lnRef idx="1">
-            <a:schemeClr val="accent1"/>
-          </a:lnRef>
-          <a:fillRef idx="3">
-            <a:schemeClr val="accent1"/>
-          </a:fillRef>
-          <a:effectRef idx="2">
-            <a:schemeClr val="accent1"/>
-          </a:effectRef>
-          <a:fontRef idx="minor">
-            <a:schemeClr val="lt1"/>
-          </a:fontRef>
-        </p:style>
-        <p:txBody>
-          <a:bodyPr rtlCol="0" anchor="ctr"/>
-          <a:lstStyle/>
-          <a:p>
-            <a:pPr algn="ctr"/>
-          </a:p>
-        </p:txBody>
-      </p:sp>
-      <p:pic>
-        <p:nvPicPr>
-          <p:cNvPr id="4" name="Picture 3" descr="stratified_eval_bars.png"/>
-          <p:cNvPicPr>
-            <a:picLocks noChangeAspect="1"/>
-          </p:cNvPicPr>
-          <p:nvPr/>
-        </p:nvPicPr>
-        <p:blipFill>
-          <a:blip r:embed="rId2"/>
-          <a:stretch>
-            <a:fillRect/>
-          </a:stretch>
-        </p:blipFill>
-        <p:spPr>
-          <a:xfrm>
-            <a:off x="365760" y="1188720"/>
-            <a:ext cx="5669280" cy="4663440"/>
-          </a:xfrm>
-          <a:prstGeom prst="rect">
-            <a:avLst/>
-          </a:prstGeom>
-        </p:spPr>
-      </p:pic>
-      <p:graphicFrame>
-        <p:nvGraphicFramePr>
-          <p:cNvPr id="5" name="Table 4"/>
-          <p:cNvGraphicFramePr>
-            <a:graphicFrameLocks noGrp="1"/>
-          </p:cNvGraphicFramePr>
-          <p:nvPr/>
-        </p:nvGraphicFramePr>
-        <p:xfrm>
-          <a:off x="6309360" y="1280160"/>
-          <a:ext cx="5669280" cy="4846320"/>
-        </p:xfrm>
-        <a:graphic>
-          <a:graphicData uri="http://schemas.openxmlformats.org/drawingml/2006/table">
-            <a:tbl>
-              <a:tblPr firstRow="1" bandRow="1">
-                <a:tableStyleId>{5C22544A-7EE6-4342-B048-85BDC9FD1C3A}</a:tableStyleId>
-              </a:tblPr>
-              <a:tblGrid>
-                <a:gridCol w="1737360"/>
-                <a:gridCol w="640080"/>
-                <a:gridCol w="1097280"/>
-                <a:gridCol w="1097280"/>
-                <a:gridCol w="1097280"/>
-              </a:tblGrid>
-              <a:tr h="538480">
-                <a:tc>
-                  <a:txBody>
-                    <a:bodyPr/>
-                    <a:lstStyle/>
-                    <a:p>
-                      <a:pPr algn="ctr">
-                        <a:defRPr sz="1000" b="1">
-                          <a:solidFill>
-                            <a:srgbClr val="FFFFFF"/>
-                          </a:solidFill>
-                          <a:latin typeface="Calibri"/>
-                        </a:defRPr>
-                      </a:pPr>
-                      <a:r>
-                        <a:t>Class</a:t>
-                      </a:r>
-                    </a:p>
-                  </a:txBody>
-                  <a:tcPr>
-                    <a:solidFill>
-                      <a:srgbClr val="1A2744"/>
-                    </a:solidFill>
-                  </a:tcPr>
-                </a:tc>
-                <a:tc>
-                  <a:txBody>
-                    <a:bodyPr/>
-                    <a:lstStyle/>
-                    <a:p>
-                      <a:pPr algn="ctr">
-                        <a:defRPr sz="1000" b="1">
-                          <a:solidFill>
-                            <a:srgbClr val="FFFFFF"/>
-                          </a:solidFill>
-                          <a:latin typeface="Calibri"/>
-                        </a:defRPr>
-                      </a:pPr>
-                      <a:r>
-                        <a:t>n</a:t>
-                      </a:r>
-                    </a:p>
-                  </a:txBody>
-                  <a:tcPr>
-                    <a:solidFill>
-                      <a:srgbClr val="1A2744"/>
-                    </a:solidFill>
-                  </a:tcPr>
-                </a:tc>
-                <a:tc>
-                  <a:txBody>
-                    <a:bodyPr/>
-                    <a:lstStyle/>
-                    <a:p>
-                      <a:pPr algn="ctr">
-                        <a:defRPr sz="1000" b="1">
-                          <a:solidFill>
-                            <a:srgbClr val="FFFFFF"/>
-                          </a:solidFill>
-                          <a:latin typeface="Calibri"/>
-                        </a:defRPr>
-                      </a:pPr>
-                      <a:r>
-                        <a:t>Sliced F1</a:t>
-                      </a:r>
-                    </a:p>
-                  </a:txBody>
-                  <a:tcPr>
-                    <a:solidFill>
-                      <a:srgbClr val="1A2744"/>
-                    </a:solidFill>
-                  </a:tcPr>
-                </a:tc>
-                <a:tc>
-                  <a:txBody>
-                    <a:bodyPr/>
-                    <a:lstStyle/>
-                    <a:p>
-                      <a:pPr algn="ctr">
-                        <a:defRPr sz="1000" b="1">
-                          <a:solidFill>
-                            <a:srgbClr val="FFFFFF"/>
-                          </a:solidFill>
-                          <a:latin typeface="Calibri"/>
-                        </a:defRPr>
-                      </a:pPr>
-                      <a:r>
-                        <a:t>Indep F1</a:t>
-                      </a:r>
-                    </a:p>
-                  </a:txBody>
-                  <a:tcPr>
-                    <a:solidFill>
-                      <a:srgbClr val="1A2744"/>
-                    </a:solidFill>
-                  </a:tcPr>
-                </a:tc>
-                <a:tc>
-                  <a:txBody>
-                    <a:bodyPr/>
-                    <a:lstStyle/>
-                    <a:p>
-                      <a:pPr algn="ctr">
-                        <a:defRPr sz="1000" b="1">
-                          <a:solidFill>
-                            <a:srgbClr val="FFFFFF"/>
-                          </a:solidFill>
-                          <a:latin typeface="Calibri"/>
-                        </a:defRPr>
-                      </a:pPr>
-                      <a:r>
-                        <a:t>Δ (I−S)</a:t>
-                      </a:r>
-                    </a:p>
-                  </a:txBody>
-                  <a:tcPr>
-                    <a:solidFill>
-                      <a:srgbClr val="1A2744"/>
-                    </a:solidFill>
-                  </a:tcPr>
-                </a:tc>
-              </a:tr>
-              <a:tr h="538480">
-                <a:tc>
-                  <a:txBody>
-                    <a:bodyPr/>
-                    <a:lstStyle/>
-                    <a:p>
-                      <a:pPr algn="l">
-                        <a:defRPr sz="1000">
-                          <a:solidFill>
-                            <a:srgbClr val="333333"/>
-                          </a:solidFill>
-                          <a:latin typeface="Calibri"/>
-                        </a:defRPr>
-                      </a:pPr>
-                      <a:r>
-                        <a:t>Convergent Margin</a:t>
-                      </a:r>
-                    </a:p>
-                  </a:txBody>
-                  <a:tcPr anchor="ctr">
-                    <a:solidFill>
-                      <a:srgbClr val="F8F8F8"/>
-                    </a:solidFill>
-                  </a:tcPr>
-                </a:tc>
-                <a:tc>
-                  <a:txBody>
-                    <a:bodyPr/>
-                    <a:lstStyle/>
-                    <a:p>
-                      <a:pPr algn="ctr">
-                        <a:defRPr sz="1000">
-                          <a:solidFill>
-                            <a:srgbClr val="333333"/>
-                          </a:solidFill>
-                          <a:latin typeface="Consolas"/>
-                        </a:defRPr>
-                      </a:pPr>
-                      <a:r>
-                        <a:t>424</a:t>
-                      </a:r>
-                    </a:p>
-                  </a:txBody>
-                  <a:tcPr anchor="ctr">
-                    <a:solidFill>
-                      <a:srgbClr val="F8F8F8"/>
-                    </a:solidFill>
-                  </a:tcPr>
-                </a:tc>
-                <a:tc>
-                  <a:txBody>
-                    <a:bodyPr/>
-                    <a:lstStyle/>
-                    <a:p>
-                      <a:pPr algn="ctr">
-                        <a:defRPr sz="1000">
-                          <a:solidFill>
-                            <a:srgbClr val="333333"/>
-                          </a:solidFill>
-                          <a:latin typeface="Consolas"/>
-                        </a:defRPr>
-                      </a:pPr>
-                      <a:r>
-                        <a:t>0.997</a:t>
-                      </a:r>
-                    </a:p>
-                  </a:txBody>
-                  <a:tcPr anchor="ctr">
-                    <a:solidFill>
-                      <a:srgbClr val="F8F8F8"/>
-                    </a:solidFill>
-                  </a:tcPr>
-                </a:tc>
-                <a:tc>
-                  <a:txBody>
-                    <a:bodyPr/>
-                    <a:lstStyle/>
-                    <a:p>
-                      <a:pPr algn="ctr">
-                        <a:defRPr sz="1000">
-                          <a:solidFill>
-                            <a:srgbClr val="333333"/>
-                          </a:solidFill>
-                          <a:latin typeface="Consolas"/>
-                        </a:defRPr>
-                      </a:pPr>
-                      <a:r>
-                        <a:t>0.961</a:t>
-                      </a:r>
-                    </a:p>
-                  </a:txBody>
-                  <a:tcPr anchor="ctr">
-                    <a:solidFill>
-                      <a:srgbClr val="F8F8F8"/>
-                    </a:solidFill>
-                  </a:tcPr>
-                </a:tc>
-                <a:tc>
-                  <a:txBody>
-                    <a:bodyPr/>
-                    <a:lstStyle/>
-                    <a:p>
-                      <a:pPr algn="ctr">
-                        <a:defRPr sz="1000" b="1">
-                          <a:solidFill>
-                            <a:srgbClr val="059669"/>
-                          </a:solidFill>
-                          <a:latin typeface="Consolas"/>
-                        </a:defRPr>
-                      </a:pPr>
-                      <a:r>
-                        <a:t>-0.036</a:t>
-                      </a:r>
-                    </a:p>
-                  </a:txBody>
-                  <a:tcPr anchor="ctr">
-                    <a:solidFill>
-                      <a:srgbClr val="F8F8F8"/>
-                    </a:solidFill>
-                  </a:tcPr>
-                </a:tc>
-              </a:tr>
-              <a:tr h="538480">
-                <a:tc>
-                  <a:txBody>
-                    <a:bodyPr/>
-                    <a:lstStyle/>
-                    <a:p>
-                      <a:pPr algn="l">
-                        <a:defRPr sz="1000">
-                          <a:solidFill>
-                            <a:srgbClr val="333333"/>
-                          </a:solidFill>
-                          <a:latin typeface="Calibri"/>
-                        </a:defRPr>
-                      </a:pPr>
-                      <a:r>
-                        <a:t>Seamount</a:t>
-                      </a:r>
-                    </a:p>
-                  </a:txBody>
-                  <a:tcPr anchor="ctr"/>
-                </a:tc>
-                <a:tc>
-                  <a:txBody>
-                    <a:bodyPr/>
-                    <a:lstStyle/>
-                    <a:p>
-                      <a:pPr algn="ctr">
-                        <a:defRPr sz="1000">
-                          <a:solidFill>
-                            <a:srgbClr val="333333"/>
-                          </a:solidFill>
-                          <a:latin typeface="Consolas"/>
-                        </a:defRPr>
-                      </a:pPr>
-                      <a:r>
-                        <a:t>106</a:t>
-                      </a:r>
-                    </a:p>
-                  </a:txBody>
-                  <a:tcPr anchor="ctr"/>
-                </a:tc>
-                <a:tc>
-                  <a:txBody>
-                    <a:bodyPr/>
-                    <a:lstStyle/>
-                    <a:p>
-                      <a:pPr algn="ctr">
-                        <a:defRPr sz="1000">
-                          <a:solidFill>
-                            <a:srgbClr val="333333"/>
-                          </a:solidFill>
-                          <a:latin typeface="Consolas"/>
-                        </a:defRPr>
-                      </a:pPr>
-                      <a:r>
-                        <a:t>0.986</a:t>
-                      </a:r>
-                    </a:p>
-                  </a:txBody>
-                  <a:tcPr anchor="ctr"/>
-                </a:tc>
-                <a:tc>
-                  <a:txBody>
-                    <a:bodyPr/>
-                    <a:lstStyle/>
-                    <a:p>
-                      <a:pPr algn="ctr">
-                        <a:defRPr sz="1000">
-                          <a:solidFill>
-                            <a:srgbClr val="333333"/>
-                          </a:solidFill>
-                          <a:latin typeface="Consolas"/>
-                        </a:defRPr>
-                      </a:pPr>
-                      <a:r>
-                        <a:t>0.873</a:t>
-                      </a:r>
-                    </a:p>
-                  </a:txBody>
-                  <a:tcPr anchor="ctr"/>
-                </a:tc>
-                <a:tc>
-                  <a:txBody>
-                    <a:bodyPr/>
-                    <a:lstStyle/>
-                    <a:p>
-                      <a:pPr algn="ctr">
-                        <a:defRPr sz="1000" b="1">
-                          <a:solidFill>
-                            <a:srgbClr val="059669"/>
-                          </a:solidFill>
-                          <a:latin typeface="Consolas"/>
-                        </a:defRPr>
-                      </a:pPr>
-                      <a:r>
-                        <a:t>-0.113</a:t>
-                      </a:r>
-                    </a:p>
-                  </a:txBody>
-                  <a:tcPr anchor="ctr"/>
-                </a:tc>
-              </a:tr>
-              <a:tr h="538480">
-                <a:tc>
-                  <a:txBody>
-                    <a:bodyPr/>
-                    <a:lstStyle/>
-                    <a:p>
-                      <a:pPr algn="l">
-                        <a:defRPr sz="1000">
-                          <a:solidFill>
-                            <a:srgbClr val="333333"/>
-                          </a:solidFill>
-                          <a:latin typeface="Calibri"/>
-                        </a:defRPr>
-                      </a:pPr>
-                      <a:r>
-                        <a:t>Ocean Island</a:t>
-                      </a:r>
-                    </a:p>
-                  </a:txBody>
-                  <a:tcPr anchor="ctr">
-                    <a:solidFill>
-                      <a:srgbClr val="F8F8F8"/>
-                    </a:solidFill>
-                  </a:tcPr>
-                </a:tc>
-                <a:tc>
-                  <a:txBody>
-                    <a:bodyPr/>
-                    <a:lstStyle/>
-                    <a:p>
-                      <a:pPr algn="ctr">
-                        <a:defRPr sz="1000">
-                          <a:solidFill>
-                            <a:srgbClr val="333333"/>
-                          </a:solidFill>
-                          <a:latin typeface="Consolas"/>
-                        </a:defRPr>
-                      </a:pPr>
-                      <a:r>
-                        <a:t>90</a:t>
-                      </a:r>
-                    </a:p>
-                  </a:txBody>
-                  <a:tcPr anchor="ctr">
-                    <a:solidFill>
-                      <a:srgbClr val="F8F8F8"/>
-                    </a:solidFill>
-                  </a:tcPr>
-                </a:tc>
-                <a:tc>
-                  <a:txBody>
-                    <a:bodyPr/>
-                    <a:lstStyle/>
-                    <a:p>
-                      <a:pPr algn="ctr">
-                        <a:defRPr sz="1000">
-                          <a:solidFill>
-                            <a:srgbClr val="333333"/>
-                          </a:solidFill>
-                          <a:latin typeface="Consolas"/>
-                        </a:defRPr>
-                      </a:pPr>
-                      <a:r>
-                        <a:t>1.000</a:t>
-                      </a:r>
-                    </a:p>
-                  </a:txBody>
-                  <a:tcPr anchor="ctr">
-                    <a:solidFill>
-                      <a:srgbClr val="F8F8F8"/>
-                    </a:solidFill>
-                  </a:tcPr>
-                </a:tc>
-                <a:tc>
-                  <a:txBody>
-                    <a:bodyPr/>
-                    <a:lstStyle/>
-                    <a:p>
-                      <a:pPr algn="ctr">
-                        <a:defRPr sz="1000">
-                          <a:solidFill>
-                            <a:srgbClr val="333333"/>
-                          </a:solidFill>
-                          <a:latin typeface="Consolas"/>
-                        </a:defRPr>
-                      </a:pPr>
-                      <a:r>
-                        <a:t>0.972</a:t>
-                      </a:r>
-                    </a:p>
-                  </a:txBody>
-                  <a:tcPr anchor="ctr">
-                    <a:solidFill>
-                      <a:srgbClr val="F8F8F8"/>
-                    </a:solidFill>
-                  </a:tcPr>
-                </a:tc>
-                <a:tc>
-                  <a:txBody>
-                    <a:bodyPr/>
-                    <a:lstStyle/>
-                    <a:p>
-                      <a:pPr algn="ctr">
-                        <a:defRPr sz="1000" b="1">
-                          <a:solidFill>
-                            <a:srgbClr val="059669"/>
-                          </a:solidFill>
-                          <a:latin typeface="Consolas"/>
-                        </a:defRPr>
-                      </a:pPr>
-                      <a:r>
-                        <a:t>-0.028</a:t>
-                      </a:r>
-                    </a:p>
-                  </a:txBody>
-                  <a:tcPr anchor="ctr">
-                    <a:solidFill>
-                      <a:srgbClr val="F8F8F8"/>
-                    </a:solidFill>
-                  </a:tcPr>
-                </a:tc>
-              </a:tr>
-              <a:tr h="538480">
-                <a:tc>
-                  <a:txBody>
-                    <a:bodyPr/>
-                    <a:lstStyle/>
-                    <a:p>
-                      <a:pPr algn="l">
-                        <a:defRPr sz="1000">
-                          <a:solidFill>
-                            <a:srgbClr val="333333"/>
-                          </a:solidFill>
-                          <a:latin typeface="Calibri"/>
-                        </a:defRPr>
-                      </a:pPr>
-                      <a:r>
-                        <a:t>Intraplate Volcanics</a:t>
-                      </a:r>
-                    </a:p>
-                  </a:txBody>
-                  <a:tcPr anchor="ctr"/>
-                </a:tc>
-                <a:tc>
-                  <a:txBody>
-                    <a:bodyPr/>
-                    <a:lstStyle/>
-                    <a:p>
-                      <a:pPr algn="ctr">
-                        <a:defRPr sz="1000">
-                          <a:solidFill>
-                            <a:srgbClr val="333333"/>
-                          </a:solidFill>
-                          <a:latin typeface="Consolas"/>
-                        </a:defRPr>
-                      </a:pPr>
-                      <a:r>
-                        <a:t>57</a:t>
-                      </a:r>
-                    </a:p>
-                  </a:txBody>
-                  <a:tcPr anchor="ctr"/>
-                </a:tc>
-                <a:tc>
-                  <a:txBody>
-                    <a:bodyPr/>
-                    <a:lstStyle/>
-                    <a:p>
-                      <a:pPr algn="ctr">
-                        <a:defRPr sz="1000">
-                          <a:solidFill>
-                            <a:srgbClr val="333333"/>
-                          </a:solidFill>
-                          <a:latin typeface="Consolas"/>
-                        </a:defRPr>
-                      </a:pPr>
-                      <a:r>
-                        <a:t>0.983</a:t>
-                      </a:r>
-                    </a:p>
-                  </a:txBody>
-                  <a:tcPr anchor="ctr"/>
-                </a:tc>
-                <a:tc>
-                  <a:txBody>
-                    <a:bodyPr/>
-                    <a:lstStyle/>
-                    <a:p>
-                      <a:pPr algn="ctr">
-                        <a:defRPr sz="1000">
-                          <a:solidFill>
-                            <a:srgbClr val="333333"/>
-                          </a:solidFill>
-                          <a:latin typeface="Consolas"/>
-                        </a:defRPr>
-                      </a:pPr>
-                      <a:r>
-                        <a:t>0.904</a:t>
-                      </a:r>
-                    </a:p>
-                  </a:txBody>
-                  <a:tcPr anchor="ctr"/>
-                </a:tc>
-                <a:tc>
-                  <a:txBody>
-                    <a:bodyPr/>
-                    <a:lstStyle/>
-                    <a:p>
-                      <a:pPr algn="ctr">
-                        <a:defRPr sz="1000" b="1">
-                          <a:solidFill>
-                            <a:srgbClr val="059669"/>
-                          </a:solidFill>
-                          <a:latin typeface="Consolas"/>
-                        </a:defRPr>
-                      </a:pPr>
-                      <a:r>
-                        <a:t>-0.079</a:t>
-                      </a:r>
-                    </a:p>
-                  </a:txBody>
-                  <a:tcPr anchor="ctr"/>
-                </a:tc>
-              </a:tr>
-              <a:tr h="538480">
-                <a:tc>
-                  <a:txBody>
-                    <a:bodyPr/>
-                    <a:lstStyle/>
-                    <a:p>
-                      <a:pPr algn="l">
-                        <a:defRPr sz="1000">
-                          <a:solidFill>
-                            <a:srgbClr val="333333"/>
-                          </a:solidFill>
-                          <a:latin typeface="Calibri"/>
-                        </a:defRPr>
-                      </a:pPr>
-                      <a:r>
-                        <a:t>Complex Volcanic</a:t>
-                      </a:r>
-                    </a:p>
-                  </a:txBody>
-                  <a:tcPr anchor="ctr">
-                    <a:solidFill>
-                      <a:srgbClr val="F8F8F8"/>
-                    </a:solidFill>
-                  </a:tcPr>
-                </a:tc>
-                <a:tc>
-                  <a:txBody>
-                    <a:bodyPr/>
-                    <a:lstStyle/>
-                    <a:p>
-                      <a:pPr algn="ctr">
-                        <a:defRPr sz="1000">
-                          <a:solidFill>
-                            <a:srgbClr val="333333"/>
-                          </a:solidFill>
-                          <a:latin typeface="Consolas"/>
-                        </a:defRPr>
-                      </a:pPr>
-                      <a:r>
-                        <a:t>46</a:t>
-                      </a:r>
-                    </a:p>
-                  </a:txBody>
-                  <a:tcPr anchor="ctr">
-                    <a:solidFill>
-                      <a:srgbClr val="F8F8F8"/>
-                    </a:solidFill>
-                  </a:tcPr>
-                </a:tc>
-                <a:tc>
-                  <a:txBody>
-                    <a:bodyPr/>
-                    <a:lstStyle/>
-                    <a:p>
-                      <a:pPr algn="ctr">
-                        <a:defRPr sz="1000">
-                          <a:solidFill>
-                            <a:srgbClr val="333333"/>
-                          </a:solidFill>
-                          <a:latin typeface="Consolas"/>
-                        </a:defRPr>
-                      </a:pPr>
-                      <a:r>
-                        <a:t>1.000</a:t>
-                      </a:r>
-                    </a:p>
-                  </a:txBody>
-                  <a:tcPr anchor="ctr">
-                    <a:solidFill>
-                      <a:srgbClr val="F8F8F8"/>
-                    </a:solidFill>
-                  </a:tcPr>
-                </a:tc>
-                <a:tc>
-                  <a:txBody>
-                    <a:bodyPr/>
-                    <a:lstStyle/>
-                    <a:p>
-                      <a:pPr algn="ctr">
-                        <a:defRPr sz="1000">
-                          <a:solidFill>
-                            <a:srgbClr val="333333"/>
-                          </a:solidFill>
-                          <a:latin typeface="Consolas"/>
-                        </a:defRPr>
-                      </a:pPr>
-                      <a:r>
-                        <a:t>0.978</a:t>
-                      </a:r>
-                    </a:p>
-                  </a:txBody>
-                  <a:tcPr anchor="ctr">
-                    <a:solidFill>
-                      <a:srgbClr val="F8F8F8"/>
-                    </a:solidFill>
-                  </a:tcPr>
-                </a:tc>
-                <a:tc>
-                  <a:txBody>
-                    <a:bodyPr/>
-                    <a:lstStyle/>
-                    <a:p>
-                      <a:pPr algn="ctr">
-                        <a:defRPr sz="1000" b="1">
-                          <a:solidFill>
-                            <a:srgbClr val="059669"/>
-                          </a:solidFill>
-                          <a:latin typeface="Consolas"/>
-                        </a:defRPr>
-                      </a:pPr>
-                      <a:r>
-                        <a:t>-0.022</a:t>
-                      </a:r>
-                    </a:p>
-                  </a:txBody>
-                  <a:tcPr anchor="ctr">
-                    <a:solidFill>
-                      <a:srgbClr val="F8F8F8"/>
-                    </a:solidFill>
-                  </a:tcPr>
-                </a:tc>
-              </a:tr>
-              <a:tr h="538480">
-                <a:tc>
-                  <a:txBody>
-                    <a:bodyPr/>
-                    <a:lstStyle/>
-                    <a:p>
-                      <a:pPr algn="l">
-                        <a:defRPr sz="1000">
-                          <a:solidFill>
-                            <a:srgbClr val="333333"/>
-                          </a:solidFill>
-                          <a:latin typeface="Calibri"/>
-                        </a:defRPr>
-                      </a:pPr>
-                      <a:r>
-                        <a:t>Rift Volcanics</a:t>
-                      </a:r>
-                    </a:p>
-                  </a:txBody>
-                  <a:tcPr anchor="ctr"/>
-                </a:tc>
-                <a:tc>
-                  <a:txBody>
-                    <a:bodyPr/>
-                    <a:lstStyle/>
-                    <a:p>
-                      <a:pPr algn="ctr">
-                        <a:defRPr sz="1000">
-                          <a:solidFill>
-                            <a:srgbClr val="333333"/>
-                          </a:solidFill>
-                          <a:latin typeface="Consolas"/>
-                        </a:defRPr>
-                      </a:pPr>
-                      <a:r>
-                        <a:t>39</a:t>
-                      </a:r>
-                    </a:p>
-                  </a:txBody>
-                  <a:tcPr anchor="ctr"/>
-                </a:tc>
-                <a:tc>
-                  <a:txBody>
-                    <a:bodyPr/>
-                    <a:lstStyle/>
-                    <a:p>
-                      <a:pPr algn="ctr">
-                        <a:defRPr sz="1000">
-                          <a:solidFill>
-                            <a:srgbClr val="333333"/>
-                          </a:solidFill>
-                          <a:latin typeface="Consolas"/>
-                        </a:defRPr>
-                      </a:pPr>
-                      <a:r>
-                        <a:t>0.987</a:t>
-                      </a:r>
-                    </a:p>
-                  </a:txBody>
-                  <a:tcPr anchor="ctr"/>
-                </a:tc>
-                <a:tc>
-                  <a:txBody>
-                    <a:bodyPr/>
-                    <a:lstStyle/>
-                    <a:p>
-                      <a:pPr algn="ctr">
-                        <a:defRPr sz="1000">
-                          <a:solidFill>
-                            <a:srgbClr val="333333"/>
-                          </a:solidFill>
-                          <a:latin typeface="Consolas"/>
-                        </a:defRPr>
-                      </a:pPr>
-                      <a:r>
-                        <a:t>0.987</a:t>
-                      </a:r>
-                    </a:p>
-                  </a:txBody>
-                  <a:tcPr anchor="ctr"/>
-                </a:tc>
-                <a:tc>
-                  <a:txBody>
-                    <a:bodyPr/>
-                    <a:lstStyle/>
-                    <a:p>
-                      <a:pPr algn="ctr">
-                        <a:defRPr sz="1000">
-                          <a:solidFill>
-                            <a:srgbClr val="333333"/>
-                          </a:solidFill>
-                          <a:latin typeface="Consolas"/>
-                        </a:defRPr>
-                      </a:pPr>
-                      <a:r>
-                        <a:t>+0.000</a:t>
-                      </a:r>
-                    </a:p>
-                  </a:txBody>
-                  <a:tcPr anchor="ctr"/>
-                </a:tc>
-              </a:tr>
-              <a:tr h="538480">
-                <a:tc>
-                  <a:txBody>
-                    <a:bodyPr/>
-                    <a:lstStyle/>
-                    <a:p>
-                      <a:pPr algn="l">
-                        <a:defRPr sz="1000">
-                          <a:solidFill>
-                            <a:srgbClr val="333333"/>
-                          </a:solidFill>
-                          <a:latin typeface="Calibri"/>
-                        </a:defRPr>
-                      </a:pPr>
-                      <a:r>
-                        <a:t>Oceanic Plateau ⚠</a:t>
-                      </a:r>
-                    </a:p>
-                  </a:txBody>
-                  <a:tcPr anchor="ctr">
-                    <a:solidFill>
-                      <a:srgbClr val="FFF4E6"/>
-                    </a:solidFill>
-                  </a:tcPr>
-                </a:tc>
-                <a:tc>
-                  <a:txBody>
-                    <a:bodyPr/>
-                    <a:lstStyle/>
-                    <a:p>
-                      <a:pPr algn="ctr">
-                        <a:defRPr sz="1000">
-                          <a:solidFill>
-                            <a:srgbClr val="333333"/>
-                          </a:solidFill>
-                          <a:latin typeface="Consolas"/>
-                        </a:defRPr>
-                      </a:pPr>
-                      <a:r>
-                        <a:t>16</a:t>
-                      </a:r>
-                    </a:p>
-                  </a:txBody>
-                  <a:tcPr anchor="ctr">
-                    <a:solidFill>
-                      <a:srgbClr val="FFF4E6"/>
-                    </a:solidFill>
-                  </a:tcPr>
-                </a:tc>
-                <a:tc>
-                  <a:txBody>
-                    <a:bodyPr/>
-                    <a:lstStyle/>
-                    <a:p>
-                      <a:pPr algn="ctr">
-                        <a:defRPr sz="1000">
-                          <a:solidFill>
-                            <a:srgbClr val="333333"/>
-                          </a:solidFill>
-                          <a:latin typeface="Consolas"/>
-                        </a:defRPr>
-                      </a:pPr>
-                      <a:r>
-                        <a:t>1.000</a:t>
-                      </a:r>
-                    </a:p>
-                  </a:txBody>
-                  <a:tcPr anchor="ctr">
-                    <a:solidFill>
-                      <a:srgbClr val="FFF4E6"/>
-                    </a:solidFill>
-                  </a:tcPr>
-                </a:tc>
-                <a:tc>
-                  <a:txBody>
-                    <a:bodyPr/>
-                    <a:lstStyle/>
-                    <a:p>
-                      <a:pPr algn="ctr">
-                        <a:defRPr sz="1000">
-                          <a:solidFill>
-                            <a:srgbClr val="333333"/>
-                          </a:solidFill>
-                          <a:latin typeface="Consolas"/>
-                        </a:defRPr>
-                      </a:pPr>
-                      <a:r>
-                        <a:t>1.000</a:t>
-                      </a:r>
-                    </a:p>
-                  </a:txBody>
-                  <a:tcPr anchor="ctr">
-                    <a:solidFill>
-                      <a:srgbClr val="FFF4E6"/>
-                    </a:solidFill>
-                  </a:tcPr>
-                </a:tc>
-                <a:tc>
-                  <a:txBody>
-                    <a:bodyPr/>
-                    <a:lstStyle/>
-                    <a:p>
-                      <a:pPr algn="ctr">
-                        <a:defRPr sz="1000">
-                          <a:solidFill>
-                            <a:srgbClr val="333333"/>
-                          </a:solidFill>
-                          <a:latin typeface="Consolas"/>
-                        </a:defRPr>
-                      </a:pPr>
-                      <a:r>
-                        <a:t>+0.000</a:t>
-                      </a:r>
-                    </a:p>
-                  </a:txBody>
-                  <a:tcPr anchor="ctr">
-                    <a:solidFill>
-                      <a:srgbClr val="FFF4E6"/>
-                    </a:solidFill>
-                  </a:tcPr>
-                </a:tc>
-              </a:tr>
-              <a:tr h="538480">
-                <a:tc>
-                  <a:txBody>
-                    <a:bodyPr/>
-                    <a:lstStyle/>
-                    <a:p>
-                      <a:pPr algn="l">
-                        <a:defRPr sz="1000">
-                          <a:solidFill>
-                            <a:srgbClr val="333333"/>
-                          </a:solidFill>
-                          <a:latin typeface="Calibri"/>
-                        </a:defRPr>
-                      </a:pPr>
-                      <a:r>
-                        <a:t>Cont. Flood Basalt ⚠</a:t>
-                      </a:r>
-                    </a:p>
-                  </a:txBody>
-                  <a:tcPr anchor="ctr">
-                    <a:solidFill>
-                      <a:srgbClr val="FFF4E6"/>
-                    </a:solidFill>
-                  </a:tcPr>
-                </a:tc>
-                <a:tc>
-                  <a:txBody>
-                    <a:bodyPr/>
-                    <a:lstStyle/>
-                    <a:p>
-                      <a:pPr algn="ctr">
-                        <a:defRPr sz="1000">
-                          <a:solidFill>
-                            <a:srgbClr val="333333"/>
-                          </a:solidFill>
-                          <a:latin typeface="Consolas"/>
-                        </a:defRPr>
-                      </a:pPr>
-                      <a:r>
-                        <a:t>5</a:t>
-                      </a:r>
-                    </a:p>
-                  </a:txBody>
-                  <a:tcPr anchor="ctr">
-                    <a:solidFill>
-                      <a:srgbClr val="FFF4E6"/>
-                    </a:solidFill>
-                  </a:tcPr>
-                </a:tc>
-                <a:tc>
-                  <a:txBody>
-                    <a:bodyPr/>
-                    <a:lstStyle/>
-                    <a:p>
-                      <a:pPr algn="ctr">
-                        <a:defRPr sz="1000">
-                          <a:solidFill>
-                            <a:srgbClr val="333333"/>
-                          </a:solidFill>
-                          <a:latin typeface="Consolas"/>
-                        </a:defRPr>
-                      </a:pPr>
-                      <a:r>
-                        <a:t>0.889</a:t>
-                      </a:r>
-                    </a:p>
-                  </a:txBody>
-                  <a:tcPr anchor="ctr">
-                    <a:solidFill>
-                      <a:srgbClr val="FFF4E6"/>
-                    </a:solidFill>
-                  </a:tcPr>
-                </a:tc>
-                <a:tc>
-                  <a:txBody>
-                    <a:bodyPr/>
-                    <a:lstStyle/>
-                    <a:p>
-                      <a:pPr algn="ctr">
-                        <a:defRPr sz="1000">
-                          <a:solidFill>
-                            <a:srgbClr val="333333"/>
-                          </a:solidFill>
-                          <a:latin typeface="Consolas"/>
-                        </a:defRPr>
-                      </a:pPr>
-                      <a:r>
-                        <a:t>1.000</a:t>
-                      </a:r>
-                    </a:p>
-                  </a:txBody>
-                  <a:tcPr anchor="ctr">
-                    <a:solidFill>
-                      <a:srgbClr val="FFF4E6"/>
-                    </a:solidFill>
-                  </a:tcPr>
-                </a:tc>
-                <a:tc>
-                  <a:txBody>
-                    <a:bodyPr/>
-                    <a:lstStyle/>
-                    <a:p>
-                      <a:pPr algn="ctr">
-                        <a:defRPr sz="1000" b="1">
-                          <a:solidFill>
-                            <a:srgbClr val="D97706"/>
-                          </a:solidFill>
-                          <a:latin typeface="Consolas"/>
-                        </a:defRPr>
-                      </a:pPr>
-                      <a:r>
-                        <a:t>+0.111</a:t>
-                      </a:r>
-                    </a:p>
-                  </a:txBody>
-                  <a:tcPr anchor="ctr">
-                    <a:solidFill>
-                      <a:srgbClr val="FFF4E6"/>
-                    </a:solidFill>
-                  </a:tcPr>
-                </a:tc>
-              </a:tr>
-            </a:tbl>
-          </a:graphicData>
-        </a:graphic>
-      </p:graphicFrame>
-      <p:sp>
-        <p:nvSpPr>
-          <p:cNvPr id="6" name="TextBox 5"/>
-          <p:cNvSpPr txBox="1"/>
-          <p:nvPr/>
-        </p:nvSpPr>
-        <p:spPr>
-          <a:xfrm>
-            <a:off x="548640" y="6217920"/>
-            <a:ext cx="10972800" cy="457200"/>
-          </a:xfrm>
-          <a:prstGeom prst="rect">
-            <a:avLst/>
-          </a:prstGeom>
-          <a:noFill/>
-        </p:spPr>
-        <p:txBody>
-          <a:bodyPr wrap="square">
-            <a:spAutoFit/>
-          </a:bodyPr>
-          <a:lstStyle/>
-          <a:p>
-            <a:pPr>
-              <a:defRPr sz="1200" i="1">
-                <a:solidFill>
-                  <a:srgbClr val="666666"/>
-                </a:solidFill>
-                <a:latin typeface="Calibri"/>
-              </a:defRPr>
-            </a:pPr>
-            <a:r>
-              <a:t>43-feature model on the 783 basalt+phenocryst samples gives F1m = 0.980. The gap to the independently trained model is driven mainly by small-class overfitting. No specialised model needed.</a:t>
-            </a:r>
-          </a:p>
-        </p:txBody>
-      </p:sp>
-    </p:spTree>
-  </p:cSld>
-  <p:clrMapOvr>
-    <a:masterClrMapping/>
-  </p:clrMapOvr>
-</p:sld>
-</file>
-
-<file path=ppt/slides/slide14.xml><?xml version="1.0" encoding="utf-8"?>
 <p:sld xmlns:a="http://schemas.openxmlformats.org/drawingml/2006/main" xmlns:p="http://schemas.openxmlformats.org/presentationml/2006/main" xmlns:r="http://schemas.openxmlformats.org/officeDocument/2006/relationships">
   <p:cSld>
     <p:spTree>
@@ -6044,7 +4662,7 @@
 </p:sld>
 </file>
 
-<file path=ppt/slides/slide15.xml><?xml version="1.0" encoding="utf-8"?>
+<file path=ppt/slides/slide13.xml><?xml version="1.0" encoding="utf-8"?>
 <p:sld xmlns:a="http://schemas.openxmlformats.org/drawingml/2006/main" xmlns:p="http://schemas.openxmlformats.org/presentationml/2006/main" xmlns:r="http://schemas.openxmlformats.org/officeDocument/2006/relationships">
   <p:cSld>
     <p:spTree>
@@ -6085,7 +4703,7 @@
               </a:defRPr>
             </a:pPr>
             <a:r>
-              <a:t>Spatial Distribution of 39,631 Predictions</a:t>
+              <a:t>Feature Importance: XGBoost Gain vs. SHAP</a:t>
             </a:r>
           </a:p>
         </p:txBody>
@@ -6135,7 +4753,7 @@
       </p:sp>
       <p:pic>
         <p:nvPicPr>
-          <p:cNvPr id="4" name="Picture 3" descr="spatial_distribution.png"/>
+          <p:cNvPr id="4" name="Picture 3" descr="shap_global.png"/>
           <p:cNvPicPr>
             <a:picLocks noChangeAspect="1"/>
           </p:cNvPicPr>
@@ -6149,8 +4767,8 @@
         </p:blipFill>
         <p:spPr>
           <a:xfrm>
-            <a:off x="274320" y="1005840"/>
-            <a:ext cx="11612880" cy="5303520"/>
+            <a:off x="457200" y="1097280"/>
+            <a:ext cx="11247120" cy="4846320"/>
           </a:xfrm>
           <a:prstGeom prst="rect">
             <a:avLst/>
@@ -6188,7 +4806,321 @@
               </a:defRPr>
             </a:pPr>
             <a:r>
-              <a:t>39,631 predictions: 39,316 correct (99.2%), 315 misclassified (red edges). Misclassifications are geographically dispersed, not clustered.</a:t>
+              <a:t>43-feature model (Major+Trace, no endmembers). Both Gain and SHAP highlight trace elements (Sr, Sm, Zr) as key prediction drivers.</a:t>
+            </a:r>
+          </a:p>
+        </p:txBody>
+      </p:sp>
+    </p:spTree>
+  </p:cSld>
+  <p:clrMapOvr>
+    <a:masterClrMapping/>
+  </p:clrMapOvr>
+</p:sld>
+</file>
+
+<file path=ppt/slides/slide14.xml><?xml version="1.0" encoding="utf-8"?>
+<p:sld xmlns:a="http://schemas.openxmlformats.org/drawingml/2006/main" xmlns:p="http://schemas.openxmlformats.org/presentationml/2006/main" xmlns:r="http://schemas.openxmlformats.org/officeDocument/2006/relationships">
+  <p:cSld>
+    <p:spTree>
+      <p:nvGrpSpPr>
+        <p:cNvPr id="1" name=""/>
+        <p:cNvGrpSpPr/>
+        <p:nvPr/>
+      </p:nvGrpSpPr>
+      <p:grpSpPr/>
+      <p:sp>
+        <p:nvSpPr>
+          <p:cNvPr id="2" name="TextBox 1"/>
+          <p:cNvSpPr txBox="1"/>
+          <p:nvPr/>
+        </p:nvSpPr>
+        <p:spPr>
+          <a:xfrm>
+            <a:off x="548640" y="274320"/>
+            <a:ext cx="10972800" cy="640080"/>
+          </a:xfrm>
+          <a:prstGeom prst="rect">
+            <a:avLst/>
+          </a:prstGeom>
+          <a:noFill/>
+        </p:spPr>
+        <p:txBody>
+          <a:bodyPr wrap="square">
+            <a:spAutoFit/>
+          </a:bodyPr>
+          <a:lstStyle/>
+          <a:p>
+            <a:pPr>
+              <a:defRPr sz="2800" b="1">
+                <a:solidFill>
+                  <a:srgbClr val="1A2744"/>
+                </a:solidFill>
+                <a:latin typeface="Calibri"/>
+              </a:defRPr>
+            </a:pPr>
+            <a:r>
+              <a:t>SHAP Per-Class Feature Importance</a:t>
+            </a:r>
+          </a:p>
+        </p:txBody>
+      </p:sp>
+      <p:sp>
+        <p:nvSpPr>
+          <p:cNvPr id="3" name="Rectangle 2"/>
+          <p:cNvSpPr/>
+          <p:nvPr/>
+        </p:nvSpPr>
+        <p:spPr>
+          <a:xfrm>
+            <a:off x="548640" y="1005840"/>
+            <a:ext cx="10972800" cy="25400"/>
+          </a:xfrm>
+          <a:prstGeom prst="rect">
+            <a:avLst/>
+          </a:prstGeom>
+          <a:solidFill>
+            <a:srgbClr val="2563EB"/>
+          </a:solidFill>
+          <a:ln>
+            <a:noFill/>
+          </a:ln>
+        </p:spPr>
+        <p:style>
+          <a:lnRef idx="1">
+            <a:schemeClr val="accent1"/>
+          </a:lnRef>
+          <a:fillRef idx="3">
+            <a:schemeClr val="accent1"/>
+          </a:fillRef>
+          <a:effectRef idx="2">
+            <a:schemeClr val="accent1"/>
+          </a:effectRef>
+          <a:fontRef idx="minor">
+            <a:schemeClr val="lt1"/>
+          </a:fontRef>
+        </p:style>
+        <p:txBody>
+          <a:bodyPr rtlCol="0" anchor="ctr"/>
+          <a:lstStyle/>
+          <a:p>
+            <a:pPr algn="ctr"/>
+          </a:p>
+        </p:txBody>
+      </p:sp>
+      <p:pic>
+        <p:nvPicPr>
+          <p:cNvPr id="4" name="Picture 3" descr="shap_heatmap.png"/>
+          <p:cNvPicPr>
+            <a:picLocks noChangeAspect="1"/>
+          </p:cNvPicPr>
+          <p:nvPr/>
+        </p:nvPicPr>
+        <p:blipFill>
+          <a:blip r:embed="rId2"/>
+          <a:stretch>
+            <a:fillRect/>
+          </a:stretch>
+        </p:blipFill>
+        <p:spPr>
+          <a:xfrm>
+            <a:off x="1371600" y="1097280"/>
+            <a:ext cx="9601200" cy="5212080"/>
+          </a:xfrm>
+          <a:prstGeom prst="rect">
+            <a:avLst/>
+          </a:prstGeom>
+        </p:spPr>
+      </p:pic>
+      <p:sp>
+        <p:nvSpPr>
+          <p:cNvPr id="5" name="TextBox 4"/>
+          <p:cNvSpPr txBox="1"/>
+          <p:nvPr/>
+        </p:nvSpPr>
+        <p:spPr>
+          <a:xfrm>
+            <a:off x="548640" y="6217920"/>
+            <a:ext cx="10972800" cy="457200"/>
+          </a:xfrm>
+          <a:prstGeom prst="rect">
+            <a:avLst/>
+          </a:prstGeom>
+          <a:noFill/>
+        </p:spPr>
+        <p:txBody>
+          <a:bodyPr wrap="square">
+            <a:spAutoFit/>
+          </a:bodyPr>
+          <a:lstStyle/>
+          <a:p>
+            <a:pPr>
+              <a:defRPr sz="1200" i="1">
+                <a:solidFill>
+                  <a:srgbClr val="666666"/>
+                </a:solidFill>
+                <a:latin typeface="Calibri"/>
+              </a:defRPr>
+            </a:pPr>
+            <a:r>
+              <a:t>Signed SHAP shows feature-class relationships. Sr pushes toward Convergent Margin but away from Archean Craton and Submarine Ridge.</a:t>
+            </a:r>
+          </a:p>
+        </p:txBody>
+      </p:sp>
+    </p:spTree>
+  </p:cSld>
+  <p:clrMapOvr>
+    <a:masterClrMapping/>
+  </p:clrMapOvr>
+</p:sld>
+</file>
+
+<file path=ppt/slides/slide15.xml><?xml version="1.0" encoding="utf-8"?>
+<p:sld xmlns:a="http://schemas.openxmlformats.org/drawingml/2006/main" xmlns:p="http://schemas.openxmlformats.org/presentationml/2006/main" xmlns:r="http://schemas.openxmlformats.org/officeDocument/2006/relationships">
+  <p:cSld>
+    <p:spTree>
+      <p:nvGrpSpPr>
+        <p:cNvPr id="1" name=""/>
+        <p:cNvGrpSpPr/>
+        <p:nvPr/>
+      </p:nvGrpSpPr>
+      <p:grpSpPr/>
+      <p:sp>
+        <p:nvSpPr>
+          <p:cNvPr id="2" name="TextBox 1"/>
+          <p:cNvSpPr txBox="1"/>
+          <p:nvPr/>
+        </p:nvSpPr>
+        <p:spPr>
+          <a:xfrm>
+            <a:off x="548640" y="274320"/>
+            <a:ext cx="10972800" cy="640080"/>
+          </a:xfrm>
+          <a:prstGeom prst="rect">
+            <a:avLst/>
+          </a:prstGeom>
+          <a:noFill/>
+        </p:spPr>
+        <p:txBody>
+          <a:bodyPr wrap="square">
+            <a:spAutoFit/>
+          </a:bodyPr>
+          <a:lstStyle/>
+          <a:p>
+            <a:pPr>
+              <a:defRPr sz="2800" b="1">
+                <a:solidFill>
+                  <a:srgbClr val="1A2744"/>
+                </a:solidFill>
+                <a:latin typeface="Calibri"/>
+              </a:defRPr>
+            </a:pPr>
+            <a:r>
+              <a:t>Basalt Subset Classification</a:t>
+            </a:r>
+          </a:p>
+        </p:txBody>
+      </p:sp>
+      <p:sp>
+        <p:nvSpPr>
+          <p:cNvPr id="3" name="Rectangle 2"/>
+          <p:cNvSpPr/>
+          <p:nvPr/>
+        </p:nvSpPr>
+        <p:spPr>
+          <a:xfrm>
+            <a:off x="548640" y="1005840"/>
+            <a:ext cx="10972800" cy="25400"/>
+          </a:xfrm>
+          <a:prstGeom prst="rect">
+            <a:avLst/>
+          </a:prstGeom>
+          <a:solidFill>
+            <a:srgbClr val="2563EB"/>
+          </a:solidFill>
+          <a:ln>
+            <a:noFill/>
+          </a:ln>
+        </p:spPr>
+        <p:style>
+          <a:lnRef idx="1">
+            <a:schemeClr val="accent1"/>
+          </a:lnRef>
+          <a:fillRef idx="3">
+            <a:schemeClr val="accent1"/>
+          </a:fillRef>
+          <a:effectRef idx="2">
+            <a:schemeClr val="accent1"/>
+          </a:effectRef>
+          <a:fontRef idx="minor">
+            <a:schemeClr val="lt1"/>
+          </a:fontRef>
+        </p:style>
+        <p:txBody>
+          <a:bodyPr rtlCol="0" anchor="ctr"/>
+          <a:lstStyle/>
+          <a:p>
+            <a:pPr algn="ctr"/>
+          </a:p>
+        </p:txBody>
+      </p:sp>
+      <p:pic>
+        <p:nvPicPr>
+          <p:cNvPr id="4" name="Picture 3" descr="basalt_comparison.png"/>
+          <p:cNvPicPr>
+            <a:picLocks noChangeAspect="1"/>
+          </p:cNvPicPr>
+          <p:nvPr/>
+        </p:nvPicPr>
+        <p:blipFill>
+          <a:blip r:embed="rId2"/>
+          <a:stretch>
+            <a:fillRect/>
+          </a:stretch>
+        </p:blipFill>
+        <p:spPr>
+          <a:xfrm>
+            <a:off x="914400" y="1188720"/>
+            <a:ext cx="10332720" cy="4754880"/>
+          </a:xfrm>
+          <a:prstGeom prst="rect">
+            <a:avLst/>
+          </a:prstGeom>
+        </p:spPr>
+      </p:pic>
+      <p:sp>
+        <p:nvSpPr>
+          <p:cNvPr id="5" name="TextBox 4"/>
+          <p:cNvSpPr txBox="1"/>
+          <p:nvPr/>
+        </p:nvSpPr>
+        <p:spPr>
+          <a:xfrm>
+            <a:off x="548640" y="6217920"/>
+            <a:ext cx="10972800" cy="457200"/>
+          </a:xfrm>
+          <a:prstGeom prst="rect">
+            <a:avLst/>
+          </a:prstGeom>
+          <a:noFill/>
+        </p:spPr>
+        <p:txBody>
+          <a:bodyPr wrap="square">
+            <a:spAutoFit/>
+          </a:bodyPr>
+          <a:lstStyle/>
+          <a:p>
+            <a:pPr>
+              <a:defRPr sz="1200" i="1">
+                <a:solidFill>
+                  <a:srgbClr val="666666"/>
+                </a:solidFill>
+                <a:latin typeface="Calibri"/>
+              </a:defRPr>
+            </a:pPr>
+            <a:r>
+              <a:t>Basalt phenocryst + trace data achieves F1-macro = 0.936 (5-fold CV, 8 classes). Trace elements consistently provide the decisive performance boost.</a:t>
             </a:r>
           </a:p>
         </p:txBody>
@@ -6242,7 +5174,7 @@
               </a:defRPr>
             </a:pPr>
             <a:r>
-              <a:t>Data Availability -- Temporal Metadata Gap</a:t>
+              <a:t>Stratified Evaluation: Best Practical on Basalt + Phenocryst</a:t>
             </a:r>
           </a:p>
         </p:txBody>
@@ -6290,62 +5222,9 @@
           </a:p>
         </p:txBody>
       </p:sp>
-      <p:sp>
-        <p:nvSpPr>
-          <p:cNvPr id="4" name="Rectangle 3"/>
-          <p:cNvSpPr/>
-          <p:nvPr/>
-        </p:nvSpPr>
-        <p:spPr>
-          <a:xfrm>
-            <a:off x="548640" y="1188720"/>
-            <a:ext cx="10972800" cy="457200"/>
-          </a:xfrm>
-          <a:prstGeom prst="rect">
-            <a:avLst/>
-          </a:prstGeom>
-          <a:solidFill>
-            <a:srgbClr val="1A2744"/>
-          </a:solidFill>
-          <a:ln>
-            <a:noFill/>
-          </a:ln>
-        </p:spPr>
-        <p:style>
-          <a:lnRef idx="1">
-            <a:schemeClr val="accent1"/>
-          </a:lnRef>
-          <a:fillRef idx="3">
-            <a:schemeClr val="accent1"/>
-          </a:fillRef>
-          <a:effectRef idx="2">
-            <a:schemeClr val="accent1"/>
-          </a:effectRef>
-          <a:fontRef idx="minor">
-            <a:schemeClr val="lt1"/>
-          </a:fontRef>
-        </p:style>
-        <p:txBody>
-          <a:bodyPr rtlCol="0" anchor="ctr" lIns="137160" rIns="137160"/>
-          <a:lstStyle/>
-          <a:p>
-            <a:pPr algn="ctr">
-              <a:defRPr sz="1600" b="1">
-                <a:solidFill>
-                  <a:srgbClr val="FFFFFF"/>
-                </a:solidFill>
-                <a:latin typeface="Calibri"/>
-              </a:defRPr>
-            </a:pPr>
-            <a:r>
-              <a:t>Only 0.076% of samples have AGE(MA) metadata (161 / 211,773)</a:t>
-            </a:r>
-          </a:p>
-        </p:txBody>
-      </p:sp>
       <p:pic>
         <p:nvPicPr>
-          <p:cNvPr id="5" name="Picture 4" descr="age_era_stacked.png"/>
+          <p:cNvPr id="4" name="Picture 3" descr="stratified_eval_bars.png"/>
           <p:cNvPicPr>
             <a:picLocks noChangeAspect="1"/>
           </p:cNvPicPr>
@@ -6359,2392 +5238,25 @@
         </p:blipFill>
         <p:spPr>
           <a:xfrm>
-            <a:off x="365760" y="1828800"/>
-            <a:ext cx="6858000" cy="4114800"/>
+            <a:off x="365760" y="1188720"/>
+            <a:ext cx="5669280" cy="4663440"/>
           </a:xfrm>
           <a:prstGeom prst="rect">
             <a:avLst/>
           </a:prstGeom>
         </p:spPr>
       </p:pic>
-      <p:sp>
-        <p:nvSpPr>
-          <p:cNvPr id="6" name="TextBox 5"/>
-          <p:cNvSpPr txBox="1"/>
-          <p:nvPr/>
-        </p:nvSpPr>
-        <p:spPr>
-          <a:xfrm>
-            <a:off x="7498079" y="1828800"/>
-            <a:ext cx="4572000" cy="4114800"/>
-          </a:xfrm>
-          <a:prstGeom prst="rect">
-            <a:avLst/>
-          </a:prstGeom>
-          <a:noFill/>
-        </p:spPr>
-        <p:txBody>
-          <a:bodyPr wrap="square">
-            <a:spAutoFit/>
-          </a:bodyPr>
-          <a:lstStyle/>
-          <a:p>
-            <a:pPr>
-              <a:spcAft>
-                <a:spcPts val="400"/>
-              </a:spcAft>
-              <a:defRPr sz="2200" b="1">
-                <a:solidFill>
-                  <a:srgbClr val="1A2744"/>
-                </a:solidFill>
-                <a:latin typeface="Calibri"/>
-              </a:defRPr>
-            </a:pPr>
-            <a:r>
-              <a:t>Age coverage: 0.076%</a:t>
-            </a:r>
-          </a:p>
-          <a:p>
-            <a:pPr>
-              <a:spcAft>
-                <a:spcPts val="1000"/>
-              </a:spcAft>
-              <a:defRPr sz="1300" i="1">
-                <a:solidFill>
-                  <a:srgbClr val="D97706"/>
-                </a:solidFill>
-                <a:latin typeface="Calibri"/>
-              </a:defRPr>
-            </a:pPr>
-            <a:r>
-              <a:t>6 / 11 classes have ZERO aged samples</a:t>
-            </a:r>
-          </a:p>
-          <a:p>
-            <a:pPr>
-              <a:spcAft>
-                <a:spcPts val="200"/>
-              </a:spcAft>
-              <a:defRPr sz="1300" b="0">
-                <a:solidFill>
-                  <a:srgbClr val="059669"/>
-                </a:solidFill>
-                <a:latin typeface="Consolas"/>
-              </a:defRPr>
-            </a:pPr>
-            <a:r>
-              <a:t>Intraplate: 16 / 84,835</a:t>
-            </a:r>
-          </a:p>
-          <a:p>
-            <a:pPr>
-              <a:spcAft>
-                <a:spcPts val="200"/>
-              </a:spcAft>
-              <a:defRPr sz="1300" b="0">
-                <a:solidFill>
-                  <a:srgbClr val="059669"/>
-                </a:solidFill>
-                <a:latin typeface="Consolas"/>
-              </a:defRPr>
-            </a:pPr>
-            <a:r>
-              <a:t>Conv. Margin: 125 / 56,216</a:t>
-            </a:r>
-          </a:p>
-          <a:p>
-            <a:pPr>
-              <a:spcAft>
-                <a:spcPts val="200"/>
-              </a:spcAft>
-              <a:defRPr sz="1300" b="0">
-                <a:solidFill>
-                  <a:srgbClr val="059669"/>
-                </a:solidFill>
-                <a:latin typeface="Consolas"/>
-              </a:defRPr>
-            </a:pPr>
-            <a:r>
-              <a:t>Ocean Island: 11 / 24,008</a:t>
-            </a:r>
-          </a:p>
-          <a:p>
-            <a:pPr>
-              <a:spcAft>
-                <a:spcPts val="200"/>
-              </a:spcAft>
-              <a:defRPr sz="1300" b="1">
-                <a:solidFill>
-                  <a:srgbClr val="D97706"/>
-                </a:solidFill>
-                <a:latin typeface="Consolas"/>
-              </a:defRPr>
-            </a:pPr>
-            <a:r>
-              <a:t>CFB: 0 / 20,816</a:t>
-            </a:r>
-          </a:p>
-          <a:p>
-            <a:pPr>
-              <a:spcAft>
-                <a:spcPts val="200"/>
-              </a:spcAft>
-              <a:defRPr sz="1300" b="0">
-                <a:solidFill>
-                  <a:srgbClr val="059669"/>
-                </a:solidFill>
-                <a:latin typeface="Consolas"/>
-              </a:defRPr>
-            </a:pPr>
-            <a:r>
-              <a:t>Rift Volc.: 3 / 13,689</a:t>
-            </a:r>
-          </a:p>
-          <a:p>
-            <a:pPr>
-              <a:spcAft>
-                <a:spcPts val="200"/>
-              </a:spcAft>
-              <a:defRPr sz="1300" b="0">
-                <a:solidFill>
-                  <a:srgbClr val="059669"/>
-                </a:solidFill>
-                <a:latin typeface="Consolas"/>
-              </a:defRPr>
-            </a:pPr>
-            <a:r>
-              <a:t>Complex Volc.: 6 / 4,201</a:t>
-            </a:r>
-          </a:p>
-          <a:p>
-            <a:pPr>
-              <a:spcAft>
-                <a:spcPts val="200"/>
-              </a:spcAft>
-              <a:defRPr sz="1300" b="1">
-                <a:solidFill>
-                  <a:srgbClr val="D97706"/>
-                </a:solidFill>
-                <a:latin typeface="Consolas"/>
-              </a:defRPr>
-            </a:pPr>
-            <a:r>
-              <a:t>Seamount: 0 / 3,907</a:t>
-            </a:r>
-          </a:p>
-          <a:p>
-            <a:pPr>
-              <a:spcAft>
-                <a:spcPts val="200"/>
-              </a:spcAft>
-              <a:defRPr sz="1300" b="1">
-                <a:solidFill>
-                  <a:srgbClr val="D97706"/>
-                </a:solidFill>
-                <a:latin typeface="Consolas"/>
-              </a:defRPr>
-            </a:pPr>
-            <a:r>
-              <a:t>Arch. Craton: 0 / 2,189</a:t>
-            </a:r>
-          </a:p>
-          <a:p>
-            <a:pPr>
-              <a:spcAft>
-                <a:spcPts val="200"/>
-              </a:spcAft>
-              <a:defRPr sz="1300" b="1">
-                <a:solidFill>
-                  <a:srgbClr val="D97706"/>
-                </a:solidFill>
-                <a:latin typeface="Consolas"/>
-              </a:defRPr>
-            </a:pPr>
-            <a:r>
-              <a:t>Oceanic Plat.: 0 / 1,472</a:t>
-            </a:r>
-          </a:p>
-          <a:p>
-            <a:pPr>
-              <a:spcAft>
-                <a:spcPts val="200"/>
-              </a:spcAft>
-              <a:defRPr sz="1300" b="1">
-                <a:solidFill>
-                  <a:srgbClr val="D97706"/>
-                </a:solidFill>
-                <a:latin typeface="Consolas"/>
-              </a:defRPr>
-            </a:pPr>
-            <a:r>
-              <a:t>Sub. Ridge: 0 / 233</a:t>
-            </a:r>
-          </a:p>
-          <a:p>
-            <a:pPr>
-              <a:spcAft>
-                <a:spcPts val="200"/>
-              </a:spcAft>
-              <a:defRPr sz="1300" b="1">
-                <a:solidFill>
-                  <a:srgbClr val="D97706"/>
-                </a:solidFill>
-                <a:latin typeface="Consolas"/>
-              </a:defRPr>
-            </a:pPr>
-            <a:r>
-              <a:t>OBF: 0 / 207</a:t>
-            </a:r>
-          </a:p>
-        </p:txBody>
-      </p:sp>
-      <p:sp>
-        <p:nvSpPr>
-          <p:cNvPr id="7" name="TextBox 6"/>
-          <p:cNvSpPr txBox="1"/>
-          <p:nvPr/>
-        </p:nvSpPr>
-        <p:spPr>
-          <a:xfrm>
-            <a:off x="548640" y="6217920"/>
-            <a:ext cx="10972800" cy="457200"/>
-          </a:xfrm>
-          <a:prstGeom prst="rect">
-            <a:avLst/>
-          </a:prstGeom>
-          <a:noFill/>
-        </p:spPr>
-        <p:txBody>
-          <a:bodyPr wrap="square">
-            <a:spAutoFit/>
-          </a:bodyPr>
-          <a:lstStyle/>
-          <a:p>
-            <a:pPr>
-              <a:defRPr sz="1200" i="1">
-                <a:solidFill>
-                  <a:srgbClr val="666666"/>
-                </a:solidFill>
-                <a:latin typeface="Calibri"/>
-              </a:defRPr>
-            </a:pPr>
-            <a:r>
-              <a:t>Age metadata cannot be used for feature engineering or stratification. Recommend flagging to GEOROC / GRO.data maintainers.</a:t>
-            </a:r>
-          </a:p>
-        </p:txBody>
-      </p:sp>
-    </p:spTree>
-  </p:cSld>
-  <p:clrMapOvr>
-    <a:masterClrMapping/>
-  </p:clrMapOvr>
-</p:sld>
-</file>
-
-<file path=ppt/slides/slide17.xml><?xml version="1.0" encoding="utf-8"?>
-<p:sld xmlns:a="http://schemas.openxmlformats.org/drawingml/2006/main" xmlns:p="http://schemas.openxmlformats.org/presentationml/2006/main" xmlns:r="http://schemas.openxmlformats.org/officeDocument/2006/relationships">
-  <p:cSld>
-    <p:spTree>
-      <p:nvGrpSpPr>
-        <p:cNvPr id="1" name=""/>
-        <p:cNvGrpSpPr/>
-        <p:nvPr/>
-      </p:nvGrpSpPr>
-      <p:grpSpPr/>
-      <p:sp>
-        <p:nvSpPr>
-          <p:cNvPr id="2" name="TextBox 1"/>
-          <p:cNvSpPr txBox="1"/>
-          <p:nvPr/>
-        </p:nvSpPr>
-        <p:spPr>
-          <a:xfrm>
-            <a:off x="548640" y="274320"/>
-            <a:ext cx="10972800" cy="640080"/>
-          </a:xfrm>
-          <a:prstGeom prst="rect">
-            <a:avLst/>
-          </a:prstGeom>
-          <a:noFill/>
-        </p:spPr>
-        <p:txBody>
-          <a:bodyPr wrap="square">
-            <a:spAutoFit/>
-          </a:bodyPr>
-          <a:lstStyle/>
-          <a:p>
-            <a:pPr>
-              <a:defRPr sz="2800" b="1">
-                <a:solidFill>
-                  <a:srgbClr val="1A2744"/>
-                </a:solidFill>
-                <a:latin typeface="Calibri"/>
-              </a:defRPr>
-            </a:pPr>
-            <a:r>
-              <a:t>Experiment Matrix: 9 Data Subsets × 6 Feature Groups</a:t>
-            </a:r>
-          </a:p>
-        </p:txBody>
-      </p:sp>
-      <p:sp>
-        <p:nvSpPr>
-          <p:cNvPr id="3" name="Rectangle 2"/>
-          <p:cNvSpPr/>
-          <p:nvPr/>
-        </p:nvSpPr>
-        <p:spPr>
-          <a:xfrm>
-            <a:off x="548640" y="1005840"/>
-            <a:ext cx="10972800" cy="25400"/>
-          </a:xfrm>
-          <a:prstGeom prst="rect">
-            <a:avLst/>
-          </a:prstGeom>
-          <a:solidFill>
-            <a:srgbClr val="2563EB"/>
-          </a:solidFill>
-          <a:ln>
-            <a:noFill/>
-          </a:ln>
-        </p:spPr>
-        <p:style>
-          <a:lnRef idx="1">
-            <a:schemeClr val="accent1"/>
-          </a:lnRef>
-          <a:fillRef idx="3">
-            <a:schemeClr val="accent1"/>
-          </a:fillRef>
-          <a:effectRef idx="2">
-            <a:schemeClr val="accent1"/>
-          </a:effectRef>
-          <a:fontRef idx="minor">
-            <a:schemeClr val="lt1"/>
-          </a:fontRef>
-        </p:style>
-        <p:txBody>
-          <a:bodyPr rtlCol="0" anchor="ctr"/>
-          <a:lstStyle/>
-          <a:p>
-            <a:pPr algn="ctr"/>
-          </a:p>
-        </p:txBody>
-      </p:sp>
-      <p:pic>
-        <p:nvPicPr>
-          <p:cNvPr id="4" name="Picture 3" descr="experiment_matrix.png"/>
-          <p:cNvPicPr>
-            <a:picLocks noChangeAspect="1"/>
-          </p:cNvPicPr>
-          <p:nvPr/>
-        </p:nvPicPr>
-        <p:blipFill>
-          <a:blip r:embed="rId2"/>
-          <a:stretch>
-            <a:fillRect/>
-          </a:stretch>
-        </p:blipFill>
-        <p:spPr>
-          <a:xfrm>
-            <a:off x="274320" y="1097280"/>
-            <a:ext cx="11612880" cy="5303520"/>
-          </a:xfrm>
-          <a:prstGeom prst="rect">
-            <a:avLst/>
-          </a:prstGeom>
-        </p:spPr>
-      </p:pic>
-      <p:sp>
-        <p:nvSpPr>
-          <p:cNvPr id="5" name="TextBox 4"/>
-          <p:cNvSpPr txBox="1"/>
-          <p:nvPr/>
-        </p:nvSpPr>
-        <p:spPr>
-          <a:xfrm>
-            <a:off x="548640" y="6217920"/>
-            <a:ext cx="10972800" cy="457200"/>
-          </a:xfrm>
-          <a:prstGeom prst="rect">
-            <a:avLst/>
-          </a:prstGeom>
-          <a:noFill/>
-        </p:spPr>
-        <p:txBody>
-          <a:bodyPr wrap="square">
-            <a:spAutoFit/>
-          </a:bodyPr>
-          <a:lstStyle/>
-          <a:p>
-            <a:pPr>
-              <a:defRPr sz="1200" i="1">
-                <a:solidFill>
-                  <a:srgbClr val="666666"/>
-                </a:solidFill>
-                <a:latin typeface="Calibri"/>
-              </a:defRPr>
-            </a:pPr>
-            <a:r>
-              <a:t>54 experiments, 5-fold stratified CV each. Best practical: Has Trace × Major+Trace (43 feat) = F1m 0.902. Black border = best per row.</a:t>
-            </a:r>
-          </a:p>
-        </p:txBody>
-      </p:sp>
-    </p:spTree>
-  </p:cSld>
-  <p:clrMapOvr>
-    <a:masterClrMapping/>
-  </p:clrMapOvr>
-</p:sld>
-</file>
-
-<file path=ppt/slides/slide18.xml><?xml version="1.0" encoding="utf-8"?>
-<p:sld xmlns:a="http://schemas.openxmlformats.org/drawingml/2006/main" xmlns:p="http://schemas.openxmlformats.org/presentationml/2006/main" xmlns:r="http://schemas.openxmlformats.org/officeDocument/2006/relationships">
-  <p:cSld>
-    <p:spTree>
-      <p:nvGrpSpPr>
-        <p:cNvPr id="1" name=""/>
-        <p:cNvGrpSpPr/>
-        <p:nvPr/>
-      </p:nvGrpSpPr>
-      <p:grpSpPr/>
-      <p:sp>
-        <p:nvSpPr>
-          <p:cNvPr id="2" name="TextBox 1"/>
-          <p:cNvSpPr txBox="1"/>
-          <p:nvPr/>
-        </p:nvSpPr>
-        <p:spPr>
-          <a:xfrm>
-            <a:off x="548640" y="274320"/>
-            <a:ext cx="10972800" cy="640080"/>
-          </a:xfrm>
-          <a:prstGeom prst="rect">
-            <a:avLst/>
-          </a:prstGeom>
-          <a:noFill/>
-        </p:spPr>
-        <p:txBody>
-          <a:bodyPr wrap="square">
-            <a:spAutoFit/>
-          </a:bodyPr>
-          <a:lstStyle/>
-          <a:p>
-            <a:pPr>
-              <a:defRPr sz="2800" b="1">
-                <a:solidFill>
-                  <a:srgbClr val="1A2744"/>
-                </a:solidFill>
-                <a:latin typeface="Calibri"/>
-              </a:defRPr>
-            </a:pPr>
-            <a:r>
-              <a:t>Key Conclusions</a:t>
-            </a:r>
-          </a:p>
-        </p:txBody>
-      </p:sp>
-      <p:sp>
-        <p:nvSpPr>
-          <p:cNvPr id="3" name="Rectangle 2"/>
-          <p:cNvSpPr/>
-          <p:nvPr/>
-        </p:nvSpPr>
-        <p:spPr>
-          <a:xfrm>
-            <a:off x="548640" y="1005840"/>
-            <a:ext cx="10972800" cy="25400"/>
-          </a:xfrm>
-          <a:prstGeom prst="rect">
-            <a:avLst/>
-          </a:prstGeom>
-          <a:solidFill>
-            <a:srgbClr val="2563EB"/>
-          </a:solidFill>
-          <a:ln>
-            <a:noFill/>
-          </a:ln>
-        </p:spPr>
-        <p:style>
-          <a:lnRef idx="1">
-            <a:schemeClr val="accent1"/>
-          </a:lnRef>
-          <a:fillRef idx="3">
-            <a:schemeClr val="accent1"/>
-          </a:fillRef>
-          <a:effectRef idx="2">
-            <a:schemeClr val="accent1"/>
-          </a:effectRef>
-          <a:fontRef idx="minor">
-            <a:schemeClr val="lt1"/>
-          </a:fontRef>
-        </p:style>
-        <p:txBody>
-          <a:bodyPr rtlCol="0" anchor="ctr"/>
-          <a:lstStyle/>
-          <a:p>
-            <a:pPr algn="ctr"/>
-          </a:p>
-        </p:txBody>
-      </p:sp>
-      <p:sp>
-        <p:nvSpPr>
-          <p:cNvPr id="4" name="TextBox 3"/>
-          <p:cNvSpPr txBox="1"/>
-          <p:nvPr/>
-        </p:nvSpPr>
-        <p:spPr>
-          <a:xfrm>
-            <a:off x="731520" y="1280160"/>
-            <a:ext cx="10789920" cy="5303520"/>
-          </a:xfrm>
-          <a:prstGeom prst="rect">
-            <a:avLst/>
-          </a:prstGeom>
-          <a:noFill/>
-        </p:spPr>
-        <p:txBody>
-          <a:bodyPr wrap="square">
-            <a:spAutoFit/>
-          </a:bodyPr>
-          <a:lstStyle/>
-          <a:p>
-            <a:pPr>
-              <a:spcBef>
-                <a:spcPts val="100"/>
-              </a:spcBef>
-              <a:spcAft>
-                <a:spcPts val="500"/>
-              </a:spcAft>
-              <a:defRPr sz="1500" i="0">
-                <a:solidFill>
-                  <a:srgbClr val="333333"/>
-                </a:solidFill>
-                <a:latin typeface="Calibri"/>
-              </a:defRPr>
-            </a:pPr>
-            <a:r>
-              <a:rPr sz="1300">
-                <a:solidFill>
-                  <a:srgbClr val="059669"/>
-                </a:solidFill>
-                <a:latin typeface="Calibri"/>
-              </a:rPr>
-              <a:t>■  </a:t>
-            </a:r>
-            <a:r>
-              <a:rPr sz="1500">
-                <a:solidFill>
-                  <a:srgbClr val="333333"/>
-                </a:solidFill>
-                <a:latin typeface="Calibri"/>
-              </a:rPr>
-              <a:t>43-feature model (Major+Trace, no endmembers): F1-macro = 0.914 on test set (90/10 split, 39,631 rows)</a:t>
-            </a:r>
-          </a:p>
-          <a:p>
-            <a:pPr>
-              <a:spcAft>
-                <a:spcPts val="100"/>
-              </a:spcAft>
-            </a:pPr>
-          </a:p>
-          <a:p>
-            <a:pPr>
-              <a:spcBef>
-                <a:spcPts val="100"/>
-              </a:spcBef>
-              <a:spcAft>
-                <a:spcPts val="500"/>
-              </a:spcAft>
-              <a:defRPr sz="1500" i="0">
-                <a:solidFill>
-                  <a:srgbClr val="333333"/>
-                </a:solidFill>
-                <a:latin typeface="Calibri"/>
-              </a:defRPr>
-            </a:pPr>
-            <a:r>
-              <a:rPr sz="1300">
-                <a:solidFill>
-                  <a:srgbClr val="059669"/>
-                </a:solidFill>
-                <a:latin typeface="Calibri"/>
-              </a:rPr>
-              <a:t>■  </a:t>
-            </a:r>
-            <a:r>
-              <a:rPr sz="1500">
-                <a:solidFill>
-                  <a:srgbClr val="333333"/>
-                </a:solidFill>
-                <a:latin typeface="Calibri"/>
-              </a:rPr>
-              <a:t>Endmembers contribute &lt;0.006 F1; dropped for parsimony (43 vs 50 features)</a:t>
-            </a:r>
-          </a:p>
-          <a:p>
-            <a:pPr>
-              <a:spcAft>
-                <a:spcPts val="100"/>
-              </a:spcAft>
-            </a:pPr>
-          </a:p>
-          <a:p>
-            <a:pPr>
-              <a:spcBef>
-                <a:spcPts val="100"/>
-              </a:spcBef>
-              <a:spcAft>
-                <a:spcPts val="500"/>
-              </a:spcAft>
-              <a:defRPr sz="1500" i="0">
-                <a:solidFill>
-                  <a:srgbClr val="333333"/>
-                </a:solidFill>
-                <a:latin typeface="Calibri"/>
-              </a:defRPr>
-            </a:pPr>
-            <a:r>
-              <a:rPr sz="1300">
-                <a:solidFill>
-                  <a:srgbClr val="D97706"/>
-                </a:solidFill>
-                <a:latin typeface="Calibri"/>
-              </a:rPr>
-              <a:t>■  </a:t>
-            </a:r>
-            <a:r>
-              <a:rPr sz="1500">
-                <a:solidFill>
-                  <a:srgbClr val="333333"/>
-                </a:solidFill>
-                <a:latin typeface="Calibri"/>
-              </a:rPr>
-              <a:t>Trace elements are decisive: +0.475 F1-macro contribution when added to major oxides</a:t>
-            </a:r>
-          </a:p>
-          <a:p>
-            <a:pPr>
-              <a:spcAft>
-                <a:spcPts val="100"/>
-              </a:spcAft>
-            </a:pPr>
-          </a:p>
-          <a:p>
-            <a:pPr>
-              <a:spcBef>
-                <a:spcPts val="100"/>
-              </a:spcBef>
-              <a:spcAft>
-                <a:spcPts val="500"/>
-              </a:spcAft>
-              <a:defRPr sz="1500" i="0">
-                <a:solidFill>
-                  <a:srgbClr val="333333"/>
-                </a:solidFill>
-                <a:latin typeface="Calibri"/>
-              </a:defRPr>
-            </a:pPr>
-            <a:r>
-              <a:rPr sz="1300">
-                <a:solidFill>
-                  <a:srgbClr val="2563EB"/>
-                </a:solidFill>
-                <a:latin typeface="Calibri"/>
-              </a:rPr>
-              <a:t>■  </a:t>
-            </a:r>
-            <a:r>
-              <a:rPr sz="1500">
-                <a:solidFill>
-                  <a:srgbClr val="333333"/>
-                </a:solidFill>
-                <a:latin typeface="Calibri"/>
-              </a:rPr>
-              <a:t>K2O is the strongest statistical discriminator among major oxides (CV = 1.753)</a:t>
-            </a:r>
-          </a:p>
-          <a:p>
-            <a:pPr>
-              <a:spcAft>
-                <a:spcPts val="100"/>
-              </a:spcAft>
-            </a:pPr>
-          </a:p>
-          <a:p>
-            <a:pPr>
-              <a:spcBef>
-                <a:spcPts val="100"/>
-              </a:spcBef>
-              <a:spcAft>
-                <a:spcPts val="500"/>
-              </a:spcAft>
-              <a:defRPr sz="1500" i="0">
-                <a:solidFill>
-                  <a:srgbClr val="333333"/>
-                </a:solidFill>
-                <a:latin typeface="Calibri"/>
-              </a:defRPr>
-            </a:pPr>
-            <a:r>
-              <a:rPr sz="1300">
-                <a:solidFill>
-                  <a:srgbClr val="1A2744"/>
-                </a:solidFill>
-                <a:latin typeface="Calibri"/>
-              </a:rPr>
-              <a:t>■  </a:t>
-            </a:r>
-            <a:r>
-              <a:rPr sz="1500">
-                <a:solidFill>
-                  <a:srgbClr val="333333"/>
-                </a:solidFill>
-                <a:latin typeface="Calibri"/>
-              </a:rPr>
-              <a:t>SHAP analysis: Sr, Sm, Zr, Sc have the highest individual prediction impact</a:t>
-            </a:r>
-          </a:p>
-          <a:p>
-            <a:pPr>
-              <a:spcAft>
-                <a:spcPts val="100"/>
-              </a:spcAft>
-            </a:pPr>
-          </a:p>
-          <a:p>
-            <a:pPr>
-              <a:spcBef>
-                <a:spcPts val="100"/>
-              </a:spcBef>
-              <a:spcAft>
-                <a:spcPts val="500"/>
-              </a:spcAft>
-              <a:defRPr sz="1500" i="0">
-                <a:solidFill>
-                  <a:srgbClr val="333333"/>
-                </a:solidFill>
-                <a:latin typeface="Calibri"/>
-              </a:defRPr>
-            </a:pPr>
-            <a:r>
-              <a:rPr sz="1300">
-                <a:solidFill>
-                  <a:srgbClr val="7C3AED"/>
-                </a:solidFill>
-                <a:latin typeface="Calibri"/>
-              </a:rPr>
-              <a:t>■  </a:t>
-            </a:r>
-            <a:r>
-              <a:rPr sz="1500">
-                <a:solidFill>
-                  <a:srgbClr val="333333"/>
-                </a:solidFill>
-                <a:latin typeface="Calibri"/>
-              </a:rPr>
-              <a:t>Intraplate Volcanics dominated by mantle xenoliths -- F1 drops on basalt+phenocryst slice</a:t>
-            </a:r>
-          </a:p>
-          <a:p>
-            <a:pPr>
-              <a:spcAft>
-                <a:spcPts val="100"/>
-              </a:spcAft>
-            </a:pPr>
-          </a:p>
-          <a:p>
-            <a:pPr>
-              <a:spcBef>
-                <a:spcPts val="100"/>
-              </a:spcBef>
-              <a:spcAft>
-                <a:spcPts val="500"/>
-              </a:spcAft>
-              <a:defRPr sz="1500" i="0">
-                <a:solidFill>
-                  <a:srgbClr val="333333"/>
-                </a:solidFill>
-                <a:latin typeface="Calibri"/>
-              </a:defRPr>
-            </a:pPr>
-            <a:r>
-              <a:rPr sz="1300">
-                <a:solidFill>
-                  <a:srgbClr val="1A2744"/>
-                </a:solidFill>
-                <a:latin typeface="Calibri"/>
-              </a:rPr>
-              <a:t>■  </a:t>
-            </a:r>
-            <a:r>
-              <a:rPr sz="1500">
-                <a:solidFill>
-                  <a:srgbClr val="333333"/>
-                </a:solidFill>
-                <a:latin typeface="Calibri"/>
-              </a:rPr>
-              <a:t>54-experiment matrix (9 subsets x 6 feature groups) confirms robustness across configurations</a:t>
-            </a:r>
-          </a:p>
-          <a:p>
-            <a:pPr>
-              <a:spcAft>
-                <a:spcPts val="100"/>
-              </a:spcAft>
-            </a:pPr>
-          </a:p>
-          <a:p>
-            <a:pPr>
-              <a:spcBef>
-                <a:spcPts val="100"/>
-              </a:spcBef>
-              <a:spcAft>
-                <a:spcPts val="500"/>
-              </a:spcAft>
-              <a:defRPr sz="1500" i="0">
-                <a:solidFill>
-                  <a:srgbClr val="333333"/>
-                </a:solidFill>
-                <a:latin typeface="Calibri"/>
-              </a:defRPr>
-            </a:pPr>
-            <a:r>
-              <a:rPr sz="1300">
-                <a:solidFill>
-                  <a:srgbClr val="2563EB"/>
-                </a:solidFill>
-                <a:latin typeface="Calibri"/>
-              </a:rPr>
-              <a:t>■  </a:t>
-            </a:r>
-            <a:r>
-              <a:rPr sz="1500">
-                <a:solidFill>
-                  <a:srgbClr val="333333"/>
-                </a:solidFill>
-                <a:latin typeface="Calibri"/>
-              </a:rPr>
-              <a:t>Class imbalance (409.8 : 1) managed via balanced sample weights, not resampling</a:t>
-            </a:r>
-          </a:p>
-        </p:txBody>
-      </p:sp>
-    </p:spTree>
-  </p:cSld>
-  <p:clrMapOvr>
-    <a:masterClrMapping/>
-  </p:clrMapOvr>
-</p:sld>
-</file>
-
-<file path=ppt/slides/slide19.xml><?xml version="1.0" encoding="utf-8"?>
-<p:sld xmlns:a="http://schemas.openxmlformats.org/drawingml/2006/main" xmlns:p="http://schemas.openxmlformats.org/presentationml/2006/main" xmlns:r="http://schemas.openxmlformats.org/officeDocument/2006/relationships">
-  <p:cSld>
-    <p:spTree>
-      <p:nvGrpSpPr>
-        <p:cNvPr id="1" name=""/>
-        <p:cNvGrpSpPr/>
-        <p:nvPr/>
-      </p:nvGrpSpPr>
-      <p:grpSpPr/>
-      <p:sp>
-        <p:nvSpPr>
-          <p:cNvPr id="2" name="TextBox 1"/>
-          <p:cNvSpPr txBox="1"/>
-          <p:nvPr/>
-        </p:nvSpPr>
-        <p:spPr>
-          <a:xfrm>
-            <a:off x="548640" y="274320"/>
-            <a:ext cx="10972800" cy="640080"/>
-          </a:xfrm>
-          <a:prstGeom prst="rect">
-            <a:avLst/>
-          </a:prstGeom>
-          <a:noFill/>
-        </p:spPr>
-        <p:txBody>
-          <a:bodyPr wrap="square">
-            <a:spAutoFit/>
-          </a:bodyPr>
-          <a:lstStyle/>
-          <a:p>
-            <a:pPr>
-              <a:defRPr sz="2800" b="1">
-                <a:solidFill>
-                  <a:srgbClr val="1A2744"/>
-                </a:solidFill>
-                <a:latin typeface="Calibri"/>
-              </a:defRPr>
-            </a:pPr>
-            <a:r>
-              <a:t>Methodology Summary</a:t>
-            </a:r>
-          </a:p>
-        </p:txBody>
-      </p:sp>
-      <p:sp>
-        <p:nvSpPr>
-          <p:cNvPr id="3" name="Rectangle 2"/>
-          <p:cNvSpPr/>
-          <p:nvPr/>
-        </p:nvSpPr>
-        <p:spPr>
-          <a:xfrm>
-            <a:off x="548640" y="1005840"/>
-            <a:ext cx="10972800" cy="25400"/>
-          </a:xfrm>
-          <a:prstGeom prst="rect">
-            <a:avLst/>
-          </a:prstGeom>
-          <a:solidFill>
-            <a:srgbClr val="2563EB"/>
-          </a:solidFill>
-          <a:ln>
-            <a:noFill/>
-          </a:ln>
-        </p:spPr>
-        <p:style>
-          <a:lnRef idx="1">
-            <a:schemeClr val="accent1"/>
-          </a:lnRef>
-          <a:fillRef idx="3">
-            <a:schemeClr val="accent1"/>
-          </a:fillRef>
-          <a:effectRef idx="2">
-            <a:schemeClr val="accent1"/>
-          </a:effectRef>
-          <a:fontRef idx="minor">
-            <a:schemeClr val="lt1"/>
-          </a:fontRef>
-        </p:style>
-        <p:txBody>
-          <a:bodyPr rtlCol="0" anchor="ctr"/>
-          <a:lstStyle/>
-          <a:p>
-            <a:pPr algn="ctr"/>
-          </a:p>
-        </p:txBody>
-      </p:sp>
-      <p:sp>
-        <p:nvSpPr>
-          <p:cNvPr id="4" name="TextBox 3"/>
-          <p:cNvSpPr txBox="1"/>
-          <p:nvPr/>
-        </p:nvSpPr>
-        <p:spPr>
-          <a:xfrm>
-            <a:off x="548640" y="1371600"/>
-            <a:ext cx="5029200" cy="365760"/>
-          </a:xfrm>
-          <a:prstGeom prst="rect">
-            <a:avLst/>
-          </a:prstGeom>
-          <a:noFill/>
-        </p:spPr>
-        <p:txBody>
-          <a:bodyPr wrap="none">
-            <a:spAutoFit/>
-          </a:bodyPr>
-          <a:lstStyle/>
-          <a:p>
-            <a:pPr>
-              <a:defRPr sz="1800" b="1">
-                <a:solidFill>
-                  <a:srgbClr val="2563EB"/>
-                </a:solidFill>
-                <a:latin typeface="Calibri"/>
-              </a:defRPr>
-            </a:pPr>
-            <a:r>
-              <a:t>Model</a:t>
-            </a:r>
-          </a:p>
-        </p:txBody>
-      </p:sp>
-      <p:sp>
-        <p:nvSpPr>
-          <p:cNvPr id="5" name="TextBox 4"/>
-          <p:cNvSpPr txBox="1"/>
-          <p:nvPr/>
-        </p:nvSpPr>
-        <p:spPr>
-          <a:xfrm>
-            <a:off x="731520" y="1783080"/>
-            <a:ext cx="4846320" cy="1737360"/>
-          </a:xfrm>
-          <a:prstGeom prst="rect">
-            <a:avLst/>
-          </a:prstGeom>
-          <a:noFill/>
-        </p:spPr>
-        <p:txBody>
-          <a:bodyPr wrap="square">
-            <a:spAutoFit/>
-          </a:bodyPr>
-          <a:lstStyle/>
-          <a:p>
-            <a:pPr>
-              <a:spcAft>
-                <a:spcPts val="400"/>
-              </a:spcAft>
-              <a:defRPr sz="1400">
-                <a:solidFill>
-                  <a:srgbClr val="333333"/>
-                </a:solidFill>
-                <a:latin typeface="Calibri"/>
-              </a:defRPr>
-            </a:pPr>
-            <a:r>
-              <a:t>•  XGBoost (tree_method='hist')</a:t>
-            </a:r>
-          </a:p>
-          <a:p>
-            <a:pPr>
-              <a:spcAft>
-                <a:spcPts val="400"/>
-              </a:spcAft>
-              <a:defRPr sz="1400">
-                <a:solidFill>
-                  <a:srgbClr val="333333"/>
-                </a:solidFill>
-                <a:latin typeface="Calibri"/>
-              </a:defRPr>
-            </a:pPr>
-            <a:r>
-              <a:t>•  max_depth = 12, learning_rate = 0.08</a:t>
-            </a:r>
-          </a:p>
-          <a:p>
-            <a:pPr>
-              <a:spcAft>
-                <a:spcPts val="400"/>
-              </a:spcAft>
-              <a:defRPr sz="1400">
-                <a:solidFill>
-                  <a:srgbClr val="333333"/>
-                </a:solidFill>
-                <a:latin typeface="Calibri"/>
-              </a:defRPr>
-            </a:pPr>
-            <a:r>
-              <a:t>•  n_estimators = 400</a:t>
-            </a:r>
-          </a:p>
-          <a:p>
-            <a:pPr>
-              <a:spcAft>
-                <a:spcPts val="400"/>
-              </a:spcAft>
-              <a:defRPr sz="1400">
-                <a:solidFill>
-                  <a:srgbClr val="333333"/>
-                </a:solidFill>
-                <a:latin typeface="Calibri"/>
-              </a:defRPr>
-            </a:pPr>
-            <a:r>
-              <a:t>•  Native NaN handling (no imputation)</a:t>
-            </a:r>
-          </a:p>
-          <a:p>
-            <a:pPr>
-              <a:spcAft>
-                <a:spcPts val="400"/>
-              </a:spcAft>
-              <a:defRPr sz="1400">
-                <a:solidFill>
-                  <a:srgbClr val="333333"/>
-                </a:solidFill>
-                <a:latin typeface="Calibri"/>
-              </a:defRPr>
-            </a:pPr>
-            <a:r>
-              <a:t>•  Balanced sample weights for class imbalance</a:t>
-            </a:r>
-          </a:p>
-        </p:txBody>
-      </p:sp>
-      <p:sp>
-        <p:nvSpPr>
-          <p:cNvPr id="6" name="TextBox 5"/>
-          <p:cNvSpPr txBox="1"/>
-          <p:nvPr/>
-        </p:nvSpPr>
-        <p:spPr>
-          <a:xfrm>
-            <a:off x="548640" y="3794759"/>
-            <a:ext cx="5029200" cy="365760"/>
-          </a:xfrm>
-          <a:prstGeom prst="rect">
-            <a:avLst/>
-          </a:prstGeom>
-          <a:noFill/>
-        </p:spPr>
-        <p:txBody>
-          <a:bodyPr wrap="none">
-            <a:spAutoFit/>
-          </a:bodyPr>
-          <a:lstStyle/>
-          <a:p>
-            <a:pPr>
-              <a:defRPr sz="1800" b="1">
-                <a:solidFill>
-                  <a:srgbClr val="2563EB"/>
-                </a:solidFill>
-                <a:latin typeface="Calibri"/>
-              </a:defRPr>
-            </a:pPr>
-            <a:r>
-              <a:t>Validation</a:t>
-            </a:r>
-          </a:p>
-        </p:txBody>
-      </p:sp>
-      <p:sp>
-        <p:nvSpPr>
-          <p:cNvPr id="7" name="TextBox 6"/>
-          <p:cNvSpPr txBox="1"/>
-          <p:nvPr/>
-        </p:nvSpPr>
-        <p:spPr>
-          <a:xfrm>
-            <a:off x="731520" y="4206239"/>
-            <a:ext cx="4846320" cy="1042416"/>
-          </a:xfrm>
-          <a:prstGeom prst="rect">
-            <a:avLst/>
-          </a:prstGeom>
-          <a:noFill/>
-        </p:spPr>
-        <p:txBody>
-          <a:bodyPr wrap="square">
-            <a:spAutoFit/>
-          </a:bodyPr>
-          <a:lstStyle/>
-          <a:p>
-            <a:pPr>
-              <a:spcAft>
-                <a:spcPts val="400"/>
-              </a:spcAft>
-              <a:defRPr sz="1400">
-                <a:solidFill>
-                  <a:srgbClr val="333333"/>
-                </a:solidFill>
-                <a:latin typeface="Calibri"/>
-              </a:defRPr>
-            </a:pPr>
-            <a:r>
-              <a:t>•  90/10 stratified split (primary model)</a:t>
-            </a:r>
-          </a:p>
-          <a:p>
-            <a:pPr>
-              <a:spcAft>
-                <a:spcPts val="400"/>
-              </a:spcAft>
-              <a:defRPr sz="1400">
-                <a:solidFill>
-                  <a:srgbClr val="333333"/>
-                </a:solidFill>
-                <a:latin typeface="Calibri"/>
-              </a:defRPr>
-            </a:pPr>
-            <a:r>
-              <a:t>•  54-experiment matrix with 5-fold CV</a:t>
-            </a:r>
-          </a:p>
-          <a:p>
-            <a:pPr>
-              <a:spcAft>
-                <a:spcPts val="400"/>
-              </a:spcAft>
-              <a:defRPr sz="1400">
-                <a:solidFill>
-                  <a:srgbClr val="333333"/>
-                </a:solidFill>
-                <a:latin typeface="Calibri"/>
-              </a:defRPr>
-            </a:pPr>
-            <a:r>
-              <a:t>•  F1-macro as primary metric (equal class weighting)</a:t>
-            </a:r>
-          </a:p>
-        </p:txBody>
-      </p:sp>
-      <p:sp>
-        <p:nvSpPr>
-          <p:cNvPr id="8" name="TextBox 7"/>
-          <p:cNvSpPr txBox="1"/>
-          <p:nvPr/>
-        </p:nvSpPr>
-        <p:spPr>
-          <a:xfrm>
-            <a:off x="6217920" y="1371600"/>
-            <a:ext cx="5029200" cy="365760"/>
-          </a:xfrm>
-          <a:prstGeom prst="rect">
-            <a:avLst/>
-          </a:prstGeom>
-          <a:noFill/>
-        </p:spPr>
-        <p:txBody>
-          <a:bodyPr wrap="none">
-            <a:spAutoFit/>
-          </a:bodyPr>
-          <a:lstStyle/>
-          <a:p>
-            <a:pPr>
-              <a:defRPr sz="1800" b="1">
-                <a:solidFill>
-                  <a:srgbClr val="2563EB"/>
-                </a:solidFill>
-                <a:latin typeface="Calibri"/>
-              </a:defRPr>
-            </a:pPr>
-            <a:r>
-              <a:t>Features</a:t>
-            </a:r>
-          </a:p>
-        </p:txBody>
-      </p:sp>
-      <p:sp>
-        <p:nvSpPr>
-          <p:cNvPr id="9" name="TextBox 8"/>
-          <p:cNvSpPr txBox="1"/>
-          <p:nvPr/>
-        </p:nvSpPr>
-        <p:spPr>
-          <a:xfrm>
-            <a:off x="6400800" y="1783080"/>
-            <a:ext cx="4846320" cy="1042416"/>
-          </a:xfrm>
-          <a:prstGeom prst="rect">
-            <a:avLst/>
-          </a:prstGeom>
-          <a:noFill/>
-        </p:spPr>
-        <p:txBody>
-          <a:bodyPr wrap="square">
-            <a:spAutoFit/>
-          </a:bodyPr>
-          <a:lstStyle/>
-          <a:p>
-            <a:pPr>
-              <a:spcAft>
-                <a:spcPts val="400"/>
-              </a:spcAft>
-              <a:defRPr sz="1400">
-                <a:solidFill>
-                  <a:srgbClr val="333333"/>
-                </a:solidFill>
-                <a:latin typeface="Calibri"/>
-              </a:defRPr>
-            </a:pPr>
-            <a:r>
-              <a:t>•  11 major oxides (SiO2 through NiO)</a:t>
-            </a:r>
-          </a:p>
-          <a:p>
-            <a:pPr>
-              <a:spcAft>
-                <a:spcPts val="400"/>
-              </a:spcAft>
-              <a:defRPr sz="1400">
-                <a:solidFill>
-                  <a:srgbClr val="333333"/>
-                </a:solidFill>
-                <a:latin typeface="Calibri"/>
-              </a:defRPr>
-            </a:pPr>
-            <a:r>
-              <a:t>•  32 trace elements (Sc through U)</a:t>
-            </a:r>
-          </a:p>
-          <a:p>
-            <a:pPr>
-              <a:spcAft>
-                <a:spcPts val="400"/>
-              </a:spcAft>
-              <a:defRPr sz="1400">
-                <a:solidFill>
-                  <a:srgbClr val="333333"/>
-                </a:solidFill>
-                <a:latin typeface="Calibri"/>
-              </a:defRPr>
-            </a:pPr>
-            <a:r>
-              <a:t>•  43 total features (no endmembers)</a:t>
-            </a:r>
-          </a:p>
-        </p:txBody>
-      </p:sp>
-      <p:sp>
-        <p:nvSpPr>
-          <p:cNvPr id="10" name="TextBox 9"/>
-          <p:cNvSpPr txBox="1"/>
-          <p:nvPr/>
-        </p:nvSpPr>
-        <p:spPr>
-          <a:xfrm>
-            <a:off x="6217920" y="3099816"/>
-            <a:ext cx="5029200" cy="365760"/>
-          </a:xfrm>
-          <a:prstGeom prst="rect">
-            <a:avLst/>
-          </a:prstGeom>
-          <a:noFill/>
-        </p:spPr>
-        <p:txBody>
-          <a:bodyPr wrap="none">
-            <a:spAutoFit/>
-          </a:bodyPr>
-          <a:lstStyle/>
-          <a:p>
-            <a:pPr>
-              <a:defRPr sz="1800" b="1">
-                <a:solidFill>
-                  <a:srgbClr val="2563EB"/>
-                </a:solidFill>
-                <a:latin typeface="Calibri"/>
-              </a:defRPr>
-            </a:pPr>
-            <a:r>
-              <a:t>Interpretation</a:t>
-            </a:r>
-          </a:p>
-        </p:txBody>
-      </p:sp>
-      <p:sp>
-        <p:nvSpPr>
-          <p:cNvPr id="11" name="TextBox 10"/>
-          <p:cNvSpPr txBox="1"/>
-          <p:nvPr/>
-        </p:nvSpPr>
-        <p:spPr>
-          <a:xfrm>
-            <a:off x="6400800" y="3511296"/>
-            <a:ext cx="4846320" cy="1042416"/>
-          </a:xfrm>
-          <a:prstGeom prst="rect">
-            <a:avLst/>
-          </a:prstGeom>
-          <a:noFill/>
-        </p:spPr>
-        <p:txBody>
-          <a:bodyPr wrap="square">
-            <a:spAutoFit/>
-          </a:bodyPr>
-          <a:lstStyle/>
-          <a:p>
-            <a:pPr>
-              <a:spcAft>
-                <a:spcPts val="400"/>
-              </a:spcAft>
-              <a:defRPr sz="1400">
-                <a:solidFill>
-                  <a:srgbClr val="333333"/>
-                </a:solidFill>
-                <a:latin typeface="Calibri"/>
-              </a:defRPr>
-            </a:pPr>
-            <a:r>
-              <a:t>•  SHAP TreeExplainer (1,000 sample subset)</a:t>
-            </a:r>
-          </a:p>
-          <a:p>
-            <a:pPr>
-              <a:spcAft>
-                <a:spcPts val="400"/>
-              </a:spcAft>
-              <a:defRPr sz="1400">
-                <a:solidFill>
-                  <a:srgbClr val="333333"/>
-                </a:solidFill>
-                <a:latin typeface="Calibri"/>
-              </a:defRPr>
-            </a:pPr>
-            <a:r>
-              <a:t>•  Global and per-class feature importance</a:t>
-            </a:r>
-          </a:p>
-          <a:p>
-            <a:pPr>
-              <a:spcAft>
-                <a:spcPts val="400"/>
-              </a:spcAft>
-              <a:defRPr sz="1400">
-                <a:solidFill>
-                  <a:srgbClr val="333333"/>
-                </a:solidFill>
-                <a:latin typeface="Calibri"/>
-              </a:defRPr>
-            </a:pPr>
-            <a:r>
-              <a:t>•  Signed SHAP values for directional effects</a:t>
-            </a:r>
-          </a:p>
-        </p:txBody>
-      </p:sp>
-      <p:sp>
-        <p:nvSpPr>
-          <p:cNvPr id="12" name="TextBox 11"/>
-          <p:cNvSpPr txBox="1"/>
-          <p:nvPr/>
-        </p:nvSpPr>
-        <p:spPr>
-          <a:xfrm>
-            <a:off x="548640" y="6126480"/>
-            <a:ext cx="10972800" cy="365760"/>
-          </a:xfrm>
-          <a:prstGeom prst="rect">
-            <a:avLst/>
-          </a:prstGeom>
-          <a:noFill/>
-        </p:spPr>
-        <p:txBody>
-          <a:bodyPr wrap="square">
-            <a:spAutoFit/>
-          </a:bodyPr>
-          <a:lstStyle/>
-          <a:p>
-            <a:pPr algn="l">
-              <a:defRPr sz="1200" b="0">
-                <a:solidFill>
-                  <a:srgbClr val="666666"/>
-                </a:solidFill>
-                <a:latin typeface="Calibri"/>
-              </a:defRPr>
-            </a:pPr>
-            <a:r>
-              <a:t>Data: GEOROC / GRO.data (DOI:10.25625/SGFTFN)  |  211,773 clinopyroxene analyses  |  11 tectonic settings</a:t>
-            </a:r>
-          </a:p>
-        </p:txBody>
-      </p:sp>
-    </p:spTree>
-  </p:cSld>
-  <p:clrMapOvr>
-    <a:masterClrMapping/>
-  </p:clrMapOvr>
-</p:sld>
-</file>
-
-<file path=ppt/slides/slide2.xml><?xml version="1.0" encoding="utf-8"?>
-<p:sld xmlns:a="http://schemas.openxmlformats.org/drawingml/2006/main" xmlns:p="http://schemas.openxmlformats.org/presentationml/2006/main" xmlns:r="http://schemas.openxmlformats.org/officeDocument/2006/relationships">
-  <p:cSld>
-    <p:spTree>
-      <p:nvGrpSpPr>
-        <p:cNvPr id="1" name=""/>
-        <p:cNvGrpSpPr/>
-        <p:nvPr/>
-      </p:nvGrpSpPr>
-      <p:grpSpPr/>
-      <p:sp>
-        <p:nvSpPr>
-          <p:cNvPr id="2" name="TextBox 1"/>
-          <p:cNvSpPr txBox="1"/>
-          <p:nvPr/>
-        </p:nvSpPr>
-        <p:spPr>
-          <a:xfrm>
-            <a:off x="548640" y="274320"/>
-            <a:ext cx="10972800" cy="640080"/>
-          </a:xfrm>
-          <a:prstGeom prst="rect">
-            <a:avLst/>
-          </a:prstGeom>
-          <a:noFill/>
-        </p:spPr>
-        <p:txBody>
-          <a:bodyPr wrap="square">
-            <a:spAutoFit/>
-          </a:bodyPr>
-          <a:lstStyle/>
-          <a:p>
-            <a:pPr>
-              <a:defRPr sz="2800" b="1">
-                <a:solidFill>
-                  <a:srgbClr val="1A2744"/>
-                </a:solidFill>
-                <a:latin typeface="Calibri"/>
-              </a:defRPr>
-            </a:pPr>
-            <a:r>
-              <a:t>Dataset Overview</a:t>
-            </a:r>
-          </a:p>
-        </p:txBody>
-      </p:sp>
-      <p:sp>
-        <p:nvSpPr>
-          <p:cNvPr id="3" name="Rectangle 2"/>
-          <p:cNvSpPr/>
-          <p:nvPr/>
-        </p:nvSpPr>
-        <p:spPr>
-          <a:xfrm>
-            <a:off x="548640" y="1005840"/>
-            <a:ext cx="10972800" cy="25400"/>
-          </a:xfrm>
-          <a:prstGeom prst="rect">
-            <a:avLst/>
-          </a:prstGeom>
-          <a:solidFill>
-            <a:srgbClr val="2563EB"/>
-          </a:solidFill>
-          <a:ln>
-            <a:noFill/>
-          </a:ln>
-        </p:spPr>
-        <p:style>
-          <a:lnRef idx="1">
-            <a:schemeClr val="accent1"/>
-          </a:lnRef>
-          <a:fillRef idx="3">
-            <a:schemeClr val="accent1"/>
-          </a:fillRef>
-          <a:effectRef idx="2">
-            <a:schemeClr val="accent1"/>
-          </a:effectRef>
-          <a:fontRef idx="minor">
-            <a:schemeClr val="lt1"/>
-          </a:fontRef>
-        </p:style>
-        <p:txBody>
-          <a:bodyPr rtlCol="0" anchor="ctr"/>
-          <a:lstStyle/>
-          <a:p>
-            <a:pPr algn="ctr"/>
-          </a:p>
-        </p:txBody>
-      </p:sp>
-      <p:sp>
-        <p:nvSpPr>
-          <p:cNvPr id="4" name="TextBox 3"/>
-          <p:cNvSpPr txBox="1"/>
-          <p:nvPr/>
-        </p:nvSpPr>
-        <p:spPr>
-          <a:xfrm>
-            <a:off x="548640" y="1280160"/>
-            <a:ext cx="5029200" cy="4572000"/>
-          </a:xfrm>
-          <a:prstGeom prst="rect">
-            <a:avLst/>
-          </a:prstGeom>
-          <a:noFill/>
-        </p:spPr>
-        <p:txBody>
-          <a:bodyPr wrap="square">
-            <a:spAutoFit/>
-          </a:bodyPr>
-          <a:lstStyle/>
-          <a:p>
-            <a:pPr>
-              <a:spcAft>
-                <a:spcPts val="400"/>
-              </a:spcAft>
-              <a:defRPr sz="1400">
-                <a:solidFill>
-                  <a:srgbClr val="333333"/>
-                </a:solidFill>
-                <a:latin typeface="Consolas"/>
-              </a:defRPr>
-            </a:pPr>
-            <a:r>
-              <a:t>Total records:               216,809</a:t>
-            </a:r>
-          </a:p>
-          <a:p>
-            <a:pPr>
-              <a:spcAft>
-                <a:spcPts val="400"/>
-              </a:spcAft>
-              <a:defRPr sz="1400">
-                <a:solidFill>
-                  <a:srgbClr val="333333"/>
-                </a:solidFill>
-                <a:latin typeface="Consolas"/>
-              </a:defRPr>
-            </a:pPr>
-            <a:r>
-              <a:t>Valid (with tectonic label):  211,773</a:t>
-            </a:r>
-          </a:p>
-          <a:p>
-            <a:pPr>
-              <a:spcAft>
-                <a:spcPts val="400"/>
-              </a:spcAft>
-              <a:defRPr sz="1400">
-                <a:solidFill>
-                  <a:srgbClr val="333333"/>
-                </a:solidFill>
-                <a:latin typeface="Consolas"/>
-              </a:defRPr>
-            </a:pPr>
-            <a:r>
-              <a:t>Columns:                      451</a:t>
-            </a:r>
-          </a:p>
-          <a:p>
-            <a:pPr>
-              <a:spcAft>
-                <a:spcPts val="400"/>
-              </a:spcAft>
-              <a:defRPr sz="1400">
-                <a:solidFill>
-                  <a:srgbClr val="333333"/>
-                </a:solidFill>
-                <a:latin typeface="Consolas"/>
-              </a:defRPr>
-            </a:pPr>
-            <a:r>
-              <a:t>Tectonic settings:            11</a:t>
-            </a:r>
-          </a:p>
-          <a:p>
-            <a:pPr>
-              <a:spcAft>
-                <a:spcPts val="400"/>
-              </a:spcAft>
-              <a:defRPr sz="1400">
-                <a:solidFill>
-                  <a:srgbClr val="333333"/>
-                </a:solidFill>
-                <a:latin typeface="Consolas"/>
-              </a:defRPr>
-            </a:pPr>
-            <a:r>
-              <a:t>Class imbalance ratio:        409.8 : 1</a:t>
-            </a:r>
-          </a:p>
-          <a:p>
-            <a:pPr>
-              <a:spcAft>
-                <a:spcPts val="400"/>
-              </a:spcAft>
-              <a:defRPr sz="1400">
-                <a:solidFill>
-                  <a:srgbClr val="333333"/>
-                </a:solidFill>
-                <a:latin typeface="Consolas"/>
-              </a:defRPr>
-            </a:pPr>
-          </a:p>
-          <a:p>
-            <a:pPr>
-              <a:spcAft>
-                <a:spcPts val="400"/>
-              </a:spcAft>
-              <a:defRPr sz="1400">
-                <a:solidFill>
-                  <a:srgbClr val="333333"/>
-                </a:solidFill>
-                <a:latin typeface="Consolas"/>
-              </a:defRPr>
-            </a:pPr>
-            <a:r>
-              <a:t>Rows with complete majors:    0  (zero)</a:t>
-            </a:r>
-          </a:p>
-          <a:p>
-            <a:pPr>
-              <a:spcAft>
-                <a:spcPts val="400"/>
-              </a:spcAft>
-              <a:defRPr sz="1400">
-                <a:solidFill>
-                  <a:srgbClr val="333333"/>
-                </a:solidFill>
-                <a:latin typeface="Consolas"/>
-              </a:defRPr>
-            </a:pPr>
-            <a:r>
-              <a:t>Rows missing ALL trace:       172,142  (81%)</a:t>
-            </a:r>
-          </a:p>
-          <a:p>
-            <a:pPr>
-              <a:spcAft>
-                <a:spcPts val="400"/>
-              </a:spcAft>
-              <a:defRPr sz="1400">
-                <a:solidFill>
-                  <a:srgbClr val="333333"/>
-                </a:solidFill>
-                <a:latin typeface="Consolas"/>
-              </a:defRPr>
-            </a:pPr>
-            <a:r>
-              <a:t>Feature groups used:          43</a:t>
-            </a:r>
-          </a:p>
-          <a:p>
-            <a:pPr>
-              <a:spcAft>
-                <a:spcPts val="400"/>
-              </a:spcAft>
-              <a:defRPr sz="1400">
-                <a:solidFill>
-                  <a:srgbClr val="333333"/>
-                </a:solidFill>
-                <a:latin typeface="Consolas"/>
-              </a:defRPr>
-            </a:pPr>
-            <a:r>
-              <a:t>   Major oxides:  11</a:t>
-            </a:r>
-          </a:p>
-          <a:p>
-            <a:pPr>
-              <a:spcAft>
-                <a:spcPts val="400"/>
-              </a:spcAft>
-              <a:defRPr sz="1400">
-                <a:solidFill>
-                  <a:srgbClr val="333333"/>
-                </a:solidFill>
-                <a:latin typeface="Consolas"/>
-              </a:defRPr>
-            </a:pPr>
-            <a:r>
-              <a:t>   Trace elements: 32</a:t>
-            </a:r>
-          </a:p>
-        </p:txBody>
-      </p:sp>
-      <p:pic>
-        <p:nvPicPr>
-          <p:cNvPr id="5" name="Picture 4" descr="class_distribution.png"/>
-          <p:cNvPicPr>
-            <a:picLocks noChangeAspect="1"/>
-          </p:cNvPicPr>
-          <p:nvPr/>
-        </p:nvPicPr>
-        <p:blipFill>
-          <a:blip r:embed="rId2"/>
-          <a:stretch>
-            <a:fillRect/>
-          </a:stretch>
-        </p:blipFill>
-        <p:spPr>
-          <a:xfrm>
-            <a:off x="6217920" y="1188720"/>
-            <a:ext cx="5486400" cy="4846320"/>
-          </a:xfrm>
-          <a:prstGeom prst="rect">
-            <a:avLst/>
-          </a:prstGeom>
-        </p:spPr>
-      </p:pic>
-    </p:spTree>
-  </p:cSld>
-  <p:clrMapOvr>
-    <a:masterClrMapping/>
-  </p:clrMapOvr>
-</p:sld>
-</file>
-
-<file path=ppt/slides/slide3.xml><?xml version="1.0" encoding="utf-8"?>
-<p:sld xmlns:a="http://schemas.openxmlformats.org/drawingml/2006/main" xmlns:p="http://schemas.openxmlformats.org/presentationml/2006/main" xmlns:r="http://schemas.openxmlformats.org/officeDocument/2006/relationships">
-  <p:cSld>
-    <p:spTree>
-      <p:nvGrpSpPr>
-        <p:cNvPr id="1" name=""/>
-        <p:cNvGrpSpPr/>
-        <p:nvPr/>
-      </p:nvGrpSpPr>
-      <p:grpSpPr/>
-      <p:sp>
-        <p:nvSpPr>
-          <p:cNvPr id="2" name="TextBox 1"/>
-          <p:cNvSpPr txBox="1"/>
-          <p:nvPr/>
-        </p:nvSpPr>
-        <p:spPr>
-          <a:xfrm>
-            <a:off x="548640" y="274320"/>
-            <a:ext cx="10972800" cy="640080"/>
-          </a:xfrm>
-          <a:prstGeom prst="rect">
-            <a:avLst/>
-          </a:prstGeom>
-          <a:noFill/>
-        </p:spPr>
-        <p:txBody>
-          <a:bodyPr wrap="square">
-            <a:spAutoFit/>
-          </a:bodyPr>
-          <a:lstStyle/>
-          <a:p>
-            <a:pPr>
-              <a:defRPr sz="2800" b="1">
-                <a:solidFill>
-                  <a:srgbClr val="1A2744"/>
-                </a:solidFill>
-                <a:latin typeface="Calibri"/>
-              </a:defRPr>
-            </a:pPr>
-            <a:r>
-              <a:t>Missing Data Challenge</a:t>
-            </a:r>
-          </a:p>
-        </p:txBody>
-      </p:sp>
-      <p:sp>
-        <p:nvSpPr>
-          <p:cNvPr id="3" name="Rectangle 2"/>
-          <p:cNvSpPr/>
-          <p:nvPr/>
-        </p:nvSpPr>
-        <p:spPr>
-          <a:xfrm>
-            <a:off x="548640" y="1005840"/>
-            <a:ext cx="10972800" cy="25400"/>
-          </a:xfrm>
-          <a:prstGeom prst="rect">
-            <a:avLst/>
-          </a:prstGeom>
-          <a:solidFill>
-            <a:srgbClr val="2563EB"/>
-          </a:solidFill>
-          <a:ln>
-            <a:noFill/>
-          </a:ln>
-        </p:spPr>
-        <p:style>
-          <a:lnRef idx="1">
-            <a:schemeClr val="accent1"/>
-          </a:lnRef>
-          <a:fillRef idx="3">
-            <a:schemeClr val="accent1"/>
-          </a:fillRef>
-          <a:effectRef idx="2">
-            <a:schemeClr val="accent1"/>
-          </a:effectRef>
-          <a:fontRef idx="minor">
-            <a:schemeClr val="lt1"/>
-          </a:fontRef>
-        </p:style>
-        <p:txBody>
-          <a:bodyPr rtlCol="0" anchor="ctr"/>
-          <a:lstStyle/>
-          <a:p>
-            <a:pPr algn="ctr"/>
-          </a:p>
-        </p:txBody>
-      </p:sp>
-      <p:pic>
-        <p:nvPicPr>
-          <p:cNvPr id="4" name="Picture 3" descr="missing_per_feature.png"/>
-          <p:cNvPicPr>
-            <a:picLocks noChangeAspect="1"/>
-          </p:cNvPicPr>
-          <p:nvPr/>
-        </p:nvPicPr>
-        <p:blipFill>
-          <a:blip r:embed="rId2"/>
-          <a:stretch>
-            <a:fillRect/>
-          </a:stretch>
-        </p:blipFill>
-        <p:spPr>
-          <a:xfrm>
-            <a:off x="365760" y="1188720"/>
-            <a:ext cx="5303520" cy="4572000"/>
-          </a:xfrm>
-          <a:prstGeom prst="rect">
-            <a:avLst/>
-          </a:prstGeom>
-        </p:spPr>
-      </p:pic>
-      <p:pic>
-        <p:nvPicPr>
-          <p:cNvPr id="5" name="Picture 4" descr="missing_per_row.png"/>
-          <p:cNvPicPr>
-            <a:picLocks noChangeAspect="1"/>
-          </p:cNvPicPr>
-          <p:nvPr/>
-        </p:nvPicPr>
-        <p:blipFill>
-          <a:blip r:embed="rId3"/>
-          <a:stretch>
-            <a:fillRect/>
-          </a:stretch>
-        </p:blipFill>
-        <p:spPr>
-          <a:xfrm>
-            <a:off x="6400800" y="1188720"/>
-            <a:ext cx="5303520" cy="4572000"/>
-          </a:xfrm>
-          <a:prstGeom prst="rect">
-            <a:avLst/>
-          </a:prstGeom>
-        </p:spPr>
-      </p:pic>
-      <p:sp>
-        <p:nvSpPr>
-          <p:cNvPr id="6" name="TextBox 5"/>
-          <p:cNvSpPr txBox="1"/>
-          <p:nvPr/>
-        </p:nvSpPr>
-        <p:spPr>
-          <a:xfrm>
-            <a:off x="548640" y="6217920"/>
-            <a:ext cx="10972800" cy="457200"/>
-          </a:xfrm>
-          <a:prstGeom prst="rect">
-            <a:avLst/>
-          </a:prstGeom>
-          <a:noFill/>
-        </p:spPr>
-        <p:txBody>
-          <a:bodyPr wrap="square">
-            <a:spAutoFit/>
-          </a:bodyPr>
-          <a:lstStyle/>
-          <a:p>
-            <a:pPr>
-              <a:defRPr sz="1200" i="1">
-                <a:solidFill>
-                  <a:srgbClr val="666666"/>
-                </a:solidFill>
-                <a:latin typeface="Calibri"/>
-              </a:defRPr>
-            </a:pPr>
-            <a:r>
-              <a:t>Zero rows have complete major oxide coverage. 81% of rows (172,142) are missing ALL 32 trace elements.</a:t>
-            </a:r>
-          </a:p>
-        </p:txBody>
-      </p:sp>
-    </p:spTree>
-  </p:cSld>
-  <p:clrMapOvr>
-    <a:masterClrMapping/>
-  </p:clrMapOvr>
-</p:sld>
-</file>
-
-<file path=ppt/slides/slide4.xml><?xml version="1.0" encoding="utf-8"?>
-<p:sld xmlns:a="http://schemas.openxmlformats.org/drawingml/2006/main" xmlns:p="http://schemas.openxmlformats.org/presentationml/2006/main" xmlns:r="http://schemas.openxmlformats.org/officeDocument/2006/relationships">
-  <p:cSld>
-    <p:spTree>
-      <p:nvGrpSpPr>
-        <p:cNvPr id="1" name=""/>
-        <p:cNvGrpSpPr/>
-        <p:nvPr/>
-      </p:nvGrpSpPr>
-      <p:grpSpPr/>
-      <p:sp>
-        <p:nvSpPr>
-          <p:cNvPr id="2" name="TextBox 1"/>
-          <p:cNvSpPr txBox="1"/>
-          <p:nvPr/>
-        </p:nvSpPr>
-        <p:spPr>
-          <a:xfrm>
-            <a:off x="548640" y="274320"/>
-            <a:ext cx="10972800" cy="640080"/>
-          </a:xfrm>
-          <a:prstGeom prst="rect">
-            <a:avLst/>
-          </a:prstGeom>
-          <a:noFill/>
-        </p:spPr>
-        <p:txBody>
-          <a:bodyPr wrap="square">
-            <a:spAutoFit/>
-          </a:bodyPr>
-          <a:lstStyle/>
-          <a:p>
-            <a:pPr>
-              <a:defRPr sz="2800" b="1">
-                <a:solidFill>
-                  <a:srgbClr val="1A2744"/>
-                </a:solidFill>
-                <a:latin typeface="Calibri"/>
-              </a:defRPr>
-            </a:pPr>
-            <a:r>
-              <a:t>Feature Discrimination Power</a:t>
-            </a:r>
-          </a:p>
-        </p:txBody>
-      </p:sp>
-      <p:sp>
-        <p:nvSpPr>
-          <p:cNvPr id="3" name="Rectangle 2"/>
-          <p:cNvSpPr/>
-          <p:nvPr/>
-        </p:nvSpPr>
-        <p:spPr>
-          <a:xfrm>
-            <a:off x="548640" y="1005840"/>
-            <a:ext cx="10972800" cy="25400"/>
-          </a:xfrm>
-          <a:prstGeom prst="rect">
-            <a:avLst/>
-          </a:prstGeom>
-          <a:solidFill>
-            <a:srgbClr val="2563EB"/>
-          </a:solidFill>
-          <a:ln>
-            <a:noFill/>
-          </a:ln>
-        </p:spPr>
-        <p:style>
-          <a:lnRef idx="1">
-            <a:schemeClr val="accent1"/>
-          </a:lnRef>
-          <a:fillRef idx="3">
-            <a:schemeClr val="accent1"/>
-          </a:fillRef>
-          <a:effectRef idx="2">
-            <a:schemeClr val="accent1"/>
-          </a:effectRef>
-          <a:fontRef idx="minor">
-            <a:schemeClr val="lt1"/>
-          </a:fontRef>
-        </p:style>
-        <p:txBody>
-          <a:bodyPr rtlCol="0" anchor="ctr"/>
-          <a:lstStyle/>
-          <a:p>
-            <a:pPr algn="ctr"/>
-          </a:p>
-        </p:txBody>
-      </p:sp>
-      <p:pic>
-        <p:nvPicPr>
-          <p:cNvPr id="4" name="Picture 3" descr="discrimination.png"/>
-          <p:cNvPicPr>
-            <a:picLocks noChangeAspect="1"/>
-          </p:cNvPicPr>
-          <p:nvPr/>
-        </p:nvPicPr>
-        <p:blipFill>
-          <a:blip r:embed="rId2"/>
-          <a:stretch>
-            <a:fillRect/>
-          </a:stretch>
-        </p:blipFill>
-        <p:spPr>
-          <a:xfrm>
-            <a:off x="731520" y="1188720"/>
-            <a:ext cx="10515600" cy="4572000"/>
-          </a:xfrm>
-          <a:prstGeom prst="rect">
-            <a:avLst/>
-          </a:prstGeom>
-        </p:spPr>
-      </p:pic>
-      <p:sp>
-        <p:nvSpPr>
-          <p:cNvPr id="5" name="TextBox 4"/>
-          <p:cNvSpPr txBox="1"/>
-          <p:nvPr/>
-        </p:nvSpPr>
-        <p:spPr>
-          <a:xfrm>
-            <a:off x="548640" y="6217920"/>
-            <a:ext cx="10972800" cy="457200"/>
-          </a:xfrm>
-          <a:prstGeom prst="rect">
-            <a:avLst/>
-          </a:prstGeom>
-          <a:noFill/>
-        </p:spPr>
-        <p:txBody>
-          <a:bodyPr wrap="square">
-            <a:spAutoFit/>
-          </a:bodyPr>
-          <a:lstStyle/>
-          <a:p>
-            <a:pPr>
-              <a:defRPr sz="1200" i="1">
-                <a:solidFill>
-                  <a:srgbClr val="666666"/>
-                </a:solidFill>
-                <a:latin typeface="Calibri"/>
-              </a:defRPr>
-            </a:pPr>
-            <a:r>
-              <a:t>K2O shows by far the strongest inter-class separation (CV = 1.753) -- not traditionally considered a key CPX discriminator.</a:t>
-            </a:r>
-          </a:p>
-        </p:txBody>
-      </p:sp>
-    </p:spTree>
-  </p:cSld>
-  <p:clrMapOvr>
-    <a:masterClrMapping/>
-  </p:clrMapOvr>
-</p:sld>
-</file>
-
-<file path=ppt/slides/slide5.xml><?xml version="1.0" encoding="utf-8"?>
-<p:sld xmlns:a="http://schemas.openxmlformats.org/drawingml/2006/main" xmlns:p="http://schemas.openxmlformats.org/presentationml/2006/main" xmlns:r="http://schemas.openxmlformats.org/officeDocument/2006/relationships">
-  <p:cSld>
-    <p:spTree>
-      <p:nvGrpSpPr>
-        <p:cNvPr id="1" name=""/>
-        <p:cNvGrpSpPr/>
-        <p:nvPr/>
-      </p:nvGrpSpPr>
-      <p:grpSpPr/>
-      <p:sp>
-        <p:nvSpPr>
-          <p:cNvPr id="2" name="TextBox 1"/>
-          <p:cNvSpPr txBox="1"/>
-          <p:nvPr/>
-        </p:nvSpPr>
-        <p:spPr>
-          <a:xfrm>
-            <a:off x="548640" y="274320"/>
-            <a:ext cx="10972800" cy="640080"/>
-          </a:xfrm>
-          <a:prstGeom prst="rect">
-            <a:avLst/>
-          </a:prstGeom>
-          <a:noFill/>
-        </p:spPr>
-        <p:txBody>
-          <a:bodyPr wrap="square">
-            <a:spAutoFit/>
-          </a:bodyPr>
-          <a:lstStyle/>
-          <a:p>
-            <a:pPr>
-              <a:defRPr sz="2800" b="1">
-                <a:solidFill>
-                  <a:srgbClr val="1A2744"/>
-                </a:solidFill>
-                <a:latin typeface="Calibri"/>
-              </a:defRPr>
-            </a:pPr>
-            <a:r>
-              <a:t>Major Oxide Correlation Matrix</a:t>
-            </a:r>
-          </a:p>
-        </p:txBody>
-      </p:sp>
-      <p:sp>
-        <p:nvSpPr>
-          <p:cNvPr id="3" name="Rectangle 2"/>
-          <p:cNvSpPr/>
-          <p:nvPr/>
-        </p:nvSpPr>
-        <p:spPr>
-          <a:xfrm>
-            <a:off x="548640" y="1005840"/>
-            <a:ext cx="10972800" cy="25400"/>
-          </a:xfrm>
-          <a:prstGeom prst="rect">
-            <a:avLst/>
-          </a:prstGeom>
-          <a:solidFill>
-            <a:srgbClr val="2563EB"/>
-          </a:solidFill>
-          <a:ln>
-            <a:noFill/>
-          </a:ln>
-        </p:spPr>
-        <p:style>
-          <a:lnRef idx="1">
-            <a:schemeClr val="accent1"/>
-          </a:lnRef>
-          <a:fillRef idx="3">
-            <a:schemeClr val="accent1"/>
-          </a:fillRef>
-          <a:effectRef idx="2">
-            <a:schemeClr val="accent1"/>
-          </a:effectRef>
-          <a:fontRef idx="minor">
-            <a:schemeClr val="lt1"/>
-          </a:fontRef>
-        </p:style>
-        <p:txBody>
-          <a:bodyPr rtlCol="0" anchor="ctr"/>
-          <a:lstStyle/>
-          <a:p>
-            <a:pPr algn="ctr"/>
-          </a:p>
-        </p:txBody>
-      </p:sp>
-      <p:pic>
-        <p:nvPicPr>
-          <p:cNvPr id="4" name="Picture 3" descr="correlation_matrix.png"/>
-          <p:cNvPicPr>
-            <a:picLocks noChangeAspect="1"/>
-          </p:cNvPicPr>
-          <p:nvPr/>
-        </p:nvPicPr>
-        <p:blipFill>
-          <a:blip r:embed="rId2"/>
-          <a:stretch>
-            <a:fillRect/>
-          </a:stretch>
-        </p:blipFill>
-        <p:spPr>
-          <a:xfrm>
-            <a:off x="2743200" y="1097280"/>
-            <a:ext cx="6675120" cy="5212080"/>
-          </a:xfrm>
-          <a:prstGeom prst="rect">
-            <a:avLst/>
-          </a:prstGeom>
-        </p:spPr>
-      </p:pic>
-      <p:sp>
-        <p:nvSpPr>
-          <p:cNvPr id="5" name="TextBox 4"/>
-          <p:cNvSpPr txBox="1"/>
-          <p:nvPr/>
-        </p:nvSpPr>
-        <p:spPr>
-          <a:xfrm>
-            <a:off x="548640" y="6217920"/>
-            <a:ext cx="10972800" cy="457200"/>
-          </a:xfrm>
-          <a:prstGeom prst="rect">
-            <a:avLst/>
-          </a:prstGeom>
-          <a:noFill/>
-        </p:spPr>
-        <p:txBody>
-          <a:bodyPr wrap="square">
-            <a:spAutoFit/>
-          </a:bodyPr>
-          <a:lstStyle/>
-          <a:p>
-            <a:pPr>
-              <a:defRPr sz="1200" i="1">
-                <a:solidFill>
-                  <a:srgbClr val="666666"/>
-                </a:solidFill>
-                <a:latin typeface="Calibri"/>
-              </a:defRPr>
-            </a:pPr>
-            <a:r>
-              <a:t>Strong correlations: FeOT-MgO (r=-0.62), SiO2-TiO2 (r=-0.69), SiO2-Al2O3 (r=-0.64). These affect model interpretation via feature collinearity.</a:t>
-            </a:r>
-          </a:p>
-        </p:txBody>
-      </p:sp>
-    </p:spTree>
-  </p:cSld>
-  <p:clrMapOvr>
-    <a:masterClrMapping/>
-  </p:clrMapOvr>
-</p:sld>
-</file>
-
-<file path=ppt/slides/slide6.xml><?xml version="1.0" encoding="utf-8"?>
-<p:sld xmlns:a="http://schemas.openxmlformats.org/drawingml/2006/main" xmlns:p="http://schemas.openxmlformats.org/presentationml/2006/main" xmlns:r="http://schemas.openxmlformats.org/officeDocument/2006/relationships">
-  <p:cSld>
-    <p:spTree>
-      <p:nvGrpSpPr>
-        <p:cNvPr id="1" name=""/>
-        <p:cNvGrpSpPr/>
-        <p:nvPr/>
-      </p:nvGrpSpPr>
-      <p:grpSpPr/>
-      <p:sp>
-        <p:nvSpPr>
-          <p:cNvPr id="2" name="TextBox 1"/>
-          <p:cNvSpPr txBox="1"/>
-          <p:nvPr/>
-        </p:nvSpPr>
-        <p:spPr>
-          <a:xfrm>
-            <a:off x="548640" y="274320"/>
-            <a:ext cx="10972800" cy="640080"/>
-          </a:xfrm>
-          <a:prstGeom prst="rect">
-            <a:avLst/>
-          </a:prstGeom>
-          <a:noFill/>
-        </p:spPr>
-        <p:txBody>
-          <a:bodyPr wrap="square">
-            <a:spAutoFit/>
-          </a:bodyPr>
-          <a:lstStyle/>
-          <a:p>
-            <a:pPr>
-              <a:defRPr sz="2800" b="1">
-                <a:solidFill>
-                  <a:srgbClr val="1A2744"/>
-                </a:solidFill>
-                <a:latin typeface="Calibri"/>
-              </a:defRPr>
-            </a:pPr>
-            <a:r>
-              <a:t>Experiment Summary: 17 Models Across 4 Data Subsets</a:t>
-            </a:r>
-          </a:p>
-        </p:txBody>
-      </p:sp>
-      <p:sp>
-        <p:nvSpPr>
-          <p:cNvPr id="3" name="Rectangle 2"/>
-          <p:cNvSpPr/>
-          <p:nvPr/>
-        </p:nvSpPr>
-        <p:spPr>
-          <a:xfrm>
-            <a:off x="548640" y="1005840"/>
-            <a:ext cx="10972800" cy="25400"/>
-          </a:xfrm>
-          <a:prstGeom prst="rect">
-            <a:avLst/>
-          </a:prstGeom>
-          <a:solidFill>
-            <a:srgbClr val="2563EB"/>
-          </a:solidFill>
-          <a:ln>
-            <a:noFill/>
-          </a:ln>
-        </p:spPr>
-        <p:style>
-          <a:lnRef idx="1">
-            <a:schemeClr val="accent1"/>
-          </a:lnRef>
-          <a:fillRef idx="3">
-            <a:schemeClr val="accent1"/>
-          </a:fillRef>
-          <a:effectRef idx="2">
-            <a:schemeClr val="accent1"/>
-          </a:effectRef>
-          <a:fontRef idx="minor">
-            <a:schemeClr val="lt1"/>
-          </a:fontRef>
-        </p:style>
-        <p:txBody>
-          <a:bodyPr rtlCol="0" anchor="ctr"/>
-          <a:lstStyle/>
-          <a:p>
-            <a:pPr algn="ctr"/>
-          </a:p>
-        </p:txBody>
-      </p:sp>
       <p:graphicFrame>
         <p:nvGraphicFramePr>
-          <p:cNvPr id="4" name="Table 3"/>
+          <p:cNvPr id="5" name="Table 4"/>
           <p:cNvGraphicFramePr>
             <a:graphicFrameLocks noGrp="1"/>
           </p:cNvGraphicFramePr>
           <p:nvPr/>
         </p:nvGraphicFramePr>
         <p:xfrm>
-          <a:off x="274320" y="1188720"/>
-          <a:ext cx="11612880" cy="5303520"/>
+          <a:off x="6309360" y="1280160"/>
+          <a:ext cx="5669280" cy="4846320"/>
         </p:xfrm>
         <a:graphic>
           <a:graphicData uri="http://schemas.openxmlformats.org/drawingml/2006/table">
@@ -8753,21 +5265,20 @@
                 <a:tableStyleId>{5C22544A-7EE6-4342-B048-85BDC9FD1C3A}</a:tableStyleId>
               </a:tblPr>
               <a:tblGrid>
-                <a:gridCol w="1463040"/>
-                <a:gridCol w="4023360"/>
+                <a:gridCol w="1737360"/>
+                <a:gridCol w="640080"/>
                 <a:gridCol w="1097280"/>
                 <a:gridCol w="1097280"/>
-                <a:gridCol w="1463040"/>
-                <a:gridCol w="2468880"/>
+                <a:gridCol w="1097280"/>
               </a:tblGrid>
-              <a:tr h="294640">
+              <a:tr h="538480">
                 <a:tc>
                   <a:txBody>
                     <a:bodyPr/>
                     <a:lstStyle/>
                     <a:p>
                       <a:pPr algn="ctr">
-                        <a:defRPr sz="1100" b="1">
+                        <a:defRPr sz="1000" b="1">
                           <a:solidFill>
                             <a:srgbClr val="FFFFFF"/>
                           </a:solidFill>
@@ -8775,7 +5286,7 @@
                         </a:defRPr>
                       </a:pPr>
                       <a:r>
-                        <a:t>Group</a:t>
+                        <a:t>Class</a:t>
                       </a:r>
                     </a:p>
                   </a:txBody>
@@ -8791,7 +5302,7 @@
                     <a:lstStyle/>
                     <a:p>
                       <a:pPr algn="ctr">
-                        <a:defRPr sz="1100" b="1">
+                        <a:defRPr sz="1000" b="1">
                           <a:solidFill>
                             <a:srgbClr val="FFFFFF"/>
                           </a:solidFill>
@@ -8799,7 +5310,7 @@
                         </a:defRPr>
                       </a:pPr>
                       <a:r>
-                        <a:t>Experiment</a:t>
+                        <a:t>n</a:t>
                       </a:r>
                     </a:p>
                   </a:txBody>
@@ -8815,7 +5326,7 @@
                     <a:lstStyle/>
                     <a:p>
                       <a:pPr algn="ctr">
-                        <a:defRPr sz="1100" b="1">
+                        <a:defRPr sz="1000" b="1">
                           <a:solidFill>
                             <a:srgbClr val="FFFFFF"/>
                           </a:solidFill>
@@ -8823,7 +5334,7 @@
                         </a:defRPr>
                       </a:pPr>
                       <a:r>
-                        <a:t>Rows</a:t>
+                        <a:t>Sliced F1</a:t>
                       </a:r>
                     </a:p>
                   </a:txBody>
@@ -8839,7 +5350,7 @@
                     <a:lstStyle/>
                     <a:p>
                       <a:pPr algn="ctr">
-                        <a:defRPr sz="1100" b="1">
+                        <a:defRPr sz="1000" b="1">
                           <a:solidFill>
                             <a:srgbClr val="FFFFFF"/>
                           </a:solidFill>
@@ -8847,7 +5358,7 @@
                         </a:defRPr>
                       </a:pPr>
                       <a:r>
-                        <a:t>Feat</a:t>
+                        <a:t>Indep F1</a:t>
                       </a:r>
                     </a:p>
                   </a:txBody>
@@ -8863,7 +5374,7 @@
                     <a:lstStyle/>
                     <a:p>
                       <a:pPr algn="ctr">
-                        <a:defRPr sz="1100" b="1">
+                        <a:defRPr sz="1000" b="1">
                           <a:solidFill>
                             <a:srgbClr val="FFFFFF"/>
                           </a:solidFill>
@@ -8871,31 +5382,7 @@
                         </a:defRPr>
                       </a:pPr>
                       <a:r>
-                        <a:t>F1-macro</a:t>
-                      </a:r>
-                    </a:p>
-                  </a:txBody>
-                  <a:tcPr>
-                    <a:solidFill>
-                      <a:srgbClr val="1A2744"/>
-                    </a:solidFill>
-                  </a:tcPr>
-                </a:tc>
-                <a:tc>
-                  <a:txBody>
-                    <a:bodyPr/>
-                    <a:lstStyle/>
-                    <a:p>
-                      <a:pPr algn="ctr">
-                        <a:defRPr sz="1100" b="1">
-                          <a:solidFill>
-                            <a:srgbClr val="FFFFFF"/>
-                          </a:solidFill>
-                          <a:latin typeface="Calibri"/>
-                        </a:defRPr>
-                      </a:pPr>
-                      <a:r>
-                        <a:t>Validation</a:t>
+                        <a:t>Δ (I−S)</a:t>
                       </a:r>
                     </a:p>
                   </a:txBody>
@@ -8906,31 +5393,7 @@
                   </a:tcPr>
                 </a:tc>
               </a:tr>
-              <a:tr h="294640">
-                <a:tc>
-                  <a:txBody>
-                    <a:bodyPr/>
-                    <a:lstStyle/>
-                    <a:p>
-                      <a:pPr algn="ctr">
-                        <a:defRPr sz="1000" b="1">
-                          <a:solidFill>
-                            <a:srgbClr val="2563EB"/>
-                          </a:solidFill>
-                          <a:latin typeface="Calibri"/>
-                        </a:defRPr>
-                      </a:pPr>
-                      <a:r>
-                        <a:t>Quality Subsets</a:t>
-                      </a:r>
-                    </a:p>
-                  </a:txBody>
-                  <a:tcPr anchor="ctr">
-                    <a:solidFill>
-                      <a:srgbClr val="F8F8F8"/>
-                    </a:solidFill>
-                  </a:tcPr>
-                </a:tc>
+              <a:tr h="538480">
                 <a:tc>
                   <a:txBody>
                     <a:bodyPr/>
@@ -8945,7 +5408,7 @@
                         </a:defRPr>
                       </a:pPr>
                       <a:r>
-                        <a:t>Subset M2_T0 (full trace)</a:t>
+                        <a:t>Convergent Margin</a:t>
                       </a:r>
                     </a:p>
                   </a:txBody>
@@ -8969,7 +5432,7 @@
                         </a:defRPr>
                       </a:pPr>
                       <a:r>
-                        <a:t>1,195</a:t>
+                        <a:t>424</a:t>
                       </a:r>
                     </a:p>
                   </a:txBody>
@@ -8993,7 +5456,231 @@
                         </a:defRPr>
                       </a:pPr>
                       <a:r>
-                        <a:t>50</a:t>
+                        <a:t>0.997</a:t>
+                      </a:r>
+                    </a:p>
+                  </a:txBody>
+                  <a:tcPr anchor="ctr">
+                    <a:solidFill>
+                      <a:srgbClr val="F8F8F8"/>
+                    </a:solidFill>
+                  </a:tcPr>
+                </a:tc>
+                <a:tc>
+                  <a:txBody>
+                    <a:bodyPr/>
+                    <a:lstStyle/>
+                    <a:p>
+                      <a:pPr algn="ctr">
+                        <a:defRPr sz="1000">
+                          <a:solidFill>
+                            <a:srgbClr val="333333"/>
+                          </a:solidFill>
+                          <a:latin typeface="Consolas"/>
+                        </a:defRPr>
+                      </a:pPr>
+                      <a:r>
+                        <a:t>0.961</a:t>
+                      </a:r>
+                    </a:p>
+                  </a:txBody>
+                  <a:tcPr anchor="ctr">
+                    <a:solidFill>
+                      <a:srgbClr val="F8F8F8"/>
+                    </a:solidFill>
+                  </a:tcPr>
+                </a:tc>
+                <a:tc>
+                  <a:txBody>
+                    <a:bodyPr/>
+                    <a:lstStyle/>
+                    <a:p>
+                      <a:pPr algn="ctr">
+                        <a:defRPr sz="1000" b="1">
+                          <a:solidFill>
+                            <a:srgbClr val="059669"/>
+                          </a:solidFill>
+                          <a:latin typeface="Consolas"/>
+                        </a:defRPr>
+                      </a:pPr>
+                      <a:r>
+                        <a:t>-0.036</a:t>
+                      </a:r>
+                    </a:p>
+                  </a:txBody>
+                  <a:tcPr anchor="ctr">
+                    <a:solidFill>
+                      <a:srgbClr val="F8F8F8"/>
+                    </a:solidFill>
+                  </a:tcPr>
+                </a:tc>
+              </a:tr>
+              <a:tr h="538480">
+                <a:tc>
+                  <a:txBody>
+                    <a:bodyPr/>
+                    <a:lstStyle/>
+                    <a:p>
+                      <a:pPr algn="l">
+                        <a:defRPr sz="1000">
+                          <a:solidFill>
+                            <a:srgbClr val="333333"/>
+                          </a:solidFill>
+                          <a:latin typeface="Calibri"/>
+                        </a:defRPr>
+                      </a:pPr>
+                      <a:r>
+                        <a:t>Seamount</a:t>
+                      </a:r>
+                    </a:p>
+                  </a:txBody>
+                  <a:tcPr anchor="ctr"/>
+                </a:tc>
+                <a:tc>
+                  <a:txBody>
+                    <a:bodyPr/>
+                    <a:lstStyle/>
+                    <a:p>
+                      <a:pPr algn="ctr">
+                        <a:defRPr sz="1000">
+                          <a:solidFill>
+                            <a:srgbClr val="333333"/>
+                          </a:solidFill>
+                          <a:latin typeface="Consolas"/>
+                        </a:defRPr>
+                      </a:pPr>
+                      <a:r>
+                        <a:t>106</a:t>
+                      </a:r>
+                    </a:p>
+                  </a:txBody>
+                  <a:tcPr anchor="ctr"/>
+                </a:tc>
+                <a:tc>
+                  <a:txBody>
+                    <a:bodyPr/>
+                    <a:lstStyle/>
+                    <a:p>
+                      <a:pPr algn="ctr">
+                        <a:defRPr sz="1000">
+                          <a:solidFill>
+                            <a:srgbClr val="333333"/>
+                          </a:solidFill>
+                          <a:latin typeface="Consolas"/>
+                        </a:defRPr>
+                      </a:pPr>
+                      <a:r>
+                        <a:t>0.986</a:t>
+                      </a:r>
+                    </a:p>
+                  </a:txBody>
+                  <a:tcPr anchor="ctr"/>
+                </a:tc>
+                <a:tc>
+                  <a:txBody>
+                    <a:bodyPr/>
+                    <a:lstStyle/>
+                    <a:p>
+                      <a:pPr algn="ctr">
+                        <a:defRPr sz="1000">
+                          <a:solidFill>
+                            <a:srgbClr val="333333"/>
+                          </a:solidFill>
+                          <a:latin typeface="Consolas"/>
+                        </a:defRPr>
+                      </a:pPr>
+                      <a:r>
+                        <a:t>0.873</a:t>
+                      </a:r>
+                    </a:p>
+                  </a:txBody>
+                  <a:tcPr anchor="ctr"/>
+                </a:tc>
+                <a:tc>
+                  <a:txBody>
+                    <a:bodyPr/>
+                    <a:lstStyle/>
+                    <a:p>
+                      <a:pPr algn="ctr">
+                        <a:defRPr sz="1000" b="1">
+                          <a:solidFill>
+                            <a:srgbClr val="059669"/>
+                          </a:solidFill>
+                          <a:latin typeface="Consolas"/>
+                        </a:defRPr>
+                      </a:pPr>
+                      <a:r>
+                        <a:t>-0.113</a:t>
+                      </a:r>
+                    </a:p>
+                  </a:txBody>
+                  <a:tcPr anchor="ctr"/>
+                </a:tc>
+              </a:tr>
+              <a:tr h="538480">
+                <a:tc>
+                  <a:txBody>
+                    <a:bodyPr/>
+                    <a:lstStyle/>
+                    <a:p>
+                      <a:pPr algn="l">
+                        <a:defRPr sz="1000">
+                          <a:solidFill>
+                            <a:srgbClr val="333333"/>
+                          </a:solidFill>
+                          <a:latin typeface="Calibri"/>
+                        </a:defRPr>
+                      </a:pPr>
+                      <a:r>
+                        <a:t>Ocean Island</a:t>
+                      </a:r>
+                    </a:p>
+                  </a:txBody>
+                  <a:tcPr anchor="ctr">
+                    <a:solidFill>
+                      <a:srgbClr val="F8F8F8"/>
+                    </a:solidFill>
+                  </a:tcPr>
+                </a:tc>
+                <a:tc>
+                  <a:txBody>
+                    <a:bodyPr/>
+                    <a:lstStyle/>
+                    <a:p>
+                      <a:pPr algn="ctr">
+                        <a:defRPr sz="1000">
+                          <a:solidFill>
+                            <a:srgbClr val="333333"/>
+                          </a:solidFill>
+                          <a:latin typeface="Consolas"/>
+                        </a:defRPr>
+                      </a:pPr>
+                      <a:r>
+                        <a:t>90</a:t>
+                      </a:r>
+                    </a:p>
+                  </a:txBody>
+                  <a:tcPr anchor="ctr">
+                    <a:solidFill>
+                      <a:srgbClr val="F8F8F8"/>
+                    </a:solidFill>
+                  </a:tcPr>
+                </a:tc>
+                <a:tc>
+                  <a:txBody>
+                    <a:bodyPr/>
+                    <a:lstStyle/>
+                    <a:p>
+                      <a:pPr algn="ctr">
+                        <a:defRPr sz="1000">
+                          <a:solidFill>
+                            <a:srgbClr val="333333"/>
+                          </a:solidFill>
+                          <a:latin typeface="Consolas"/>
+                        </a:defRPr>
+                      </a:pPr>
+                      <a:r>
+                        <a:t>1.000</a:t>
                       </a:r>
                     </a:p>
                   </a:txBody>
@@ -9033,15 +5720,15 @@
                     <a:lstStyle/>
                     <a:p>
                       <a:pPr algn="ctr">
-                        <a:defRPr sz="1000">
+                        <a:defRPr sz="1000" b="1">
                           <a:solidFill>
-                            <a:srgbClr val="333333"/>
+                            <a:srgbClr val="059669"/>
                           </a:solidFill>
-                          <a:latin typeface="Calibri"/>
+                          <a:latin typeface="Consolas"/>
                         </a:defRPr>
                       </a:pPr>
                       <a:r>
-                        <a:t>80/20 split</a:t>
+                        <a:t>-0.028</a:t>
                       </a:r>
                     </a:p>
                   </a:txBody>
@@ -9052,27 +5739,7 @@
                   </a:tcPr>
                 </a:tc>
               </a:tr>
-              <a:tr h="294640">
-                <a:tc>
-                  <a:txBody>
-                    <a:bodyPr/>
-                    <a:lstStyle/>
-                    <a:p>
-                      <a:pPr algn="ctr">
-                        <a:defRPr sz="1000" b="1">
-                          <a:solidFill>
-                            <a:srgbClr val="7C3AED"/>
-                          </a:solidFill>
-                          <a:latin typeface="Calibri"/>
-                        </a:defRPr>
-                      </a:pPr>
-                      <a:r>
-                        <a:t>Phenocryst</a:t>
-                      </a:r>
-                    </a:p>
-                  </a:txBody>
-                  <a:tcPr anchor="ctr"/>
-                </a:tc>
+              <a:tr h="538480">
                 <a:tc>
                   <a:txBody>
                     <a:bodyPr/>
@@ -9087,7 +5754,7 @@
                         </a:defRPr>
                       </a:pPr>
                       <a:r>
-                        <a:t>Basalt Pheno + Trace Data</a:t>
+                        <a:t>Intraplate Volcanics</a:t>
                       </a:r>
                     </a:p>
                   </a:txBody>
@@ -9107,7 +5774,7 @@
                         </a:defRPr>
                       </a:pPr>
                       <a:r>
-                        <a:t>783</a:t>
+                        <a:t>57</a:t>
                       </a:r>
                     </a:p>
                   </a:txBody>
@@ -9127,7 +5794,7 @@
                         </a:defRPr>
                       </a:pPr>
                       <a:r>
-                        <a:t>50</a:t>
+                        <a:t>0.983</a:t>
                       </a:r>
                     </a:p>
                   </a:txBody>
@@ -9147,7 +5814,7 @@
                         </a:defRPr>
                       </a:pPr>
                       <a:r>
-                        <a:t>0.959 +/- 0.007</a:t>
+                        <a:t>0.904</a:t>
                       </a:r>
                     </a:p>
                   </a:txBody>
@@ -9159,46 +5826,22 @@
                     <a:lstStyle/>
                     <a:p>
                       <a:pPr algn="ctr">
-                        <a:defRPr sz="1000">
+                        <a:defRPr sz="1000" b="1">
                           <a:solidFill>
-                            <a:srgbClr val="333333"/>
+                            <a:srgbClr val="059669"/>
                           </a:solidFill>
-                          <a:latin typeface="Calibri"/>
+                          <a:latin typeface="Consolas"/>
                         </a:defRPr>
                       </a:pPr>
                       <a:r>
-                        <a:t>5-fold CV</a:t>
+                        <a:t>-0.079</a:t>
                       </a:r>
                     </a:p>
                   </a:txBody>
                   <a:tcPr anchor="ctr"/>
                 </a:tc>
               </a:tr>
-              <a:tr h="294640">
-                <a:tc>
-                  <a:txBody>
-                    <a:bodyPr/>
-                    <a:lstStyle/>
-                    <a:p>
-                      <a:pPr algn="ctr">
-                        <a:defRPr sz="1000" b="1">
-                          <a:solidFill>
-                            <a:srgbClr val="2563EB"/>
-                          </a:solidFill>
-                          <a:latin typeface="Calibri"/>
-                        </a:defRPr>
-                      </a:pPr>
-                      <a:r>
-                        <a:t>Quality Subsets</a:t>
-                      </a:r>
-                    </a:p>
-                  </a:txBody>
-                  <a:tcPr anchor="ctr">
-                    <a:solidFill>
-                      <a:srgbClr val="E6F9EF"/>
-                    </a:solidFill>
-                  </a:tcPr>
-                </a:tc>
+              <a:tr h="538480">
                 <a:tc>
                   <a:txBody>
                     <a:bodyPr/>
@@ -9213,275 +5856,7 @@
                         </a:defRPr>
                       </a:pPr>
                       <a:r>
-                        <a:t>Excl. Full-Trace-Missing</a:t>
-                      </a:r>
-                    </a:p>
-                  </a:txBody>
-                  <a:tcPr anchor="ctr">
-                    <a:solidFill>
-                      <a:srgbClr val="E6F9EF"/>
-                    </a:solidFill>
-                  </a:tcPr>
-                </a:tc>
-                <a:tc>
-                  <a:txBody>
-                    <a:bodyPr/>
-                    <a:lstStyle/>
-                    <a:p>
-                      <a:pPr algn="ctr">
-                        <a:defRPr sz="1000">
-                          <a:solidFill>
-                            <a:srgbClr val="333333"/>
-                          </a:solidFill>
-                          <a:latin typeface="Consolas"/>
-                        </a:defRPr>
-                      </a:pPr>
-                      <a:r>
-                        <a:t>39,631</a:t>
-                      </a:r>
-                    </a:p>
-                  </a:txBody>
-                  <a:tcPr anchor="ctr">
-                    <a:solidFill>
-                      <a:srgbClr val="E6F9EF"/>
-                    </a:solidFill>
-                  </a:tcPr>
-                </a:tc>
-                <a:tc>
-                  <a:txBody>
-                    <a:bodyPr/>
-                    <a:lstStyle/>
-                    <a:p>
-                      <a:pPr algn="ctr">
-                        <a:defRPr sz="1000">
-                          <a:solidFill>
-                            <a:srgbClr val="333333"/>
-                          </a:solidFill>
-                          <a:latin typeface="Consolas"/>
-                        </a:defRPr>
-                      </a:pPr>
-                      <a:r>
-                        <a:t>50</a:t>
-                      </a:r>
-                    </a:p>
-                  </a:txBody>
-                  <a:tcPr anchor="ctr">
-                    <a:solidFill>
-                      <a:srgbClr val="E6F9EF"/>
-                    </a:solidFill>
-                  </a:tcPr>
-                </a:tc>
-                <a:tc>
-                  <a:txBody>
-                    <a:bodyPr/>
-                    <a:lstStyle/>
-                    <a:p>
-                      <a:pPr algn="ctr">
-                        <a:defRPr sz="1000">
-                          <a:solidFill>
-                            <a:srgbClr val="333333"/>
-                          </a:solidFill>
-                          <a:latin typeface="Consolas"/>
-                        </a:defRPr>
-                      </a:pPr>
-                      <a:r>
-                        <a:t>0.909 +/- 0.005</a:t>
-                      </a:r>
-                    </a:p>
-                  </a:txBody>
-                  <a:tcPr anchor="ctr">
-                    <a:solidFill>
-                      <a:srgbClr val="E6F9EF"/>
-                    </a:solidFill>
-                  </a:tcPr>
-                </a:tc>
-                <a:tc>
-                  <a:txBody>
-                    <a:bodyPr/>
-                    <a:lstStyle/>
-                    <a:p>
-                      <a:pPr algn="ctr">
-                        <a:defRPr sz="1000">
-                          <a:solidFill>
-                            <a:srgbClr val="333333"/>
-                          </a:solidFill>
-                          <a:latin typeface="Calibri"/>
-                        </a:defRPr>
-                      </a:pPr>
-                      <a:r>
-                        <a:t>5-fold CV</a:t>
-                      </a:r>
-                    </a:p>
-                  </a:txBody>
-                  <a:tcPr anchor="ctr">
-                    <a:solidFill>
-                      <a:srgbClr val="E6F9EF"/>
-                    </a:solidFill>
-                  </a:tcPr>
-                </a:tc>
-              </a:tr>
-              <a:tr h="294640">
-                <a:tc>
-                  <a:txBody>
-                    <a:bodyPr/>
-                    <a:lstStyle/>
-                    <a:p>
-                      <a:pPr algn="ctr">
-                        <a:defRPr sz="1000" b="1">
-                          <a:solidFill>
-                            <a:srgbClr val="D97706"/>
-                          </a:solidFill>
-                          <a:latin typeface="Calibri"/>
-                        </a:defRPr>
-                      </a:pPr>
-                      <a:r>
-                        <a:t>Basalt</a:t>
-                      </a:r>
-                    </a:p>
-                  </a:txBody>
-                  <a:tcPr anchor="ctr"/>
-                </a:tc>
-                <a:tc>
-                  <a:txBody>
-                    <a:bodyPr/>
-                    <a:lstStyle/>
-                    <a:p>
-                      <a:pPr algn="l">
-                        <a:defRPr sz="1000">
-                          <a:solidFill>
-                            <a:srgbClr val="333333"/>
-                          </a:solidFill>
-                          <a:latin typeface="Calibri"/>
-                        </a:defRPr>
-                      </a:pPr>
-                      <a:r>
-                        <a:t>Basalt + Trace Data (all feat)</a:t>
-                      </a:r>
-                    </a:p>
-                  </a:txBody>
-                  <a:tcPr anchor="ctr"/>
-                </a:tc>
-                <a:tc>
-                  <a:txBody>
-                    <a:bodyPr/>
-                    <a:lstStyle/>
-                    <a:p>
-                      <a:pPr algn="ctr">
-                        <a:defRPr sz="1000">
-                          <a:solidFill>
-                            <a:srgbClr val="333333"/>
-                          </a:solidFill>
-                          <a:latin typeface="Consolas"/>
-                        </a:defRPr>
-                      </a:pPr>
-                      <a:r>
-                        <a:t>3,298</a:t>
-                      </a:r>
-                    </a:p>
-                  </a:txBody>
-                  <a:tcPr anchor="ctr"/>
-                </a:tc>
-                <a:tc>
-                  <a:txBody>
-                    <a:bodyPr/>
-                    <a:lstStyle/>
-                    <a:p>
-                      <a:pPr algn="ctr">
-                        <a:defRPr sz="1000">
-                          <a:solidFill>
-                            <a:srgbClr val="333333"/>
-                          </a:solidFill>
-                          <a:latin typeface="Consolas"/>
-                        </a:defRPr>
-                      </a:pPr>
-                      <a:r>
-                        <a:t>50</a:t>
-                      </a:r>
-                    </a:p>
-                  </a:txBody>
-                  <a:tcPr anchor="ctr"/>
-                </a:tc>
-                <a:tc>
-                  <a:txBody>
-                    <a:bodyPr/>
-                    <a:lstStyle/>
-                    <a:p>
-                      <a:pPr algn="ctr">
-                        <a:defRPr sz="1000">
-                          <a:solidFill>
-                            <a:srgbClr val="333333"/>
-                          </a:solidFill>
-                          <a:latin typeface="Consolas"/>
-                        </a:defRPr>
-                      </a:pPr>
-                      <a:r>
-                        <a:t>0.904 +/- 0.011</a:t>
-                      </a:r>
-                    </a:p>
-                  </a:txBody>
-                  <a:tcPr anchor="ctr"/>
-                </a:tc>
-                <a:tc>
-                  <a:txBody>
-                    <a:bodyPr/>
-                    <a:lstStyle/>
-                    <a:p>
-                      <a:pPr algn="ctr">
-                        <a:defRPr sz="1000">
-                          <a:solidFill>
-                            <a:srgbClr val="333333"/>
-                          </a:solidFill>
-                          <a:latin typeface="Calibri"/>
-                        </a:defRPr>
-                      </a:pPr>
-                      <a:r>
-                        <a:t>5-fold CV</a:t>
-                      </a:r>
-                    </a:p>
-                  </a:txBody>
-                  <a:tcPr anchor="ctr"/>
-                </a:tc>
-              </a:tr>
-              <a:tr h="294640">
-                <a:tc>
-                  <a:txBody>
-                    <a:bodyPr/>
-                    <a:lstStyle/>
-                    <a:p>
-                      <a:pPr algn="ctr">
-                        <a:defRPr sz="1000" b="1">
-                          <a:solidFill>
-                            <a:srgbClr val="2563EB"/>
-                          </a:solidFill>
-                          <a:latin typeface="Calibri"/>
-                        </a:defRPr>
-                      </a:pPr>
-                      <a:r>
-                        <a:t>Quality Subsets</a:t>
-                      </a:r>
-                    </a:p>
-                  </a:txBody>
-                  <a:tcPr anchor="ctr">
-                    <a:solidFill>
-                      <a:srgbClr val="F8F8F8"/>
-                    </a:solidFill>
-                  </a:tcPr>
-                </a:tc>
-                <a:tc>
-                  <a:txBody>
-                    <a:bodyPr/>
-                    <a:lstStyle/>
-                    <a:p>
-                      <a:pPr algn="l">
-                        <a:defRPr sz="1000">
-                          <a:solidFill>
-                            <a:srgbClr val="333333"/>
-                          </a:solidFill>
-                          <a:latin typeface="Calibri"/>
-                        </a:defRPr>
-                      </a:pPr>
-                      <a:r>
-                        <a:t>M1 + All Features</a:t>
+                        <a:t>Complex Volcanic</a:t>
                       </a:r>
                     </a:p>
                   </a:txBody>
@@ -9505,7 +5880,7 @@
                         </a:defRPr>
                       </a:pPr>
                       <a:r>
-                        <a:t>99,840</a:t>
+                        <a:t>46</a:t>
                       </a:r>
                     </a:p>
                   </a:txBody>
@@ -9529,7 +5904,7 @@
                         </a:defRPr>
                       </a:pPr>
                       <a:r>
-                        <a:t>50</a:t>
+                        <a:t>1.000</a:t>
                       </a:r>
                     </a:p>
                   </a:txBody>
@@ -9553,7 +5928,7 @@
                         </a:defRPr>
                       </a:pPr>
                       <a:r>
-                        <a:t>0.824 +/- 0.004</a:t>
+                        <a:t>0.978</a:t>
                       </a:r>
                     </a:p>
                   </a:txBody>
@@ -9569,15 +5944,15 @@
                     <a:lstStyle/>
                     <a:p>
                       <a:pPr algn="ctr">
-                        <a:defRPr sz="1000">
+                        <a:defRPr sz="1000" b="1">
                           <a:solidFill>
-                            <a:srgbClr val="333333"/>
+                            <a:srgbClr val="059669"/>
                           </a:solidFill>
-                          <a:latin typeface="Calibri"/>
+                          <a:latin typeface="Consolas"/>
                         </a:defRPr>
                       </a:pPr>
                       <a:r>
-                        <a:t>5-fold CV</a:t>
+                        <a:t>-0.022</a:t>
                       </a:r>
                     </a:p>
                   </a:txBody>
@@ -9588,27 +5963,7 @@
                   </a:tcPr>
                 </a:tc>
               </a:tr>
-              <a:tr h="294640">
-                <a:tc>
-                  <a:txBody>
-                    <a:bodyPr/>
-                    <a:lstStyle/>
-                    <a:p>
-                      <a:pPr algn="ctr">
-                        <a:defRPr sz="1000" b="1">
-                          <a:solidFill>
-                            <a:srgbClr val="2563EB"/>
-                          </a:solidFill>
-                          <a:latin typeface="Calibri"/>
-                        </a:defRPr>
-                      </a:pPr>
-                      <a:r>
-                        <a:t>Quality Subsets</a:t>
-                      </a:r>
-                    </a:p>
-                  </a:txBody>
-                  <a:tcPr anchor="ctr"/>
-                </a:tc>
+              <a:tr h="538480">
                 <a:tc>
                   <a:txBody>
                     <a:bodyPr/>
@@ -9623,7 +5978,7 @@
                         </a:defRPr>
                       </a:pPr>
                       <a:r>
-                        <a:t>Subset M1 (major miss≤1)</a:t>
+                        <a:t>Rift Volcanics</a:t>
                       </a:r>
                     </a:p>
                   </a:txBody>
@@ -9643,7 +5998,7 @@
                         </a:defRPr>
                       </a:pPr>
                       <a:r>
-                        <a:t>99,840</a:t>
+                        <a:t>39</a:t>
                       </a:r>
                     </a:p>
                   </a:txBody>
@@ -9663,7 +6018,7 @@
                         </a:defRPr>
                       </a:pPr>
                       <a:r>
-                        <a:t>18</a:t>
+                        <a:t>0.987</a:t>
                       </a:r>
                     </a:p>
                   </a:txBody>
@@ -9683,215 +6038,7 @@
                         </a:defRPr>
                       </a:pPr>
                       <a:r>
-                        <a:t>0.822</a:t>
-                      </a:r>
-                    </a:p>
-                  </a:txBody>
-                  <a:tcPr anchor="ctr"/>
-                </a:tc>
-                <a:tc>
-                  <a:txBody>
-                    <a:bodyPr/>
-                    <a:lstStyle/>
-                    <a:p>
-                      <a:pPr algn="ctr">
-                        <a:defRPr sz="1000">
-                          <a:solidFill>
-                            <a:srgbClr val="333333"/>
-                          </a:solidFill>
-                          <a:latin typeface="Calibri"/>
-                        </a:defRPr>
-                      </a:pPr>
-                      <a:r>
-                        <a:t>80/20 split</a:t>
-                      </a:r>
-                    </a:p>
-                  </a:txBody>
-                  <a:tcPr anchor="ctr"/>
-                </a:tc>
-              </a:tr>
-              <a:tr h="294640">
-                <a:tc>
-                  <a:txBody>
-                    <a:bodyPr/>
-                    <a:lstStyle/>
-                    <a:p>
-                      <a:pPr algn="ctr">
-                        <a:defRPr sz="1000" b="1">
-                          <a:solidFill>
-                            <a:srgbClr val="1A2744"/>
-                          </a:solidFill>
-                          <a:latin typeface="Calibri"/>
-                        </a:defRPr>
-                      </a:pPr>
-                      <a:r>
-                        <a:t>Full Dataset</a:t>
-                      </a:r>
-                    </a:p>
-                  </a:txBody>
-                  <a:tcPr anchor="ctr">
-                    <a:solidFill>
-                      <a:srgbClr val="F8F8F8"/>
-                    </a:solidFill>
-                  </a:tcPr>
-                </a:tc>
-                <a:tc>
-                  <a:txBody>
-                    <a:bodyPr/>
-                    <a:lstStyle/>
-                    <a:p>
-                      <a:pPr algn="l">
-                        <a:defRPr sz="1000">
-                          <a:solidFill>
-                            <a:srgbClr val="333333"/>
-                          </a:solidFill>
-                          <a:latin typeface="Calibri"/>
-                        </a:defRPr>
-                      </a:pPr>
-                      <a:r>
-                        <a:t>Native NaN (XGBoost)</a:t>
-                      </a:r>
-                    </a:p>
-                  </a:txBody>
-                  <a:tcPr anchor="ctr">
-                    <a:solidFill>
-                      <a:srgbClr val="F8F8F8"/>
-                    </a:solidFill>
-                  </a:tcPr>
-                </a:tc>
-                <a:tc>
-                  <a:txBody>
-                    <a:bodyPr/>
-                    <a:lstStyle/>
-                    <a:p>
-                      <a:pPr algn="ctr">
-                        <a:defRPr sz="1000">
-                          <a:solidFill>
-                            <a:srgbClr val="333333"/>
-                          </a:solidFill>
-                          <a:latin typeface="Consolas"/>
-                        </a:defRPr>
-                      </a:pPr>
-                      <a:r>
-                        <a:t>203,179</a:t>
-                      </a:r>
-                    </a:p>
-                  </a:txBody>
-                  <a:tcPr anchor="ctr">
-                    <a:solidFill>
-                      <a:srgbClr val="F8F8F8"/>
-                    </a:solidFill>
-                  </a:tcPr>
-                </a:tc>
-                <a:tc>
-                  <a:txBody>
-                    <a:bodyPr/>
-                    <a:lstStyle/>
-                    <a:p>
-                      <a:pPr algn="ctr">
-                        <a:defRPr sz="1000">
-                          <a:solidFill>
-                            <a:srgbClr val="333333"/>
-                          </a:solidFill>
-                          <a:latin typeface="Consolas"/>
-                        </a:defRPr>
-                      </a:pPr>
-                      <a:r>
-                        <a:t>50</a:t>
-                      </a:r>
-                    </a:p>
-                  </a:txBody>
-                  <a:tcPr anchor="ctr">
-                    <a:solidFill>
-                      <a:srgbClr val="F8F8F8"/>
-                    </a:solidFill>
-                  </a:tcPr>
-                </a:tc>
-                <a:tc>
-                  <a:txBody>
-                    <a:bodyPr/>
-                    <a:lstStyle/>
-                    <a:p>
-                      <a:pPr algn="ctr">
-                        <a:defRPr sz="1000">
-                          <a:solidFill>
-                            <a:srgbClr val="333333"/>
-                          </a:solidFill>
-                          <a:latin typeface="Consolas"/>
-                        </a:defRPr>
-                      </a:pPr>
-                      <a:r>
-                        <a:t>0.772</a:t>
-                      </a:r>
-                    </a:p>
-                  </a:txBody>
-                  <a:tcPr anchor="ctr">
-                    <a:solidFill>
-                      <a:srgbClr val="F8F8F8"/>
-                    </a:solidFill>
-                  </a:tcPr>
-                </a:tc>
-                <a:tc>
-                  <a:txBody>
-                    <a:bodyPr/>
-                    <a:lstStyle/>
-                    <a:p>
-                      <a:pPr algn="ctr">
-                        <a:defRPr sz="1000">
-                          <a:solidFill>
-                            <a:srgbClr val="333333"/>
-                          </a:solidFill>
-                          <a:latin typeface="Calibri"/>
-                        </a:defRPr>
-                      </a:pPr>
-                      <a:r>
-                        <a:t>80/20 split</a:t>
-                      </a:r>
-                    </a:p>
-                  </a:txBody>
-                  <a:tcPr anchor="ctr">
-                    <a:solidFill>
-                      <a:srgbClr val="F8F8F8"/>
-                    </a:solidFill>
-                  </a:tcPr>
-                </a:tc>
-              </a:tr>
-              <a:tr h="294640">
-                <a:tc>
-                  <a:txBody>
-                    <a:bodyPr/>
-                    <a:lstStyle/>
-                    <a:p>
-                      <a:pPr algn="ctr">
-                        <a:defRPr sz="1000" b="1">
-                          <a:solidFill>
-                            <a:srgbClr val="1A2744"/>
-                          </a:solidFill>
-                          <a:latin typeface="Calibri"/>
-                        </a:defRPr>
-                      </a:pPr>
-                      <a:r>
-                        <a:t>Full Dataset</a:t>
-                      </a:r>
-                    </a:p>
-                  </a:txBody>
-                  <a:tcPr anchor="ctr"/>
-                </a:tc>
-                <a:tc>
-                  <a:txBody>
-                    <a:bodyPr/>
-                    <a:lstStyle/>
-                    <a:p>
-                      <a:pPr algn="l">
-                        <a:defRPr sz="1000">
-                          <a:solidFill>
-                            <a:srgbClr val="333333"/>
-                          </a:solidFill>
-                          <a:latin typeface="Calibri"/>
-                        </a:defRPr>
-                      </a:pPr>
-                      <a:r>
-                        <a:t>Full Dataset (CV verified)</a:t>
+                        <a:t>0.987</a:t>
                       </a:r>
                     </a:p>
                   </a:txBody>
@@ -9911,98 +6058,14 @@
                         </a:defRPr>
                       </a:pPr>
                       <a:r>
-                        <a:t>211,773</a:t>
-                      </a:r>
-                    </a:p>
-                  </a:txBody>
-                  <a:tcPr anchor="ctr"/>
-                </a:tc>
-                <a:tc>
-                  <a:txBody>
-                    <a:bodyPr/>
-                    <a:lstStyle/>
-                    <a:p>
-                      <a:pPr algn="ctr">
-                        <a:defRPr sz="1000">
-                          <a:solidFill>
-                            <a:srgbClr val="333333"/>
-                          </a:solidFill>
-                          <a:latin typeface="Consolas"/>
-                        </a:defRPr>
-                      </a:pPr>
-                      <a:r>
-                        <a:t>50</a:t>
-                      </a:r>
-                    </a:p>
-                  </a:txBody>
-                  <a:tcPr anchor="ctr"/>
-                </a:tc>
-                <a:tc>
-                  <a:txBody>
-                    <a:bodyPr/>
-                    <a:lstStyle/>
-                    <a:p>
-                      <a:pPr algn="ctr">
-                        <a:defRPr sz="1000">
-                          <a:solidFill>
-                            <a:srgbClr val="333333"/>
-                          </a:solidFill>
-                          <a:latin typeface="Consolas"/>
-                        </a:defRPr>
-                      </a:pPr>
-                      <a:r>
-                        <a:t>0.762 +/- 0.008</a:t>
-                      </a:r>
-                    </a:p>
-                  </a:txBody>
-                  <a:tcPr anchor="ctr"/>
-                </a:tc>
-                <a:tc>
-                  <a:txBody>
-                    <a:bodyPr/>
-                    <a:lstStyle/>
-                    <a:p>
-                      <a:pPr algn="ctr">
-                        <a:defRPr sz="1000">
-                          <a:solidFill>
-                            <a:srgbClr val="333333"/>
-                          </a:solidFill>
-                          <a:latin typeface="Calibri"/>
-                        </a:defRPr>
-                      </a:pPr>
-                      <a:r>
-                        <a:t>5-fold CV</a:t>
+                        <a:t>+0.000</a:t>
                       </a:r>
                     </a:p>
                   </a:txBody>
                   <a:tcPr anchor="ctr"/>
                 </a:tc>
               </a:tr>
-              <a:tr h="294640">
-                <a:tc>
-                  <a:txBody>
-                    <a:bodyPr/>
-                    <a:lstStyle/>
-                    <a:p>
-                      <a:pPr algn="ctr">
-                        <a:defRPr sz="1000" b="1">
-                          <a:solidFill>
-                            <a:srgbClr val="1A2744"/>
-                          </a:solidFill>
-                          <a:latin typeface="Calibri"/>
-                        </a:defRPr>
-                      </a:pPr>
-                      <a:r>
-                        <a:t>Full Dataset</a:t>
-                      </a:r>
-                    </a:p>
-                  </a:txBody>
-                  <a:tcPr anchor="ctr">
-                    <a:solidFill>
-                      <a:srgbClr val="F8F8F8"/>
-                    </a:solidFill>
-                  </a:tcPr>
-                </a:tc>
+              <a:tr h="538480">
                 <a:tc>
                   <a:txBody>
                     <a:bodyPr/>
@@ -10017,13 +6080,13 @@
                         </a:defRPr>
                       </a:pPr>
                       <a:r>
-                        <a:t>Hierarchical (S1+S2)</a:t>
+                        <a:t>Oceanic Plateau !</a:t>
                       </a:r>
                     </a:p>
                   </a:txBody>
                   <a:tcPr anchor="ctr">
                     <a:solidFill>
-                      <a:srgbClr val="F8F8F8"/>
+                      <a:srgbClr val="FFF4E6"/>
                     </a:solidFill>
                   </a:tcPr>
                 </a:tc>
@@ -10041,13 +6104,13 @@
                         </a:defRPr>
                       </a:pPr>
                       <a:r>
-                        <a:t>42,355</a:t>
+                        <a:t>16</a:t>
                       </a:r>
                     </a:p>
                   </a:txBody>
                   <a:tcPr anchor="ctr">
                     <a:solidFill>
-                      <a:srgbClr val="F8F8F8"/>
+                      <a:srgbClr val="FFF4E6"/>
                     </a:solidFill>
                   </a:tcPr>
                 </a:tc>
@@ -10065,13 +6128,13 @@
                         </a:defRPr>
                       </a:pPr>
                       <a:r>
-                        <a:t>18+32</a:t>
+                        <a:t>1.000</a:t>
                       </a:r>
                     </a:p>
                   </a:txBody>
                   <a:tcPr anchor="ctr">
                     <a:solidFill>
-                      <a:srgbClr val="F8F8F8"/>
+                      <a:srgbClr val="FFF4E6"/>
                     </a:solidFill>
                   </a:tcPr>
                 </a:tc>
@@ -10089,209 +6152,13 @@
                         </a:defRPr>
                       </a:pPr>
                       <a:r>
-                        <a:t>0.742</a:t>
+                        <a:t>1.000</a:t>
                       </a:r>
                     </a:p>
                   </a:txBody>
                   <a:tcPr anchor="ctr">
                     <a:solidFill>
-                      <a:srgbClr val="F8F8F8"/>
-                    </a:solidFill>
-                  </a:tcPr>
-                </a:tc>
-                <a:tc>
-                  <a:txBody>
-                    <a:bodyPr/>
-                    <a:lstStyle/>
-                    <a:p>
-                      <a:pPr algn="ctr">
-                        <a:defRPr sz="1000">
-                          <a:solidFill>
-                            <a:srgbClr val="333333"/>
-                          </a:solidFill>
-                          <a:latin typeface="Calibri"/>
-                        </a:defRPr>
-                      </a:pPr>
-                      <a:r>
-                        <a:t>80/20 split</a:t>
-                      </a:r>
-                    </a:p>
-                  </a:txBody>
-                  <a:tcPr anchor="ctr">
-                    <a:solidFill>
-                      <a:srgbClr val="F8F8F8"/>
-                    </a:solidFill>
-                  </a:tcPr>
-                </a:tc>
-              </a:tr>
-              <a:tr h="294640">
-                <a:tc>
-                  <a:txBody>
-                    <a:bodyPr/>
-                    <a:lstStyle/>
-                    <a:p>
-                      <a:pPr algn="ctr">
-                        <a:defRPr sz="1000" b="1">
-                          <a:solidFill>
-                            <a:srgbClr val="7C3AED"/>
-                          </a:solidFill>
-                          <a:latin typeface="Calibri"/>
-                        </a:defRPr>
-                      </a:pPr>
-                      <a:r>
-                        <a:t>Phenocryst</a:t>
-                      </a:r>
-                    </a:p>
-                  </a:txBody>
-                  <a:tcPr anchor="ctr"/>
-                </a:tc>
-                <a:tc>
-                  <a:txBody>
-                    <a:bodyPr/>
-                    <a:lstStyle/>
-                    <a:p>
-                      <a:pPr algn="l">
-                        <a:defRPr sz="1000">
-                          <a:solidFill>
-                            <a:srgbClr val="333333"/>
-                          </a:solidFill>
-                          <a:latin typeface="Calibri"/>
-                        </a:defRPr>
-                      </a:pPr>
-                      <a:r>
-                        <a:t>Basalt Phenocryst (all feat)</a:t>
-                      </a:r>
-                    </a:p>
-                  </a:txBody>
-                  <a:tcPr anchor="ctr"/>
-                </a:tc>
-                <a:tc>
-                  <a:txBody>
-                    <a:bodyPr/>
-                    <a:lstStyle/>
-                    <a:p>
-                      <a:pPr algn="ctr">
-                        <a:defRPr sz="1000">
-                          <a:solidFill>
-                            <a:srgbClr val="333333"/>
-                          </a:solidFill>
-                          <a:latin typeface="Consolas"/>
-                        </a:defRPr>
-                      </a:pPr>
-                      <a:r>
-                        <a:t>9,653</a:t>
-                      </a:r>
-                    </a:p>
-                  </a:txBody>
-                  <a:tcPr anchor="ctr"/>
-                </a:tc>
-                <a:tc>
-                  <a:txBody>
-                    <a:bodyPr/>
-                    <a:lstStyle/>
-                    <a:p>
-                      <a:pPr algn="ctr">
-                        <a:defRPr sz="1000">
-                          <a:solidFill>
-                            <a:srgbClr val="333333"/>
-                          </a:solidFill>
-                          <a:latin typeface="Consolas"/>
-                        </a:defRPr>
-                      </a:pPr>
-                      <a:r>
-                        <a:t>50</a:t>
-                      </a:r>
-                    </a:p>
-                  </a:txBody>
-                  <a:tcPr anchor="ctr"/>
-                </a:tc>
-                <a:tc>
-                  <a:txBody>
-                    <a:bodyPr/>
-                    <a:lstStyle/>
-                    <a:p>
-                      <a:pPr algn="ctr">
-                        <a:defRPr sz="1000">
-                          <a:solidFill>
-                            <a:srgbClr val="333333"/>
-                          </a:solidFill>
-                          <a:latin typeface="Consolas"/>
-                        </a:defRPr>
-                      </a:pPr>
-                      <a:r>
-                        <a:t>0.734 +/- 0.023</a:t>
-                      </a:r>
-                    </a:p>
-                  </a:txBody>
-                  <a:tcPr anchor="ctr"/>
-                </a:tc>
-                <a:tc>
-                  <a:txBody>
-                    <a:bodyPr/>
-                    <a:lstStyle/>
-                    <a:p>
-                      <a:pPr algn="ctr">
-                        <a:defRPr sz="1000">
-                          <a:solidFill>
-                            <a:srgbClr val="333333"/>
-                          </a:solidFill>
-                          <a:latin typeface="Calibri"/>
-                        </a:defRPr>
-                      </a:pPr>
-                      <a:r>
-                        <a:t>5-fold CV</a:t>
-                      </a:r>
-                    </a:p>
-                  </a:txBody>
-                  <a:tcPr anchor="ctr"/>
-                </a:tc>
-              </a:tr>
-              <a:tr h="294640">
-                <a:tc>
-                  <a:txBody>
-                    <a:bodyPr/>
-                    <a:lstStyle/>
-                    <a:p>
-                      <a:pPr algn="ctr">
-                        <a:defRPr sz="1000" b="1">
-                          <a:solidFill>
-                            <a:srgbClr val="1A2744"/>
-                          </a:solidFill>
-                          <a:latin typeface="Calibri"/>
-                        </a:defRPr>
-                      </a:pPr>
-                      <a:r>
-                        <a:t>Full Dataset</a:t>
-                      </a:r>
-                    </a:p>
-                  </a:txBody>
-                  <a:tcPr anchor="ctr">
-                    <a:solidFill>
-                      <a:srgbClr val="F8F8F8"/>
-                    </a:solidFill>
-                  </a:tcPr>
-                </a:tc>
-                <a:tc>
-                  <a:txBody>
-                    <a:bodyPr/>
-                    <a:lstStyle/>
-                    <a:p>
-                      <a:pPr algn="l">
-                        <a:defRPr sz="1000">
-                          <a:solidFill>
-                            <a:srgbClr val="333333"/>
-                          </a:solidFill>
-                          <a:latin typeface="Calibri"/>
-                        </a:defRPr>
-                      </a:pPr>
-                      <a:r>
-                        <a:t>Baseline (median impute)</a:t>
-                      </a:r>
-                    </a:p>
-                  </a:txBody>
-                  <a:tcPr anchor="ctr">
-                    <a:solidFill>
-                      <a:srgbClr val="F8F8F8"/>
+                      <a:srgbClr val="FFF4E6"/>
                     </a:solidFill>
                   </a:tcPr>
                 </a:tc>
@@ -10309,13 +6176,39 @@
                         </a:defRPr>
                       </a:pPr>
                       <a:r>
-                        <a:t>177,947</a:t>
+                        <a:t>+0.000</a:t>
                       </a:r>
                     </a:p>
                   </a:txBody>
                   <a:tcPr anchor="ctr">
                     <a:solidFill>
-                      <a:srgbClr val="F8F8F8"/>
+                      <a:srgbClr val="FFF4E6"/>
+                    </a:solidFill>
+                  </a:tcPr>
+                </a:tc>
+              </a:tr>
+              <a:tr h="538480">
+                <a:tc>
+                  <a:txBody>
+                    <a:bodyPr/>
+                    <a:lstStyle/>
+                    <a:p>
+                      <a:pPr algn="l">
+                        <a:defRPr sz="1000">
+                          <a:solidFill>
+                            <a:srgbClr val="333333"/>
+                          </a:solidFill>
+                          <a:latin typeface="Calibri"/>
+                        </a:defRPr>
+                      </a:pPr>
+                      <a:r>
+                        <a:t>Cont. Flood Basalt !</a:t>
+                      </a:r>
+                    </a:p>
+                  </a:txBody>
+                  <a:tcPr anchor="ctr">
+                    <a:solidFill>
+                      <a:srgbClr val="FFF4E6"/>
                     </a:solidFill>
                   </a:tcPr>
                 </a:tc>
@@ -10333,13 +6226,13 @@
                         </a:defRPr>
                       </a:pPr>
                       <a:r>
-                        <a:t>14</a:t>
+                        <a:t>5</a:t>
                       </a:r>
                     </a:p>
                   </a:txBody>
                   <a:tcPr anchor="ctr">
                     <a:solidFill>
-                      <a:srgbClr val="F8F8F8"/>
+                      <a:srgbClr val="FFF4E6"/>
                     </a:solidFill>
                   </a:tcPr>
                 </a:tc>
@@ -10357,209 +6250,13 @@
                         </a:defRPr>
                       </a:pPr>
                       <a:r>
-                        <a:t>0.732</a:t>
+                        <a:t>0.889</a:t>
                       </a:r>
                     </a:p>
                   </a:txBody>
                   <a:tcPr anchor="ctr">
                     <a:solidFill>
-                      <a:srgbClr val="F8F8F8"/>
-                    </a:solidFill>
-                  </a:tcPr>
-                </a:tc>
-                <a:tc>
-                  <a:txBody>
-                    <a:bodyPr/>
-                    <a:lstStyle/>
-                    <a:p>
-                      <a:pPr algn="ctr">
-                        <a:defRPr sz="1000">
-                          <a:solidFill>
-                            <a:srgbClr val="333333"/>
-                          </a:solidFill>
-                          <a:latin typeface="Calibri"/>
-                        </a:defRPr>
-                      </a:pPr>
-                      <a:r>
-                        <a:t>80/20 split</a:t>
-                      </a:r>
-                    </a:p>
-                  </a:txBody>
-                  <a:tcPr anchor="ctr">
-                    <a:solidFill>
-                      <a:srgbClr val="F8F8F8"/>
-                    </a:solidFill>
-                  </a:tcPr>
-                </a:tc>
-              </a:tr>
-              <a:tr h="294640">
-                <a:tc>
-                  <a:txBody>
-                    <a:bodyPr/>
-                    <a:lstStyle/>
-                    <a:p>
-                      <a:pPr algn="ctr">
-                        <a:defRPr sz="1000" b="1">
-                          <a:solidFill>
-                            <a:srgbClr val="D97706"/>
-                          </a:solidFill>
-                          <a:latin typeface="Calibri"/>
-                        </a:defRPr>
-                      </a:pPr>
-                      <a:r>
-                        <a:t>Basalt</a:t>
-                      </a:r>
-                    </a:p>
-                  </a:txBody>
-                  <a:tcPr anchor="ctr"/>
-                </a:tc>
-                <a:tc>
-                  <a:txBody>
-                    <a:bodyPr/>
-                    <a:lstStyle/>
-                    <a:p>
-                      <a:pPr algn="l">
-                        <a:defRPr sz="1000">
-                          <a:solidFill>
-                            <a:srgbClr val="333333"/>
-                          </a:solidFill>
-                          <a:latin typeface="Calibri"/>
-                        </a:defRPr>
-                      </a:pPr>
-                      <a:r>
-                        <a:t>Basalt Subset (all features)</a:t>
-                      </a:r>
-                    </a:p>
-                  </a:txBody>
-                  <a:tcPr anchor="ctr"/>
-                </a:tc>
-                <a:tc>
-                  <a:txBody>
-                    <a:bodyPr/>
-                    <a:lstStyle/>
-                    <a:p>
-                      <a:pPr algn="ctr">
-                        <a:defRPr sz="1000">
-                          <a:solidFill>
-                            <a:srgbClr val="333333"/>
-                          </a:solidFill>
-                          <a:latin typeface="Consolas"/>
-                        </a:defRPr>
-                      </a:pPr>
-                      <a:r>
-                        <a:t>46,530</a:t>
-                      </a:r>
-                    </a:p>
-                  </a:txBody>
-                  <a:tcPr anchor="ctr"/>
-                </a:tc>
-                <a:tc>
-                  <a:txBody>
-                    <a:bodyPr/>
-                    <a:lstStyle/>
-                    <a:p>
-                      <a:pPr algn="ctr">
-                        <a:defRPr sz="1000">
-                          <a:solidFill>
-                            <a:srgbClr val="333333"/>
-                          </a:solidFill>
-                          <a:latin typeface="Consolas"/>
-                        </a:defRPr>
-                      </a:pPr>
-                      <a:r>
-                        <a:t>50</a:t>
-                      </a:r>
-                    </a:p>
-                  </a:txBody>
-                  <a:tcPr anchor="ctr"/>
-                </a:tc>
-                <a:tc>
-                  <a:txBody>
-                    <a:bodyPr/>
-                    <a:lstStyle/>
-                    <a:p>
-                      <a:pPr algn="ctr">
-                        <a:defRPr sz="1000">
-                          <a:solidFill>
-                            <a:srgbClr val="333333"/>
-                          </a:solidFill>
-                          <a:latin typeface="Consolas"/>
-                        </a:defRPr>
-                      </a:pPr>
-                      <a:r>
-                        <a:t>0.717 +/- 0.007</a:t>
-                      </a:r>
-                    </a:p>
-                  </a:txBody>
-                  <a:tcPr anchor="ctr"/>
-                </a:tc>
-                <a:tc>
-                  <a:txBody>
-                    <a:bodyPr/>
-                    <a:lstStyle/>
-                    <a:p>
-                      <a:pPr algn="ctr">
-                        <a:defRPr sz="1000">
-                          <a:solidFill>
-                            <a:srgbClr val="333333"/>
-                          </a:solidFill>
-                          <a:latin typeface="Calibri"/>
-                        </a:defRPr>
-                      </a:pPr>
-                      <a:r>
-                        <a:t>5-fold CV</a:t>
-                      </a:r>
-                    </a:p>
-                  </a:txBody>
-                  <a:tcPr anchor="ctr"/>
-                </a:tc>
-              </a:tr>
-              <a:tr h="294640">
-                <a:tc>
-                  <a:txBody>
-                    <a:bodyPr/>
-                    <a:lstStyle/>
-                    <a:p>
-                      <a:pPr algn="ctr">
-                        <a:defRPr sz="1000" b="1">
-                          <a:solidFill>
-                            <a:srgbClr val="7C3AED"/>
-                          </a:solidFill>
-                          <a:latin typeface="Calibri"/>
-                        </a:defRPr>
-                      </a:pPr>
-                      <a:r>
-                        <a:t>Phenocryst</a:t>
-                      </a:r>
-                    </a:p>
-                  </a:txBody>
-                  <a:tcPr anchor="ctr">
-                    <a:solidFill>
-                      <a:srgbClr val="F8F8F8"/>
-                    </a:solidFill>
-                  </a:tcPr>
-                </a:tc>
-                <a:tc>
-                  <a:txBody>
-                    <a:bodyPr/>
-                    <a:lstStyle/>
-                    <a:p>
-                      <a:pPr algn="l">
-                        <a:defRPr sz="1000">
-                          <a:solidFill>
-                            <a:srgbClr val="333333"/>
-                          </a:solidFill>
-                          <a:latin typeface="Calibri"/>
-                        </a:defRPr>
-                      </a:pPr>
-                      <a:r>
-                        <a:t>Basalt Pheno + Trace (major only)</a:t>
-                      </a:r>
-                    </a:p>
-                  </a:txBody>
-                  <a:tcPr anchor="ctr">
-                    <a:solidFill>
-                      <a:srgbClr val="F8F8F8"/>
+                      <a:srgbClr val="FFF4E6"/>
                     </a:solidFill>
                   </a:tcPr>
                 </a:tc>
@@ -10577,212 +6274,16 @@
                         </a:defRPr>
                       </a:pPr>
                       <a:r>
-                        <a:t>783</a:t>
+                        <a:t>1.000</a:t>
                       </a:r>
                     </a:p>
                   </a:txBody>
                   <a:tcPr anchor="ctr">
                     <a:solidFill>
-                      <a:srgbClr val="F8F8F8"/>
+                      <a:srgbClr val="FFF4E6"/>
                     </a:solidFill>
                   </a:tcPr>
                 </a:tc>
-                <a:tc>
-                  <a:txBody>
-                    <a:bodyPr/>
-                    <a:lstStyle/>
-                    <a:p>
-                      <a:pPr algn="ctr">
-                        <a:defRPr sz="1000">
-                          <a:solidFill>
-                            <a:srgbClr val="333333"/>
-                          </a:solidFill>
-                          <a:latin typeface="Consolas"/>
-                        </a:defRPr>
-                      </a:pPr>
-                      <a:r>
-                        <a:t>11</a:t>
-                      </a:r>
-                    </a:p>
-                  </a:txBody>
-                  <a:tcPr anchor="ctr">
-                    <a:solidFill>
-                      <a:srgbClr val="F8F8F8"/>
-                    </a:solidFill>
-                  </a:tcPr>
-                </a:tc>
-                <a:tc>
-                  <a:txBody>
-                    <a:bodyPr/>
-                    <a:lstStyle/>
-                    <a:p>
-                      <a:pPr algn="ctr">
-                        <a:defRPr sz="1000">
-                          <a:solidFill>
-                            <a:srgbClr val="333333"/>
-                          </a:solidFill>
-                          <a:latin typeface="Consolas"/>
-                        </a:defRPr>
-                      </a:pPr>
-                      <a:r>
-                        <a:t>0.676 +/- 0.068</a:t>
-                      </a:r>
-                    </a:p>
-                  </a:txBody>
-                  <a:tcPr anchor="ctr">
-                    <a:solidFill>
-                      <a:srgbClr val="F8F8F8"/>
-                    </a:solidFill>
-                  </a:tcPr>
-                </a:tc>
-                <a:tc>
-                  <a:txBody>
-                    <a:bodyPr/>
-                    <a:lstStyle/>
-                    <a:p>
-                      <a:pPr algn="ctr">
-                        <a:defRPr sz="1000">
-                          <a:solidFill>
-                            <a:srgbClr val="333333"/>
-                          </a:solidFill>
-                          <a:latin typeface="Calibri"/>
-                        </a:defRPr>
-                      </a:pPr>
-                      <a:r>
-                        <a:t>5-fold CV</a:t>
-                      </a:r>
-                    </a:p>
-                  </a:txBody>
-                  <a:tcPr anchor="ctr">
-                    <a:solidFill>
-                      <a:srgbClr val="F8F8F8"/>
-                    </a:solidFill>
-                  </a:tcPr>
-                </a:tc>
-              </a:tr>
-              <a:tr h="294640">
-                <a:tc>
-                  <a:txBody>
-                    <a:bodyPr/>
-                    <a:lstStyle/>
-                    <a:p>
-                      <a:pPr algn="ctr">
-                        <a:defRPr sz="1000" b="1">
-                          <a:solidFill>
-                            <a:srgbClr val="7C3AED"/>
-                          </a:solidFill>
-                          <a:latin typeface="Calibri"/>
-                        </a:defRPr>
-                      </a:pPr>
-                      <a:r>
-                        <a:t>Phenocryst</a:t>
-                      </a:r>
-                    </a:p>
-                  </a:txBody>
-                  <a:tcPr anchor="ctr"/>
-                </a:tc>
-                <a:tc>
-                  <a:txBody>
-                    <a:bodyPr/>
-                    <a:lstStyle/>
-                    <a:p>
-                      <a:pPr algn="l">
-                        <a:defRPr sz="1000">
-                          <a:solidFill>
-                            <a:srgbClr val="333333"/>
-                          </a:solidFill>
-                          <a:latin typeface="Calibri"/>
-                        </a:defRPr>
-                      </a:pPr>
-                      <a:r>
-                        <a:t>Basalt Phenocryst (major only)</a:t>
-                      </a:r>
-                    </a:p>
-                  </a:txBody>
-                  <a:tcPr anchor="ctr"/>
-                </a:tc>
-                <a:tc>
-                  <a:txBody>
-                    <a:bodyPr/>
-                    <a:lstStyle/>
-                    <a:p>
-                      <a:pPr algn="ctr">
-                        <a:defRPr sz="1000">
-                          <a:solidFill>
-                            <a:srgbClr val="333333"/>
-                          </a:solidFill>
-                          <a:latin typeface="Consolas"/>
-                        </a:defRPr>
-                      </a:pPr>
-                      <a:r>
-                        <a:t>9,653</a:t>
-                      </a:r>
-                    </a:p>
-                  </a:txBody>
-                  <a:tcPr anchor="ctr"/>
-                </a:tc>
-                <a:tc>
-                  <a:txBody>
-                    <a:bodyPr/>
-                    <a:lstStyle/>
-                    <a:p>
-                      <a:pPr algn="ctr">
-                        <a:defRPr sz="1000">
-                          <a:solidFill>
-                            <a:srgbClr val="333333"/>
-                          </a:solidFill>
-                          <a:latin typeface="Consolas"/>
-                        </a:defRPr>
-                      </a:pPr>
-                      <a:r>
-                        <a:t>11</a:t>
-                      </a:r>
-                    </a:p>
-                  </a:txBody>
-                  <a:tcPr anchor="ctr"/>
-                </a:tc>
-                <a:tc>
-                  <a:txBody>
-                    <a:bodyPr/>
-                    <a:lstStyle/>
-                    <a:p>
-                      <a:pPr algn="ctr">
-                        <a:defRPr sz="1000">
-                          <a:solidFill>
-                            <a:srgbClr val="333333"/>
-                          </a:solidFill>
-                          <a:latin typeface="Consolas"/>
-                        </a:defRPr>
-                      </a:pPr>
-                      <a:r>
-                        <a:t>0.621 +/- 0.026</a:t>
-                      </a:r>
-                    </a:p>
-                  </a:txBody>
-                  <a:tcPr anchor="ctr"/>
-                </a:tc>
-                <a:tc>
-                  <a:txBody>
-                    <a:bodyPr/>
-                    <a:lstStyle/>
-                    <a:p>
-                      <a:pPr algn="ctr">
-                        <a:defRPr sz="1000">
-                          <a:solidFill>
-                            <a:srgbClr val="333333"/>
-                          </a:solidFill>
-                          <a:latin typeface="Calibri"/>
-                        </a:defRPr>
-                      </a:pPr>
-                      <a:r>
-                        <a:t>5-fold CV</a:t>
-                      </a:r>
-                    </a:p>
-                  </a:txBody>
-                  <a:tcPr anchor="ctr"/>
-                </a:tc>
-              </a:tr>
-              <a:tr h="294640">
                 <a:tc>
                   <a:txBody>
                     <a:bodyPr/>
@@ -10793,405 +6294,17 @@
                           <a:solidFill>
                             <a:srgbClr val="D97706"/>
                           </a:solidFill>
-                          <a:latin typeface="Calibri"/>
+                          <a:latin typeface="Consolas"/>
                         </a:defRPr>
                       </a:pPr>
                       <a:r>
-                        <a:t>Basalt</a:t>
+                        <a:t>+0.111</a:t>
                       </a:r>
                     </a:p>
                   </a:txBody>
                   <a:tcPr anchor="ctr">
                     <a:solidFill>
-                      <a:srgbClr val="F8F8F8"/>
-                    </a:solidFill>
-                  </a:tcPr>
-                </a:tc>
-                <a:tc>
-                  <a:txBody>
-                    <a:bodyPr/>
-                    <a:lstStyle/>
-                    <a:p>
-                      <a:pPr algn="l">
-                        <a:defRPr sz="1000">
-                          <a:solidFill>
-                            <a:srgbClr val="333333"/>
-                          </a:solidFill>
-                          <a:latin typeface="Calibri"/>
-                        </a:defRPr>
-                      </a:pPr>
-                      <a:r>
-                        <a:t>Basalt Subset (major only)</a:t>
-                      </a:r>
-                    </a:p>
-                  </a:txBody>
-                  <a:tcPr anchor="ctr">
-                    <a:solidFill>
-                      <a:srgbClr val="F8F8F8"/>
-                    </a:solidFill>
-                  </a:tcPr>
-                </a:tc>
-                <a:tc>
-                  <a:txBody>
-                    <a:bodyPr/>
-                    <a:lstStyle/>
-                    <a:p>
-                      <a:pPr algn="ctr">
-                        <a:defRPr sz="1000">
-                          <a:solidFill>
-                            <a:srgbClr val="333333"/>
-                          </a:solidFill>
-                          <a:latin typeface="Consolas"/>
-                        </a:defRPr>
-                      </a:pPr>
-                      <a:r>
-                        <a:t>46,530</a:t>
-                      </a:r>
-                    </a:p>
-                  </a:txBody>
-                  <a:tcPr anchor="ctr">
-                    <a:solidFill>
-                      <a:srgbClr val="F8F8F8"/>
-                    </a:solidFill>
-                  </a:tcPr>
-                </a:tc>
-                <a:tc>
-                  <a:txBody>
-                    <a:bodyPr/>
-                    <a:lstStyle/>
-                    <a:p>
-                      <a:pPr algn="ctr">
-                        <a:defRPr sz="1000">
-                          <a:solidFill>
-                            <a:srgbClr val="333333"/>
-                          </a:solidFill>
-                          <a:latin typeface="Consolas"/>
-                        </a:defRPr>
-                      </a:pPr>
-                      <a:r>
-                        <a:t>11</a:t>
-                      </a:r>
-                    </a:p>
-                  </a:txBody>
-                  <a:tcPr anchor="ctr">
-                    <a:solidFill>
-                      <a:srgbClr val="F8F8F8"/>
-                    </a:solidFill>
-                  </a:tcPr>
-                </a:tc>
-                <a:tc>
-                  <a:txBody>
-                    <a:bodyPr/>
-                    <a:lstStyle/>
-                    <a:p>
-                      <a:pPr algn="ctr">
-                        <a:defRPr sz="1000">
-                          <a:solidFill>
-                            <a:srgbClr val="333333"/>
-                          </a:solidFill>
-                          <a:latin typeface="Consolas"/>
-                        </a:defRPr>
-                      </a:pPr>
-                      <a:r>
-                        <a:t>0.616 +/- 0.017</a:t>
-                      </a:r>
-                    </a:p>
-                  </a:txBody>
-                  <a:tcPr anchor="ctr">
-                    <a:solidFill>
-                      <a:srgbClr val="F8F8F8"/>
-                    </a:solidFill>
-                  </a:tcPr>
-                </a:tc>
-                <a:tc>
-                  <a:txBody>
-                    <a:bodyPr/>
-                    <a:lstStyle/>
-                    <a:p>
-                      <a:pPr algn="ctr">
-                        <a:defRPr sz="1000">
-                          <a:solidFill>
-                            <a:srgbClr val="333333"/>
-                          </a:solidFill>
-                          <a:latin typeface="Calibri"/>
-                        </a:defRPr>
-                      </a:pPr>
-                      <a:r>
-                        <a:t>5-fold CV</a:t>
-                      </a:r>
-                    </a:p>
-                  </a:txBody>
-                  <a:tcPr anchor="ctr">
-                    <a:solidFill>
-                      <a:srgbClr val="F8F8F8"/>
-                    </a:solidFill>
-                  </a:tcPr>
-                </a:tc>
-              </a:tr>
-              <a:tr h="294640">
-                <a:tc>
-                  <a:txBody>
-                    <a:bodyPr/>
-                    <a:lstStyle/>
-                    <a:p>
-                      <a:pPr algn="ctr">
-                        <a:defRPr sz="1000" b="1">
-                          <a:solidFill>
-                            <a:srgbClr val="D97706"/>
-                          </a:solidFill>
-                          <a:latin typeface="Calibri"/>
-                        </a:defRPr>
-                      </a:pPr>
-                      <a:r>
-                        <a:t>Basalt</a:t>
-                      </a:r>
-                    </a:p>
-                  </a:txBody>
-                  <a:tcPr anchor="ctr"/>
-                </a:tc>
-                <a:tc>
-                  <a:txBody>
-                    <a:bodyPr/>
-                    <a:lstStyle/>
-                    <a:p>
-                      <a:pPr algn="l">
-                        <a:defRPr sz="1000">
-                          <a:solidFill>
-                            <a:srgbClr val="333333"/>
-                          </a:solidFill>
-                          <a:latin typeface="Calibri"/>
-                        </a:defRPr>
-                      </a:pPr>
-                      <a:r>
-                        <a:t>Basalt + Trace Data (major only)</a:t>
-                      </a:r>
-                    </a:p>
-                  </a:txBody>
-                  <a:tcPr anchor="ctr"/>
-                </a:tc>
-                <a:tc>
-                  <a:txBody>
-                    <a:bodyPr/>
-                    <a:lstStyle/>
-                    <a:p>
-                      <a:pPr algn="ctr">
-                        <a:defRPr sz="1000">
-                          <a:solidFill>
-                            <a:srgbClr val="333333"/>
-                          </a:solidFill>
-                          <a:latin typeface="Consolas"/>
-                        </a:defRPr>
-                      </a:pPr>
-                      <a:r>
-                        <a:t>3,298</a:t>
-                      </a:r>
-                    </a:p>
-                  </a:txBody>
-                  <a:tcPr anchor="ctr"/>
-                </a:tc>
-                <a:tc>
-                  <a:txBody>
-                    <a:bodyPr/>
-                    <a:lstStyle/>
-                    <a:p>
-                      <a:pPr algn="ctr">
-                        <a:defRPr sz="1000">
-                          <a:solidFill>
-                            <a:srgbClr val="333333"/>
-                          </a:solidFill>
-                          <a:latin typeface="Consolas"/>
-                        </a:defRPr>
-                      </a:pPr>
-                      <a:r>
-                        <a:t>11</a:t>
-                      </a:r>
-                    </a:p>
-                  </a:txBody>
-                  <a:tcPr anchor="ctr"/>
-                </a:tc>
-                <a:tc>
-                  <a:txBody>
-                    <a:bodyPr/>
-                    <a:lstStyle/>
-                    <a:p>
-                      <a:pPr algn="ctr">
-                        <a:defRPr sz="1000">
-                          <a:solidFill>
-                            <a:srgbClr val="333333"/>
-                          </a:solidFill>
-                          <a:latin typeface="Consolas"/>
-                        </a:defRPr>
-                      </a:pPr>
-                      <a:r>
-                        <a:t>0.576 +/- 0.029</a:t>
-                      </a:r>
-                    </a:p>
-                  </a:txBody>
-                  <a:tcPr anchor="ctr"/>
-                </a:tc>
-                <a:tc>
-                  <a:txBody>
-                    <a:bodyPr/>
-                    <a:lstStyle/>
-                    <a:p>
-                      <a:pPr algn="ctr">
-                        <a:defRPr sz="1000">
-                          <a:solidFill>
-                            <a:srgbClr val="333333"/>
-                          </a:solidFill>
-                          <a:latin typeface="Calibri"/>
-                        </a:defRPr>
-                      </a:pPr>
-                      <a:r>
-                        <a:t>5-fold CV</a:t>
-                      </a:r>
-                    </a:p>
-                  </a:txBody>
-                  <a:tcPr anchor="ctr"/>
-                </a:tc>
-              </a:tr>
-              <a:tr h="294640">
-                <a:tc>
-                  <a:txBody>
-                    <a:bodyPr/>
-                    <a:lstStyle/>
-                    <a:p>
-                      <a:pPr algn="ctr">
-                        <a:defRPr sz="1000" b="1">
-                          <a:solidFill>
-                            <a:srgbClr val="2563EB"/>
-                          </a:solidFill>
-                          <a:latin typeface="Calibri"/>
-                        </a:defRPr>
-                      </a:pPr>
-                      <a:r>
-                        <a:t>Quality Subsets</a:t>
-                      </a:r>
-                    </a:p>
-                  </a:txBody>
-                  <a:tcPr anchor="ctr">
-                    <a:solidFill>
-                      <a:srgbClr val="F8F8F8"/>
-                    </a:solidFill>
-                  </a:tcPr>
-                </a:tc>
-                <a:tc>
-                  <a:txBody>
-                    <a:bodyPr/>
-                    <a:lstStyle/>
-                    <a:p>
-                      <a:pPr algn="l">
-                        <a:defRPr sz="1000">
-                          <a:solidFill>
-                            <a:srgbClr val="333333"/>
-                          </a:solidFill>
-                          <a:latin typeface="Calibri"/>
-                        </a:defRPr>
-                      </a:pPr>
-                      <a:r>
-                        <a:t>Excl. Trace-Miss (major only)</a:t>
-                      </a:r>
-                    </a:p>
-                  </a:txBody>
-                  <a:tcPr anchor="ctr">
-                    <a:solidFill>
-                      <a:srgbClr val="F8F8F8"/>
-                    </a:solidFill>
-                  </a:tcPr>
-                </a:tc>
-                <a:tc>
-                  <a:txBody>
-                    <a:bodyPr/>
-                    <a:lstStyle/>
-                    <a:p>
-                      <a:pPr algn="ctr">
-                        <a:defRPr sz="1000">
-                          <a:solidFill>
-                            <a:srgbClr val="333333"/>
-                          </a:solidFill>
-                          <a:latin typeface="Consolas"/>
-                        </a:defRPr>
-                      </a:pPr>
-                      <a:r>
-                        <a:t>39,631</a:t>
-                      </a:r>
-                    </a:p>
-                  </a:txBody>
-                  <a:tcPr anchor="ctr">
-                    <a:solidFill>
-                      <a:srgbClr val="F8F8F8"/>
-                    </a:solidFill>
-                  </a:tcPr>
-                </a:tc>
-                <a:tc>
-                  <a:txBody>
-                    <a:bodyPr/>
-                    <a:lstStyle/>
-                    <a:p>
-                      <a:pPr algn="ctr">
-                        <a:defRPr sz="1000">
-                          <a:solidFill>
-                            <a:srgbClr val="333333"/>
-                          </a:solidFill>
-                          <a:latin typeface="Consolas"/>
-                        </a:defRPr>
-                      </a:pPr>
-                      <a:r>
-                        <a:t>11</a:t>
-                      </a:r>
-                    </a:p>
-                  </a:txBody>
-                  <a:tcPr anchor="ctr">
-                    <a:solidFill>
-                      <a:srgbClr val="F8F8F8"/>
-                    </a:solidFill>
-                  </a:tcPr>
-                </a:tc>
-                <a:tc>
-                  <a:txBody>
-                    <a:bodyPr/>
-                    <a:lstStyle/>
-                    <a:p>
-                      <a:pPr algn="ctr">
-                        <a:defRPr sz="1000">
-                          <a:solidFill>
-                            <a:srgbClr val="333333"/>
-                          </a:solidFill>
-                          <a:latin typeface="Consolas"/>
-                        </a:defRPr>
-                      </a:pPr>
-                      <a:r>
-                        <a:t>0.432 +/- 0.012</a:t>
-                      </a:r>
-                    </a:p>
-                  </a:txBody>
-                  <a:tcPr anchor="ctr">
-                    <a:solidFill>
-                      <a:srgbClr val="F8F8F8"/>
-                    </a:solidFill>
-                  </a:tcPr>
-                </a:tc>
-                <a:tc>
-                  <a:txBody>
-                    <a:bodyPr/>
-                    <a:lstStyle/>
-                    <a:p>
-                      <a:pPr algn="ctr">
-                        <a:defRPr sz="1000">
-                          <a:solidFill>
-                            <a:srgbClr val="333333"/>
-                          </a:solidFill>
-                          <a:latin typeface="Calibri"/>
-                        </a:defRPr>
-                      </a:pPr>
-                      <a:r>
-                        <a:t>5-fold CV</a:t>
-                      </a:r>
-                    </a:p>
-                  </a:txBody>
-                  <a:tcPr anchor="ctr">
-                    <a:solidFill>
-                      <a:srgbClr val="F8F8F8"/>
+                      <a:srgbClr val="FFF4E6"/>
                     </a:solidFill>
                   </a:tcPr>
                 </a:tc>
@@ -11202,7 +6315,7 @@
       </p:graphicFrame>
       <p:sp>
         <p:nvSpPr>
-          <p:cNvPr id="5" name="TextBox 4"/>
+          <p:cNvPr id="6" name="TextBox 5"/>
           <p:cNvSpPr txBox="1"/>
           <p:nvPr/>
         </p:nvSpPr>
@@ -11231,7 +6344,2294 @@
               </a:defRPr>
             </a:pPr>
             <a:r>
-              <a:t>Green row = best practical model. M2_T0 has highest F1 (0.972) but only 1,195 samples. See Slide 17 for the full 54-experiment matrix.</a:t>
+              <a:t>43-feature model on the 783 basalt+phenocryst samples gives F1m = 0.980. The gap to the independently trained model is driven mainly by small-class overfitting. No specialised model needed.</a:t>
+            </a:r>
+          </a:p>
+        </p:txBody>
+      </p:sp>
+    </p:spTree>
+  </p:cSld>
+  <p:clrMapOvr>
+    <a:masterClrMapping/>
+  </p:clrMapOvr>
+</p:sld>
+</file>
+
+<file path=ppt/slides/slide17.xml><?xml version="1.0" encoding="utf-8"?>
+<p:sld xmlns:a="http://schemas.openxmlformats.org/drawingml/2006/main" xmlns:p="http://schemas.openxmlformats.org/presentationml/2006/main" xmlns:r="http://schemas.openxmlformats.org/officeDocument/2006/relationships">
+  <p:cSld>
+    <p:spTree>
+      <p:nvGrpSpPr>
+        <p:cNvPr id="1" name=""/>
+        <p:cNvGrpSpPr/>
+        <p:nvPr/>
+      </p:nvGrpSpPr>
+      <p:grpSpPr/>
+      <p:sp>
+        <p:nvSpPr>
+          <p:cNvPr id="2" name="TextBox 1"/>
+          <p:cNvSpPr txBox="1"/>
+          <p:nvPr/>
+        </p:nvSpPr>
+        <p:spPr>
+          <a:xfrm>
+            <a:off x="548640" y="274320"/>
+            <a:ext cx="10972800" cy="640080"/>
+          </a:xfrm>
+          <a:prstGeom prst="rect">
+            <a:avLst/>
+          </a:prstGeom>
+          <a:noFill/>
+        </p:spPr>
+        <p:txBody>
+          <a:bodyPr wrap="square">
+            <a:spAutoFit/>
+          </a:bodyPr>
+          <a:lstStyle/>
+          <a:p>
+            <a:pPr>
+              <a:defRPr sz="2800" b="1">
+                <a:solidFill>
+                  <a:srgbClr val="1A2744"/>
+                </a:solidFill>
+                <a:latin typeface="Calibri"/>
+              </a:defRPr>
+            </a:pPr>
+            <a:r>
+              <a:t>Key Conclusions</a:t>
+            </a:r>
+          </a:p>
+        </p:txBody>
+      </p:sp>
+      <p:sp>
+        <p:nvSpPr>
+          <p:cNvPr id="3" name="Rectangle 2"/>
+          <p:cNvSpPr/>
+          <p:nvPr/>
+        </p:nvSpPr>
+        <p:spPr>
+          <a:xfrm>
+            <a:off x="548640" y="1005840"/>
+            <a:ext cx="10972800" cy="25400"/>
+          </a:xfrm>
+          <a:prstGeom prst="rect">
+            <a:avLst/>
+          </a:prstGeom>
+          <a:solidFill>
+            <a:srgbClr val="2563EB"/>
+          </a:solidFill>
+          <a:ln>
+            <a:noFill/>
+          </a:ln>
+        </p:spPr>
+        <p:style>
+          <a:lnRef idx="1">
+            <a:schemeClr val="accent1"/>
+          </a:lnRef>
+          <a:fillRef idx="3">
+            <a:schemeClr val="accent1"/>
+          </a:fillRef>
+          <a:effectRef idx="2">
+            <a:schemeClr val="accent1"/>
+          </a:effectRef>
+          <a:fontRef idx="minor">
+            <a:schemeClr val="lt1"/>
+          </a:fontRef>
+        </p:style>
+        <p:txBody>
+          <a:bodyPr rtlCol="0" anchor="ctr"/>
+          <a:lstStyle/>
+          <a:p>
+            <a:pPr algn="ctr"/>
+          </a:p>
+        </p:txBody>
+      </p:sp>
+      <p:sp>
+        <p:nvSpPr>
+          <p:cNvPr id="4" name="TextBox 3"/>
+          <p:cNvSpPr txBox="1"/>
+          <p:nvPr/>
+        </p:nvSpPr>
+        <p:spPr>
+          <a:xfrm>
+            <a:off x="731520" y="1280160"/>
+            <a:ext cx="10789920" cy="5303520"/>
+          </a:xfrm>
+          <a:prstGeom prst="rect">
+            <a:avLst/>
+          </a:prstGeom>
+          <a:noFill/>
+        </p:spPr>
+        <p:txBody>
+          <a:bodyPr wrap="square">
+            <a:spAutoFit/>
+          </a:bodyPr>
+          <a:lstStyle/>
+          <a:p>
+            <a:pPr>
+              <a:spcBef>
+                <a:spcPts val="100"/>
+              </a:spcBef>
+              <a:spcAft>
+                <a:spcPts val="500"/>
+              </a:spcAft>
+              <a:defRPr sz="1500" i="0">
+                <a:solidFill>
+                  <a:srgbClr val="333333"/>
+                </a:solidFill>
+                <a:latin typeface="Calibri"/>
+              </a:defRPr>
+            </a:pPr>
+            <a:r>
+              <a:rPr sz="1300">
+                <a:solidFill>
+                  <a:srgbClr val="059669"/>
+                </a:solidFill>
+                <a:latin typeface="Calibri"/>
+              </a:rPr>
+              <a:t>■  </a:t>
+            </a:r>
+            <a:r>
+              <a:rPr sz="1500">
+                <a:solidFill>
+                  <a:srgbClr val="333333"/>
+                </a:solidFill>
+                <a:latin typeface="Calibri"/>
+              </a:rPr>
+              <a:t>43-feature model (Major+Trace, no endmembers): F1-macro = 0.914 on test set (90/10 split, 39,631 rows)</a:t>
+            </a:r>
+          </a:p>
+          <a:p>
+            <a:pPr>
+              <a:spcAft>
+                <a:spcPts val="100"/>
+              </a:spcAft>
+            </a:pPr>
+          </a:p>
+          <a:p>
+            <a:pPr>
+              <a:spcBef>
+                <a:spcPts val="100"/>
+              </a:spcBef>
+              <a:spcAft>
+                <a:spcPts val="500"/>
+              </a:spcAft>
+              <a:defRPr sz="1500" i="0">
+                <a:solidFill>
+                  <a:srgbClr val="333333"/>
+                </a:solidFill>
+                <a:latin typeface="Calibri"/>
+              </a:defRPr>
+            </a:pPr>
+            <a:r>
+              <a:rPr sz="1300">
+                <a:solidFill>
+                  <a:srgbClr val="059669"/>
+                </a:solidFill>
+                <a:latin typeface="Calibri"/>
+              </a:rPr>
+              <a:t>■  </a:t>
+            </a:r>
+            <a:r>
+              <a:rPr sz="1500">
+                <a:solidFill>
+                  <a:srgbClr val="333333"/>
+                </a:solidFill>
+                <a:latin typeface="Calibri"/>
+              </a:rPr>
+              <a:t>Endmembers contribute &lt;0.006 F1; dropped for parsimony (43 vs 50 features)</a:t>
+            </a:r>
+          </a:p>
+          <a:p>
+            <a:pPr>
+              <a:spcAft>
+                <a:spcPts val="100"/>
+              </a:spcAft>
+            </a:pPr>
+          </a:p>
+          <a:p>
+            <a:pPr>
+              <a:spcBef>
+                <a:spcPts val="100"/>
+              </a:spcBef>
+              <a:spcAft>
+                <a:spcPts val="500"/>
+              </a:spcAft>
+              <a:defRPr sz="1500" i="0">
+                <a:solidFill>
+                  <a:srgbClr val="333333"/>
+                </a:solidFill>
+                <a:latin typeface="Calibri"/>
+              </a:defRPr>
+            </a:pPr>
+            <a:r>
+              <a:rPr sz="1300">
+                <a:solidFill>
+                  <a:srgbClr val="D97706"/>
+                </a:solidFill>
+                <a:latin typeface="Calibri"/>
+              </a:rPr>
+              <a:t>■  </a:t>
+            </a:r>
+            <a:r>
+              <a:rPr sz="1500">
+                <a:solidFill>
+                  <a:srgbClr val="333333"/>
+                </a:solidFill>
+                <a:latin typeface="Calibri"/>
+              </a:rPr>
+              <a:t>Trace elements are decisive: +0.475 F1-macro contribution when added to major oxides</a:t>
+            </a:r>
+          </a:p>
+          <a:p>
+            <a:pPr>
+              <a:spcAft>
+                <a:spcPts val="100"/>
+              </a:spcAft>
+            </a:pPr>
+          </a:p>
+          <a:p>
+            <a:pPr>
+              <a:spcBef>
+                <a:spcPts val="100"/>
+              </a:spcBef>
+              <a:spcAft>
+                <a:spcPts val="500"/>
+              </a:spcAft>
+              <a:defRPr sz="1500" i="0">
+                <a:solidFill>
+                  <a:srgbClr val="333333"/>
+                </a:solidFill>
+                <a:latin typeface="Calibri"/>
+              </a:defRPr>
+            </a:pPr>
+            <a:r>
+              <a:rPr sz="1300">
+                <a:solidFill>
+                  <a:srgbClr val="2563EB"/>
+                </a:solidFill>
+                <a:latin typeface="Calibri"/>
+              </a:rPr>
+              <a:t>■  </a:t>
+            </a:r>
+            <a:r>
+              <a:rPr sz="1500">
+                <a:solidFill>
+                  <a:srgbClr val="333333"/>
+                </a:solidFill>
+                <a:latin typeface="Calibri"/>
+              </a:rPr>
+              <a:t>K2O is the strongest statistical discriminator among major oxides (CV = 1.753)</a:t>
+            </a:r>
+          </a:p>
+          <a:p>
+            <a:pPr>
+              <a:spcAft>
+                <a:spcPts val="100"/>
+              </a:spcAft>
+            </a:pPr>
+          </a:p>
+          <a:p>
+            <a:pPr>
+              <a:spcBef>
+                <a:spcPts val="100"/>
+              </a:spcBef>
+              <a:spcAft>
+                <a:spcPts val="500"/>
+              </a:spcAft>
+              <a:defRPr sz="1500" i="0">
+                <a:solidFill>
+                  <a:srgbClr val="333333"/>
+                </a:solidFill>
+                <a:latin typeface="Calibri"/>
+              </a:defRPr>
+            </a:pPr>
+            <a:r>
+              <a:rPr sz="1300">
+                <a:solidFill>
+                  <a:srgbClr val="1A2744"/>
+                </a:solidFill>
+                <a:latin typeface="Calibri"/>
+              </a:rPr>
+              <a:t>■  </a:t>
+            </a:r>
+            <a:r>
+              <a:rPr sz="1500">
+                <a:solidFill>
+                  <a:srgbClr val="333333"/>
+                </a:solidFill>
+                <a:latin typeface="Calibri"/>
+              </a:rPr>
+              <a:t>SHAP analysis: Sr, Sm, Zr, Sc have the highest individual prediction impact</a:t>
+            </a:r>
+          </a:p>
+          <a:p>
+            <a:pPr>
+              <a:spcAft>
+                <a:spcPts val="100"/>
+              </a:spcAft>
+            </a:pPr>
+          </a:p>
+          <a:p>
+            <a:pPr>
+              <a:spcBef>
+                <a:spcPts val="100"/>
+              </a:spcBef>
+              <a:spcAft>
+                <a:spcPts val="500"/>
+              </a:spcAft>
+              <a:defRPr sz="1500" i="0">
+                <a:solidFill>
+                  <a:srgbClr val="333333"/>
+                </a:solidFill>
+                <a:latin typeface="Calibri"/>
+              </a:defRPr>
+            </a:pPr>
+            <a:r>
+              <a:rPr sz="1300">
+                <a:solidFill>
+                  <a:srgbClr val="7C3AED"/>
+                </a:solidFill>
+                <a:latin typeface="Calibri"/>
+              </a:rPr>
+              <a:t>■  </a:t>
+            </a:r>
+            <a:r>
+              <a:rPr sz="1500">
+                <a:solidFill>
+                  <a:srgbClr val="333333"/>
+                </a:solidFill>
+                <a:latin typeface="Calibri"/>
+              </a:rPr>
+              <a:t>Intraplate Volcanics dominated by mantle xenoliths -- F1 drops on basalt+phenocryst slice</a:t>
+            </a:r>
+          </a:p>
+          <a:p>
+            <a:pPr>
+              <a:spcAft>
+                <a:spcPts val="100"/>
+              </a:spcAft>
+            </a:pPr>
+          </a:p>
+          <a:p>
+            <a:pPr>
+              <a:spcBef>
+                <a:spcPts val="100"/>
+              </a:spcBef>
+              <a:spcAft>
+                <a:spcPts val="500"/>
+              </a:spcAft>
+              <a:defRPr sz="1500" i="0">
+                <a:solidFill>
+                  <a:srgbClr val="333333"/>
+                </a:solidFill>
+                <a:latin typeface="Calibri"/>
+              </a:defRPr>
+            </a:pPr>
+            <a:r>
+              <a:rPr sz="1300">
+                <a:solidFill>
+                  <a:srgbClr val="1A2744"/>
+                </a:solidFill>
+                <a:latin typeface="Calibri"/>
+              </a:rPr>
+              <a:t>■  </a:t>
+            </a:r>
+            <a:r>
+              <a:rPr sz="1500">
+                <a:solidFill>
+                  <a:srgbClr val="333333"/>
+                </a:solidFill>
+                <a:latin typeface="Calibri"/>
+              </a:rPr>
+              <a:t>54-experiment matrix (9 subsets x 6 feature groups) confirms robustness across configurations</a:t>
+            </a:r>
+          </a:p>
+          <a:p>
+            <a:pPr>
+              <a:spcAft>
+                <a:spcPts val="100"/>
+              </a:spcAft>
+            </a:pPr>
+          </a:p>
+          <a:p>
+            <a:pPr>
+              <a:spcBef>
+                <a:spcPts val="100"/>
+              </a:spcBef>
+              <a:spcAft>
+                <a:spcPts val="500"/>
+              </a:spcAft>
+              <a:defRPr sz="1500" i="0">
+                <a:solidFill>
+                  <a:srgbClr val="333333"/>
+                </a:solidFill>
+                <a:latin typeface="Calibri"/>
+              </a:defRPr>
+            </a:pPr>
+            <a:r>
+              <a:rPr sz="1300">
+                <a:solidFill>
+                  <a:srgbClr val="2563EB"/>
+                </a:solidFill>
+                <a:latin typeface="Calibri"/>
+              </a:rPr>
+              <a:t>■  </a:t>
+            </a:r>
+            <a:r>
+              <a:rPr sz="1500">
+                <a:solidFill>
+                  <a:srgbClr val="333333"/>
+                </a:solidFill>
+                <a:latin typeface="Calibri"/>
+              </a:rPr>
+              <a:t>Class imbalance (409.8 : 1) managed via balanced sample weights, not resampling</a:t>
+            </a:r>
+          </a:p>
+        </p:txBody>
+      </p:sp>
+    </p:spTree>
+  </p:cSld>
+  <p:clrMapOvr>
+    <a:masterClrMapping/>
+  </p:clrMapOvr>
+</p:sld>
+</file>
+
+<file path=ppt/slides/slide18.xml><?xml version="1.0" encoding="utf-8"?>
+<p:sld xmlns:a="http://schemas.openxmlformats.org/drawingml/2006/main" xmlns:p="http://schemas.openxmlformats.org/presentationml/2006/main" xmlns:r="http://schemas.openxmlformats.org/officeDocument/2006/relationships">
+  <p:cSld>
+    <p:spTree>
+      <p:nvGrpSpPr>
+        <p:cNvPr id="1" name=""/>
+        <p:cNvGrpSpPr/>
+        <p:nvPr/>
+      </p:nvGrpSpPr>
+      <p:grpSpPr/>
+      <p:sp>
+        <p:nvSpPr>
+          <p:cNvPr id="2" name="TextBox 1"/>
+          <p:cNvSpPr txBox="1"/>
+          <p:nvPr/>
+        </p:nvSpPr>
+        <p:spPr>
+          <a:xfrm>
+            <a:off x="548640" y="274320"/>
+            <a:ext cx="10972800" cy="640080"/>
+          </a:xfrm>
+          <a:prstGeom prst="rect">
+            <a:avLst/>
+          </a:prstGeom>
+          <a:noFill/>
+        </p:spPr>
+        <p:txBody>
+          <a:bodyPr wrap="square">
+            <a:spAutoFit/>
+          </a:bodyPr>
+          <a:lstStyle/>
+          <a:p>
+            <a:pPr>
+              <a:defRPr sz="2800" b="1">
+                <a:solidFill>
+                  <a:srgbClr val="1A2744"/>
+                </a:solidFill>
+                <a:latin typeface="Calibri"/>
+              </a:defRPr>
+            </a:pPr>
+            <a:r>
+              <a:t>Methodology Summary</a:t>
+            </a:r>
+          </a:p>
+        </p:txBody>
+      </p:sp>
+      <p:sp>
+        <p:nvSpPr>
+          <p:cNvPr id="3" name="Rectangle 2"/>
+          <p:cNvSpPr/>
+          <p:nvPr/>
+        </p:nvSpPr>
+        <p:spPr>
+          <a:xfrm>
+            <a:off x="548640" y="1005840"/>
+            <a:ext cx="10972800" cy="25400"/>
+          </a:xfrm>
+          <a:prstGeom prst="rect">
+            <a:avLst/>
+          </a:prstGeom>
+          <a:solidFill>
+            <a:srgbClr val="2563EB"/>
+          </a:solidFill>
+          <a:ln>
+            <a:noFill/>
+          </a:ln>
+        </p:spPr>
+        <p:style>
+          <a:lnRef idx="1">
+            <a:schemeClr val="accent1"/>
+          </a:lnRef>
+          <a:fillRef idx="3">
+            <a:schemeClr val="accent1"/>
+          </a:fillRef>
+          <a:effectRef idx="2">
+            <a:schemeClr val="accent1"/>
+          </a:effectRef>
+          <a:fontRef idx="minor">
+            <a:schemeClr val="lt1"/>
+          </a:fontRef>
+        </p:style>
+        <p:txBody>
+          <a:bodyPr rtlCol="0" anchor="ctr"/>
+          <a:lstStyle/>
+          <a:p>
+            <a:pPr algn="ctr"/>
+          </a:p>
+        </p:txBody>
+      </p:sp>
+      <p:sp>
+        <p:nvSpPr>
+          <p:cNvPr id="4" name="TextBox 3"/>
+          <p:cNvSpPr txBox="1"/>
+          <p:nvPr/>
+        </p:nvSpPr>
+        <p:spPr>
+          <a:xfrm>
+            <a:off x="548640" y="1371600"/>
+            <a:ext cx="5029200" cy="365760"/>
+          </a:xfrm>
+          <a:prstGeom prst="rect">
+            <a:avLst/>
+          </a:prstGeom>
+          <a:noFill/>
+        </p:spPr>
+        <p:txBody>
+          <a:bodyPr wrap="none">
+            <a:spAutoFit/>
+          </a:bodyPr>
+          <a:lstStyle/>
+          <a:p>
+            <a:pPr>
+              <a:defRPr sz="1800" b="1">
+                <a:solidFill>
+                  <a:srgbClr val="2563EB"/>
+                </a:solidFill>
+                <a:latin typeface="Calibri"/>
+              </a:defRPr>
+            </a:pPr>
+            <a:r>
+              <a:t>Model</a:t>
+            </a:r>
+          </a:p>
+        </p:txBody>
+      </p:sp>
+      <p:sp>
+        <p:nvSpPr>
+          <p:cNvPr id="5" name="TextBox 4"/>
+          <p:cNvSpPr txBox="1"/>
+          <p:nvPr/>
+        </p:nvSpPr>
+        <p:spPr>
+          <a:xfrm>
+            <a:off x="731520" y="1783080"/>
+            <a:ext cx="4846320" cy="1737360"/>
+          </a:xfrm>
+          <a:prstGeom prst="rect">
+            <a:avLst/>
+          </a:prstGeom>
+          <a:noFill/>
+        </p:spPr>
+        <p:txBody>
+          <a:bodyPr wrap="square">
+            <a:spAutoFit/>
+          </a:bodyPr>
+          <a:lstStyle/>
+          <a:p>
+            <a:pPr>
+              <a:spcAft>
+                <a:spcPts val="400"/>
+              </a:spcAft>
+              <a:defRPr sz="1400">
+                <a:solidFill>
+                  <a:srgbClr val="333333"/>
+                </a:solidFill>
+                <a:latin typeface="Calibri"/>
+              </a:defRPr>
+            </a:pPr>
+            <a:r>
+              <a:t>•  XGBoost (tree_method='hist')</a:t>
+            </a:r>
+          </a:p>
+          <a:p>
+            <a:pPr>
+              <a:spcAft>
+                <a:spcPts val="400"/>
+              </a:spcAft>
+              <a:defRPr sz="1400">
+                <a:solidFill>
+                  <a:srgbClr val="333333"/>
+                </a:solidFill>
+                <a:latin typeface="Calibri"/>
+              </a:defRPr>
+            </a:pPr>
+            <a:r>
+              <a:t>•  max_depth = 12, learning_rate = 0.08</a:t>
+            </a:r>
+          </a:p>
+          <a:p>
+            <a:pPr>
+              <a:spcAft>
+                <a:spcPts val="400"/>
+              </a:spcAft>
+              <a:defRPr sz="1400">
+                <a:solidFill>
+                  <a:srgbClr val="333333"/>
+                </a:solidFill>
+                <a:latin typeface="Calibri"/>
+              </a:defRPr>
+            </a:pPr>
+            <a:r>
+              <a:t>•  n_estimators = 400</a:t>
+            </a:r>
+          </a:p>
+          <a:p>
+            <a:pPr>
+              <a:spcAft>
+                <a:spcPts val="400"/>
+              </a:spcAft>
+              <a:defRPr sz="1400">
+                <a:solidFill>
+                  <a:srgbClr val="333333"/>
+                </a:solidFill>
+                <a:latin typeface="Calibri"/>
+              </a:defRPr>
+            </a:pPr>
+            <a:r>
+              <a:t>•  Native NaN handling (no imputation)</a:t>
+            </a:r>
+          </a:p>
+          <a:p>
+            <a:pPr>
+              <a:spcAft>
+                <a:spcPts val="400"/>
+              </a:spcAft>
+              <a:defRPr sz="1400">
+                <a:solidFill>
+                  <a:srgbClr val="333333"/>
+                </a:solidFill>
+                <a:latin typeface="Calibri"/>
+              </a:defRPr>
+            </a:pPr>
+            <a:r>
+              <a:t>•  Balanced sample weights for class imbalance</a:t>
+            </a:r>
+          </a:p>
+        </p:txBody>
+      </p:sp>
+      <p:sp>
+        <p:nvSpPr>
+          <p:cNvPr id="6" name="TextBox 5"/>
+          <p:cNvSpPr txBox="1"/>
+          <p:nvPr/>
+        </p:nvSpPr>
+        <p:spPr>
+          <a:xfrm>
+            <a:off x="548640" y="3794759"/>
+            <a:ext cx="5029200" cy="365760"/>
+          </a:xfrm>
+          <a:prstGeom prst="rect">
+            <a:avLst/>
+          </a:prstGeom>
+          <a:noFill/>
+        </p:spPr>
+        <p:txBody>
+          <a:bodyPr wrap="none">
+            <a:spAutoFit/>
+          </a:bodyPr>
+          <a:lstStyle/>
+          <a:p>
+            <a:pPr>
+              <a:defRPr sz="1800" b="1">
+                <a:solidFill>
+                  <a:srgbClr val="2563EB"/>
+                </a:solidFill>
+                <a:latin typeface="Calibri"/>
+              </a:defRPr>
+            </a:pPr>
+            <a:r>
+              <a:t>Validation</a:t>
+            </a:r>
+          </a:p>
+        </p:txBody>
+      </p:sp>
+      <p:sp>
+        <p:nvSpPr>
+          <p:cNvPr id="7" name="TextBox 6"/>
+          <p:cNvSpPr txBox="1"/>
+          <p:nvPr/>
+        </p:nvSpPr>
+        <p:spPr>
+          <a:xfrm>
+            <a:off x="731520" y="4206239"/>
+            <a:ext cx="4846320" cy="1042416"/>
+          </a:xfrm>
+          <a:prstGeom prst="rect">
+            <a:avLst/>
+          </a:prstGeom>
+          <a:noFill/>
+        </p:spPr>
+        <p:txBody>
+          <a:bodyPr wrap="square">
+            <a:spAutoFit/>
+          </a:bodyPr>
+          <a:lstStyle/>
+          <a:p>
+            <a:pPr>
+              <a:spcAft>
+                <a:spcPts val="400"/>
+              </a:spcAft>
+              <a:defRPr sz="1400">
+                <a:solidFill>
+                  <a:srgbClr val="333333"/>
+                </a:solidFill>
+                <a:latin typeface="Calibri"/>
+              </a:defRPr>
+            </a:pPr>
+            <a:r>
+              <a:t>•  90/10 stratified split (primary model)</a:t>
+            </a:r>
+          </a:p>
+          <a:p>
+            <a:pPr>
+              <a:spcAft>
+                <a:spcPts val="400"/>
+              </a:spcAft>
+              <a:defRPr sz="1400">
+                <a:solidFill>
+                  <a:srgbClr val="333333"/>
+                </a:solidFill>
+                <a:latin typeface="Calibri"/>
+              </a:defRPr>
+            </a:pPr>
+            <a:r>
+              <a:t>•  54-experiment matrix with 5-fold CV</a:t>
+            </a:r>
+          </a:p>
+          <a:p>
+            <a:pPr>
+              <a:spcAft>
+                <a:spcPts val="400"/>
+              </a:spcAft>
+              <a:defRPr sz="1400">
+                <a:solidFill>
+                  <a:srgbClr val="333333"/>
+                </a:solidFill>
+                <a:latin typeface="Calibri"/>
+              </a:defRPr>
+            </a:pPr>
+            <a:r>
+              <a:t>•  F1-macro as primary metric (equal class weighting)</a:t>
+            </a:r>
+          </a:p>
+        </p:txBody>
+      </p:sp>
+      <p:sp>
+        <p:nvSpPr>
+          <p:cNvPr id="8" name="TextBox 7"/>
+          <p:cNvSpPr txBox="1"/>
+          <p:nvPr/>
+        </p:nvSpPr>
+        <p:spPr>
+          <a:xfrm>
+            <a:off x="6217920" y="1371600"/>
+            <a:ext cx="5029200" cy="365760"/>
+          </a:xfrm>
+          <a:prstGeom prst="rect">
+            <a:avLst/>
+          </a:prstGeom>
+          <a:noFill/>
+        </p:spPr>
+        <p:txBody>
+          <a:bodyPr wrap="none">
+            <a:spAutoFit/>
+          </a:bodyPr>
+          <a:lstStyle/>
+          <a:p>
+            <a:pPr>
+              <a:defRPr sz="1800" b="1">
+                <a:solidFill>
+                  <a:srgbClr val="2563EB"/>
+                </a:solidFill>
+                <a:latin typeface="Calibri"/>
+              </a:defRPr>
+            </a:pPr>
+            <a:r>
+              <a:t>Features</a:t>
+            </a:r>
+          </a:p>
+        </p:txBody>
+      </p:sp>
+      <p:sp>
+        <p:nvSpPr>
+          <p:cNvPr id="9" name="TextBox 8"/>
+          <p:cNvSpPr txBox="1"/>
+          <p:nvPr/>
+        </p:nvSpPr>
+        <p:spPr>
+          <a:xfrm>
+            <a:off x="6400800" y="1783080"/>
+            <a:ext cx="4846320" cy="1042416"/>
+          </a:xfrm>
+          <a:prstGeom prst="rect">
+            <a:avLst/>
+          </a:prstGeom>
+          <a:noFill/>
+        </p:spPr>
+        <p:txBody>
+          <a:bodyPr wrap="square">
+            <a:spAutoFit/>
+          </a:bodyPr>
+          <a:lstStyle/>
+          <a:p>
+            <a:pPr>
+              <a:spcAft>
+                <a:spcPts val="400"/>
+              </a:spcAft>
+              <a:defRPr sz="1400">
+                <a:solidFill>
+                  <a:srgbClr val="333333"/>
+                </a:solidFill>
+                <a:latin typeface="Calibri"/>
+              </a:defRPr>
+            </a:pPr>
+            <a:r>
+              <a:t>•  11 major oxides (SiO2 through NiO)</a:t>
+            </a:r>
+          </a:p>
+          <a:p>
+            <a:pPr>
+              <a:spcAft>
+                <a:spcPts val="400"/>
+              </a:spcAft>
+              <a:defRPr sz="1400">
+                <a:solidFill>
+                  <a:srgbClr val="333333"/>
+                </a:solidFill>
+                <a:latin typeface="Calibri"/>
+              </a:defRPr>
+            </a:pPr>
+            <a:r>
+              <a:t>•  32 trace elements (Sc through U)</a:t>
+            </a:r>
+          </a:p>
+          <a:p>
+            <a:pPr>
+              <a:spcAft>
+                <a:spcPts val="400"/>
+              </a:spcAft>
+              <a:defRPr sz="1400">
+                <a:solidFill>
+                  <a:srgbClr val="333333"/>
+                </a:solidFill>
+                <a:latin typeface="Calibri"/>
+              </a:defRPr>
+            </a:pPr>
+            <a:r>
+              <a:t>•  43 total features (no endmembers)</a:t>
+            </a:r>
+          </a:p>
+        </p:txBody>
+      </p:sp>
+      <p:sp>
+        <p:nvSpPr>
+          <p:cNvPr id="10" name="TextBox 9"/>
+          <p:cNvSpPr txBox="1"/>
+          <p:nvPr/>
+        </p:nvSpPr>
+        <p:spPr>
+          <a:xfrm>
+            <a:off x="6217920" y="3099816"/>
+            <a:ext cx="5029200" cy="365760"/>
+          </a:xfrm>
+          <a:prstGeom prst="rect">
+            <a:avLst/>
+          </a:prstGeom>
+          <a:noFill/>
+        </p:spPr>
+        <p:txBody>
+          <a:bodyPr wrap="none">
+            <a:spAutoFit/>
+          </a:bodyPr>
+          <a:lstStyle/>
+          <a:p>
+            <a:pPr>
+              <a:defRPr sz="1800" b="1">
+                <a:solidFill>
+                  <a:srgbClr val="2563EB"/>
+                </a:solidFill>
+                <a:latin typeface="Calibri"/>
+              </a:defRPr>
+            </a:pPr>
+            <a:r>
+              <a:t>Interpretation</a:t>
+            </a:r>
+          </a:p>
+        </p:txBody>
+      </p:sp>
+      <p:sp>
+        <p:nvSpPr>
+          <p:cNvPr id="11" name="TextBox 10"/>
+          <p:cNvSpPr txBox="1"/>
+          <p:nvPr/>
+        </p:nvSpPr>
+        <p:spPr>
+          <a:xfrm>
+            <a:off x="6400800" y="3511296"/>
+            <a:ext cx="4846320" cy="1042416"/>
+          </a:xfrm>
+          <a:prstGeom prst="rect">
+            <a:avLst/>
+          </a:prstGeom>
+          <a:noFill/>
+        </p:spPr>
+        <p:txBody>
+          <a:bodyPr wrap="square">
+            <a:spAutoFit/>
+          </a:bodyPr>
+          <a:lstStyle/>
+          <a:p>
+            <a:pPr>
+              <a:spcAft>
+                <a:spcPts val="400"/>
+              </a:spcAft>
+              <a:defRPr sz="1400">
+                <a:solidFill>
+                  <a:srgbClr val="333333"/>
+                </a:solidFill>
+                <a:latin typeface="Calibri"/>
+              </a:defRPr>
+            </a:pPr>
+            <a:r>
+              <a:t>•  SHAP TreeExplainer (1,000 sample subset)</a:t>
+            </a:r>
+          </a:p>
+          <a:p>
+            <a:pPr>
+              <a:spcAft>
+                <a:spcPts val="400"/>
+              </a:spcAft>
+              <a:defRPr sz="1400">
+                <a:solidFill>
+                  <a:srgbClr val="333333"/>
+                </a:solidFill>
+                <a:latin typeface="Calibri"/>
+              </a:defRPr>
+            </a:pPr>
+            <a:r>
+              <a:t>•  Global and per-class feature importance</a:t>
+            </a:r>
+          </a:p>
+          <a:p>
+            <a:pPr>
+              <a:spcAft>
+                <a:spcPts val="400"/>
+              </a:spcAft>
+              <a:defRPr sz="1400">
+                <a:solidFill>
+                  <a:srgbClr val="333333"/>
+                </a:solidFill>
+                <a:latin typeface="Calibri"/>
+              </a:defRPr>
+            </a:pPr>
+            <a:r>
+              <a:t>•  Signed SHAP values for directional effects</a:t>
+            </a:r>
+          </a:p>
+        </p:txBody>
+      </p:sp>
+      <p:sp>
+        <p:nvSpPr>
+          <p:cNvPr id="12" name="TextBox 11"/>
+          <p:cNvSpPr txBox="1"/>
+          <p:nvPr/>
+        </p:nvSpPr>
+        <p:spPr>
+          <a:xfrm>
+            <a:off x="548640" y="6126480"/>
+            <a:ext cx="10972800" cy="365760"/>
+          </a:xfrm>
+          <a:prstGeom prst="rect">
+            <a:avLst/>
+          </a:prstGeom>
+          <a:noFill/>
+        </p:spPr>
+        <p:txBody>
+          <a:bodyPr wrap="square">
+            <a:spAutoFit/>
+          </a:bodyPr>
+          <a:lstStyle/>
+          <a:p>
+            <a:pPr algn="l">
+              <a:defRPr sz="1200" b="0">
+                <a:solidFill>
+                  <a:srgbClr val="666666"/>
+                </a:solidFill>
+                <a:latin typeface="Calibri"/>
+              </a:defRPr>
+            </a:pPr>
+            <a:r>
+              <a:t>Data: GEOROC / GRO.data (DOI:10.25625/SGFTFN)  |  211,773 clinopyroxene analyses  |  11 tectonic settings</a:t>
+            </a:r>
+          </a:p>
+        </p:txBody>
+      </p:sp>
+    </p:spTree>
+  </p:cSld>
+  <p:clrMapOvr>
+    <a:masterClrMapping/>
+  </p:clrMapOvr>
+</p:sld>
+</file>
+
+<file path=ppt/slides/slide2.xml><?xml version="1.0" encoding="utf-8"?>
+<p:sld xmlns:a="http://schemas.openxmlformats.org/drawingml/2006/main" xmlns:p="http://schemas.openxmlformats.org/presentationml/2006/main" xmlns:r="http://schemas.openxmlformats.org/officeDocument/2006/relationships">
+  <p:cSld>
+    <p:spTree>
+      <p:nvGrpSpPr>
+        <p:cNvPr id="1" name=""/>
+        <p:cNvGrpSpPr/>
+        <p:nvPr/>
+      </p:nvGrpSpPr>
+      <p:grpSpPr/>
+      <p:sp>
+        <p:nvSpPr>
+          <p:cNvPr id="2" name="TextBox 1"/>
+          <p:cNvSpPr txBox="1"/>
+          <p:nvPr/>
+        </p:nvSpPr>
+        <p:spPr>
+          <a:xfrm>
+            <a:off x="548640" y="274320"/>
+            <a:ext cx="10972800" cy="640080"/>
+          </a:xfrm>
+          <a:prstGeom prst="rect">
+            <a:avLst/>
+          </a:prstGeom>
+          <a:noFill/>
+        </p:spPr>
+        <p:txBody>
+          <a:bodyPr wrap="square">
+            <a:spAutoFit/>
+          </a:bodyPr>
+          <a:lstStyle/>
+          <a:p>
+            <a:pPr>
+              <a:defRPr sz="2800" b="1">
+                <a:solidFill>
+                  <a:srgbClr val="1A2744"/>
+                </a:solidFill>
+                <a:latin typeface="Calibri"/>
+              </a:defRPr>
+            </a:pPr>
+            <a:r>
+              <a:t>Dataset Overview</a:t>
+            </a:r>
+          </a:p>
+        </p:txBody>
+      </p:sp>
+      <p:sp>
+        <p:nvSpPr>
+          <p:cNvPr id="3" name="Rectangle 2"/>
+          <p:cNvSpPr/>
+          <p:nvPr/>
+        </p:nvSpPr>
+        <p:spPr>
+          <a:xfrm>
+            <a:off x="548640" y="1005840"/>
+            <a:ext cx="10972800" cy="25400"/>
+          </a:xfrm>
+          <a:prstGeom prst="rect">
+            <a:avLst/>
+          </a:prstGeom>
+          <a:solidFill>
+            <a:srgbClr val="2563EB"/>
+          </a:solidFill>
+          <a:ln>
+            <a:noFill/>
+          </a:ln>
+        </p:spPr>
+        <p:style>
+          <a:lnRef idx="1">
+            <a:schemeClr val="accent1"/>
+          </a:lnRef>
+          <a:fillRef idx="3">
+            <a:schemeClr val="accent1"/>
+          </a:fillRef>
+          <a:effectRef idx="2">
+            <a:schemeClr val="accent1"/>
+          </a:effectRef>
+          <a:fontRef idx="minor">
+            <a:schemeClr val="lt1"/>
+          </a:fontRef>
+        </p:style>
+        <p:txBody>
+          <a:bodyPr rtlCol="0" anchor="ctr"/>
+          <a:lstStyle/>
+          <a:p>
+            <a:pPr algn="ctr"/>
+          </a:p>
+        </p:txBody>
+      </p:sp>
+      <p:sp>
+        <p:nvSpPr>
+          <p:cNvPr id="4" name="TextBox 3"/>
+          <p:cNvSpPr txBox="1"/>
+          <p:nvPr/>
+        </p:nvSpPr>
+        <p:spPr>
+          <a:xfrm>
+            <a:off x="548640" y="1280160"/>
+            <a:ext cx="5029200" cy="4572000"/>
+          </a:xfrm>
+          <a:prstGeom prst="rect">
+            <a:avLst/>
+          </a:prstGeom>
+          <a:noFill/>
+        </p:spPr>
+        <p:txBody>
+          <a:bodyPr wrap="square">
+            <a:spAutoFit/>
+          </a:bodyPr>
+          <a:lstStyle/>
+          <a:p>
+            <a:pPr>
+              <a:spcAft>
+                <a:spcPts val="400"/>
+              </a:spcAft>
+              <a:defRPr sz="1400">
+                <a:solidFill>
+                  <a:srgbClr val="333333"/>
+                </a:solidFill>
+                <a:latin typeface="Consolas"/>
+              </a:defRPr>
+            </a:pPr>
+            <a:r>
+              <a:t>Total records:               216,809</a:t>
+            </a:r>
+          </a:p>
+          <a:p>
+            <a:pPr>
+              <a:spcAft>
+                <a:spcPts val="400"/>
+              </a:spcAft>
+              <a:defRPr sz="1400">
+                <a:solidFill>
+                  <a:srgbClr val="333333"/>
+                </a:solidFill>
+                <a:latin typeface="Consolas"/>
+              </a:defRPr>
+            </a:pPr>
+            <a:r>
+              <a:t>Valid (with tectonic label):  211,773</a:t>
+            </a:r>
+          </a:p>
+          <a:p>
+            <a:pPr>
+              <a:spcAft>
+                <a:spcPts val="400"/>
+              </a:spcAft>
+              <a:defRPr sz="1400">
+                <a:solidFill>
+                  <a:srgbClr val="333333"/>
+                </a:solidFill>
+                <a:latin typeface="Consolas"/>
+              </a:defRPr>
+            </a:pPr>
+            <a:r>
+              <a:t>Columns:                      451</a:t>
+            </a:r>
+          </a:p>
+          <a:p>
+            <a:pPr>
+              <a:spcAft>
+                <a:spcPts val="400"/>
+              </a:spcAft>
+              <a:defRPr sz="1400">
+                <a:solidFill>
+                  <a:srgbClr val="333333"/>
+                </a:solidFill>
+                <a:latin typeface="Consolas"/>
+              </a:defRPr>
+            </a:pPr>
+            <a:r>
+              <a:t>Tectonic settings:            11</a:t>
+            </a:r>
+          </a:p>
+          <a:p>
+            <a:pPr>
+              <a:spcAft>
+                <a:spcPts val="400"/>
+              </a:spcAft>
+              <a:defRPr sz="1400">
+                <a:solidFill>
+                  <a:srgbClr val="333333"/>
+                </a:solidFill>
+                <a:latin typeface="Consolas"/>
+              </a:defRPr>
+            </a:pPr>
+            <a:r>
+              <a:t>Class imbalance ratio:        409.8 : 1</a:t>
+            </a:r>
+          </a:p>
+          <a:p>
+            <a:pPr>
+              <a:spcAft>
+                <a:spcPts val="400"/>
+              </a:spcAft>
+              <a:defRPr sz="1400">
+                <a:solidFill>
+                  <a:srgbClr val="333333"/>
+                </a:solidFill>
+                <a:latin typeface="Consolas"/>
+              </a:defRPr>
+            </a:pPr>
+          </a:p>
+          <a:p>
+            <a:pPr>
+              <a:spcAft>
+                <a:spcPts val="400"/>
+              </a:spcAft>
+              <a:defRPr sz="1400">
+                <a:solidFill>
+                  <a:srgbClr val="333333"/>
+                </a:solidFill>
+                <a:latin typeface="Consolas"/>
+              </a:defRPr>
+            </a:pPr>
+            <a:r>
+              <a:t>Rows with complete majors:    0  (zero)</a:t>
+            </a:r>
+          </a:p>
+          <a:p>
+            <a:pPr>
+              <a:spcAft>
+                <a:spcPts val="400"/>
+              </a:spcAft>
+              <a:defRPr sz="1400">
+                <a:solidFill>
+                  <a:srgbClr val="333333"/>
+                </a:solidFill>
+                <a:latin typeface="Consolas"/>
+              </a:defRPr>
+            </a:pPr>
+            <a:r>
+              <a:t>Rows missing ALL trace:       172,142  (81%)</a:t>
+            </a:r>
+          </a:p>
+          <a:p>
+            <a:pPr>
+              <a:spcAft>
+                <a:spcPts val="400"/>
+              </a:spcAft>
+              <a:defRPr sz="1400">
+                <a:solidFill>
+                  <a:srgbClr val="333333"/>
+                </a:solidFill>
+                <a:latin typeface="Consolas"/>
+              </a:defRPr>
+            </a:pPr>
+            <a:r>
+              <a:t>Feature groups used:          43</a:t>
+            </a:r>
+          </a:p>
+          <a:p>
+            <a:pPr>
+              <a:spcAft>
+                <a:spcPts val="400"/>
+              </a:spcAft>
+              <a:defRPr sz="1400">
+                <a:solidFill>
+                  <a:srgbClr val="333333"/>
+                </a:solidFill>
+                <a:latin typeface="Consolas"/>
+              </a:defRPr>
+            </a:pPr>
+            <a:r>
+              <a:t>   Major oxides:  11</a:t>
+            </a:r>
+          </a:p>
+          <a:p>
+            <a:pPr>
+              <a:spcAft>
+                <a:spcPts val="400"/>
+              </a:spcAft>
+              <a:defRPr sz="1400">
+                <a:solidFill>
+                  <a:srgbClr val="333333"/>
+                </a:solidFill>
+                <a:latin typeface="Consolas"/>
+              </a:defRPr>
+            </a:pPr>
+            <a:r>
+              <a:t>   Trace elements: 32</a:t>
+            </a:r>
+          </a:p>
+        </p:txBody>
+      </p:sp>
+      <p:pic>
+        <p:nvPicPr>
+          <p:cNvPr id="5" name="Picture 4" descr="class_distribution.png"/>
+          <p:cNvPicPr>
+            <a:picLocks noChangeAspect="1"/>
+          </p:cNvPicPr>
+          <p:nvPr/>
+        </p:nvPicPr>
+        <p:blipFill>
+          <a:blip r:embed="rId2"/>
+          <a:stretch>
+            <a:fillRect/>
+          </a:stretch>
+        </p:blipFill>
+        <p:spPr>
+          <a:xfrm>
+            <a:off x="6217920" y="1188720"/>
+            <a:ext cx="5486400" cy="4846320"/>
+          </a:xfrm>
+          <a:prstGeom prst="rect">
+            <a:avLst/>
+          </a:prstGeom>
+        </p:spPr>
+      </p:pic>
+    </p:spTree>
+  </p:cSld>
+  <p:clrMapOvr>
+    <a:masterClrMapping/>
+  </p:clrMapOvr>
+</p:sld>
+</file>
+
+<file path=ppt/slides/slide3.xml><?xml version="1.0" encoding="utf-8"?>
+<p:sld xmlns:a="http://schemas.openxmlformats.org/drawingml/2006/main" xmlns:p="http://schemas.openxmlformats.org/presentationml/2006/main" xmlns:r="http://schemas.openxmlformats.org/officeDocument/2006/relationships">
+  <p:cSld>
+    <p:spTree>
+      <p:nvGrpSpPr>
+        <p:cNvPr id="1" name=""/>
+        <p:cNvGrpSpPr/>
+        <p:nvPr/>
+      </p:nvGrpSpPr>
+      <p:grpSpPr/>
+      <p:sp>
+        <p:nvSpPr>
+          <p:cNvPr id="2" name="TextBox 1"/>
+          <p:cNvSpPr txBox="1"/>
+          <p:nvPr/>
+        </p:nvSpPr>
+        <p:spPr>
+          <a:xfrm>
+            <a:off x="548640" y="274320"/>
+            <a:ext cx="10972800" cy="640080"/>
+          </a:xfrm>
+          <a:prstGeom prst="rect">
+            <a:avLst/>
+          </a:prstGeom>
+          <a:noFill/>
+        </p:spPr>
+        <p:txBody>
+          <a:bodyPr wrap="square">
+            <a:spAutoFit/>
+          </a:bodyPr>
+          <a:lstStyle/>
+          <a:p>
+            <a:pPr>
+              <a:defRPr sz="2800" b="1">
+                <a:solidFill>
+                  <a:srgbClr val="1A2744"/>
+                </a:solidFill>
+                <a:latin typeface="Calibri"/>
+              </a:defRPr>
+            </a:pPr>
+            <a:r>
+              <a:t>Missing Data Challenge</a:t>
+            </a:r>
+          </a:p>
+        </p:txBody>
+      </p:sp>
+      <p:sp>
+        <p:nvSpPr>
+          <p:cNvPr id="3" name="Rectangle 2"/>
+          <p:cNvSpPr/>
+          <p:nvPr/>
+        </p:nvSpPr>
+        <p:spPr>
+          <a:xfrm>
+            <a:off x="548640" y="1005840"/>
+            <a:ext cx="10972800" cy="25400"/>
+          </a:xfrm>
+          <a:prstGeom prst="rect">
+            <a:avLst/>
+          </a:prstGeom>
+          <a:solidFill>
+            <a:srgbClr val="2563EB"/>
+          </a:solidFill>
+          <a:ln>
+            <a:noFill/>
+          </a:ln>
+        </p:spPr>
+        <p:style>
+          <a:lnRef idx="1">
+            <a:schemeClr val="accent1"/>
+          </a:lnRef>
+          <a:fillRef idx="3">
+            <a:schemeClr val="accent1"/>
+          </a:fillRef>
+          <a:effectRef idx="2">
+            <a:schemeClr val="accent1"/>
+          </a:effectRef>
+          <a:fontRef idx="minor">
+            <a:schemeClr val="lt1"/>
+          </a:fontRef>
+        </p:style>
+        <p:txBody>
+          <a:bodyPr rtlCol="0" anchor="ctr"/>
+          <a:lstStyle/>
+          <a:p>
+            <a:pPr algn="ctr"/>
+          </a:p>
+        </p:txBody>
+      </p:sp>
+      <p:pic>
+        <p:nvPicPr>
+          <p:cNvPr id="4" name="Picture 3" descr="missing_per_feature.png"/>
+          <p:cNvPicPr>
+            <a:picLocks noChangeAspect="1"/>
+          </p:cNvPicPr>
+          <p:nvPr/>
+        </p:nvPicPr>
+        <p:blipFill>
+          <a:blip r:embed="rId2"/>
+          <a:stretch>
+            <a:fillRect/>
+          </a:stretch>
+        </p:blipFill>
+        <p:spPr>
+          <a:xfrm>
+            <a:off x="365760" y="1188720"/>
+            <a:ext cx="5303520" cy="4572000"/>
+          </a:xfrm>
+          <a:prstGeom prst="rect">
+            <a:avLst/>
+          </a:prstGeom>
+        </p:spPr>
+      </p:pic>
+      <p:pic>
+        <p:nvPicPr>
+          <p:cNvPr id="5" name="Picture 4" descr="missing_per_row.png"/>
+          <p:cNvPicPr>
+            <a:picLocks noChangeAspect="1"/>
+          </p:cNvPicPr>
+          <p:nvPr/>
+        </p:nvPicPr>
+        <p:blipFill>
+          <a:blip r:embed="rId3"/>
+          <a:stretch>
+            <a:fillRect/>
+          </a:stretch>
+        </p:blipFill>
+        <p:spPr>
+          <a:xfrm>
+            <a:off x="6400800" y="1188720"/>
+            <a:ext cx="5303520" cy="4572000"/>
+          </a:xfrm>
+          <a:prstGeom prst="rect">
+            <a:avLst/>
+          </a:prstGeom>
+        </p:spPr>
+      </p:pic>
+      <p:sp>
+        <p:nvSpPr>
+          <p:cNvPr id="6" name="TextBox 5"/>
+          <p:cNvSpPr txBox="1"/>
+          <p:nvPr/>
+        </p:nvSpPr>
+        <p:spPr>
+          <a:xfrm>
+            <a:off x="548640" y="6217920"/>
+            <a:ext cx="10972800" cy="457200"/>
+          </a:xfrm>
+          <a:prstGeom prst="rect">
+            <a:avLst/>
+          </a:prstGeom>
+          <a:noFill/>
+        </p:spPr>
+        <p:txBody>
+          <a:bodyPr wrap="square">
+            <a:spAutoFit/>
+          </a:bodyPr>
+          <a:lstStyle/>
+          <a:p>
+            <a:pPr>
+              <a:defRPr sz="1200" i="1">
+                <a:solidFill>
+                  <a:srgbClr val="666666"/>
+                </a:solidFill>
+                <a:latin typeface="Calibri"/>
+              </a:defRPr>
+            </a:pPr>
+            <a:r>
+              <a:t>Zero rows have complete major oxide coverage. 81% of rows (172,142) are missing ALL 32 trace elements.</a:t>
+            </a:r>
+          </a:p>
+        </p:txBody>
+      </p:sp>
+    </p:spTree>
+  </p:cSld>
+  <p:clrMapOvr>
+    <a:masterClrMapping/>
+  </p:clrMapOvr>
+</p:sld>
+</file>
+
+<file path=ppt/slides/slide4.xml><?xml version="1.0" encoding="utf-8"?>
+<p:sld xmlns:a="http://schemas.openxmlformats.org/drawingml/2006/main" xmlns:p="http://schemas.openxmlformats.org/presentationml/2006/main" xmlns:r="http://schemas.openxmlformats.org/officeDocument/2006/relationships">
+  <p:cSld>
+    <p:spTree>
+      <p:nvGrpSpPr>
+        <p:cNvPr id="1" name=""/>
+        <p:cNvGrpSpPr/>
+        <p:nvPr/>
+      </p:nvGrpSpPr>
+      <p:grpSpPr/>
+      <p:sp>
+        <p:nvSpPr>
+          <p:cNvPr id="2" name="TextBox 1"/>
+          <p:cNvSpPr txBox="1"/>
+          <p:nvPr/>
+        </p:nvSpPr>
+        <p:spPr>
+          <a:xfrm>
+            <a:off x="548640" y="274320"/>
+            <a:ext cx="10972800" cy="640080"/>
+          </a:xfrm>
+          <a:prstGeom prst="rect">
+            <a:avLst/>
+          </a:prstGeom>
+          <a:noFill/>
+        </p:spPr>
+        <p:txBody>
+          <a:bodyPr wrap="square">
+            <a:spAutoFit/>
+          </a:bodyPr>
+          <a:lstStyle/>
+          <a:p>
+            <a:pPr>
+              <a:defRPr sz="2800" b="1">
+                <a:solidFill>
+                  <a:srgbClr val="1A2744"/>
+                </a:solidFill>
+                <a:latin typeface="Calibri"/>
+              </a:defRPr>
+            </a:pPr>
+            <a:r>
+              <a:t>Data Availability -- Temporal Metadata Gap</a:t>
+            </a:r>
+          </a:p>
+        </p:txBody>
+      </p:sp>
+      <p:sp>
+        <p:nvSpPr>
+          <p:cNvPr id="3" name="Rectangle 2"/>
+          <p:cNvSpPr/>
+          <p:nvPr/>
+        </p:nvSpPr>
+        <p:spPr>
+          <a:xfrm>
+            <a:off x="548640" y="1005840"/>
+            <a:ext cx="10972800" cy="25400"/>
+          </a:xfrm>
+          <a:prstGeom prst="rect">
+            <a:avLst/>
+          </a:prstGeom>
+          <a:solidFill>
+            <a:srgbClr val="2563EB"/>
+          </a:solidFill>
+          <a:ln>
+            <a:noFill/>
+          </a:ln>
+        </p:spPr>
+        <p:style>
+          <a:lnRef idx="1">
+            <a:schemeClr val="accent1"/>
+          </a:lnRef>
+          <a:fillRef idx="3">
+            <a:schemeClr val="accent1"/>
+          </a:fillRef>
+          <a:effectRef idx="2">
+            <a:schemeClr val="accent1"/>
+          </a:effectRef>
+          <a:fontRef idx="minor">
+            <a:schemeClr val="lt1"/>
+          </a:fontRef>
+        </p:style>
+        <p:txBody>
+          <a:bodyPr rtlCol="0" anchor="ctr"/>
+          <a:lstStyle/>
+          <a:p>
+            <a:pPr algn="ctr"/>
+          </a:p>
+        </p:txBody>
+      </p:sp>
+      <p:sp>
+        <p:nvSpPr>
+          <p:cNvPr id="4" name="Rectangle 3"/>
+          <p:cNvSpPr/>
+          <p:nvPr/>
+        </p:nvSpPr>
+        <p:spPr>
+          <a:xfrm>
+            <a:off x="548640" y="1188720"/>
+            <a:ext cx="10972800" cy="457200"/>
+          </a:xfrm>
+          <a:prstGeom prst="rect">
+            <a:avLst/>
+          </a:prstGeom>
+          <a:solidFill>
+            <a:srgbClr val="1A2744"/>
+          </a:solidFill>
+          <a:ln>
+            <a:noFill/>
+          </a:ln>
+        </p:spPr>
+        <p:style>
+          <a:lnRef idx="1">
+            <a:schemeClr val="accent1"/>
+          </a:lnRef>
+          <a:fillRef idx="3">
+            <a:schemeClr val="accent1"/>
+          </a:fillRef>
+          <a:effectRef idx="2">
+            <a:schemeClr val="accent1"/>
+          </a:effectRef>
+          <a:fontRef idx="minor">
+            <a:schemeClr val="lt1"/>
+          </a:fontRef>
+        </p:style>
+        <p:txBody>
+          <a:bodyPr rtlCol="0" anchor="ctr" lIns="137160" rIns="137160"/>
+          <a:lstStyle/>
+          <a:p>
+            <a:pPr algn="ctr">
+              <a:defRPr sz="1600" b="1">
+                <a:solidFill>
+                  <a:srgbClr val="FFFFFF"/>
+                </a:solidFill>
+                <a:latin typeface="Calibri"/>
+              </a:defRPr>
+            </a:pPr>
+            <a:r>
+              <a:t>Only 0.076% of samples have AGE(MA) metadata (161 / 211,773)</a:t>
+            </a:r>
+          </a:p>
+        </p:txBody>
+      </p:sp>
+      <p:pic>
+        <p:nvPicPr>
+          <p:cNvPr id="5" name="Picture 4" descr="age_era_stacked.png"/>
+          <p:cNvPicPr>
+            <a:picLocks noChangeAspect="1"/>
+          </p:cNvPicPr>
+          <p:nvPr/>
+        </p:nvPicPr>
+        <p:blipFill>
+          <a:blip r:embed="rId2"/>
+          <a:stretch>
+            <a:fillRect/>
+          </a:stretch>
+        </p:blipFill>
+        <p:spPr>
+          <a:xfrm>
+            <a:off x="365760" y="1828800"/>
+            <a:ext cx="6858000" cy="4114800"/>
+          </a:xfrm>
+          <a:prstGeom prst="rect">
+            <a:avLst/>
+          </a:prstGeom>
+        </p:spPr>
+      </p:pic>
+      <p:sp>
+        <p:nvSpPr>
+          <p:cNvPr id="6" name="TextBox 5"/>
+          <p:cNvSpPr txBox="1"/>
+          <p:nvPr/>
+        </p:nvSpPr>
+        <p:spPr>
+          <a:xfrm>
+            <a:off x="7498079" y="1828800"/>
+            <a:ext cx="4572000" cy="4114800"/>
+          </a:xfrm>
+          <a:prstGeom prst="rect">
+            <a:avLst/>
+          </a:prstGeom>
+          <a:noFill/>
+        </p:spPr>
+        <p:txBody>
+          <a:bodyPr wrap="square">
+            <a:spAutoFit/>
+          </a:bodyPr>
+          <a:lstStyle/>
+          <a:p>
+            <a:pPr>
+              <a:spcAft>
+                <a:spcPts val="400"/>
+              </a:spcAft>
+              <a:defRPr sz="2200" b="1">
+                <a:solidFill>
+                  <a:srgbClr val="1A2744"/>
+                </a:solidFill>
+                <a:latin typeface="Calibri"/>
+              </a:defRPr>
+            </a:pPr>
+            <a:r>
+              <a:t>Age coverage: 0.076%</a:t>
+            </a:r>
+          </a:p>
+          <a:p>
+            <a:pPr>
+              <a:spcAft>
+                <a:spcPts val="1000"/>
+              </a:spcAft>
+              <a:defRPr sz="1300" i="1">
+                <a:solidFill>
+                  <a:srgbClr val="D97706"/>
+                </a:solidFill>
+                <a:latin typeface="Calibri"/>
+              </a:defRPr>
+            </a:pPr>
+            <a:r>
+              <a:t>6 / 11 classes have ZERO aged samples</a:t>
+            </a:r>
+          </a:p>
+          <a:p>
+            <a:pPr>
+              <a:spcAft>
+                <a:spcPts val="200"/>
+              </a:spcAft>
+              <a:defRPr sz="1300" b="0">
+                <a:solidFill>
+                  <a:srgbClr val="059669"/>
+                </a:solidFill>
+                <a:latin typeface="Consolas"/>
+              </a:defRPr>
+            </a:pPr>
+            <a:r>
+              <a:t>Intraplate: 16 / 84,835</a:t>
+            </a:r>
+          </a:p>
+          <a:p>
+            <a:pPr>
+              <a:spcAft>
+                <a:spcPts val="200"/>
+              </a:spcAft>
+              <a:defRPr sz="1300" b="0">
+                <a:solidFill>
+                  <a:srgbClr val="059669"/>
+                </a:solidFill>
+                <a:latin typeface="Consolas"/>
+              </a:defRPr>
+            </a:pPr>
+            <a:r>
+              <a:t>Conv. Margin: 125 / 56,216</a:t>
+            </a:r>
+          </a:p>
+          <a:p>
+            <a:pPr>
+              <a:spcAft>
+                <a:spcPts val="200"/>
+              </a:spcAft>
+              <a:defRPr sz="1300" b="0">
+                <a:solidFill>
+                  <a:srgbClr val="059669"/>
+                </a:solidFill>
+                <a:latin typeface="Consolas"/>
+              </a:defRPr>
+            </a:pPr>
+            <a:r>
+              <a:t>Ocean Island: 11 / 24,008</a:t>
+            </a:r>
+          </a:p>
+          <a:p>
+            <a:pPr>
+              <a:spcAft>
+                <a:spcPts val="200"/>
+              </a:spcAft>
+              <a:defRPr sz="1300" b="1">
+                <a:solidFill>
+                  <a:srgbClr val="D97706"/>
+                </a:solidFill>
+                <a:latin typeface="Consolas"/>
+              </a:defRPr>
+            </a:pPr>
+            <a:r>
+              <a:t>CFB: 0 / 20,816</a:t>
+            </a:r>
+          </a:p>
+          <a:p>
+            <a:pPr>
+              <a:spcAft>
+                <a:spcPts val="200"/>
+              </a:spcAft>
+              <a:defRPr sz="1300" b="0">
+                <a:solidFill>
+                  <a:srgbClr val="059669"/>
+                </a:solidFill>
+                <a:latin typeface="Consolas"/>
+              </a:defRPr>
+            </a:pPr>
+            <a:r>
+              <a:t>Rift Volc.: 3 / 13,689</a:t>
+            </a:r>
+          </a:p>
+          <a:p>
+            <a:pPr>
+              <a:spcAft>
+                <a:spcPts val="200"/>
+              </a:spcAft>
+              <a:defRPr sz="1300" b="0">
+                <a:solidFill>
+                  <a:srgbClr val="059669"/>
+                </a:solidFill>
+                <a:latin typeface="Consolas"/>
+              </a:defRPr>
+            </a:pPr>
+            <a:r>
+              <a:t>Complex Volc.: 6 / 4,201</a:t>
+            </a:r>
+          </a:p>
+          <a:p>
+            <a:pPr>
+              <a:spcAft>
+                <a:spcPts val="200"/>
+              </a:spcAft>
+              <a:defRPr sz="1300" b="1">
+                <a:solidFill>
+                  <a:srgbClr val="D97706"/>
+                </a:solidFill>
+                <a:latin typeface="Consolas"/>
+              </a:defRPr>
+            </a:pPr>
+            <a:r>
+              <a:t>Seamount: 0 / 3,907</a:t>
+            </a:r>
+          </a:p>
+          <a:p>
+            <a:pPr>
+              <a:spcAft>
+                <a:spcPts val="200"/>
+              </a:spcAft>
+              <a:defRPr sz="1300" b="1">
+                <a:solidFill>
+                  <a:srgbClr val="D97706"/>
+                </a:solidFill>
+                <a:latin typeface="Consolas"/>
+              </a:defRPr>
+            </a:pPr>
+            <a:r>
+              <a:t>Arch. Craton: 0 / 2,189</a:t>
+            </a:r>
+          </a:p>
+          <a:p>
+            <a:pPr>
+              <a:spcAft>
+                <a:spcPts val="200"/>
+              </a:spcAft>
+              <a:defRPr sz="1300" b="1">
+                <a:solidFill>
+                  <a:srgbClr val="D97706"/>
+                </a:solidFill>
+                <a:latin typeface="Consolas"/>
+              </a:defRPr>
+            </a:pPr>
+            <a:r>
+              <a:t>Oceanic Plat.: 0 / 1,472</a:t>
+            </a:r>
+          </a:p>
+          <a:p>
+            <a:pPr>
+              <a:spcAft>
+                <a:spcPts val="200"/>
+              </a:spcAft>
+              <a:defRPr sz="1300" b="1">
+                <a:solidFill>
+                  <a:srgbClr val="D97706"/>
+                </a:solidFill>
+                <a:latin typeface="Consolas"/>
+              </a:defRPr>
+            </a:pPr>
+            <a:r>
+              <a:t>Sub. Ridge: 0 / 233</a:t>
+            </a:r>
+          </a:p>
+          <a:p>
+            <a:pPr>
+              <a:spcAft>
+                <a:spcPts val="200"/>
+              </a:spcAft>
+              <a:defRPr sz="1300" b="1">
+                <a:solidFill>
+                  <a:srgbClr val="D97706"/>
+                </a:solidFill>
+                <a:latin typeface="Consolas"/>
+              </a:defRPr>
+            </a:pPr>
+            <a:r>
+              <a:t>OBF: 0 / 207</a:t>
+            </a:r>
+          </a:p>
+        </p:txBody>
+      </p:sp>
+      <p:sp>
+        <p:nvSpPr>
+          <p:cNvPr id="7" name="TextBox 6"/>
+          <p:cNvSpPr txBox="1"/>
+          <p:nvPr/>
+        </p:nvSpPr>
+        <p:spPr>
+          <a:xfrm>
+            <a:off x="548640" y="6217920"/>
+            <a:ext cx="10972800" cy="457200"/>
+          </a:xfrm>
+          <a:prstGeom prst="rect">
+            <a:avLst/>
+          </a:prstGeom>
+          <a:noFill/>
+        </p:spPr>
+        <p:txBody>
+          <a:bodyPr wrap="square">
+            <a:spAutoFit/>
+          </a:bodyPr>
+          <a:lstStyle/>
+          <a:p>
+            <a:pPr>
+              <a:defRPr sz="1200" i="1">
+                <a:solidFill>
+                  <a:srgbClr val="666666"/>
+                </a:solidFill>
+                <a:latin typeface="Calibri"/>
+              </a:defRPr>
+            </a:pPr>
+            <a:r>
+              <a:t>Age metadata cannot be used for feature engineering or stratification. Recommend flagging to GEOROC / GRO.data maintainers.</a:t>
+            </a:r>
+          </a:p>
+        </p:txBody>
+      </p:sp>
+    </p:spTree>
+  </p:cSld>
+  <p:clrMapOvr>
+    <a:masterClrMapping/>
+  </p:clrMapOvr>
+</p:sld>
+</file>
+
+<file path=ppt/slides/slide5.xml><?xml version="1.0" encoding="utf-8"?>
+<p:sld xmlns:a="http://schemas.openxmlformats.org/drawingml/2006/main" xmlns:p="http://schemas.openxmlformats.org/presentationml/2006/main" xmlns:r="http://schemas.openxmlformats.org/officeDocument/2006/relationships">
+  <p:cSld>
+    <p:spTree>
+      <p:nvGrpSpPr>
+        <p:cNvPr id="1" name=""/>
+        <p:cNvGrpSpPr/>
+        <p:nvPr/>
+      </p:nvGrpSpPr>
+      <p:grpSpPr/>
+      <p:sp>
+        <p:nvSpPr>
+          <p:cNvPr id="2" name="TextBox 1"/>
+          <p:cNvSpPr txBox="1"/>
+          <p:nvPr/>
+        </p:nvSpPr>
+        <p:spPr>
+          <a:xfrm>
+            <a:off x="548640" y="274320"/>
+            <a:ext cx="10972800" cy="640080"/>
+          </a:xfrm>
+          <a:prstGeom prst="rect">
+            <a:avLst/>
+          </a:prstGeom>
+          <a:noFill/>
+        </p:spPr>
+        <p:txBody>
+          <a:bodyPr wrap="square">
+            <a:spAutoFit/>
+          </a:bodyPr>
+          <a:lstStyle/>
+          <a:p>
+            <a:pPr>
+              <a:defRPr sz="2800" b="1">
+                <a:solidFill>
+                  <a:srgbClr val="1A2744"/>
+                </a:solidFill>
+                <a:latin typeface="Calibri"/>
+              </a:defRPr>
+            </a:pPr>
+            <a:r>
+              <a:t>Spatial Distribution of 39,631 Predictions</a:t>
+            </a:r>
+          </a:p>
+        </p:txBody>
+      </p:sp>
+      <p:sp>
+        <p:nvSpPr>
+          <p:cNvPr id="3" name="Rectangle 2"/>
+          <p:cNvSpPr/>
+          <p:nvPr/>
+        </p:nvSpPr>
+        <p:spPr>
+          <a:xfrm>
+            <a:off x="548640" y="1005840"/>
+            <a:ext cx="10972800" cy="25400"/>
+          </a:xfrm>
+          <a:prstGeom prst="rect">
+            <a:avLst/>
+          </a:prstGeom>
+          <a:solidFill>
+            <a:srgbClr val="2563EB"/>
+          </a:solidFill>
+          <a:ln>
+            <a:noFill/>
+          </a:ln>
+        </p:spPr>
+        <p:style>
+          <a:lnRef idx="1">
+            <a:schemeClr val="accent1"/>
+          </a:lnRef>
+          <a:fillRef idx="3">
+            <a:schemeClr val="accent1"/>
+          </a:fillRef>
+          <a:effectRef idx="2">
+            <a:schemeClr val="accent1"/>
+          </a:effectRef>
+          <a:fontRef idx="minor">
+            <a:schemeClr val="lt1"/>
+          </a:fontRef>
+        </p:style>
+        <p:txBody>
+          <a:bodyPr rtlCol="0" anchor="ctr"/>
+          <a:lstStyle/>
+          <a:p>
+            <a:pPr algn="ctr"/>
+          </a:p>
+        </p:txBody>
+      </p:sp>
+      <p:pic>
+        <p:nvPicPr>
+          <p:cNvPr id="4" name="Picture 3" descr="spatial_distribution.png"/>
+          <p:cNvPicPr>
+            <a:picLocks noChangeAspect="1"/>
+          </p:cNvPicPr>
+          <p:nvPr/>
+        </p:nvPicPr>
+        <p:blipFill>
+          <a:blip r:embed="rId2"/>
+          <a:stretch>
+            <a:fillRect/>
+          </a:stretch>
+        </p:blipFill>
+        <p:spPr>
+          <a:xfrm>
+            <a:off x="274320" y="1005840"/>
+            <a:ext cx="11612880" cy="5303520"/>
+          </a:xfrm>
+          <a:prstGeom prst="rect">
+            <a:avLst/>
+          </a:prstGeom>
+        </p:spPr>
+      </p:pic>
+      <p:sp>
+        <p:nvSpPr>
+          <p:cNvPr id="5" name="TextBox 4"/>
+          <p:cNvSpPr txBox="1"/>
+          <p:nvPr/>
+        </p:nvSpPr>
+        <p:spPr>
+          <a:xfrm>
+            <a:off x="548640" y="6217920"/>
+            <a:ext cx="10972800" cy="457200"/>
+          </a:xfrm>
+          <a:prstGeom prst="rect">
+            <a:avLst/>
+          </a:prstGeom>
+          <a:noFill/>
+        </p:spPr>
+        <p:txBody>
+          <a:bodyPr wrap="square">
+            <a:spAutoFit/>
+          </a:bodyPr>
+          <a:lstStyle/>
+          <a:p>
+            <a:pPr>
+              <a:defRPr sz="1200" i="1">
+                <a:solidFill>
+                  <a:srgbClr val="666666"/>
+                </a:solidFill>
+                <a:latin typeface="Calibri"/>
+              </a:defRPr>
+            </a:pPr>
+            <a:r>
+              <a:t>39,631 predictions: 39,316 correct (99.2%), 315 misclassified (red edges). Misclassifications are geographically dispersed, not clustered.</a:t>
+            </a:r>
+          </a:p>
+        </p:txBody>
+      </p:sp>
+    </p:spTree>
+  </p:cSld>
+  <p:clrMapOvr>
+    <a:masterClrMapping/>
+  </p:clrMapOvr>
+</p:sld>
+</file>
+
+<file path=ppt/slides/slide6.xml><?xml version="1.0" encoding="utf-8"?>
+<p:sld xmlns:a="http://schemas.openxmlformats.org/drawingml/2006/main" xmlns:p="http://schemas.openxmlformats.org/presentationml/2006/main" xmlns:r="http://schemas.openxmlformats.org/officeDocument/2006/relationships">
+  <p:cSld>
+    <p:spTree>
+      <p:nvGrpSpPr>
+        <p:cNvPr id="1" name=""/>
+        <p:cNvGrpSpPr/>
+        <p:nvPr/>
+      </p:nvGrpSpPr>
+      <p:grpSpPr/>
+      <p:sp>
+        <p:nvSpPr>
+          <p:cNvPr id="2" name="TextBox 1"/>
+          <p:cNvSpPr txBox="1"/>
+          <p:nvPr/>
+        </p:nvSpPr>
+        <p:spPr>
+          <a:xfrm>
+            <a:off x="548640" y="274320"/>
+            <a:ext cx="10972800" cy="640080"/>
+          </a:xfrm>
+          <a:prstGeom prst="rect">
+            <a:avLst/>
+          </a:prstGeom>
+          <a:noFill/>
+        </p:spPr>
+        <p:txBody>
+          <a:bodyPr wrap="square">
+            <a:spAutoFit/>
+          </a:bodyPr>
+          <a:lstStyle/>
+          <a:p>
+            <a:pPr>
+              <a:defRPr sz="2800" b="1">
+                <a:solidFill>
+                  <a:srgbClr val="1A2744"/>
+                </a:solidFill>
+                <a:latin typeface="Calibri"/>
+              </a:defRPr>
+            </a:pPr>
+            <a:r>
+              <a:t>Feature Discrimination Power</a:t>
+            </a:r>
+          </a:p>
+        </p:txBody>
+      </p:sp>
+      <p:sp>
+        <p:nvSpPr>
+          <p:cNvPr id="3" name="Rectangle 2"/>
+          <p:cNvSpPr/>
+          <p:nvPr/>
+        </p:nvSpPr>
+        <p:spPr>
+          <a:xfrm>
+            <a:off x="548640" y="1005840"/>
+            <a:ext cx="10972800" cy="25400"/>
+          </a:xfrm>
+          <a:prstGeom prst="rect">
+            <a:avLst/>
+          </a:prstGeom>
+          <a:solidFill>
+            <a:srgbClr val="2563EB"/>
+          </a:solidFill>
+          <a:ln>
+            <a:noFill/>
+          </a:ln>
+        </p:spPr>
+        <p:style>
+          <a:lnRef idx="1">
+            <a:schemeClr val="accent1"/>
+          </a:lnRef>
+          <a:fillRef idx="3">
+            <a:schemeClr val="accent1"/>
+          </a:fillRef>
+          <a:effectRef idx="2">
+            <a:schemeClr val="accent1"/>
+          </a:effectRef>
+          <a:fontRef idx="minor">
+            <a:schemeClr val="lt1"/>
+          </a:fontRef>
+        </p:style>
+        <p:txBody>
+          <a:bodyPr rtlCol="0" anchor="ctr"/>
+          <a:lstStyle/>
+          <a:p>
+            <a:pPr algn="ctr"/>
+          </a:p>
+        </p:txBody>
+      </p:sp>
+      <p:pic>
+        <p:nvPicPr>
+          <p:cNvPr id="4" name="Picture 3" descr="discrimination.png"/>
+          <p:cNvPicPr>
+            <a:picLocks noChangeAspect="1"/>
+          </p:cNvPicPr>
+          <p:nvPr/>
+        </p:nvPicPr>
+        <p:blipFill>
+          <a:blip r:embed="rId2"/>
+          <a:stretch>
+            <a:fillRect/>
+          </a:stretch>
+        </p:blipFill>
+        <p:spPr>
+          <a:xfrm>
+            <a:off x="731520" y="1188720"/>
+            <a:ext cx="10515600" cy="4572000"/>
+          </a:xfrm>
+          <a:prstGeom prst="rect">
+            <a:avLst/>
+          </a:prstGeom>
+        </p:spPr>
+      </p:pic>
+      <p:sp>
+        <p:nvSpPr>
+          <p:cNvPr id="5" name="TextBox 4"/>
+          <p:cNvSpPr txBox="1"/>
+          <p:nvPr/>
+        </p:nvSpPr>
+        <p:spPr>
+          <a:xfrm>
+            <a:off x="548640" y="6217920"/>
+            <a:ext cx="10972800" cy="457200"/>
+          </a:xfrm>
+          <a:prstGeom prst="rect">
+            <a:avLst/>
+          </a:prstGeom>
+          <a:noFill/>
+        </p:spPr>
+        <p:txBody>
+          <a:bodyPr wrap="square">
+            <a:spAutoFit/>
+          </a:bodyPr>
+          <a:lstStyle/>
+          <a:p>
+            <a:pPr>
+              <a:defRPr sz="1200" i="1">
+                <a:solidFill>
+                  <a:srgbClr val="666666"/>
+                </a:solidFill>
+                <a:latin typeface="Calibri"/>
+              </a:defRPr>
+            </a:pPr>
+            <a:r>
+              <a:t>K2O shows by far the strongest inter-class separation (CV = 1.753) -- not traditionally considered a key CPX discriminator.</a:t>
             </a:r>
           </a:p>
         </p:txBody>
@@ -11285,7 +8685,7 @@
               </a:defRPr>
             </a:pPr>
             <a:r>
-              <a:t>Model Performance Comparison</a:t>
+              <a:t>Major Oxide Correlation Matrix</a:t>
             </a:r>
           </a:p>
         </p:txBody>
@@ -11335,7 +8735,7 @@
       </p:sp>
       <p:pic>
         <p:nvPicPr>
-          <p:cNvPr id="4" name="Picture 3" descr="model_comparison.png"/>
+          <p:cNvPr id="4" name="Picture 3" descr="correlation_matrix.png"/>
           <p:cNvPicPr>
             <a:picLocks noChangeAspect="1"/>
           </p:cNvPicPr>
@@ -11349,14 +8749,50 @@
         </p:blipFill>
         <p:spPr>
           <a:xfrm>
-            <a:off x="457200" y="1097280"/>
-            <a:ext cx="11247120" cy="5486400"/>
+            <a:off x="2743200" y="1097280"/>
+            <a:ext cx="6675120" cy="5212080"/>
           </a:xfrm>
           <a:prstGeom prst="rect">
             <a:avLst/>
           </a:prstGeom>
         </p:spPr>
       </p:pic>
+      <p:sp>
+        <p:nvSpPr>
+          <p:cNvPr id="5" name="TextBox 4"/>
+          <p:cNvSpPr txBox="1"/>
+          <p:nvPr/>
+        </p:nvSpPr>
+        <p:spPr>
+          <a:xfrm>
+            <a:off x="548640" y="6217920"/>
+            <a:ext cx="10972800" cy="457200"/>
+          </a:xfrm>
+          <a:prstGeom prst="rect">
+            <a:avLst/>
+          </a:prstGeom>
+          <a:noFill/>
+        </p:spPr>
+        <p:txBody>
+          <a:bodyPr wrap="square">
+            <a:spAutoFit/>
+          </a:bodyPr>
+          <a:lstStyle/>
+          <a:p>
+            <a:pPr>
+              <a:defRPr sz="1200" i="1">
+                <a:solidFill>
+                  <a:srgbClr val="666666"/>
+                </a:solidFill>
+                <a:latin typeface="Calibri"/>
+              </a:defRPr>
+            </a:pPr>
+            <a:r>
+              <a:t>Strong correlations: FeOT-MgO (r=-0.62), SiO2-TiO2 (r=-0.69), SiO2-Al2O3 (r=-0.64). These affect model interpretation via feature collinearity.</a:t>
+            </a:r>
+          </a:p>
+        </p:txBody>
+      </p:sp>
     </p:spTree>
   </p:cSld>
   <p:clrMapOvr>
@@ -11406,7 +8842,7 @@
               </a:defRPr>
             </a:pPr>
             <a:r>
-              <a:t>Trace Elements Are the Decisive Discriminator</a:t>
+              <a:t>Trace Element Correlation Matrix</a:t>
             </a:r>
           </a:p>
         </p:txBody>
@@ -11456,7 +8892,7 @@
       </p:sp>
       <p:pic>
         <p:nvPicPr>
-          <p:cNvPr id="4" name="Picture 3" descr="trace_impact.png"/>
+          <p:cNvPr id="4" name="Picture 3" descr="trace_correlation.png"/>
           <p:cNvPicPr>
             <a:picLocks noChangeAspect="1"/>
           </p:cNvPicPr>
@@ -11470,8 +8906,8 @@
         </p:blipFill>
         <p:spPr>
           <a:xfrm>
-            <a:off x="1828800" y="1188720"/>
-            <a:ext cx="8229600" cy="4572000"/>
+            <a:off x="457200" y="1097280"/>
+            <a:ext cx="11247120" cy="4846320"/>
           </a:xfrm>
           <a:prstGeom prst="rect">
             <a:avLst/>
@@ -11509,7 +8945,7 @@
               </a:defRPr>
             </a:pPr>
             <a:r>
-              <a:t>Trace elements add +0.475 F1 over major oxides alone. Endmembers add only +0.006 over Major+Trace -- dropped for parsimony (43 features).</a:t>
+              <a:t>REE block (La-Lu) shows strong internal correlations (r &gt; 0.8). HFSE (Zr, Hf, Nb, Ta) form a second correlated group. These clusters inform feature importance interpretation.</a:t>
             </a:r>
           </a:p>
         </p:txBody>
@@ -11563,7 +8999,7 @@
               </a:defRPr>
             </a:pPr>
             <a:r>
-              <a:t>Feature Importance: XGBoost Gain vs. SHAP</a:t>
+              <a:t>Experiment Matrix: 9 Data Subsets × 6 Feature Groups</a:t>
             </a:r>
           </a:p>
         </p:txBody>
@@ -11613,7 +9049,7 @@
       </p:sp>
       <p:pic>
         <p:nvPicPr>
-          <p:cNvPr id="4" name="Picture 3" descr="shap_global.png"/>
+          <p:cNvPr id="4" name="Picture 3" descr="experiment_matrix.png"/>
           <p:cNvPicPr>
             <a:picLocks noChangeAspect="1"/>
           </p:cNvPicPr>
@@ -11627,8 +9063,8 @@
         </p:blipFill>
         <p:spPr>
           <a:xfrm>
-            <a:off x="457200" y="1097280"/>
-            <a:ext cx="11247120" cy="4846320"/>
+            <a:off x="274320" y="1097280"/>
+            <a:ext cx="11612880" cy="5303520"/>
           </a:xfrm>
           <a:prstGeom prst="rect">
             <a:avLst/>
@@ -11666,7 +9102,7 @@
               </a:defRPr>
             </a:pPr>
             <a:r>
-              <a:t>43-feature model (Major+Trace, no endmembers). Both Gain and SHAP highlight trace elements (Sr, Sm, Zr) as key prediction drivers.</a:t>
+              <a:t>54 experiments, 5-fold stratified CV each. Best practical: Has Trace × Major+Trace (43 feat) = F1m 0.902. Black border = best per row.</a:t>
             </a:r>
           </a:p>
         </p:txBody>
